--- a/teaching/NS_2.pptx
+++ b/teaching/NS_2.pptx
@@ -5,25 +5,33 @@
     <p:sldMasterId id="2147483750" r:id="rId1"/>
   </p:sldMasterIdLst>
   <p:notesMasterIdLst>
-    <p:notesMasterId r:id="rId18"/>
+    <p:notesMasterId r:id="rId26"/>
   </p:notesMasterIdLst>
   <p:sldIdLst>
-    <p:sldId id="256" r:id="rId2"/>
-    <p:sldId id="296" r:id="rId3"/>
-    <p:sldId id="297" r:id="rId4"/>
-    <p:sldId id="271" r:id="rId5"/>
-    <p:sldId id="258" r:id="rId6"/>
-    <p:sldId id="275" r:id="rId7"/>
-    <p:sldId id="276" r:id="rId8"/>
-    <p:sldId id="272" r:id="rId9"/>
-    <p:sldId id="277" r:id="rId10"/>
-    <p:sldId id="278" r:id="rId11"/>
-    <p:sldId id="279" r:id="rId12"/>
-    <p:sldId id="280" r:id="rId13"/>
-    <p:sldId id="281" r:id="rId14"/>
-    <p:sldId id="282" r:id="rId15"/>
-    <p:sldId id="283" r:id="rId16"/>
-    <p:sldId id="284" r:id="rId17"/>
+    <p:sldId id="288" r:id="rId2"/>
+    <p:sldId id="300" r:id="rId3"/>
+    <p:sldId id="274" r:id="rId4"/>
+    <p:sldId id="273" r:id="rId5"/>
+    <p:sldId id="289" r:id="rId6"/>
+    <p:sldId id="294" r:id="rId7"/>
+    <p:sldId id="295" r:id="rId8"/>
+    <p:sldId id="299" r:id="rId9"/>
+    <p:sldId id="291" r:id="rId10"/>
+    <p:sldId id="290" r:id="rId11"/>
+    <p:sldId id="296" r:id="rId12"/>
+    <p:sldId id="297" r:id="rId13"/>
+    <p:sldId id="256" r:id="rId14"/>
+    <p:sldId id="275" r:id="rId15"/>
+    <p:sldId id="276" r:id="rId16"/>
+    <p:sldId id="272" r:id="rId17"/>
+    <p:sldId id="277" r:id="rId18"/>
+    <p:sldId id="278" r:id="rId19"/>
+    <p:sldId id="279" r:id="rId20"/>
+    <p:sldId id="280" r:id="rId21"/>
+    <p:sldId id="281" r:id="rId22"/>
+    <p:sldId id="282" r:id="rId23"/>
+    <p:sldId id="283" r:id="rId24"/>
+    <p:sldId id="284" r:id="rId25"/>
   </p:sldIdLst>
   <p:sldSz cx="12192000" cy="6858000"/>
   <p:notesSz cx="6858000" cy="9144000"/>
@@ -131,6 +139,753 @@
 </file>
 
 <file path=ppt/diagrams/colors1.xml><?xml version="1.0" encoding="utf-8"?>
+<dgm:colorsDef xmlns:dgm="http://schemas.openxmlformats.org/drawingml/2006/diagram" xmlns:a="http://schemas.openxmlformats.org/drawingml/2006/main" uniqueId="urn:microsoft.com/office/officeart/2005/8/colors/accent4_2">
+  <dgm:title val=""/>
+  <dgm:desc val=""/>
+  <dgm:catLst>
+    <dgm:cat type="accent4" pri="11200"/>
+  </dgm:catLst>
+  <dgm:styleLbl name="node0">
+    <dgm:fillClrLst meth="repeat">
+      <a:schemeClr val="accent4"/>
+    </dgm:fillClrLst>
+    <dgm:linClrLst meth="repeat">
+      <a:schemeClr val="lt1"/>
+    </dgm:linClrLst>
+    <dgm:effectClrLst/>
+    <dgm:txLinClrLst/>
+    <dgm:txFillClrLst/>
+    <dgm:txEffectClrLst/>
+  </dgm:styleLbl>
+  <dgm:styleLbl name="node1">
+    <dgm:fillClrLst meth="repeat">
+      <a:schemeClr val="accent4"/>
+    </dgm:fillClrLst>
+    <dgm:linClrLst meth="repeat">
+      <a:schemeClr val="lt1"/>
+    </dgm:linClrLst>
+    <dgm:effectClrLst/>
+    <dgm:txLinClrLst/>
+    <dgm:txFillClrLst/>
+    <dgm:txEffectClrLst/>
+  </dgm:styleLbl>
+  <dgm:styleLbl name="alignNode1">
+    <dgm:fillClrLst meth="repeat">
+      <a:schemeClr val="accent4"/>
+    </dgm:fillClrLst>
+    <dgm:linClrLst meth="repeat">
+      <a:schemeClr val="accent4"/>
+    </dgm:linClrLst>
+    <dgm:effectClrLst/>
+    <dgm:txLinClrLst/>
+    <dgm:txFillClrLst/>
+    <dgm:txEffectClrLst/>
+  </dgm:styleLbl>
+  <dgm:styleLbl name="lnNode1">
+    <dgm:fillClrLst meth="repeat">
+      <a:schemeClr val="accent4"/>
+    </dgm:fillClrLst>
+    <dgm:linClrLst meth="repeat">
+      <a:schemeClr val="lt1"/>
+    </dgm:linClrLst>
+    <dgm:effectClrLst/>
+    <dgm:txLinClrLst/>
+    <dgm:txFillClrLst/>
+    <dgm:txEffectClrLst/>
+  </dgm:styleLbl>
+  <dgm:styleLbl name="vennNode1">
+    <dgm:fillClrLst meth="repeat">
+      <a:schemeClr val="accent4">
+        <a:alpha val="50000"/>
+      </a:schemeClr>
+    </dgm:fillClrLst>
+    <dgm:linClrLst meth="repeat">
+      <a:schemeClr val="lt1"/>
+    </dgm:linClrLst>
+    <dgm:effectClrLst/>
+    <dgm:txLinClrLst/>
+    <dgm:txFillClrLst/>
+    <dgm:txEffectClrLst/>
+  </dgm:styleLbl>
+  <dgm:styleLbl name="node2">
+    <dgm:fillClrLst meth="repeat">
+      <a:schemeClr val="accent4"/>
+    </dgm:fillClrLst>
+    <dgm:linClrLst meth="repeat">
+      <a:schemeClr val="lt1"/>
+    </dgm:linClrLst>
+    <dgm:effectClrLst/>
+    <dgm:txLinClrLst/>
+    <dgm:txFillClrLst/>
+    <dgm:txEffectClrLst/>
+  </dgm:styleLbl>
+  <dgm:styleLbl name="node3">
+    <dgm:fillClrLst meth="repeat">
+      <a:schemeClr val="accent4"/>
+    </dgm:fillClrLst>
+    <dgm:linClrLst meth="repeat">
+      <a:schemeClr val="lt1"/>
+    </dgm:linClrLst>
+    <dgm:effectClrLst/>
+    <dgm:txLinClrLst/>
+    <dgm:txFillClrLst/>
+    <dgm:txEffectClrLst/>
+  </dgm:styleLbl>
+  <dgm:styleLbl name="node4">
+    <dgm:fillClrLst meth="repeat">
+      <a:schemeClr val="accent4"/>
+    </dgm:fillClrLst>
+    <dgm:linClrLst meth="repeat">
+      <a:schemeClr val="lt1"/>
+    </dgm:linClrLst>
+    <dgm:effectClrLst/>
+    <dgm:txLinClrLst/>
+    <dgm:txFillClrLst/>
+    <dgm:txEffectClrLst/>
+  </dgm:styleLbl>
+  <dgm:styleLbl name="fgImgPlace1">
+    <dgm:fillClrLst meth="repeat">
+      <a:schemeClr val="accent4">
+        <a:tint val="50000"/>
+      </a:schemeClr>
+    </dgm:fillClrLst>
+    <dgm:linClrLst meth="repeat">
+      <a:schemeClr val="lt1"/>
+    </dgm:linClrLst>
+    <dgm:effectClrLst/>
+    <dgm:txLinClrLst/>
+    <dgm:txFillClrLst meth="repeat">
+      <a:schemeClr val="lt1"/>
+    </dgm:txFillClrLst>
+    <dgm:txEffectClrLst/>
+  </dgm:styleLbl>
+  <dgm:styleLbl name="alignImgPlace1">
+    <dgm:fillClrLst meth="repeat">
+      <a:schemeClr val="accent4">
+        <a:tint val="50000"/>
+      </a:schemeClr>
+    </dgm:fillClrLst>
+    <dgm:linClrLst meth="repeat">
+      <a:schemeClr val="lt1"/>
+    </dgm:linClrLst>
+    <dgm:effectClrLst/>
+    <dgm:txLinClrLst/>
+    <dgm:txFillClrLst meth="repeat">
+      <a:schemeClr val="lt1"/>
+    </dgm:txFillClrLst>
+    <dgm:txEffectClrLst/>
+  </dgm:styleLbl>
+  <dgm:styleLbl name="bgImgPlace1">
+    <dgm:fillClrLst meth="repeat">
+      <a:schemeClr val="accent4">
+        <a:tint val="50000"/>
+      </a:schemeClr>
+    </dgm:fillClrLst>
+    <dgm:linClrLst meth="repeat">
+      <a:schemeClr val="lt1"/>
+    </dgm:linClrLst>
+    <dgm:effectClrLst/>
+    <dgm:txLinClrLst/>
+    <dgm:txFillClrLst meth="repeat">
+      <a:schemeClr val="lt1"/>
+    </dgm:txFillClrLst>
+    <dgm:txEffectClrLst/>
+  </dgm:styleLbl>
+  <dgm:styleLbl name="sibTrans2D1">
+    <dgm:fillClrLst meth="repeat">
+      <a:schemeClr val="accent4">
+        <a:tint val="60000"/>
+      </a:schemeClr>
+    </dgm:fillClrLst>
+    <dgm:linClrLst meth="repeat">
+      <a:schemeClr val="accent4">
+        <a:tint val="60000"/>
+      </a:schemeClr>
+    </dgm:linClrLst>
+    <dgm:effectClrLst/>
+    <dgm:txLinClrLst/>
+    <dgm:txFillClrLst/>
+    <dgm:txEffectClrLst/>
+  </dgm:styleLbl>
+  <dgm:styleLbl name="fgSibTrans2D1">
+    <dgm:fillClrLst meth="repeat">
+      <a:schemeClr val="accent4">
+        <a:tint val="60000"/>
+      </a:schemeClr>
+    </dgm:fillClrLst>
+    <dgm:linClrLst meth="repeat">
+      <a:schemeClr val="accent4">
+        <a:tint val="60000"/>
+      </a:schemeClr>
+    </dgm:linClrLst>
+    <dgm:effectClrLst/>
+    <dgm:txLinClrLst/>
+    <dgm:txFillClrLst/>
+    <dgm:txEffectClrLst/>
+  </dgm:styleLbl>
+  <dgm:styleLbl name="bgSibTrans2D1">
+    <dgm:fillClrLst meth="repeat">
+      <a:schemeClr val="accent4">
+        <a:tint val="60000"/>
+      </a:schemeClr>
+    </dgm:fillClrLst>
+    <dgm:linClrLst meth="repeat">
+      <a:schemeClr val="accent4">
+        <a:tint val="60000"/>
+      </a:schemeClr>
+    </dgm:linClrLst>
+    <dgm:effectClrLst/>
+    <dgm:txLinClrLst/>
+    <dgm:txFillClrLst/>
+    <dgm:txEffectClrLst/>
+  </dgm:styleLbl>
+  <dgm:styleLbl name="sibTrans1D1">
+    <dgm:fillClrLst meth="repeat">
+      <a:schemeClr val="accent4"/>
+    </dgm:fillClrLst>
+    <dgm:linClrLst meth="repeat">
+      <a:schemeClr val="accent4"/>
+    </dgm:linClrLst>
+    <dgm:effectClrLst/>
+    <dgm:txLinClrLst/>
+    <dgm:txFillClrLst meth="repeat">
+      <a:schemeClr val="tx1"/>
+    </dgm:txFillClrLst>
+    <dgm:txEffectClrLst/>
+  </dgm:styleLbl>
+  <dgm:styleLbl name="callout">
+    <dgm:fillClrLst meth="repeat">
+      <a:schemeClr val="accent4"/>
+    </dgm:fillClrLst>
+    <dgm:linClrLst meth="repeat">
+      <a:schemeClr val="accent4">
+        <a:tint val="50000"/>
+      </a:schemeClr>
+    </dgm:linClrLst>
+    <dgm:effectClrLst/>
+    <dgm:txLinClrLst/>
+    <dgm:txFillClrLst meth="repeat">
+      <a:schemeClr val="tx1"/>
+    </dgm:txFillClrLst>
+    <dgm:txEffectClrLst/>
+  </dgm:styleLbl>
+  <dgm:styleLbl name="asst0">
+    <dgm:fillClrLst meth="repeat">
+      <a:schemeClr val="accent4"/>
+    </dgm:fillClrLst>
+    <dgm:linClrLst meth="repeat">
+      <a:schemeClr val="lt1"/>
+    </dgm:linClrLst>
+    <dgm:effectClrLst/>
+    <dgm:txLinClrLst/>
+    <dgm:txFillClrLst/>
+    <dgm:txEffectClrLst/>
+  </dgm:styleLbl>
+  <dgm:styleLbl name="asst1">
+    <dgm:fillClrLst meth="repeat">
+      <a:schemeClr val="accent4"/>
+    </dgm:fillClrLst>
+    <dgm:linClrLst meth="repeat">
+      <a:schemeClr val="lt1"/>
+    </dgm:linClrLst>
+    <dgm:effectClrLst/>
+    <dgm:txLinClrLst/>
+    <dgm:txFillClrLst/>
+    <dgm:txEffectClrLst/>
+  </dgm:styleLbl>
+  <dgm:styleLbl name="asst2">
+    <dgm:fillClrLst meth="repeat">
+      <a:schemeClr val="accent4"/>
+    </dgm:fillClrLst>
+    <dgm:linClrLst meth="repeat">
+      <a:schemeClr val="lt1"/>
+    </dgm:linClrLst>
+    <dgm:effectClrLst/>
+    <dgm:txLinClrLst/>
+    <dgm:txFillClrLst/>
+    <dgm:txEffectClrLst/>
+  </dgm:styleLbl>
+  <dgm:styleLbl name="asst3">
+    <dgm:fillClrLst meth="repeat">
+      <a:schemeClr val="accent4"/>
+    </dgm:fillClrLst>
+    <dgm:linClrLst meth="repeat">
+      <a:schemeClr val="lt1"/>
+    </dgm:linClrLst>
+    <dgm:effectClrLst/>
+    <dgm:txLinClrLst/>
+    <dgm:txFillClrLst/>
+    <dgm:txEffectClrLst/>
+  </dgm:styleLbl>
+  <dgm:styleLbl name="asst4">
+    <dgm:fillClrLst meth="repeat">
+      <a:schemeClr val="accent4"/>
+    </dgm:fillClrLst>
+    <dgm:linClrLst meth="repeat">
+      <a:schemeClr val="lt1"/>
+    </dgm:linClrLst>
+    <dgm:effectClrLst/>
+    <dgm:txLinClrLst/>
+    <dgm:txFillClrLst/>
+    <dgm:txEffectClrLst/>
+  </dgm:styleLbl>
+  <dgm:styleLbl name="parChTrans2D1">
+    <dgm:fillClrLst meth="repeat">
+      <a:schemeClr val="accent4">
+        <a:tint val="60000"/>
+      </a:schemeClr>
+    </dgm:fillClrLst>
+    <dgm:linClrLst meth="repeat">
+      <a:schemeClr val="accent4">
+        <a:tint val="60000"/>
+      </a:schemeClr>
+    </dgm:linClrLst>
+    <dgm:effectClrLst/>
+    <dgm:txLinClrLst/>
+    <dgm:txFillClrLst meth="repeat">
+      <a:schemeClr val="lt1"/>
+    </dgm:txFillClrLst>
+    <dgm:txEffectClrLst/>
+  </dgm:styleLbl>
+  <dgm:styleLbl name="parChTrans2D2">
+    <dgm:fillClrLst meth="repeat">
+      <a:schemeClr val="accent4"/>
+    </dgm:fillClrLst>
+    <dgm:linClrLst meth="repeat">
+      <a:schemeClr val="accent4"/>
+    </dgm:linClrLst>
+    <dgm:effectClrLst/>
+    <dgm:txLinClrLst/>
+    <dgm:txFillClrLst meth="repeat">
+      <a:schemeClr val="lt1"/>
+    </dgm:txFillClrLst>
+    <dgm:txEffectClrLst/>
+  </dgm:styleLbl>
+  <dgm:styleLbl name="parChTrans2D3">
+    <dgm:fillClrLst meth="repeat">
+      <a:schemeClr val="accent4"/>
+    </dgm:fillClrLst>
+    <dgm:linClrLst meth="repeat">
+      <a:schemeClr val="accent4"/>
+    </dgm:linClrLst>
+    <dgm:effectClrLst/>
+    <dgm:txLinClrLst/>
+    <dgm:txFillClrLst meth="repeat">
+      <a:schemeClr val="lt1"/>
+    </dgm:txFillClrLst>
+    <dgm:txEffectClrLst/>
+  </dgm:styleLbl>
+  <dgm:styleLbl name="parChTrans2D4">
+    <dgm:fillClrLst meth="repeat">
+      <a:schemeClr val="accent4"/>
+    </dgm:fillClrLst>
+    <dgm:linClrLst meth="repeat">
+      <a:schemeClr val="accent4"/>
+    </dgm:linClrLst>
+    <dgm:effectClrLst/>
+    <dgm:txLinClrLst/>
+    <dgm:txFillClrLst meth="repeat">
+      <a:schemeClr val="lt1"/>
+    </dgm:txFillClrLst>
+    <dgm:txEffectClrLst/>
+  </dgm:styleLbl>
+  <dgm:styleLbl name="parChTrans1D1">
+    <dgm:fillClrLst meth="repeat">
+      <a:schemeClr val="accent4"/>
+    </dgm:fillClrLst>
+    <dgm:linClrLst meth="repeat">
+      <a:schemeClr val="accent4">
+        <a:shade val="60000"/>
+      </a:schemeClr>
+    </dgm:linClrLst>
+    <dgm:effectClrLst/>
+    <dgm:txLinClrLst/>
+    <dgm:txFillClrLst meth="repeat">
+      <a:schemeClr val="tx1"/>
+    </dgm:txFillClrLst>
+    <dgm:txEffectClrLst/>
+  </dgm:styleLbl>
+  <dgm:styleLbl name="parChTrans1D2">
+    <dgm:fillClrLst meth="repeat">
+      <a:schemeClr val="accent4"/>
+    </dgm:fillClrLst>
+    <dgm:linClrLst meth="repeat">
+      <a:schemeClr val="accent4">
+        <a:shade val="60000"/>
+      </a:schemeClr>
+    </dgm:linClrLst>
+    <dgm:effectClrLst/>
+    <dgm:txLinClrLst/>
+    <dgm:txFillClrLst meth="repeat">
+      <a:schemeClr val="tx1"/>
+    </dgm:txFillClrLst>
+    <dgm:txEffectClrLst/>
+  </dgm:styleLbl>
+  <dgm:styleLbl name="parChTrans1D3">
+    <dgm:fillClrLst meth="repeat">
+      <a:schemeClr val="accent4"/>
+    </dgm:fillClrLst>
+    <dgm:linClrLst meth="repeat">
+      <a:schemeClr val="accent4">
+        <a:shade val="80000"/>
+      </a:schemeClr>
+    </dgm:linClrLst>
+    <dgm:effectClrLst/>
+    <dgm:txLinClrLst/>
+    <dgm:txFillClrLst meth="repeat">
+      <a:schemeClr val="tx1"/>
+    </dgm:txFillClrLst>
+    <dgm:txEffectClrLst/>
+  </dgm:styleLbl>
+  <dgm:styleLbl name="parChTrans1D4">
+    <dgm:fillClrLst meth="repeat">
+      <a:schemeClr val="accent4"/>
+    </dgm:fillClrLst>
+    <dgm:linClrLst meth="repeat">
+      <a:schemeClr val="accent4">
+        <a:shade val="80000"/>
+      </a:schemeClr>
+    </dgm:linClrLst>
+    <dgm:effectClrLst/>
+    <dgm:txLinClrLst/>
+    <dgm:txFillClrLst meth="repeat">
+      <a:schemeClr val="tx1"/>
+    </dgm:txFillClrLst>
+    <dgm:txEffectClrLst/>
+  </dgm:styleLbl>
+  <dgm:styleLbl name="fgAcc1">
+    <dgm:fillClrLst meth="repeat">
+      <a:schemeClr val="lt1">
+        <a:alpha val="90000"/>
+      </a:schemeClr>
+    </dgm:fillClrLst>
+    <dgm:linClrLst meth="repeat">
+      <a:schemeClr val="accent4"/>
+    </dgm:linClrLst>
+    <dgm:effectClrLst/>
+    <dgm:txLinClrLst/>
+    <dgm:txFillClrLst meth="repeat">
+      <a:schemeClr val="dk1"/>
+    </dgm:txFillClrLst>
+    <dgm:txEffectClrLst/>
+  </dgm:styleLbl>
+  <dgm:styleLbl name="conFgAcc1">
+    <dgm:fillClrLst meth="repeat">
+      <a:schemeClr val="lt1">
+        <a:alpha val="90000"/>
+      </a:schemeClr>
+    </dgm:fillClrLst>
+    <dgm:linClrLst meth="repeat">
+      <a:schemeClr val="accent4"/>
+    </dgm:linClrLst>
+    <dgm:effectClrLst/>
+    <dgm:txLinClrLst/>
+    <dgm:txFillClrLst meth="repeat">
+      <a:schemeClr val="dk1"/>
+    </dgm:txFillClrLst>
+    <dgm:txEffectClrLst/>
+  </dgm:styleLbl>
+  <dgm:styleLbl name="alignAcc1">
+    <dgm:fillClrLst meth="repeat">
+      <a:schemeClr val="lt1">
+        <a:alpha val="90000"/>
+      </a:schemeClr>
+    </dgm:fillClrLst>
+    <dgm:linClrLst meth="repeat">
+      <a:schemeClr val="accent4"/>
+    </dgm:linClrLst>
+    <dgm:effectClrLst/>
+    <dgm:txLinClrLst/>
+    <dgm:txFillClrLst meth="repeat">
+      <a:schemeClr val="dk1"/>
+    </dgm:txFillClrLst>
+    <dgm:txEffectClrLst/>
+  </dgm:styleLbl>
+  <dgm:styleLbl name="trAlignAcc1">
+    <dgm:fillClrLst meth="repeat">
+      <a:schemeClr val="lt1">
+        <a:alpha val="40000"/>
+      </a:schemeClr>
+    </dgm:fillClrLst>
+    <dgm:linClrLst meth="repeat">
+      <a:schemeClr val="accent4"/>
+    </dgm:linClrLst>
+    <dgm:effectClrLst/>
+    <dgm:txLinClrLst/>
+    <dgm:txFillClrLst meth="repeat">
+      <a:schemeClr val="dk1"/>
+    </dgm:txFillClrLst>
+    <dgm:txEffectClrLst/>
+  </dgm:styleLbl>
+  <dgm:styleLbl name="bgAcc1">
+    <dgm:fillClrLst meth="repeat">
+      <a:schemeClr val="lt1">
+        <a:alpha val="90000"/>
+      </a:schemeClr>
+    </dgm:fillClrLst>
+    <dgm:linClrLst meth="repeat">
+      <a:schemeClr val="accent4"/>
+    </dgm:linClrLst>
+    <dgm:effectClrLst/>
+    <dgm:txLinClrLst/>
+    <dgm:txFillClrLst meth="repeat">
+      <a:schemeClr val="dk1"/>
+    </dgm:txFillClrLst>
+    <dgm:txEffectClrLst/>
+  </dgm:styleLbl>
+  <dgm:styleLbl name="solidFgAcc1">
+    <dgm:fillClrLst meth="repeat">
+      <a:schemeClr val="lt1"/>
+    </dgm:fillClrLst>
+    <dgm:linClrLst meth="repeat">
+      <a:schemeClr val="accent4"/>
+    </dgm:linClrLst>
+    <dgm:effectClrLst/>
+    <dgm:txLinClrLst/>
+    <dgm:txFillClrLst meth="repeat">
+      <a:schemeClr val="dk1"/>
+    </dgm:txFillClrLst>
+    <dgm:txEffectClrLst/>
+  </dgm:styleLbl>
+  <dgm:styleLbl name="solidAlignAcc1">
+    <dgm:fillClrLst meth="repeat">
+      <a:schemeClr val="lt1"/>
+    </dgm:fillClrLst>
+    <dgm:linClrLst meth="repeat">
+      <a:schemeClr val="accent4"/>
+    </dgm:linClrLst>
+    <dgm:effectClrLst/>
+    <dgm:txLinClrLst/>
+    <dgm:txFillClrLst meth="repeat">
+      <a:schemeClr val="dk1"/>
+    </dgm:txFillClrLst>
+    <dgm:txEffectClrLst/>
+  </dgm:styleLbl>
+  <dgm:styleLbl name="solidBgAcc1">
+    <dgm:fillClrLst meth="repeat">
+      <a:schemeClr val="lt1"/>
+    </dgm:fillClrLst>
+    <dgm:linClrLst meth="repeat">
+      <a:schemeClr val="accent4"/>
+    </dgm:linClrLst>
+    <dgm:effectClrLst/>
+    <dgm:txLinClrLst/>
+    <dgm:txFillClrLst meth="repeat">
+      <a:schemeClr val="dk1"/>
+    </dgm:txFillClrLst>
+    <dgm:txEffectClrLst/>
+  </dgm:styleLbl>
+  <dgm:styleLbl name="fgAccFollowNode1">
+    <dgm:fillClrLst meth="repeat">
+      <a:schemeClr val="accent4">
+        <a:alpha val="90000"/>
+        <a:tint val="40000"/>
+      </a:schemeClr>
+    </dgm:fillClrLst>
+    <dgm:linClrLst meth="repeat">
+      <a:schemeClr val="accent4">
+        <a:alpha val="90000"/>
+        <a:tint val="40000"/>
+      </a:schemeClr>
+    </dgm:linClrLst>
+    <dgm:effectClrLst/>
+    <dgm:txLinClrLst/>
+    <dgm:txFillClrLst meth="repeat">
+      <a:schemeClr val="dk1"/>
+    </dgm:txFillClrLst>
+    <dgm:txEffectClrLst/>
+  </dgm:styleLbl>
+  <dgm:styleLbl name="alignAccFollowNode1">
+    <dgm:fillClrLst meth="repeat">
+      <a:schemeClr val="accent4">
+        <a:alpha val="90000"/>
+        <a:tint val="40000"/>
+      </a:schemeClr>
+    </dgm:fillClrLst>
+    <dgm:linClrLst meth="repeat">
+      <a:schemeClr val="accent4">
+        <a:alpha val="90000"/>
+        <a:tint val="40000"/>
+      </a:schemeClr>
+    </dgm:linClrLst>
+    <dgm:effectClrLst/>
+    <dgm:txLinClrLst/>
+    <dgm:txFillClrLst meth="repeat">
+      <a:schemeClr val="dk1"/>
+    </dgm:txFillClrLst>
+    <dgm:txEffectClrLst/>
+  </dgm:styleLbl>
+  <dgm:styleLbl name="bgAccFollowNode1">
+    <dgm:fillClrLst meth="repeat">
+      <a:schemeClr val="accent4">
+        <a:alpha val="90000"/>
+        <a:tint val="40000"/>
+      </a:schemeClr>
+    </dgm:fillClrLst>
+    <dgm:linClrLst meth="repeat">
+      <a:schemeClr val="accent4">
+        <a:alpha val="90000"/>
+        <a:tint val="40000"/>
+      </a:schemeClr>
+    </dgm:linClrLst>
+    <dgm:effectClrLst/>
+    <dgm:txLinClrLst/>
+    <dgm:txFillClrLst meth="repeat">
+      <a:schemeClr val="dk1"/>
+    </dgm:txFillClrLst>
+    <dgm:txEffectClrLst/>
+  </dgm:styleLbl>
+  <dgm:styleLbl name="fgAcc0">
+    <dgm:fillClrLst meth="repeat">
+      <a:schemeClr val="lt1">
+        <a:alpha val="90000"/>
+      </a:schemeClr>
+    </dgm:fillClrLst>
+    <dgm:linClrLst meth="repeat">
+      <a:schemeClr val="accent4"/>
+    </dgm:linClrLst>
+    <dgm:effectClrLst/>
+    <dgm:txLinClrLst/>
+    <dgm:txFillClrLst meth="repeat">
+      <a:schemeClr val="dk1"/>
+    </dgm:txFillClrLst>
+    <dgm:txEffectClrLst/>
+  </dgm:styleLbl>
+  <dgm:styleLbl name="fgAcc2">
+    <dgm:fillClrLst meth="repeat">
+      <a:schemeClr val="lt1">
+        <a:alpha val="90000"/>
+      </a:schemeClr>
+    </dgm:fillClrLst>
+    <dgm:linClrLst meth="repeat">
+      <a:schemeClr val="accent4"/>
+    </dgm:linClrLst>
+    <dgm:effectClrLst/>
+    <dgm:txLinClrLst/>
+    <dgm:txFillClrLst meth="repeat">
+      <a:schemeClr val="dk1"/>
+    </dgm:txFillClrLst>
+    <dgm:txEffectClrLst/>
+  </dgm:styleLbl>
+  <dgm:styleLbl name="fgAcc3">
+    <dgm:fillClrLst meth="repeat">
+      <a:schemeClr val="lt1">
+        <a:alpha val="90000"/>
+      </a:schemeClr>
+    </dgm:fillClrLst>
+    <dgm:linClrLst meth="repeat">
+      <a:schemeClr val="accent4"/>
+    </dgm:linClrLst>
+    <dgm:effectClrLst/>
+    <dgm:txLinClrLst/>
+    <dgm:txFillClrLst meth="repeat">
+      <a:schemeClr val="dk1"/>
+    </dgm:txFillClrLst>
+    <dgm:txEffectClrLst/>
+  </dgm:styleLbl>
+  <dgm:styleLbl name="fgAcc4">
+    <dgm:fillClrLst meth="repeat">
+      <a:schemeClr val="lt1">
+        <a:alpha val="90000"/>
+      </a:schemeClr>
+    </dgm:fillClrLst>
+    <dgm:linClrLst meth="repeat">
+      <a:schemeClr val="accent4"/>
+    </dgm:linClrLst>
+    <dgm:effectClrLst/>
+    <dgm:txLinClrLst/>
+    <dgm:txFillClrLst meth="repeat">
+      <a:schemeClr val="dk1"/>
+    </dgm:txFillClrLst>
+    <dgm:txEffectClrLst/>
+  </dgm:styleLbl>
+  <dgm:styleLbl name="bgShp">
+    <dgm:fillClrLst meth="repeat">
+      <a:schemeClr val="accent4">
+        <a:tint val="40000"/>
+      </a:schemeClr>
+    </dgm:fillClrLst>
+    <dgm:linClrLst meth="repeat">
+      <a:schemeClr val="accent4"/>
+    </dgm:linClrLst>
+    <dgm:effectClrLst/>
+    <dgm:txLinClrLst/>
+    <dgm:txFillClrLst meth="repeat">
+      <a:schemeClr val="dk1"/>
+    </dgm:txFillClrLst>
+    <dgm:txEffectClrLst/>
+  </dgm:styleLbl>
+  <dgm:styleLbl name="dkBgShp">
+    <dgm:fillClrLst meth="repeat">
+      <a:schemeClr val="accent4">
+        <a:shade val="80000"/>
+      </a:schemeClr>
+    </dgm:fillClrLst>
+    <dgm:linClrLst meth="repeat">
+      <a:schemeClr val="accent4"/>
+    </dgm:linClrLst>
+    <dgm:effectClrLst/>
+    <dgm:txLinClrLst/>
+    <dgm:txFillClrLst meth="repeat">
+      <a:schemeClr val="lt1"/>
+    </dgm:txFillClrLst>
+    <dgm:txEffectClrLst/>
+  </dgm:styleLbl>
+  <dgm:styleLbl name="trBgShp">
+    <dgm:fillClrLst meth="repeat">
+      <a:schemeClr val="accent4">
+        <a:tint val="50000"/>
+        <a:alpha val="40000"/>
+      </a:schemeClr>
+    </dgm:fillClrLst>
+    <dgm:linClrLst meth="repeat">
+      <a:schemeClr val="accent4"/>
+    </dgm:linClrLst>
+    <dgm:effectClrLst/>
+    <dgm:txLinClrLst/>
+    <dgm:txFillClrLst meth="repeat">
+      <a:schemeClr val="lt1"/>
+    </dgm:txFillClrLst>
+    <dgm:txEffectClrLst/>
+  </dgm:styleLbl>
+  <dgm:styleLbl name="fgShp">
+    <dgm:fillClrLst meth="repeat">
+      <a:schemeClr val="accent4">
+        <a:tint val="60000"/>
+      </a:schemeClr>
+    </dgm:fillClrLst>
+    <dgm:linClrLst meth="repeat">
+      <a:schemeClr val="lt1"/>
+    </dgm:linClrLst>
+    <dgm:effectClrLst/>
+    <dgm:txLinClrLst/>
+    <dgm:txFillClrLst meth="repeat">
+      <a:schemeClr val="dk1"/>
+    </dgm:txFillClrLst>
+    <dgm:txEffectClrLst/>
+  </dgm:styleLbl>
+  <dgm:styleLbl name="revTx">
+    <dgm:fillClrLst meth="repeat">
+      <a:schemeClr val="lt1">
+        <a:alpha val="0"/>
+      </a:schemeClr>
+    </dgm:fillClrLst>
+    <dgm:linClrLst meth="repeat">
+      <a:schemeClr val="dk1">
+        <a:alpha val="0"/>
+      </a:schemeClr>
+    </dgm:linClrLst>
+    <dgm:effectClrLst/>
+    <dgm:txLinClrLst/>
+    <dgm:txFillClrLst meth="repeat">
+      <a:schemeClr val="tx1"/>
+    </dgm:txFillClrLst>
+    <dgm:txEffectClrLst/>
+  </dgm:styleLbl>
+</dgm:colorsDef>
+</file>
+
+<file path=ppt/diagrams/colors2.xml><?xml version="1.0" encoding="utf-8"?>
 <dgm:colorsDef xmlns:dgm="http://schemas.openxmlformats.org/drawingml/2006/diagram" xmlns:a="http://schemas.openxmlformats.org/drawingml/2006/main" uniqueId="urn:microsoft.com/office/officeart/2018/5/colors/Iconchunking_neutralbg_colorful1">
   <dgm:title val=""/>
   <dgm:desc val=""/>
@@ -1051,754 +1806,399 @@
 </dgm:colorsDef>
 </file>
 
-<file path=ppt/diagrams/colors2.xml><?xml version="1.0" encoding="utf-8"?>
-<dgm:colorsDef xmlns:dgm="http://schemas.openxmlformats.org/drawingml/2006/diagram" xmlns:a="http://schemas.openxmlformats.org/drawingml/2006/main" uniqueId="urn:microsoft.com/office/officeart/2005/8/colors/accent1_2">
-  <dgm:title val=""/>
-  <dgm:desc val=""/>
-  <dgm:catLst>
-    <dgm:cat type="accent1" pri="11200"/>
-  </dgm:catLst>
-  <dgm:styleLbl name="node0">
-    <dgm:fillClrLst meth="repeat">
-      <a:schemeClr val="accent1"/>
-    </dgm:fillClrLst>
-    <dgm:linClrLst meth="repeat">
-      <a:schemeClr val="lt1"/>
-    </dgm:linClrLst>
-    <dgm:effectClrLst/>
-    <dgm:txLinClrLst/>
-    <dgm:txFillClrLst/>
-    <dgm:txEffectClrLst/>
-  </dgm:styleLbl>
-  <dgm:styleLbl name="alignNode1">
-    <dgm:fillClrLst meth="repeat">
-      <a:schemeClr val="accent1"/>
-    </dgm:fillClrLst>
-    <dgm:linClrLst meth="repeat">
-      <a:schemeClr val="accent1"/>
-    </dgm:linClrLst>
-    <dgm:effectClrLst/>
-    <dgm:txLinClrLst/>
-    <dgm:txFillClrLst/>
-    <dgm:txEffectClrLst/>
-  </dgm:styleLbl>
-  <dgm:styleLbl name="node1">
-    <dgm:fillClrLst meth="repeat">
-      <a:schemeClr val="accent1"/>
-    </dgm:fillClrLst>
-    <dgm:linClrLst meth="repeat">
-      <a:schemeClr val="lt1"/>
-    </dgm:linClrLst>
-    <dgm:effectClrLst/>
-    <dgm:txLinClrLst/>
-    <dgm:txFillClrLst/>
-    <dgm:txEffectClrLst/>
-  </dgm:styleLbl>
-  <dgm:styleLbl name="lnNode1">
-    <dgm:fillClrLst meth="repeat">
-      <a:schemeClr val="accent1"/>
-    </dgm:fillClrLst>
-    <dgm:linClrLst meth="repeat">
-      <a:schemeClr val="lt1"/>
-    </dgm:linClrLst>
-    <dgm:effectClrLst/>
-    <dgm:txLinClrLst/>
-    <dgm:txFillClrLst/>
-    <dgm:txEffectClrLst/>
-  </dgm:styleLbl>
-  <dgm:styleLbl name="vennNode1">
-    <dgm:fillClrLst meth="repeat">
-      <a:schemeClr val="accent1">
-        <a:alpha val="50000"/>
-      </a:schemeClr>
-    </dgm:fillClrLst>
-    <dgm:linClrLst meth="repeat">
-      <a:schemeClr val="lt1"/>
-    </dgm:linClrLst>
-    <dgm:effectClrLst/>
-    <dgm:txLinClrLst/>
-    <dgm:txFillClrLst/>
-    <dgm:txEffectClrLst/>
-  </dgm:styleLbl>
-  <dgm:styleLbl name="node2">
-    <dgm:fillClrLst meth="repeat">
-      <a:schemeClr val="accent1"/>
-    </dgm:fillClrLst>
-    <dgm:linClrLst meth="repeat">
-      <a:schemeClr val="lt1"/>
-    </dgm:linClrLst>
-    <dgm:effectClrLst/>
-    <dgm:txLinClrLst/>
-    <dgm:txFillClrLst/>
-    <dgm:txEffectClrLst/>
-  </dgm:styleLbl>
-  <dgm:styleLbl name="node3">
-    <dgm:fillClrLst meth="repeat">
-      <a:schemeClr val="accent1"/>
-    </dgm:fillClrLst>
-    <dgm:linClrLst meth="repeat">
-      <a:schemeClr val="lt1"/>
-    </dgm:linClrLst>
-    <dgm:effectClrLst/>
-    <dgm:txLinClrLst/>
-    <dgm:txFillClrLst/>
-    <dgm:txEffectClrLst/>
-  </dgm:styleLbl>
-  <dgm:styleLbl name="node4">
-    <dgm:fillClrLst meth="repeat">
-      <a:schemeClr val="accent1"/>
-    </dgm:fillClrLst>
-    <dgm:linClrLst meth="repeat">
-      <a:schemeClr val="lt1"/>
-    </dgm:linClrLst>
-    <dgm:effectClrLst/>
-    <dgm:txLinClrLst/>
-    <dgm:txFillClrLst/>
-    <dgm:txEffectClrLst/>
-  </dgm:styleLbl>
-  <dgm:styleLbl name="fgImgPlace1">
-    <dgm:fillClrLst meth="repeat">
-      <a:schemeClr val="accent1">
-        <a:tint val="50000"/>
-      </a:schemeClr>
-    </dgm:fillClrLst>
-    <dgm:linClrLst meth="repeat">
-      <a:schemeClr val="lt1"/>
-    </dgm:linClrLst>
-    <dgm:effectClrLst/>
-    <dgm:txLinClrLst/>
-    <dgm:txFillClrLst meth="repeat">
-      <a:schemeClr val="lt1"/>
-    </dgm:txFillClrLst>
-    <dgm:txEffectClrLst/>
-  </dgm:styleLbl>
-  <dgm:styleLbl name="alignImgPlace1">
-    <dgm:fillClrLst meth="repeat">
-      <a:schemeClr val="accent1">
-        <a:tint val="50000"/>
-      </a:schemeClr>
-    </dgm:fillClrLst>
-    <dgm:linClrLst meth="repeat">
-      <a:schemeClr val="lt1"/>
-    </dgm:linClrLst>
-    <dgm:effectClrLst/>
-    <dgm:txLinClrLst/>
-    <dgm:txFillClrLst meth="repeat">
-      <a:schemeClr val="lt1"/>
-    </dgm:txFillClrLst>
-    <dgm:txEffectClrLst/>
-  </dgm:styleLbl>
-  <dgm:styleLbl name="bgImgPlace1">
-    <dgm:fillClrLst meth="repeat">
-      <a:schemeClr val="accent1">
-        <a:tint val="50000"/>
-      </a:schemeClr>
-    </dgm:fillClrLst>
-    <dgm:linClrLst meth="repeat">
-      <a:schemeClr val="lt1"/>
-    </dgm:linClrLst>
-    <dgm:effectClrLst/>
-    <dgm:txLinClrLst/>
-    <dgm:txFillClrLst meth="repeat">
-      <a:schemeClr val="lt1"/>
-    </dgm:txFillClrLst>
-    <dgm:txEffectClrLst/>
-  </dgm:styleLbl>
-  <dgm:styleLbl name="sibTrans2D1">
-    <dgm:fillClrLst meth="repeat">
-      <a:schemeClr val="accent1">
-        <a:tint val="60000"/>
-      </a:schemeClr>
-    </dgm:fillClrLst>
-    <dgm:linClrLst meth="repeat">
-      <a:schemeClr val="accent1">
-        <a:tint val="60000"/>
-      </a:schemeClr>
-    </dgm:linClrLst>
-    <dgm:effectClrLst/>
-    <dgm:txLinClrLst/>
-    <dgm:txFillClrLst/>
-    <dgm:txEffectClrLst/>
-  </dgm:styleLbl>
-  <dgm:styleLbl name="fgSibTrans2D1">
-    <dgm:fillClrLst meth="repeat">
-      <a:schemeClr val="accent1">
-        <a:tint val="60000"/>
-      </a:schemeClr>
-    </dgm:fillClrLst>
-    <dgm:linClrLst meth="repeat">
-      <a:schemeClr val="accent1">
-        <a:tint val="60000"/>
-      </a:schemeClr>
-    </dgm:linClrLst>
-    <dgm:effectClrLst/>
-    <dgm:txLinClrLst/>
-    <dgm:txFillClrLst/>
-    <dgm:txEffectClrLst/>
-  </dgm:styleLbl>
-  <dgm:styleLbl name="bgSibTrans2D1">
-    <dgm:fillClrLst meth="repeat">
-      <a:schemeClr val="accent1">
-        <a:tint val="60000"/>
-      </a:schemeClr>
-    </dgm:fillClrLst>
-    <dgm:linClrLst meth="repeat">
-      <a:schemeClr val="accent1">
-        <a:tint val="60000"/>
-      </a:schemeClr>
-    </dgm:linClrLst>
-    <dgm:effectClrLst/>
-    <dgm:txLinClrLst/>
-    <dgm:txFillClrLst/>
-    <dgm:txEffectClrLst/>
-  </dgm:styleLbl>
-  <dgm:styleLbl name="sibTrans1D1">
-    <dgm:fillClrLst meth="repeat">
-      <a:schemeClr val="accent1"/>
-    </dgm:fillClrLst>
-    <dgm:linClrLst meth="repeat">
-      <a:schemeClr val="accent1"/>
-    </dgm:linClrLst>
-    <dgm:effectClrLst/>
-    <dgm:txLinClrLst/>
-    <dgm:txFillClrLst meth="repeat">
-      <a:schemeClr val="tx1"/>
-    </dgm:txFillClrLst>
-    <dgm:txEffectClrLst/>
-  </dgm:styleLbl>
-  <dgm:styleLbl name="callout">
-    <dgm:fillClrLst meth="repeat">
-      <a:schemeClr val="accent1"/>
-    </dgm:fillClrLst>
-    <dgm:linClrLst meth="repeat">
-      <a:schemeClr val="accent1">
-        <a:tint val="50000"/>
-      </a:schemeClr>
-    </dgm:linClrLst>
-    <dgm:effectClrLst/>
-    <dgm:txLinClrLst/>
-    <dgm:txFillClrLst meth="repeat">
-      <a:schemeClr val="tx1"/>
-    </dgm:txFillClrLst>
-    <dgm:txEffectClrLst/>
-  </dgm:styleLbl>
-  <dgm:styleLbl name="asst0">
-    <dgm:fillClrLst meth="repeat">
-      <a:schemeClr val="accent1"/>
-    </dgm:fillClrLst>
-    <dgm:linClrLst meth="repeat">
-      <a:schemeClr val="lt1"/>
-    </dgm:linClrLst>
-    <dgm:effectClrLst/>
-    <dgm:txLinClrLst/>
-    <dgm:txFillClrLst/>
-    <dgm:txEffectClrLst/>
-  </dgm:styleLbl>
-  <dgm:styleLbl name="asst1">
-    <dgm:fillClrLst meth="repeat">
-      <a:schemeClr val="accent1"/>
-    </dgm:fillClrLst>
-    <dgm:linClrLst meth="repeat">
-      <a:schemeClr val="lt1"/>
-    </dgm:linClrLst>
-    <dgm:effectClrLst/>
-    <dgm:txLinClrLst/>
-    <dgm:txFillClrLst/>
-    <dgm:txEffectClrLst/>
-  </dgm:styleLbl>
-  <dgm:styleLbl name="asst2">
-    <dgm:fillClrLst meth="repeat">
-      <a:schemeClr val="accent1"/>
-    </dgm:fillClrLst>
-    <dgm:linClrLst meth="repeat">
-      <a:schemeClr val="lt1"/>
-    </dgm:linClrLst>
-    <dgm:effectClrLst/>
-    <dgm:txLinClrLst/>
-    <dgm:txFillClrLst/>
-    <dgm:txEffectClrLst/>
-  </dgm:styleLbl>
-  <dgm:styleLbl name="asst3">
-    <dgm:fillClrLst meth="repeat">
-      <a:schemeClr val="accent1"/>
-    </dgm:fillClrLst>
-    <dgm:linClrLst meth="repeat">
-      <a:schemeClr val="lt1"/>
-    </dgm:linClrLst>
-    <dgm:effectClrLst/>
-    <dgm:txLinClrLst/>
-    <dgm:txFillClrLst/>
-    <dgm:txEffectClrLst/>
-  </dgm:styleLbl>
-  <dgm:styleLbl name="asst4">
-    <dgm:fillClrLst meth="repeat">
-      <a:schemeClr val="accent1"/>
-    </dgm:fillClrLst>
-    <dgm:linClrLst meth="repeat">
-      <a:schemeClr val="lt1"/>
-    </dgm:linClrLst>
-    <dgm:effectClrLst/>
-    <dgm:txLinClrLst/>
-    <dgm:txFillClrLst/>
-    <dgm:txEffectClrLst/>
-  </dgm:styleLbl>
-  <dgm:styleLbl name="parChTrans2D1">
-    <dgm:fillClrLst meth="repeat">
-      <a:schemeClr val="accent1">
-        <a:tint val="60000"/>
-      </a:schemeClr>
-    </dgm:fillClrLst>
-    <dgm:linClrLst meth="repeat">
-      <a:schemeClr val="accent1">
-        <a:tint val="60000"/>
-      </a:schemeClr>
-    </dgm:linClrLst>
-    <dgm:effectClrLst/>
-    <dgm:txLinClrLst/>
-    <dgm:txFillClrLst meth="repeat">
-      <a:schemeClr val="lt1"/>
-    </dgm:txFillClrLst>
-    <dgm:txEffectClrLst/>
-  </dgm:styleLbl>
-  <dgm:styleLbl name="parChTrans2D2">
-    <dgm:fillClrLst meth="repeat">
-      <a:schemeClr val="accent1"/>
-    </dgm:fillClrLst>
-    <dgm:linClrLst meth="repeat">
-      <a:schemeClr val="accent1"/>
-    </dgm:linClrLst>
-    <dgm:effectClrLst/>
-    <dgm:txLinClrLst/>
-    <dgm:txFillClrLst meth="repeat">
-      <a:schemeClr val="lt1"/>
-    </dgm:txFillClrLst>
-    <dgm:txEffectClrLst/>
-  </dgm:styleLbl>
-  <dgm:styleLbl name="parChTrans2D3">
-    <dgm:fillClrLst meth="repeat">
-      <a:schemeClr val="accent1"/>
-    </dgm:fillClrLst>
-    <dgm:linClrLst meth="repeat">
-      <a:schemeClr val="accent1"/>
-    </dgm:linClrLst>
-    <dgm:effectClrLst/>
-    <dgm:txLinClrLst/>
-    <dgm:txFillClrLst meth="repeat">
-      <a:schemeClr val="lt1"/>
-    </dgm:txFillClrLst>
-    <dgm:txEffectClrLst/>
-  </dgm:styleLbl>
-  <dgm:styleLbl name="parChTrans2D4">
-    <dgm:fillClrLst meth="repeat">
-      <a:schemeClr val="accent1"/>
-    </dgm:fillClrLst>
-    <dgm:linClrLst meth="repeat">
-      <a:schemeClr val="accent1"/>
-    </dgm:linClrLst>
-    <dgm:effectClrLst/>
-    <dgm:txLinClrLst/>
-    <dgm:txFillClrLst meth="repeat">
-      <a:schemeClr val="lt1"/>
-    </dgm:txFillClrLst>
-    <dgm:txEffectClrLst/>
-  </dgm:styleLbl>
-  <dgm:styleLbl name="parChTrans1D1">
-    <dgm:fillClrLst meth="repeat">
-      <a:schemeClr val="accent1"/>
-    </dgm:fillClrLst>
-    <dgm:linClrLst meth="repeat">
-      <a:schemeClr val="accent1">
-        <a:shade val="60000"/>
-      </a:schemeClr>
-    </dgm:linClrLst>
-    <dgm:effectClrLst/>
-    <dgm:txLinClrLst/>
-    <dgm:txFillClrLst meth="repeat">
-      <a:schemeClr val="tx1"/>
-    </dgm:txFillClrLst>
-    <dgm:txEffectClrLst/>
-  </dgm:styleLbl>
-  <dgm:styleLbl name="parChTrans1D2">
-    <dgm:fillClrLst meth="repeat">
-      <a:schemeClr val="accent1"/>
-    </dgm:fillClrLst>
-    <dgm:linClrLst meth="repeat">
-      <a:schemeClr val="accent1">
-        <a:shade val="60000"/>
-      </a:schemeClr>
-    </dgm:linClrLst>
-    <dgm:effectClrLst/>
-    <dgm:txLinClrLst/>
-    <dgm:txFillClrLst meth="repeat">
-      <a:schemeClr val="tx1"/>
-    </dgm:txFillClrLst>
-    <dgm:txEffectClrLst/>
-  </dgm:styleLbl>
-  <dgm:styleLbl name="parChTrans1D3">
-    <dgm:fillClrLst meth="repeat">
-      <a:schemeClr val="accent1"/>
-    </dgm:fillClrLst>
-    <dgm:linClrLst meth="repeat">
-      <a:schemeClr val="accent1">
-        <a:shade val="80000"/>
-      </a:schemeClr>
-    </dgm:linClrLst>
-    <dgm:effectClrLst/>
-    <dgm:txLinClrLst/>
-    <dgm:txFillClrLst meth="repeat">
-      <a:schemeClr val="tx1"/>
-    </dgm:txFillClrLst>
-    <dgm:txEffectClrLst/>
-  </dgm:styleLbl>
-  <dgm:styleLbl name="parChTrans1D4">
-    <dgm:fillClrLst meth="repeat">
-      <a:schemeClr val="accent1"/>
-    </dgm:fillClrLst>
-    <dgm:linClrLst meth="repeat">
-      <a:schemeClr val="accent1">
-        <a:shade val="80000"/>
-      </a:schemeClr>
-    </dgm:linClrLst>
-    <dgm:effectClrLst/>
-    <dgm:txLinClrLst/>
-    <dgm:txFillClrLst meth="repeat">
-      <a:schemeClr val="tx1"/>
-    </dgm:txFillClrLst>
-    <dgm:txEffectClrLst/>
-  </dgm:styleLbl>
-  <dgm:styleLbl name="fgAcc1">
-    <dgm:fillClrLst meth="repeat">
-      <a:schemeClr val="lt1">
-        <a:alpha val="90000"/>
-      </a:schemeClr>
-    </dgm:fillClrLst>
-    <dgm:linClrLst meth="repeat">
-      <a:schemeClr val="accent1"/>
-    </dgm:linClrLst>
-    <dgm:effectClrLst/>
-    <dgm:txLinClrLst/>
-    <dgm:txFillClrLst meth="repeat">
-      <a:schemeClr val="dk1"/>
-    </dgm:txFillClrLst>
-    <dgm:txEffectClrLst/>
-  </dgm:styleLbl>
-  <dgm:styleLbl name="conFgAcc1">
-    <dgm:fillClrLst meth="repeat">
-      <a:schemeClr val="lt1">
-        <a:alpha val="90000"/>
-      </a:schemeClr>
-    </dgm:fillClrLst>
-    <dgm:linClrLst meth="repeat">
-      <a:schemeClr val="accent1"/>
-    </dgm:linClrLst>
-    <dgm:effectClrLst/>
-    <dgm:txLinClrLst/>
-    <dgm:txFillClrLst meth="repeat">
-      <a:schemeClr val="dk1"/>
-    </dgm:txFillClrLst>
-    <dgm:txEffectClrLst/>
-  </dgm:styleLbl>
-  <dgm:styleLbl name="alignAcc1">
-    <dgm:fillClrLst meth="repeat">
-      <a:schemeClr val="lt1">
-        <a:alpha val="90000"/>
-      </a:schemeClr>
-    </dgm:fillClrLst>
-    <dgm:linClrLst meth="repeat">
-      <a:schemeClr val="accent1"/>
-    </dgm:linClrLst>
-    <dgm:effectClrLst/>
-    <dgm:txLinClrLst/>
-    <dgm:txFillClrLst meth="repeat">
-      <a:schemeClr val="dk1"/>
-    </dgm:txFillClrLst>
-    <dgm:txEffectClrLst/>
-  </dgm:styleLbl>
-  <dgm:styleLbl name="trAlignAcc1">
-    <dgm:fillClrLst meth="repeat">
-      <a:schemeClr val="lt1">
-        <a:alpha val="40000"/>
-      </a:schemeClr>
-    </dgm:fillClrLst>
-    <dgm:linClrLst meth="repeat">
-      <a:schemeClr val="accent1"/>
-    </dgm:linClrLst>
-    <dgm:effectClrLst/>
-    <dgm:txLinClrLst/>
-    <dgm:txFillClrLst meth="repeat">
-      <a:schemeClr val="dk1"/>
-    </dgm:txFillClrLst>
-    <dgm:txEffectClrLst/>
-  </dgm:styleLbl>
-  <dgm:styleLbl name="bgAcc1">
-    <dgm:fillClrLst meth="repeat">
-      <a:schemeClr val="lt1">
-        <a:alpha val="90000"/>
-      </a:schemeClr>
-    </dgm:fillClrLst>
-    <dgm:linClrLst meth="repeat">
-      <a:schemeClr val="accent1"/>
-    </dgm:linClrLst>
-    <dgm:effectClrLst/>
-    <dgm:txLinClrLst/>
-    <dgm:txFillClrLst meth="repeat">
-      <a:schemeClr val="dk1"/>
-    </dgm:txFillClrLst>
-    <dgm:txEffectClrLst/>
-  </dgm:styleLbl>
-  <dgm:styleLbl name="solidFgAcc1">
-    <dgm:fillClrLst meth="repeat">
-      <a:schemeClr val="lt1"/>
-    </dgm:fillClrLst>
-    <dgm:linClrLst meth="repeat">
-      <a:schemeClr val="accent1"/>
-    </dgm:linClrLst>
-    <dgm:effectClrLst/>
-    <dgm:txLinClrLst/>
-    <dgm:txFillClrLst meth="repeat">
-      <a:schemeClr val="dk1"/>
-    </dgm:txFillClrLst>
-    <dgm:txEffectClrLst/>
-  </dgm:styleLbl>
-  <dgm:styleLbl name="solidAlignAcc1">
-    <dgm:fillClrLst meth="repeat">
-      <a:schemeClr val="lt1"/>
-    </dgm:fillClrLst>
-    <dgm:linClrLst meth="repeat">
-      <a:schemeClr val="accent1"/>
-    </dgm:linClrLst>
-    <dgm:effectClrLst/>
-    <dgm:txLinClrLst/>
-    <dgm:txFillClrLst meth="repeat">
-      <a:schemeClr val="dk1"/>
-    </dgm:txFillClrLst>
-    <dgm:txEffectClrLst/>
-  </dgm:styleLbl>
-  <dgm:styleLbl name="solidBgAcc1">
-    <dgm:fillClrLst meth="repeat">
-      <a:schemeClr val="lt1"/>
-    </dgm:fillClrLst>
-    <dgm:linClrLst meth="repeat">
-      <a:schemeClr val="accent1"/>
-    </dgm:linClrLst>
-    <dgm:effectClrLst/>
-    <dgm:txLinClrLst/>
-    <dgm:txFillClrLst meth="repeat">
-      <a:schemeClr val="dk1"/>
-    </dgm:txFillClrLst>
-    <dgm:txEffectClrLst/>
-  </dgm:styleLbl>
-  <dgm:styleLbl name="fgAccFollowNode1">
-    <dgm:fillClrLst meth="repeat">
-      <a:schemeClr val="accent1">
-        <a:alpha val="90000"/>
-        <a:tint val="40000"/>
-      </a:schemeClr>
-    </dgm:fillClrLst>
-    <dgm:linClrLst meth="repeat">
-      <a:schemeClr val="accent1">
-        <a:alpha val="90000"/>
-        <a:tint val="40000"/>
-      </a:schemeClr>
-    </dgm:linClrLst>
-    <dgm:effectClrLst/>
-    <dgm:txLinClrLst/>
-    <dgm:txFillClrLst meth="repeat">
-      <a:schemeClr val="dk1"/>
-    </dgm:txFillClrLst>
-    <dgm:txEffectClrLst/>
-  </dgm:styleLbl>
-  <dgm:styleLbl name="alignAccFollowNode1">
-    <dgm:fillClrLst meth="repeat">
-      <a:schemeClr val="accent1">
-        <a:alpha val="90000"/>
-        <a:tint val="40000"/>
-      </a:schemeClr>
-    </dgm:fillClrLst>
-    <dgm:linClrLst meth="repeat">
-      <a:schemeClr val="accent1">
-        <a:alpha val="90000"/>
-        <a:tint val="40000"/>
-      </a:schemeClr>
-    </dgm:linClrLst>
-    <dgm:effectClrLst/>
-    <dgm:txLinClrLst/>
-    <dgm:txFillClrLst meth="repeat">
-      <a:schemeClr val="dk1"/>
-    </dgm:txFillClrLst>
-    <dgm:txEffectClrLst/>
-  </dgm:styleLbl>
-  <dgm:styleLbl name="bgAccFollowNode1">
-    <dgm:fillClrLst meth="repeat">
-      <a:schemeClr val="accent1">
-        <a:alpha val="90000"/>
-        <a:tint val="40000"/>
-      </a:schemeClr>
-    </dgm:fillClrLst>
-    <dgm:linClrLst meth="repeat">
-      <a:schemeClr val="accent1">
-        <a:alpha val="90000"/>
-        <a:tint val="40000"/>
-      </a:schemeClr>
-    </dgm:linClrLst>
-    <dgm:effectClrLst/>
-    <dgm:txLinClrLst/>
-    <dgm:txFillClrLst meth="repeat">
-      <a:schemeClr val="dk1"/>
-    </dgm:txFillClrLst>
-    <dgm:txEffectClrLst/>
-  </dgm:styleLbl>
-  <dgm:styleLbl name="fgAcc0">
-    <dgm:fillClrLst meth="repeat">
-      <a:schemeClr val="lt1">
-        <a:alpha val="90000"/>
-      </a:schemeClr>
-    </dgm:fillClrLst>
-    <dgm:linClrLst meth="repeat">
-      <a:schemeClr val="accent1"/>
-    </dgm:linClrLst>
-    <dgm:effectClrLst/>
-    <dgm:txLinClrLst/>
-    <dgm:txFillClrLst meth="repeat">
-      <a:schemeClr val="dk1"/>
-    </dgm:txFillClrLst>
-    <dgm:txEffectClrLst/>
-  </dgm:styleLbl>
-  <dgm:styleLbl name="fgAcc2">
-    <dgm:fillClrLst meth="repeat">
-      <a:schemeClr val="lt1">
-        <a:alpha val="90000"/>
-      </a:schemeClr>
-    </dgm:fillClrLst>
-    <dgm:linClrLst meth="repeat">
-      <a:schemeClr val="accent1"/>
-    </dgm:linClrLst>
-    <dgm:effectClrLst/>
-    <dgm:txLinClrLst/>
-    <dgm:txFillClrLst meth="repeat">
-      <a:schemeClr val="dk1"/>
-    </dgm:txFillClrLst>
-    <dgm:txEffectClrLst/>
-  </dgm:styleLbl>
-  <dgm:styleLbl name="fgAcc3">
-    <dgm:fillClrLst meth="repeat">
-      <a:schemeClr val="lt1">
-        <a:alpha val="90000"/>
-      </a:schemeClr>
-    </dgm:fillClrLst>
-    <dgm:linClrLst meth="repeat">
-      <a:schemeClr val="accent1"/>
-    </dgm:linClrLst>
-    <dgm:effectClrLst/>
-    <dgm:txLinClrLst/>
-    <dgm:txFillClrLst meth="repeat">
-      <a:schemeClr val="dk1"/>
-    </dgm:txFillClrLst>
-    <dgm:txEffectClrLst/>
-  </dgm:styleLbl>
-  <dgm:styleLbl name="fgAcc4">
-    <dgm:fillClrLst meth="repeat">
-      <a:schemeClr val="lt1">
-        <a:alpha val="90000"/>
-      </a:schemeClr>
-    </dgm:fillClrLst>
-    <dgm:linClrLst meth="repeat">
-      <a:schemeClr val="accent1"/>
-    </dgm:linClrLst>
-    <dgm:effectClrLst/>
-    <dgm:txLinClrLst/>
-    <dgm:txFillClrLst meth="repeat">
-      <a:schemeClr val="dk1"/>
-    </dgm:txFillClrLst>
-    <dgm:txEffectClrLst/>
-  </dgm:styleLbl>
-  <dgm:styleLbl name="bgShp">
-    <dgm:fillClrLst meth="repeat">
-      <a:schemeClr val="accent1">
-        <a:tint val="40000"/>
-      </a:schemeClr>
-    </dgm:fillClrLst>
-    <dgm:linClrLst meth="repeat">
-      <a:schemeClr val="accent1"/>
-    </dgm:linClrLst>
-    <dgm:effectClrLst/>
-    <dgm:txLinClrLst/>
-    <dgm:txFillClrLst meth="repeat">
-      <a:schemeClr val="dk1"/>
-    </dgm:txFillClrLst>
-    <dgm:txEffectClrLst/>
-  </dgm:styleLbl>
-  <dgm:styleLbl name="dkBgShp">
-    <dgm:fillClrLst meth="repeat">
-      <a:schemeClr val="accent1">
-        <a:shade val="80000"/>
-      </a:schemeClr>
-    </dgm:fillClrLst>
-    <dgm:linClrLst meth="repeat">
-      <a:schemeClr val="accent1"/>
-    </dgm:linClrLst>
-    <dgm:effectClrLst/>
-    <dgm:txLinClrLst/>
-    <dgm:txFillClrLst meth="repeat">
-      <a:schemeClr val="lt1"/>
-    </dgm:txFillClrLst>
-    <dgm:txEffectClrLst/>
-  </dgm:styleLbl>
-  <dgm:styleLbl name="trBgShp">
-    <dgm:fillClrLst meth="repeat">
-      <a:schemeClr val="accent1">
-        <a:tint val="50000"/>
-        <a:alpha val="40000"/>
-      </a:schemeClr>
-    </dgm:fillClrLst>
-    <dgm:linClrLst meth="repeat">
-      <a:schemeClr val="accent1"/>
-    </dgm:linClrLst>
-    <dgm:effectClrLst/>
-    <dgm:txLinClrLst/>
-    <dgm:txFillClrLst meth="repeat">
-      <a:schemeClr val="lt1"/>
-    </dgm:txFillClrLst>
-    <dgm:txEffectClrLst/>
-  </dgm:styleLbl>
-  <dgm:styleLbl name="fgShp">
-    <dgm:fillClrLst meth="repeat">
-      <a:schemeClr val="accent1">
-        <a:tint val="60000"/>
-      </a:schemeClr>
-    </dgm:fillClrLst>
-    <dgm:linClrLst meth="repeat">
-      <a:schemeClr val="lt1"/>
-    </dgm:linClrLst>
-    <dgm:effectClrLst/>
-    <dgm:txLinClrLst/>
-    <dgm:txFillClrLst meth="repeat">
-      <a:schemeClr val="dk1"/>
-    </dgm:txFillClrLst>
-    <dgm:txEffectClrLst/>
-  </dgm:styleLbl>
-  <dgm:styleLbl name="revTx">
-    <dgm:fillClrLst meth="repeat">
-      <a:schemeClr val="lt1">
-        <a:alpha val="0"/>
-      </a:schemeClr>
-    </dgm:fillClrLst>
-    <dgm:linClrLst meth="repeat">
-      <a:schemeClr val="dk1">
-        <a:alpha val="0"/>
-      </a:schemeClr>
-    </dgm:linClrLst>
-    <dgm:effectClrLst/>
-    <dgm:txLinClrLst/>
-    <dgm:txFillClrLst meth="repeat">
-      <a:schemeClr val="tx1"/>
-    </dgm:txFillClrLst>
-    <dgm:txEffectClrLst/>
-  </dgm:styleLbl>
-</dgm:colorsDef>
+<file path=ppt/diagrams/data1.xml><?xml version="1.0" encoding="utf-8"?>
+<dgm:dataModel xmlns:dgm="http://schemas.openxmlformats.org/drawingml/2006/diagram" xmlns:a="http://schemas.openxmlformats.org/drawingml/2006/main">
+  <dgm:ptLst>
+    <dgm:pt modelId="{B8C7C84B-2E71-412A-A89B-4D4D2BF0AD67}" type="doc">
+      <dgm:prSet loTypeId="urn:microsoft.com/office/officeart/2008/layout/LinedList" loCatId="list" qsTypeId="urn:microsoft.com/office/officeart/2005/8/quickstyle/simple1" qsCatId="simple" csTypeId="urn:microsoft.com/office/officeart/2005/8/colors/accent4_2" csCatId="accent4"/>
+      <dgm:spPr/>
+      <dgm:t>
+        <a:bodyPr/>
+        <a:lstStyle/>
+        <a:p>
+          <a:endParaRPr lang="en-US"/>
+        </a:p>
+      </dgm:t>
+    </dgm:pt>
+    <dgm:pt modelId="{781C5C77-0F4A-4A03-9A1F-95C071647205}">
+      <dgm:prSet/>
+      <dgm:spPr/>
+      <dgm:t>
+        <a:bodyPr/>
+        <a:lstStyle/>
+        <a:p>
+          <a:r>
+            <a:rPr lang="en-US" b="0" i="0"/>
+            <a:t>Clarity is a primary goal. It is helped by consistent use of precise words.</a:t>
+          </a:r>
+          <a:endParaRPr lang="en-US"/>
+        </a:p>
+      </dgm:t>
+    </dgm:pt>
+    <dgm:pt modelId="{4838066C-412A-4AC6-827B-2D118F6397F5}" type="parTrans" cxnId="{3473060D-7436-4EC4-9FBF-11611214582C}">
+      <dgm:prSet/>
+      <dgm:spPr/>
+      <dgm:t>
+        <a:bodyPr/>
+        <a:lstStyle/>
+        <a:p>
+          <a:endParaRPr lang="en-US"/>
+        </a:p>
+      </dgm:t>
+    </dgm:pt>
+    <dgm:pt modelId="{9C2C571B-F77D-4E26-97FE-FFB193B89F68}" type="sibTrans" cxnId="{3473060D-7436-4EC4-9FBF-11611214582C}">
+      <dgm:prSet/>
+      <dgm:spPr/>
+      <dgm:t>
+        <a:bodyPr/>
+        <a:lstStyle/>
+        <a:p>
+          <a:endParaRPr lang="en-US"/>
+        </a:p>
+      </dgm:t>
+    </dgm:pt>
+    <dgm:pt modelId="{35FC7857-87DE-43E8-AF6C-30FB3843DD1C}">
+      <dgm:prSet/>
+      <dgm:spPr/>
+      <dgm:t>
+        <a:bodyPr/>
+        <a:lstStyle/>
+        <a:p>
+          <a:r>
+            <a:rPr lang="en-US" b="0" i="0"/>
+            <a:t>Brevity is a virtue. Aim for short, streamlined sentences that are seamlessly connected in building up your logical arguments.</a:t>
+          </a:r>
+          <a:endParaRPr lang="en-US"/>
+        </a:p>
+      </dgm:t>
+    </dgm:pt>
+    <dgm:pt modelId="{94EEB272-37E3-44C1-8345-68D6F0EA1FAE}" type="parTrans" cxnId="{8DE32345-8B19-42FD-A51C-8DDD021785D7}">
+      <dgm:prSet/>
+      <dgm:spPr/>
+      <dgm:t>
+        <a:bodyPr/>
+        <a:lstStyle/>
+        <a:p>
+          <a:endParaRPr lang="en-US"/>
+        </a:p>
+      </dgm:t>
+    </dgm:pt>
+    <dgm:pt modelId="{7489EA19-2A6B-4C79-9807-F163B0A52FDF}" type="sibTrans" cxnId="{8DE32345-8B19-42FD-A51C-8DDD021785D7}">
+      <dgm:prSet/>
+      <dgm:spPr/>
+      <dgm:t>
+        <a:bodyPr/>
+        <a:lstStyle/>
+        <a:p>
+          <a:endParaRPr lang="en-US"/>
+        </a:p>
+      </dgm:t>
+    </dgm:pt>
+    <dgm:pt modelId="{939818DC-742D-47F6-8CDE-313C9204F4F6}">
+      <dgm:prSet/>
+      <dgm:spPr/>
+      <dgm:t>
+        <a:bodyPr/>
+        <a:lstStyle/>
+        <a:p>
+          <a:r>
+            <a:rPr lang="en-US" b="0" i="0"/>
+            <a:t>Always begin with the reason. Tell the readers why you’re writing the things that you’re writing. Do not describe what you did before you explain why you did it.</a:t>
+          </a:r>
+          <a:endParaRPr lang="en-US"/>
+        </a:p>
+      </dgm:t>
+    </dgm:pt>
+    <dgm:pt modelId="{57CFEFCE-9451-4490-AB3A-DABE30607E1C}" type="parTrans" cxnId="{7219C99C-6D61-4804-ADD1-C98A16D7986B}">
+      <dgm:prSet/>
+      <dgm:spPr/>
+      <dgm:t>
+        <a:bodyPr/>
+        <a:lstStyle/>
+        <a:p>
+          <a:endParaRPr lang="en-US"/>
+        </a:p>
+      </dgm:t>
+    </dgm:pt>
+    <dgm:pt modelId="{B4FF5009-6BE2-4C0F-8B67-AE429EBCB308}" type="sibTrans" cxnId="{7219C99C-6D61-4804-ADD1-C98A16D7986B}">
+      <dgm:prSet/>
+      <dgm:spPr/>
+      <dgm:t>
+        <a:bodyPr/>
+        <a:lstStyle/>
+        <a:p>
+          <a:endParaRPr lang="en-US"/>
+        </a:p>
+      </dgm:t>
+    </dgm:pt>
+    <dgm:pt modelId="{530547B7-0C13-41F4-ADC8-3CE64AF6415E}">
+      <dgm:prSet/>
+      <dgm:spPr/>
+      <dgm:t>
+        <a:bodyPr/>
+        <a:lstStyle/>
+        <a:p>
+          <a:r>
+            <a:rPr lang="en-US" b="0" i="0"/>
+            <a:t>Minimize the use of adjectives and make sure the remaining ones do not do much work.</a:t>
+          </a:r>
+          <a:endParaRPr lang="en-US"/>
+        </a:p>
+      </dgm:t>
+    </dgm:pt>
+    <dgm:pt modelId="{0E038192-5FEC-4F72-B86A-0B73C122A7C5}" type="parTrans" cxnId="{C299719A-6C5F-4234-B0C4-31A2CDCC9CB9}">
+      <dgm:prSet/>
+      <dgm:spPr/>
+      <dgm:t>
+        <a:bodyPr/>
+        <a:lstStyle/>
+        <a:p>
+          <a:endParaRPr lang="en-US"/>
+        </a:p>
+      </dgm:t>
+    </dgm:pt>
+    <dgm:pt modelId="{41942A8A-01B2-43D7-8245-C691D8B52C22}" type="sibTrans" cxnId="{C299719A-6C5F-4234-B0C4-31A2CDCC9CB9}">
+      <dgm:prSet/>
+      <dgm:spPr/>
+      <dgm:t>
+        <a:bodyPr/>
+        <a:lstStyle/>
+        <a:p>
+          <a:endParaRPr lang="en-US"/>
+        </a:p>
+      </dgm:t>
+    </dgm:pt>
+    <dgm:pt modelId="{51A215F9-18B7-4BAF-9221-F449E32686C2}">
+      <dgm:prSet/>
+      <dgm:spPr/>
+      <dgm:t>
+        <a:bodyPr/>
+        <a:lstStyle/>
+        <a:p>
+          <a:r>
+            <a:rPr lang="en-US" b="0" i="0"/>
+            <a:t>Read your draft and pause after each statement to think of counterexamples, counterarguments or possible misinterpretations. If you can think of one, revise it.</a:t>
+          </a:r>
+          <a:endParaRPr lang="en-US"/>
+        </a:p>
+      </dgm:t>
+    </dgm:pt>
+    <dgm:pt modelId="{29440E32-E83A-42C2-82D2-61CA31774E4B}" type="parTrans" cxnId="{C506E17F-16E6-45A4-A771-C134B870C7AC}">
+      <dgm:prSet/>
+      <dgm:spPr/>
+      <dgm:t>
+        <a:bodyPr/>
+        <a:lstStyle/>
+        <a:p>
+          <a:endParaRPr lang="en-US"/>
+        </a:p>
+      </dgm:t>
+    </dgm:pt>
+    <dgm:pt modelId="{278107CD-51C1-4584-8456-67B92B0FDB42}" type="sibTrans" cxnId="{C506E17F-16E6-45A4-A771-C134B870C7AC}">
+      <dgm:prSet/>
+      <dgm:spPr/>
+      <dgm:t>
+        <a:bodyPr/>
+        <a:lstStyle/>
+        <a:p>
+          <a:endParaRPr lang="en-US"/>
+        </a:p>
+      </dgm:t>
+    </dgm:pt>
+    <dgm:pt modelId="{92C2BC1A-5223-4292-8311-335CB09BD192}">
+      <dgm:prSet/>
+      <dgm:spPr/>
+      <dgm:t>
+        <a:bodyPr/>
+        <a:lstStyle/>
+        <a:p>
+          <a:r>
+            <a:rPr lang="en-US" b="0" i="0" dirty="0"/>
+            <a:t>Be willing to critically evaluate your own writing and take constructive feedback as much as possible.</a:t>
+          </a:r>
+          <a:endParaRPr lang="en-US" dirty="0"/>
+        </a:p>
+      </dgm:t>
+    </dgm:pt>
+    <dgm:pt modelId="{949941A5-9CF1-4EFE-8556-7D12FE06A3AD}" type="parTrans" cxnId="{B5E777ED-76C5-4725-9933-E1CBE363F4CB}">
+      <dgm:prSet/>
+      <dgm:spPr/>
+      <dgm:t>
+        <a:bodyPr/>
+        <a:lstStyle/>
+        <a:p>
+          <a:endParaRPr lang="en-US"/>
+        </a:p>
+      </dgm:t>
+    </dgm:pt>
+    <dgm:pt modelId="{0446D736-194B-4B83-B048-6441416DA2F3}" type="sibTrans" cxnId="{B5E777ED-76C5-4725-9933-E1CBE363F4CB}">
+      <dgm:prSet/>
+      <dgm:spPr/>
+      <dgm:t>
+        <a:bodyPr/>
+        <a:lstStyle/>
+        <a:p>
+          <a:endParaRPr lang="en-US"/>
+        </a:p>
+      </dgm:t>
+    </dgm:pt>
+    <dgm:pt modelId="{91692442-4EC2-E848-B771-F788E03BD894}" type="pres">
+      <dgm:prSet presAssocID="{B8C7C84B-2E71-412A-A89B-4D4D2BF0AD67}" presName="vert0" presStyleCnt="0">
+        <dgm:presLayoutVars>
+          <dgm:dir/>
+          <dgm:animOne val="branch"/>
+          <dgm:animLvl val="lvl"/>
+        </dgm:presLayoutVars>
+      </dgm:prSet>
+      <dgm:spPr/>
+    </dgm:pt>
+    <dgm:pt modelId="{45CD4254-87FD-DD41-8745-DDE0CBF27369}" type="pres">
+      <dgm:prSet presAssocID="{781C5C77-0F4A-4A03-9A1F-95C071647205}" presName="thickLine" presStyleLbl="alignNode1" presStyleIdx="0" presStyleCnt="6"/>
+      <dgm:spPr/>
+    </dgm:pt>
+    <dgm:pt modelId="{2086D604-0722-4841-8433-95BB29313C36}" type="pres">
+      <dgm:prSet presAssocID="{781C5C77-0F4A-4A03-9A1F-95C071647205}" presName="horz1" presStyleCnt="0"/>
+      <dgm:spPr/>
+    </dgm:pt>
+    <dgm:pt modelId="{FA1ED58C-8B26-5848-9EE7-7897E6244BEB}" type="pres">
+      <dgm:prSet presAssocID="{781C5C77-0F4A-4A03-9A1F-95C071647205}" presName="tx1" presStyleLbl="revTx" presStyleIdx="0" presStyleCnt="6"/>
+      <dgm:spPr/>
+    </dgm:pt>
+    <dgm:pt modelId="{66B171BB-ADC5-4440-9243-7D5BCEA219CF}" type="pres">
+      <dgm:prSet presAssocID="{781C5C77-0F4A-4A03-9A1F-95C071647205}" presName="vert1" presStyleCnt="0"/>
+      <dgm:spPr/>
+    </dgm:pt>
+    <dgm:pt modelId="{713D64C0-8003-E340-9876-903B3AB5D6E0}" type="pres">
+      <dgm:prSet presAssocID="{35FC7857-87DE-43E8-AF6C-30FB3843DD1C}" presName="thickLine" presStyleLbl="alignNode1" presStyleIdx="1" presStyleCnt="6"/>
+      <dgm:spPr/>
+    </dgm:pt>
+    <dgm:pt modelId="{45EEB474-C63E-3145-8FF2-BAE96C56257D}" type="pres">
+      <dgm:prSet presAssocID="{35FC7857-87DE-43E8-AF6C-30FB3843DD1C}" presName="horz1" presStyleCnt="0"/>
+      <dgm:spPr/>
+    </dgm:pt>
+    <dgm:pt modelId="{8CD1F598-5922-984A-B80E-A77828A63387}" type="pres">
+      <dgm:prSet presAssocID="{35FC7857-87DE-43E8-AF6C-30FB3843DD1C}" presName="tx1" presStyleLbl="revTx" presStyleIdx="1" presStyleCnt="6"/>
+      <dgm:spPr/>
+    </dgm:pt>
+    <dgm:pt modelId="{3886AD02-17B7-5648-BE04-B823066F927F}" type="pres">
+      <dgm:prSet presAssocID="{35FC7857-87DE-43E8-AF6C-30FB3843DD1C}" presName="vert1" presStyleCnt="0"/>
+      <dgm:spPr/>
+    </dgm:pt>
+    <dgm:pt modelId="{04C58192-9310-694E-B6AA-20DDB5E5CD84}" type="pres">
+      <dgm:prSet presAssocID="{939818DC-742D-47F6-8CDE-313C9204F4F6}" presName="thickLine" presStyleLbl="alignNode1" presStyleIdx="2" presStyleCnt="6"/>
+      <dgm:spPr/>
+    </dgm:pt>
+    <dgm:pt modelId="{01D08B60-5D6C-7B43-9FC6-FFA595525D2A}" type="pres">
+      <dgm:prSet presAssocID="{939818DC-742D-47F6-8CDE-313C9204F4F6}" presName="horz1" presStyleCnt="0"/>
+      <dgm:spPr/>
+    </dgm:pt>
+    <dgm:pt modelId="{3D2BDD5F-9D27-2C47-B4EE-8852B1AEB8F2}" type="pres">
+      <dgm:prSet presAssocID="{939818DC-742D-47F6-8CDE-313C9204F4F6}" presName="tx1" presStyleLbl="revTx" presStyleIdx="2" presStyleCnt="6"/>
+      <dgm:spPr/>
+    </dgm:pt>
+    <dgm:pt modelId="{79391FFC-D13F-EC49-BBDC-102CD5EF2517}" type="pres">
+      <dgm:prSet presAssocID="{939818DC-742D-47F6-8CDE-313C9204F4F6}" presName="vert1" presStyleCnt="0"/>
+      <dgm:spPr/>
+    </dgm:pt>
+    <dgm:pt modelId="{36F339E6-F5A9-1749-8B45-CC72A238E0B1}" type="pres">
+      <dgm:prSet presAssocID="{530547B7-0C13-41F4-ADC8-3CE64AF6415E}" presName="thickLine" presStyleLbl="alignNode1" presStyleIdx="3" presStyleCnt="6"/>
+      <dgm:spPr/>
+    </dgm:pt>
+    <dgm:pt modelId="{51D7279D-512B-D843-B725-C0C4219F21DF}" type="pres">
+      <dgm:prSet presAssocID="{530547B7-0C13-41F4-ADC8-3CE64AF6415E}" presName="horz1" presStyleCnt="0"/>
+      <dgm:spPr/>
+    </dgm:pt>
+    <dgm:pt modelId="{CAEFD2C4-BC2E-7445-9F5B-41B1859AC8C2}" type="pres">
+      <dgm:prSet presAssocID="{530547B7-0C13-41F4-ADC8-3CE64AF6415E}" presName="tx1" presStyleLbl="revTx" presStyleIdx="3" presStyleCnt="6"/>
+      <dgm:spPr/>
+    </dgm:pt>
+    <dgm:pt modelId="{2006D656-51AB-A14B-91B7-E9647054633B}" type="pres">
+      <dgm:prSet presAssocID="{530547B7-0C13-41F4-ADC8-3CE64AF6415E}" presName="vert1" presStyleCnt="0"/>
+      <dgm:spPr/>
+    </dgm:pt>
+    <dgm:pt modelId="{C2F65B9E-C50A-DE40-A722-30C67402B921}" type="pres">
+      <dgm:prSet presAssocID="{51A215F9-18B7-4BAF-9221-F449E32686C2}" presName="thickLine" presStyleLbl="alignNode1" presStyleIdx="4" presStyleCnt="6"/>
+      <dgm:spPr/>
+    </dgm:pt>
+    <dgm:pt modelId="{232F1195-ED64-A74D-AB2D-664F830F4733}" type="pres">
+      <dgm:prSet presAssocID="{51A215F9-18B7-4BAF-9221-F449E32686C2}" presName="horz1" presStyleCnt="0"/>
+      <dgm:spPr/>
+    </dgm:pt>
+    <dgm:pt modelId="{AA53877E-2617-6B43-926C-CAEBEC33B2C5}" type="pres">
+      <dgm:prSet presAssocID="{51A215F9-18B7-4BAF-9221-F449E32686C2}" presName="tx1" presStyleLbl="revTx" presStyleIdx="4" presStyleCnt="6"/>
+      <dgm:spPr/>
+    </dgm:pt>
+    <dgm:pt modelId="{E912C49D-9135-044E-B226-15B6D13F6535}" type="pres">
+      <dgm:prSet presAssocID="{51A215F9-18B7-4BAF-9221-F449E32686C2}" presName="vert1" presStyleCnt="0"/>
+      <dgm:spPr/>
+    </dgm:pt>
+    <dgm:pt modelId="{23083892-6143-0C42-8CF5-C5840A164817}" type="pres">
+      <dgm:prSet presAssocID="{92C2BC1A-5223-4292-8311-335CB09BD192}" presName="thickLine" presStyleLbl="alignNode1" presStyleIdx="5" presStyleCnt="6"/>
+      <dgm:spPr/>
+    </dgm:pt>
+    <dgm:pt modelId="{262C9E27-2F3B-D54A-B422-88F081A24885}" type="pres">
+      <dgm:prSet presAssocID="{92C2BC1A-5223-4292-8311-335CB09BD192}" presName="horz1" presStyleCnt="0"/>
+      <dgm:spPr/>
+    </dgm:pt>
+    <dgm:pt modelId="{E6F8F40D-19F9-064C-BA94-82EA3DCF4BAE}" type="pres">
+      <dgm:prSet presAssocID="{92C2BC1A-5223-4292-8311-335CB09BD192}" presName="tx1" presStyleLbl="revTx" presStyleIdx="5" presStyleCnt="6"/>
+      <dgm:spPr/>
+    </dgm:pt>
+    <dgm:pt modelId="{881193DD-EE5E-B447-A245-F03AB8E131F9}" type="pres">
+      <dgm:prSet presAssocID="{92C2BC1A-5223-4292-8311-335CB09BD192}" presName="vert1" presStyleCnt="0"/>
+      <dgm:spPr/>
+    </dgm:pt>
+  </dgm:ptLst>
+  <dgm:cxnLst>
+    <dgm:cxn modelId="{3473060D-7436-4EC4-9FBF-11611214582C}" srcId="{B8C7C84B-2E71-412A-A89B-4D4D2BF0AD67}" destId="{781C5C77-0F4A-4A03-9A1F-95C071647205}" srcOrd="0" destOrd="0" parTransId="{4838066C-412A-4AC6-827B-2D118F6397F5}" sibTransId="{9C2C571B-F77D-4E26-97FE-FFB193B89F68}"/>
+    <dgm:cxn modelId="{D45EB238-DAEE-6743-9743-36F5F86D67FC}" type="presOf" srcId="{530547B7-0C13-41F4-ADC8-3CE64AF6415E}" destId="{CAEFD2C4-BC2E-7445-9F5B-41B1859AC8C2}" srcOrd="0" destOrd="0" presId="urn:microsoft.com/office/officeart/2008/layout/LinedList"/>
+    <dgm:cxn modelId="{8DE32345-8B19-42FD-A51C-8DDD021785D7}" srcId="{B8C7C84B-2E71-412A-A89B-4D4D2BF0AD67}" destId="{35FC7857-87DE-43E8-AF6C-30FB3843DD1C}" srcOrd="1" destOrd="0" parTransId="{94EEB272-37E3-44C1-8345-68D6F0EA1FAE}" sibTransId="{7489EA19-2A6B-4C79-9807-F163B0A52FDF}"/>
+    <dgm:cxn modelId="{DCA4B655-B1F6-BA41-B3EA-690415273E5D}" type="presOf" srcId="{B8C7C84B-2E71-412A-A89B-4D4D2BF0AD67}" destId="{91692442-4EC2-E848-B771-F788E03BD894}" srcOrd="0" destOrd="0" presId="urn:microsoft.com/office/officeart/2008/layout/LinedList"/>
+    <dgm:cxn modelId="{F573B17A-58A2-7C47-B9ED-11B6960CB1C9}" type="presOf" srcId="{781C5C77-0F4A-4A03-9A1F-95C071647205}" destId="{FA1ED58C-8B26-5848-9EE7-7897E6244BEB}" srcOrd="0" destOrd="0" presId="urn:microsoft.com/office/officeart/2008/layout/LinedList"/>
+    <dgm:cxn modelId="{C506E17F-16E6-45A4-A771-C134B870C7AC}" srcId="{B8C7C84B-2E71-412A-A89B-4D4D2BF0AD67}" destId="{51A215F9-18B7-4BAF-9221-F449E32686C2}" srcOrd="4" destOrd="0" parTransId="{29440E32-E83A-42C2-82D2-61CA31774E4B}" sibTransId="{278107CD-51C1-4584-8456-67B92B0FDB42}"/>
+    <dgm:cxn modelId="{ACB4DF98-86FA-3C41-B423-8CF22C37A563}" type="presOf" srcId="{92C2BC1A-5223-4292-8311-335CB09BD192}" destId="{E6F8F40D-19F9-064C-BA94-82EA3DCF4BAE}" srcOrd="0" destOrd="0" presId="urn:microsoft.com/office/officeart/2008/layout/LinedList"/>
+    <dgm:cxn modelId="{C299719A-6C5F-4234-B0C4-31A2CDCC9CB9}" srcId="{B8C7C84B-2E71-412A-A89B-4D4D2BF0AD67}" destId="{530547B7-0C13-41F4-ADC8-3CE64AF6415E}" srcOrd="3" destOrd="0" parTransId="{0E038192-5FEC-4F72-B86A-0B73C122A7C5}" sibTransId="{41942A8A-01B2-43D7-8245-C691D8B52C22}"/>
+    <dgm:cxn modelId="{7219C99C-6D61-4804-ADD1-C98A16D7986B}" srcId="{B8C7C84B-2E71-412A-A89B-4D4D2BF0AD67}" destId="{939818DC-742D-47F6-8CDE-313C9204F4F6}" srcOrd="2" destOrd="0" parTransId="{57CFEFCE-9451-4490-AB3A-DABE30607E1C}" sibTransId="{B4FF5009-6BE2-4C0F-8B67-AE429EBCB308}"/>
+    <dgm:cxn modelId="{0092F3A5-C5C4-D147-B3DF-B60B040818D3}" type="presOf" srcId="{35FC7857-87DE-43E8-AF6C-30FB3843DD1C}" destId="{8CD1F598-5922-984A-B80E-A77828A63387}" srcOrd="0" destOrd="0" presId="urn:microsoft.com/office/officeart/2008/layout/LinedList"/>
+    <dgm:cxn modelId="{C3CF91C9-1E8A-CA41-94CB-878CF038676C}" type="presOf" srcId="{939818DC-742D-47F6-8CDE-313C9204F4F6}" destId="{3D2BDD5F-9D27-2C47-B4EE-8852B1AEB8F2}" srcOrd="0" destOrd="0" presId="urn:microsoft.com/office/officeart/2008/layout/LinedList"/>
+    <dgm:cxn modelId="{812A3CCA-7317-3146-88AD-21DE0864573B}" type="presOf" srcId="{51A215F9-18B7-4BAF-9221-F449E32686C2}" destId="{AA53877E-2617-6B43-926C-CAEBEC33B2C5}" srcOrd="0" destOrd="0" presId="urn:microsoft.com/office/officeart/2008/layout/LinedList"/>
+    <dgm:cxn modelId="{B5E777ED-76C5-4725-9933-E1CBE363F4CB}" srcId="{B8C7C84B-2E71-412A-A89B-4D4D2BF0AD67}" destId="{92C2BC1A-5223-4292-8311-335CB09BD192}" srcOrd="5" destOrd="0" parTransId="{949941A5-9CF1-4EFE-8556-7D12FE06A3AD}" sibTransId="{0446D736-194B-4B83-B048-6441416DA2F3}"/>
+    <dgm:cxn modelId="{108EA5E7-2671-2449-A1F3-61315E7CA508}" type="presParOf" srcId="{91692442-4EC2-E848-B771-F788E03BD894}" destId="{45CD4254-87FD-DD41-8745-DDE0CBF27369}" srcOrd="0" destOrd="0" presId="urn:microsoft.com/office/officeart/2008/layout/LinedList"/>
+    <dgm:cxn modelId="{0F2A7033-C1FE-9E42-AFE5-600D9F6B7F78}" type="presParOf" srcId="{91692442-4EC2-E848-B771-F788E03BD894}" destId="{2086D604-0722-4841-8433-95BB29313C36}" srcOrd="1" destOrd="0" presId="urn:microsoft.com/office/officeart/2008/layout/LinedList"/>
+    <dgm:cxn modelId="{28B9DE83-648E-0A4D-9386-3346061D3F59}" type="presParOf" srcId="{2086D604-0722-4841-8433-95BB29313C36}" destId="{FA1ED58C-8B26-5848-9EE7-7897E6244BEB}" srcOrd="0" destOrd="0" presId="urn:microsoft.com/office/officeart/2008/layout/LinedList"/>
+    <dgm:cxn modelId="{9F5B0C51-4584-7443-BBB7-B6D3BC5CF882}" type="presParOf" srcId="{2086D604-0722-4841-8433-95BB29313C36}" destId="{66B171BB-ADC5-4440-9243-7D5BCEA219CF}" srcOrd="1" destOrd="0" presId="urn:microsoft.com/office/officeart/2008/layout/LinedList"/>
+    <dgm:cxn modelId="{03A9BA3D-0B9E-7244-8CBE-B75F6497AEE8}" type="presParOf" srcId="{91692442-4EC2-E848-B771-F788E03BD894}" destId="{713D64C0-8003-E340-9876-903B3AB5D6E0}" srcOrd="2" destOrd="0" presId="urn:microsoft.com/office/officeart/2008/layout/LinedList"/>
+    <dgm:cxn modelId="{BC1C84DD-53EF-3E4F-9962-D8587E54CCDD}" type="presParOf" srcId="{91692442-4EC2-E848-B771-F788E03BD894}" destId="{45EEB474-C63E-3145-8FF2-BAE96C56257D}" srcOrd="3" destOrd="0" presId="urn:microsoft.com/office/officeart/2008/layout/LinedList"/>
+    <dgm:cxn modelId="{66D1C4EC-E537-1B41-B814-41884333D7AF}" type="presParOf" srcId="{45EEB474-C63E-3145-8FF2-BAE96C56257D}" destId="{8CD1F598-5922-984A-B80E-A77828A63387}" srcOrd="0" destOrd="0" presId="urn:microsoft.com/office/officeart/2008/layout/LinedList"/>
+    <dgm:cxn modelId="{60E4019C-6D48-FC41-97B5-3D9AE52D0306}" type="presParOf" srcId="{45EEB474-C63E-3145-8FF2-BAE96C56257D}" destId="{3886AD02-17B7-5648-BE04-B823066F927F}" srcOrd="1" destOrd="0" presId="urn:microsoft.com/office/officeart/2008/layout/LinedList"/>
+    <dgm:cxn modelId="{4C01FF96-835C-6B46-B053-779A4D75C338}" type="presParOf" srcId="{91692442-4EC2-E848-B771-F788E03BD894}" destId="{04C58192-9310-694E-B6AA-20DDB5E5CD84}" srcOrd="4" destOrd="0" presId="urn:microsoft.com/office/officeart/2008/layout/LinedList"/>
+    <dgm:cxn modelId="{16E86D0C-5D07-7643-A331-1E92425399E0}" type="presParOf" srcId="{91692442-4EC2-E848-B771-F788E03BD894}" destId="{01D08B60-5D6C-7B43-9FC6-FFA595525D2A}" srcOrd="5" destOrd="0" presId="urn:microsoft.com/office/officeart/2008/layout/LinedList"/>
+    <dgm:cxn modelId="{E6EAE03B-B363-5045-A1D7-1CC3F910FC89}" type="presParOf" srcId="{01D08B60-5D6C-7B43-9FC6-FFA595525D2A}" destId="{3D2BDD5F-9D27-2C47-B4EE-8852B1AEB8F2}" srcOrd="0" destOrd="0" presId="urn:microsoft.com/office/officeart/2008/layout/LinedList"/>
+    <dgm:cxn modelId="{60E04A40-E65D-664C-8B5C-E599241CE5FF}" type="presParOf" srcId="{01D08B60-5D6C-7B43-9FC6-FFA595525D2A}" destId="{79391FFC-D13F-EC49-BBDC-102CD5EF2517}" srcOrd="1" destOrd="0" presId="urn:microsoft.com/office/officeart/2008/layout/LinedList"/>
+    <dgm:cxn modelId="{1C701EDE-903F-B046-864E-27C7A0105ECB}" type="presParOf" srcId="{91692442-4EC2-E848-B771-F788E03BD894}" destId="{36F339E6-F5A9-1749-8B45-CC72A238E0B1}" srcOrd="6" destOrd="0" presId="urn:microsoft.com/office/officeart/2008/layout/LinedList"/>
+    <dgm:cxn modelId="{417D6D8E-50AE-E040-8090-80679E141D5B}" type="presParOf" srcId="{91692442-4EC2-E848-B771-F788E03BD894}" destId="{51D7279D-512B-D843-B725-C0C4219F21DF}" srcOrd="7" destOrd="0" presId="urn:microsoft.com/office/officeart/2008/layout/LinedList"/>
+    <dgm:cxn modelId="{486134BF-FACF-BD48-A87E-ADCF28B04A95}" type="presParOf" srcId="{51D7279D-512B-D843-B725-C0C4219F21DF}" destId="{CAEFD2C4-BC2E-7445-9F5B-41B1859AC8C2}" srcOrd="0" destOrd="0" presId="urn:microsoft.com/office/officeart/2008/layout/LinedList"/>
+    <dgm:cxn modelId="{263A9AF9-C1BA-1543-8DA9-53E9A083A9AC}" type="presParOf" srcId="{51D7279D-512B-D843-B725-C0C4219F21DF}" destId="{2006D656-51AB-A14B-91B7-E9647054633B}" srcOrd="1" destOrd="0" presId="urn:microsoft.com/office/officeart/2008/layout/LinedList"/>
+    <dgm:cxn modelId="{7921CA0A-BD27-5B47-8727-152890A83654}" type="presParOf" srcId="{91692442-4EC2-E848-B771-F788E03BD894}" destId="{C2F65B9E-C50A-DE40-A722-30C67402B921}" srcOrd="8" destOrd="0" presId="urn:microsoft.com/office/officeart/2008/layout/LinedList"/>
+    <dgm:cxn modelId="{4B5085DB-95E7-3C46-BDA4-7F1676279954}" type="presParOf" srcId="{91692442-4EC2-E848-B771-F788E03BD894}" destId="{232F1195-ED64-A74D-AB2D-664F830F4733}" srcOrd="9" destOrd="0" presId="urn:microsoft.com/office/officeart/2008/layout/LinedList"/>
+    <dgm:cxn modelId="{1E9DD931-7F86-7242-BB80-FD9B906A6157}" type="presParOf" srcId="{232F1195-ED64-A74D-AB2D-664F830F4733}" destId="{AA53877E-2617-6B43-926C-CAEBEC33B2C5}" srcOrd="0" destOrd="0" presId="urn:microsoft.com/office/officeart/2008/layout/LinedList"/>
+    <dgm:cxn modelId="{0C9F3D2A-DC10-6D43-B74F-97968EF3105D}" type="presParOf" srcId="{232F1195-ED64-A74D-AB2D-664F830F4733}" destId="{E912C49D-9135-044E-B226-15B6D13F6535}" srcOrd="1" destOrd="0" presId="urn:microsoft.com/office/officeart/2008/layout/LinedList"/>
+    <dgm:cxn modelId="{161C50B2-E7B5-4946-8C5D-2E52881F9460}" type="presParOf" srcId="{91692442-4EC2-E848-B771-F788E03BD894}" destId="{23083892-6143-0C42-8CF5-C5840A164817}" srcOrd="10" destOrd="0" presId="urn:microsoft.com/office/officeart/2008/layout/LinedList"/>
+    <dgm:cxn modelId="{E65CAF29-D9B1-9941-9372-C37E9AC1FAD4}" type="presParOf" srcId="{91692442-4EC2-E848-B771-F788E03BD894}" destId="{262C9E27-2F3B-D54A-B422-88F081A24885}" srcOrd="11" destOrd="0" presId="urn:microsoft.com/office/officeart/2008/layout/LinedList"/>
+    <dgm:cxn modelId="{DC59C7D1-B825-E34D-A5DE-87132EB6B73C}" type="presParOf" srcId="{262C9E27-2F3B-D54A-B422-88F081A24885}" destId="{E6F8F40D-19F9-064C-BA94-82EA3DCF4BAE}" srcOrd="0" destOrd="0" presId="urn:microsoft.com/office/officeart/2008/layout/LinedList"/>
+    <dgm:cxn modelId="{CF0CAE24-2858-2E43-9D5F-4BCE55104051}" type="presParOf" srcId="{262C9E27-2F3B-D54A-B422-88F081A24885}" destId="{881193DD-EE5E-B447-A245-F03AB8E131F9}" srcOrd="1" destOrd="0" presId="urn:microsoft.com/office/officeart/2008/layout/LinedList"/>
+  </dgm:cxnLst>
+  <dgm:bg/>
+  <dgm:whole/>
+  <dgm:extLst>
+    <a:ext uri="http://schemas.microsoft.com/office/drawing/2008/diagram">
+      <dsp:dataModelExt xmlns:dsp="http://schemas.microsoft.com/office/drawing/2008/diagram" relId="rId6" minVer="http://schemas.openxmlformats.org/drawingml/2006/diagram"/>
+    </a:ext>
+  </dgm:extLst>
+</dgm:dataModel>
 </file>
 
-<file path=ppt/diagrams/data1.xml><?xml version="1.0" encoding="utf-8"?>
+<file path=ppt/diagrams/data2.xml><?xml version="1.0" encoding="utf-8"?>
 <dgm:dataModel xmlns:dgm="http://schemas.openxmlformats.org/drawingml/2006/diagram" xmlns:a="http://schemas.openxmlformats.org/drawingml/2006/main">
   <dgm:ptLst>
     <dgm:pt modelId="{00EBF847-D923-4D08-BE6C-FC022C8DF685}" type="doc">
@@ -2106,332 +2506,685 @@
 </dgm:dataModel>
 </file>
 
-<file path=ppt/diagrams/data2.xml><?xml version="1.0" encoding="utf-8"?>
-<dgm:dataModel xmlns:dgm="http://schemas.openxmlformats.org/drawingml/2006/diagram" xmlns:a="http://schemas.openxmlformats.org/drawingml/2006/main">
-  <dgm:ptLst>
-    <dgm:pt modelId="{4BC3B0D7-7E31-4E16-A270-91F8257499EC}" type="doc">
-      <dgm:prSet loTypeId="urn:microsoft.com/office/officeart/2005/8/layout/hierarchy1" loCatId="hierarchy" qsTypeId="urn:microsoft.com/office/officeart/2005/8/quickstyle/simple1" qsCatId="simple" csTypeId="urn:microsoft.com/office/officeart/2005/8/colors/accent1_2" csCatId="accent1"/>
-      <dgm:spPr/>
-      <dgm:t>
-        <a:bodyPr/>
+<file path=ppt/diagrams/drawing1.xml><?xml version="1.0" encoding="utf-8"?>
+<dsp:drawing xmlns:dgm="http://schemas.openxmlformats.org/drawingml/2006/diagram" xmlns:dsp="http://schemas.microsoft.com/office/drawing/2008/diagram" xmlns:a="http://schemas.openxmlformats.org/drawingml/2006/main">
+  <dsp:spTree>
+    <dsp:nvGrpSpPr>
+      <dsp:cNvPr id="0" name=""/>
+      <dsp:cNvGrpSpPr/>
+    </dsp:nvGrpSpPr>
+    <dsp:grpSpPr/>
+    <dsp:sp modelId="{45CD4254-87FD-DD41-8745-DDE0CBF27369}">
+      <dsp:nvSpPr>
+        <dsp:cNvPr id="0" name=""/>
+        <dsp:cNvSpPr/>
+      </dsp:nvSpPr>
+      <dsp:spPr>
+        <a:xfrm>
+          <a:off x="0" y="2723"/>
+          <a:ext cx="6967728" cy="0"/>
+        </a:xfrm>
+        <a:prstGeom prst="line">
+          <a:avLst/>
+        </a:prstGeom>
+        <a:solidFill>
+          <a:schemeClr val="accent4">
+            <a:hueOff val="0"/>
+            <a:satOff val="0"/>
+            <a:lumOff val="0"/>
+            <a:alphaOff val="0"/>
+          </a:schemeClr>
+        </a:solidFill>
+        <a:ln w="12700" cap="flat" cmpd="sng" algn="ctr">
+          <a:solidFill>
+            <a:schemeClr val="accent4">
+              <a:hueOff val="0"/>
+              <a:satOff val="0"/>
+              <a:lumOff val="0"/>
+              <a:alphaOff val="0"/>
+            </a:schemeClr>
+          </a:solidFill>
+          <a:prstDash val="solid"/>
+          <a:miter lim="800000"/>
+        </a:ln>
+        <a:effectLst/>
+      </dsp:spPr>
+      <dsp:style>
+        <a:lnRef idx="2">
+          <a:scrgbClr r="0" g="0" b="0"/>
+        </a:lnRef>
+        <a:fillRef idx="1">
+          <a:scrgbClr r="0" g="0" b="0"/>
+        </a:fillRef>
+        <a:effectRef idx="0">
+          <a:scrgbClr r="0" g="0" b="0"/>
+        </a:effectRef>
+        <a:fontRef idx="minor">
+          <a:schemeClr val="lt1"/>
+        </a:fontRef>
+      </dsp:style>
+    </dsp:sp>
+    <dsp:sp modelId="{FA1ED58C-8B26-5848-9EE7-7897E6244BEB}">
+      <dsp:nvSpPr>
+        <dsp:cNvPr id="0" name=""/>
+        <dsp:cNvSpPr/>
+      </dsp:nvSpPr>
+      <dsp:spPr>
+        <a:xfrm>
+          <a:off x="0" y="2723"/>
+          <a:ext cx="6967728" cy="928732"/>
+        </a:xfrm>
+        <a:prstGeom prst="rect">
+          <a:avLst/>
+        </a:prstGeom>
+        <a:noFill/>
+        <a:ln>
+          <a:noFill/>
+        </a:ln>
+        <a:effectLst/>
+      </dsp:spPr>
+      <dsp:style>
+        <a:lnRef idx="0">
+          <a:scrgbClr r="0" g="0" b="0"/>
+        </a:lnRef>
+        <a:fillRef idx="0">
+          <a:scrgbClr r="0" g="0" b="0"/>
+        </a:fillRef>
+        <a:effectRef idx="0">
+          <a:scrgbClr r="0" g="0" b="0"/>
+        </a:effectRef>
+        <a:fontRef idx="minor"/>
+      </dsp:style>
+      <dsp:txBody>
+        <a:bodyPr spcFirstLastPara="0" vert="horz" wrap="square" lIns="68580" tIns="68580" rIns="68580" bIns="68580" numCol="1" spcCol="1270" anchor="t" anchorCtr="0">
+          <a:noAutofit/>
+        </a:bodyPr>
         <a:lstStyle/>
         <a:p>
-          <a:endParaRPr lang="en-US"/>
+          <a:pPr marL="0" lvl="0" indent="0" algn="l" defTabSz="800100">
+            <a:lnSpc>
+              <a:spcPct val="90000"/>
+            </a:lnSpc>
+            <a:spcBef>
+              <a:spcPct val="0"/>
+            </a:spcBef>
+            <a:spcAft>
+              <a:spcPct val="35000"/>
+            </a:spcAft>
+            <a:buNone/>
+          </a:pPr>
+          <a:r>
+            <a:rPr lang="en-US" sz="1800" b="0" i="0" kern="1200"/>
+            <a:t>Clarity is a primary goal. It is helped by consistent use of precise words.</a:t>
+          </a:r>
+          <a:endParaRPr lang="en-US" sz="1800" kern="1200"/>
         </a:p>
-      </dgm:t>
-    </dgm:pt>
-    <dgm:pt modelId="{0ED0DB0F-7BF6-4467-A92B-3A4F1FF3E34C}">
-      <dgm:prSet/>
-      <dgm:spPr/>
-      <dgm:t>
-        <a:bodyPr/>
+      </dsp:txBody>
+      <dsp:txXfrm>
+        <a:off x="0" y="2723"/>
+        <a:ext cx="6967728" cy="928732"/>
+      </dsp:txXfrm>
+    </dsp:sp>
+    <dsp:sp modelId="{713D64C0-8003-E340-9876-903B3AB5D6E0}">
+      <dsp:nvSpPr>
+        <dsp:cNvPr id="0" name=""/>
+        <dsp:cNvSpPr/>
+      </dsp:nvSpPr>
+      <dsp:spPr>
+        <a:xfrm>
+          <a:off x="0" y="931455"/>
+          <a:ext cx="6967728" cy="0"/>
+        </a:xfrm>
+        <a:prstGeom prst="line">
+          <a:avLst/>
+        </a:prstGeom>
+        <a:solidFill>
+          <a:schemeClr val="accent4">
+            <a:hueOff val="0"/>
+            <a:satOff val="0"/>
+            <a:lumOff val="0"/>
+            <a:alphaOff val="0"/>
+          </a:schemeClr>
+        </a:solidFill>
+        <a:ln w="12700" cap="flat" cmpd="sng" algn="ctr">
+          <a:solidFill>
+            <a:schemeClr val="accent4">
+              <a:hueOff val="0"/>
+              <a:satOff val="0"/>
+              <a:lumOff val="0"/>
+              <a:alphaOff val="0"/>
+            </a:schemeClr>
+          </a:solidFill>
+          <a:prstDash val="solid"/>
+          <a:miter lim="800000"/>
+        </a:ln>
+        <a:effectLst/>
+      </dsp:spPr>
+      <dsp:style>
+        <a:lnRef idx="2">
+          <a:scrgbClr r="0" g="0" b="0"/>
+        </a:lnRef>
+        <a:fillRef idx="1">
+          <a:scrgbClr r="0" g="0" b="0"/>
+        </a:fillRef>
+        <a:effectRef idx="0">
+          <a:scrgbClr r="0" g="0" b="0"/>
+        </a:effectRef>
+        <a:fontRef idx="minor">
+          <a:schemeClr val="lt1"/>
+        </a:fontRef>
+      </dsp:style>
+    </dsp:sp>
+    <dsp:sp modelId="{8CD1F598-5922-984A-B80E-A77828A63387}">
+      <dsp:nvSpPr>
+        <dsp:cNvPr id="0" name=""/>
+        <dsp:cNvSpPr/>
+      </dsp:nvSpPr>
+      <dsp:spPr>
+        <a:xfrm>
+          <a:off x="0" y="931455"/>
+          <a:ext cx="6967728" cy="928732"/>
+        </a:xfrm>
+        <a:prstGeom prst="rect">
+          <a:avLst/>
+        </a:prstGeom>
+        <a:noFill/>
+        <a:ln>
+          <a:noFill/>
+        </a:ln>
+        <a:effectLst/>
+      </dsp:spPr>
+      <dsp:style>
+        <a:lnRef idx="0">
+          <a:scrgbClr r="0" g="0" b="0"/>
+        </a:lnRef>
+        <a:fillRef idx="0">
+          <a:scrgbClr r="0" g="0" b="0"/>
+        </a:fillRef>
+        <a:effectRef idx="0">
+          <a:scrgbClr r="0" g="0" b="0"/>
+        </a:effectRef>
+        <a:fontRef idx="minor"/>
+      </dsp:style>
+      <dsp:txBody>
+        <a:bodyPr spcFirstLastPara="0" vert="horz" wrap="square" lIns="68580" tIns="68580" rIns="68580" bIns="68580" numCol="1" spcCol="1270" anchor="t" anchorCtr="0">
+          <a:noAutofit/>
+        </a:bodyPr>
         <a:lstStyle/>
         <a:p>
+          <a:pPr marL="0" lvl="0" indent="0" algn="l" defTabSz="800100">
+            <a:lnSpc>
+              <a:spcPct val="90000"/>
+            </a:lnSpc>
+            <a:spcBef>
+              <a:spcPct val="0"/>
+            </a:spcBef>
+            <a:spcAft>
+              <a:spcPct val="35000"/>
+            </a:spcAft>
+            <a:buNone/>
+          </a:pPr>
           <a:r>
-            <a:rPr lang="en-US"/>
-            <a:t>Office Hours: Tuesdays @ 10am at Mugar 334  </a:t>
+            <a:rPr lang="en-US" sz="1800" b="0" i="0" kern="1200"/>
+            <a:t>Brevity is a virtue. Aim for short, streamlined sentences that are seamlessly connected in building up your logical arguments.</a:t>
           </a:r>
+          <a:endParaRPr lang="en-US" sz="1800" kern="1200"/>
         </a:p>
-      </dgm:t>
-    </dgm:pt>
-    <dgm:pt modelId="{E664F827-5262-4030-B26E-50B49F78EB4B}" type="parTrans" cxnId="{1355DB44-86B4-4AEA-8B91-219B7CBB5B3C}">
-      <dgm:prSet/>
-      <dgm:spPr/>
-      <dgm:t>
-        <a:bodyPr/>
+      </dsp:txBody>
+      <dsp:txXfrm>
+        <a:off x="0" y="931455"/>
+        <a:ext cx="6967728" cy="928732"/>
+      </dsp:txXfrm>
+    </dsp:sp>
+    <dsp:sp modelId="{04C58192-9310-694E-B6AA-20DDB5E5CD84}">
+      <dsp:nvSpPr>
+        <dsp:cNvPr id="0" name=""/>
+        <dsp:cNvSpPr/>
+      </dsp:nvSpPr>
+      <dsp:spPr>
+        <a:xfrm>
+          <a:off x="0" y="1860187"/>
+          <a:ext cx="6967728" cy="0"/>
+        </a:xfrm>
+        <a:prstGeom prst="line">
+          <a:avLst/>
+        </a:prstGeom>
+        <a:solidFill>
+          <a:schemeClr val="accent4">
+            <a:hueOff val="0"/>
+            <a:satOff val="0"/>
+            <a:lumOff val="0"/>
+            <a:alphaOff val="0"/>
+          </a:schemeClr>
+        </a:solidFill>
+        <a:ln w="12700" cap="flat" cmpd="sng" algn="ctr">
+          <a:solidFill>
+            <a:schemeClr val="accent4">
+              <a:hueOff val="0"/>
+              <a:satOff val="0"/>
+              <a:lumOff val="0"/>
+              <a:alphaOff val="0"/>
+            </a:schemeClr>
+          </a:solidFill>
+          <a:prstDash val="solid"/>
+          <a:miter lim="800000"/>
+        </a:ln>
+        <a:effectLst/>
+      </dsp:spPr>
+      <dsp:style>
+        <a:lnRef idx="2">
+          <a:scrgbClr r="0" g="0" b="0"/>
+        </a:lnRef>
+        <a:fillRef idx="1">
+          <a:scrgbClr r="0" g="0" b="0"/>
+        </a:fillRef>
+        <a:effectRef idx="0">
+          <a:scrgbClr r="0" g="0" b="0"/>
+        </a:effectRef>
+        <a:fontRef idx="minor">
+          <a:schemeClr val="lt1"/>
+        </a:fontRef>
+      </dsp:style>
+    </dsp:sp>
+    <dsp:sp modelId="{3D2BDD5F-9D27-2C47-B4EE-8852B1AEB8F2}">
+      <dsp:nvSpPr>
+        <dsp:cNvPr id="0" name=""/>
+        <dsp:cNvSpPr/>
+      </dsp:nvSpPr>
+      <dsp:spPr>
+        <a:xfrm>
+          <a:off x="0" y="1860187"/>
+          <a:ext cx="6967728" cy="928732"/>
+        </a:xfrm>
+        <a:prstGeom prst="rect">
+          <a:avLst/>
+        </a:prstGeom>
+        <a:noFill/>
+        <a:ln>
+          <a:noFill/>
+        </a:ln>
+        <a:effectLst/>
+      </dsp:spPr>
+      <dsp:style>
+        <a:lnRef idx="0">
+          <a:scrgbClr r="0" g="0" b="0"/>
+        </a:lnRef>
+        <a:fillRef idx="0">
+          <a:scrgbClr r="0" g="0" b="0"/>
+        </a:fillRef>
+        <a:effectRef idx="0">
+          <a:scrgbClr r="0" g="0" b="0"/>
+        </a:effectRef>
+        <a:fontRef idx="minor"/>
+      </dsp:style>
+      <dsp:txBody>
+        <a:bodyPr spcFirstLastPara="0" vert="horz" wrap="square" lIns="68580" tIns="68580" rIns="68580" bIns="68580" numCol="1" spcCol="1270" anchor="t" anchorCtr="0">
+          <a:noAutofit/>
+        </a:bodyPr>
         <a:lstStyle/>
         <a:p>
-          <a:endParaRPr lang="en-US"/>
+          <a:pPr marL="0" lvl="0" indent="0" algn="l" defTabSz="800100">
+            <a:lnSpc>
+              <a:spcPct val="90000"/>
+            </a:lnSpc>
+            <a:spcBef>
+              <a:spcPct val="0"/>
+            </a:spcBef>
+            <a:spcAft>
+              <a:spcPct val="35000"/>
+            </a:spcAft>
+            <a:buNone/>
+          </a:pPr>
+          <a:r>
+            <a:rPr lang="en-US" sz="1800" b="0" i="0" kern="1200"/>
+            <a:t>Always begin with the reason. Tell the readers why you’re writing the things that you’re writing. Do not describe what you did before you explain why you did it.</a:t>
+          </a:r>
+          <a:endParaRPr lang="en-US" sz="1800" kern="1200"/>
         </a:p>
-      </dgm:t>
-    </dgm:pt>
-    <dgm:pt modelId="{A2ED36D5-4D75-4A03-A4AE-5D0C2C122EAC}" type="sibTrans" cxnId="{1355DB44-86B4-4AEA-8B91-219B7CBB5B3C}">
-      <dgm:prSet/>
-      <dgm:spPr/>
-      <dgm:t>
-        <a:bodyPr/>
+      </dsp:txBody>
+      <dsp:txXfrm>
+        <a:off x="0" y="1860187"/>
+        <a:ext cx="6967728" cy="928732"/>
+      </dsp:txXfrm>
+    </dsp:sp>
+    <dsp:sp modelId="{36F339E6-F5A9-1749-8B45-CC72A238E0B1}">
+      <dsp:nvSpPr>
+        <dsp:cNvPr id="0" name=""/>
+        <dsp:cNvSpPr/>
+      </dsp:nvSpPr>
+      <dsp:spPr>
+        <a:xfrm>
+          <a:off x="0" y="2788919"/>
+          <a:ext cx="6967728" cy="0"/>
+        </a:xfrm>
+        <a:prstGeom prst="line">
+          <a:avLst/>
+        </a:prstGeom>
+        <a:solidFill>
+          <a:schemeClr val="accent4">
+            <a:hueOff val="0"/>
+            <a:satOff val="0"/>
+            <a:lumOff val="0"/>
+            <a:alphaOff val="0"/>
+          </a:schemeClr>
+        </a:solidFill>
+        <a:ln w="12700" cap="flat" cmpd="sng" algn="ctr">
+          <a:solidFill>
+            <a:schemeClr val="accent4">
+              <a:hueOff val="0"/>
+              <a:satOff val="0"/>
+              <a:lumOff val="0"/>
+              <a:alphaOff val="0"/>
+            </a:schemeClr>
+          </a:solidFill>
+          <a:prstDash val="solid"/>
+          <a:miter lim="800000"/>
+        </a:ln>
+        <a:effectLst/>
+      </dsp:spPr>
+      <dsp:style>
+        <a:lnRef idx="2">
+          <a:scrgbClr r="0" g="0" b="0"/>
+        </a:lnRef>
+        <a:fillRef idx="1">
+          <a:scrgbClr r="0" g="0" b="0"/>
+        </a:fillRef>
+        <a:effectRef idx="0">
+          <a:scrgbClr r="0" g="0" b="0"/>
+        </a:effectRef>
+        <a:fontRef idx="minor">
+          <a:schemeClr val="lt1"/>
+        </a:fontRef>
+      </dsp:style>
+    </dsp:sp>
+    <dsp:sp modelId="{CAEFD2C4-BC2E-7445-9F5B-41B1859AC8C2}">
+      <dsp:nvSpPr>
+        <dsp:cNvPr id="0" name=""/>
+        <dsp:cNvSpPr/>
+      </dsp:nvSpPr>
+      <dsp:spPr>
+        <a:xfrm>
+          <a:off x="0" y="2788919"/>
+          <a:ext cx="6967728" cy="928732"/>
+        </a:xfrm>
+        <a:prstGeom prst="rect">
+          <a:avLst/>
+        </a:prstGeom>
+        <a:noFill/>
+        <a:ln>
+          <a:noFill/>
+        </a:ln>
+        <a:effectLst/>
+      </dsp:spPr>
+      <dsp:style>
+        <a:lnRef idx="0">
+          <a:scrgbClr r="0" g="0" b="0"/>
+        </a:lnRef>
+        <a:fillRef idx="0">
+          <a:scrgbClr r="0" g="0" b="0"/>
+        </a:fillRef>
+        <a:effectRef idx="0">
+          <a:scrgbClr r="0" g="0" b="0"/>
+        </a:effectRef>
+        <a:fontRef idx="minor"/>
+      </dsp:style>
+      <dsp:txBody>
+        <a:bodyPr spcFirstLastPara="0" vert="horz" wrap="square" lIns="68580" tIns="68580" rIns="68580" bIns="68580" numCol="1" spcCol="1270" anchor="t" anchorCtr="0">
+          <a:noAutofit/>
+        </a:bodyPr>
         <a:lstStyle/>
         <a:p>
-          <a:endParaRPr lang="en-US"/>
+          <a:pPr marL="0" lvl="0" indent="0" algn="l" defTabSz="800100">
+            <a:lnSpc>
+              <a:spcPct val="90000"/>
+            </a:lnSpc>
+            <a:spcBef>
+              <a:spcPct val="0"/>
+            </a:spcBef>
+            <a:spcAft>
+              <a:spcPct val="35000"/>
+            </a:spcAft>
+            <a:buNone/>
+          </a:pPr>
+          <a:r>
+            <a:rPr lang="en-US" sz="1800" b="0" i="0" kern="1200"/>
+            <a:t>Minimize the use of adjectives and make sure the remaining ones do not do much work.</a:t>
+          </a:r>
+          <a:endParaRPr lang="en-US" sz="1800" kern="1200"/>
         </a:p>
-      </dgm:t>
-    </dgm:pt>
-    <dgm:pt modelId="{95411A98-A81F-4A74-BA7F-B65D8827C239}">
-      <dgm:prSet/>
-      <dgm:spPr/>
-      <dgm:t>
-        <a:bodyPr/>
+      </dsp:txBody>
+      <dsp:txXfrm>
+        <a:off x="0" y="2788919"/>
+        <a:ext cx="6967728" cy="928732"/>
+      </dsp:txXfrm>
+    </dsp:sp>
+    <dsp:sp modelId="{C2F65B9E-C50A-DE40-A722-30C67402B921}">
+      <dsp:nvSpPr>
+        <dsp:cNvPr id="0" name=""/>
+        <dsp:cNvSpPr/>
+      </dsp:nvSpPr>
+      <dsp:spPr>
+        <a:xfrm>
+          <a:off x="0" y="3717652"/>
+          <a:ext cx="6967728" cy="0"/>
+        </a:xfrm>
+        <a:prstGeom prst="line">
+          <a:avLst/>
+        </a:prstGeom>
+        <a:solidFill>
+          <a:schemeClr val="accent4">
+            <a:hueOff val="0"/>
+            <a:satOff val="0"/>
+            <a:lumOff val="0"/>
+            <a:alphaOff val="0"/>
+          </a:schemeClr>
+        </a:solidFill>
+        <a:ln w="12700" cap="flat" cmpd="sng" algn="ctr">
+          <a:solidFill>
+            <a:schemeClr val="accent4">
+              <a:hueOff val="0"/>
+              <a:satOff val="0"/>
+              <a:lumOff val="0"/>
+              <a:alphaOff val="0"/>
+            </a:schemeClr>
+          </a:solidFill>
+          <a:prstDash val="solid"/>
+          <a:miter lim="800000"/>
+        </a:ln>
+        <a:effectLst/>
+      </dsp:spPr>
+      <dsp:style>
+        <a:lnRef idx="2">
+          <a:scrgbClr r="0" g="0" b="0"/>
+        </a:lnRef>
+        <a:fillRef idx="1">
+          <a:scrgbClr r="0" g="0" b="0"/>
+        </a:fillRef>
+        <a:effectRef idx="0">
+          <a:scrgbClr r="0" g="0" b="0"/>
+        </a:effectRef>
+        <a:fontRef idx="minor">
+          <a:schemeClr val="lt1"/>
+        </a:fontRef>
+      </dsp:style>
+    </dsp:sp>
+    <dsp:sp modelId="{AA53877E-2617-6B43-926C-CAEBEC33B2C5}">
+      <dsp:nvSpPr>
+        <dsp:cNvPr id="0" name=""/>
+        <dsp:cNvSpPr/>
+      </dsp:nvSpPr>
+      <dsp:spPr>
+        <a:xfrm>
+          <a:off x="0" y="3717652"/>
+          <a:ext cx="6967728" cy="928732"/>
+        </a:xfrm>
+        <a:prstGeom prst="rect">
+          <a:avLst/>
+        </a:prstGeom>
+        <a:noFill/>
+        <a:ln>
+          <a:noFill/>
+        </a:ln>
+        <a:effectLst/>
+      </dsp:spPr>
+      <dsp:style>
+        <a:lnRef idx="0">
+          <a:scrgbClr r="0" g="0" b="0"/>
+        </a:lnRef>
+        <a:fillRef idx="0">
+          <a:scrgbClr r="0" g="0" b="0"/>
+        </a:fillRef>
+        <a:effectRef idx="0">
+          <a:scrgbClr r="0" g="0" b="0"/>
+        </a:effectRef>
+        <a:fontRef idx="minor"/>
+      </dsp:style>
+      <dsp:txBody>
+        <a:bodyPr spcFirstLastPara="0" vert="horz" wrap="square" lIns="68580" tIns="68580" rIns="68580" bIns="68580" numCol="1" spcCol="1270" anchor="t" anchorCtr="0">
+          <a:noAutofit/>
+        </a:bodyPr>
         <a:lstStyle/>
         <a:p>
+          <a:pPr marL="0" lvl="0" indent="0" algn="l" defTabSz="800100">
+            <a:lnSpc>
+              <a:spcPct val="90000"/>
+            </a:lnSpc>
+            <a:spcBef>
+              <a:spcPct val="0"/>
+            </a:spcBef>
+            <a:spcAft>
+              <a:spcPct val="35000"/>
+            </a:spcAft>
+            <a:buNone/>
+          </a:pPr>
           <a:r>
-            <a:rPr lang="en-US"/>
-            <a:t>Student presentations: 20 +5 min / student  </a:t>
+            <a:rPr lang="en-US" sz="1800" b="0" i="0" kern="1200"/>
+            <a:t>Read your draft and pause after each statement to think of counterexamples, counterarguments or possible misinterpretations. If you can think of one, revise it.</a:t>
           </a:r>
+          <a:endParaRPr lang="en-US" sz="1800" kern="1200"/>
         </a:p>
-      </dgm:t>
-    </dgm:pt>
-    <dgm:pt modelId="{1279262D-0A8E-4D24-ABDF-F9C1C779645E}" type="parTrans" cxnId="{7856432B-6C7C-49DA-AA0B-19AEBDF3B0C5}">
-      <dgm:prSet/>
-      <dgm:spPr/>
-      <dgm:t>
-        <a:bodyPr/>
+      </dsp:txBody>
+      <dsp:txXfrm>
+        <a:off x="0" y="3717652"/>
+        <a:ext cx="6967728" cy="928732"/>
+      </dsp:txXfrm>
+    </dsp:sp>
+    <dsp:sp modelId="{23083892-6143-0C42-8CF5-C5840A164817}">
+      <dsp:nvSpPr>
+        <dsp:cNvPr id="0" name=""/>
+        <dsp:cNvSpPr/>
+      </dsp:nvSpPr>
+      <dsp:spPr>
+        <a:xfrm>
+          <a:off x="0" y="4646384"/>
+          <a:ext cx="6967728" cy="0"/>
+        </a:xfrm>
+        <a:prstGeom prst="line">
+          <a:avLst/>
+        </a:prstGeom>
+        <a:solidFill>
+          <a:schemeClr val="accent4">
+            <a:hueOff val="0"/>
+            <a:satOff val="0"/>
+            <a:lumOff val="0"/>
+            <a:alphaOff val="0"/>
+          </a:schemeClr>
+        </a:solidFill>
+        <a:ln w="12700" cap="flat" cmpd="sng" algn="ctr">
+          <a:solidFill>
+            <a:schemeClr val="accent4">
+              <a:hueOff val="0"/>
+              <a:satOff val="0"/>
+              <a:lumOff val="0"/>
+              <a:alphaOff val="0"/>
+            </a:schemeClr>
+          </a:solidFill>
+          <a:prstDash val="solid"/>
+          <a:miter lim="800000"/>
+        </a:ln>
+        <a:effectLst/>
+      </dsp:spPr>
+      <dsp:style>
+        <a:lnRef idx="2">
+          <a:scrgbClr r="0" g="0" b="0"/>
+        </a:lnRef>
+        <a:fillRef idx="1">
+          <a:scrgbClr r="0" g="0" b="0"/>
+        </a:fillRef>
+        <a:effectRef idx="0">
+          <a:scrgbClr r="0" g="0" b="0"/>
+        </a:effectRef>
+        <a:fontRef idx="minor">
+          <a:schemeClr val="lt1"/>
+        </a:fontRef>
+      </dsp:style>
+    </dsp:sp>
+    <dsp:sp modelId="{E6F8F40D-19F9-064C-BA94-82EA3DCF4BAE}">
+      <dsp:nvSpPr>
+        <dsp:cNvPr id="0" name=""/>
+        <dsp:cNvSpPr/>
+      </dsp:nvSpPr>
+      <dsp:spPr>
+        <a:xfrm>
+          <a:off x="0" y="4646384"/>
+          <a:ext cx="6967728" cy="928732"/>
+        </a:xfrm>
+        <a:prstGeom prst="rect">
+          <a:avLst/>
+        </a:prstGeom>
+        <a:noFill/>
+        <a:ln>
+          <a:noFill/>
+        </a:ln>
+        <a:effectLst/>
+      </dsp:spPr>
+      <dsp:style>
+        <a:lnRef idx="0">
+          <a:scrgbClr r="0" g="0" b="0"/>
+        </a:lnRef>
+        <a:fillRef idx="0">
+          <a:scrgbClr r="0" g="0" b="0"/>
+        </a:fillRef>
+        <a:effectRef idx="0">
+          <a:scrgbClr r="0" g="0" b="0"/>
+        </a:effectRef>
+        <a:fontRef idx="minor"/>
+      </dsp:style>
+      <dsp:txBody>
+        <a:bodyPr spcFirstLastPara="0" vert="horz" wrap="square" lIns="68580" tIns="68580" rIns="68580" bIns="68580" numCol="1" spcCol="1270" anchor="t" anchorCtr="0">
+          <a:noAutofit/>
+        </a:bodyPr>
         <a:lstStyle/>
         <a:p>
-          <a:endParaRPr lang="en-US"/>
+          <a:pPr marL="0" lvl="0" indent="0" algn="l" defTabSz="800100">
+            <a:lnSpc>
+              <a:spcPct val="90000"/>
+            </a:lnSpc>
+            <a:spcBef>
+              <a:spcPct val="0"/>
+            </a:spcBef>
+            <a:spcAft>
+              <a:spcPct val="35000"/>
+            </a:spcAft>
+            <a:buNone/>
+          </a:pPr>
+          <a:r>
+            <a:rPr lang="en-US" sz="1800" b="0" i="0" kern="1200" dirty="0"/>
+            <a:t>Be willing to critically evaluate your own writing and take constructive feedback as much as possible.</a:t>
+          </a:r>
+          <a:endParaRPr lang="en-US" sz="1800" kern="1200" dirty="0"/>
         </a:p>
-      </dgm:t>
-    </dgm:pt>
-    <dgm:pt modelId="{2E2B1A5D-3662-4C7C-82AC-1FF96C6C8DCE}" type="sibTrans" cxnId="{7856432B-6C7C-49DA-AA0B-19AEBDF3B0C5}">
-      <dgm:prSet/>
-      <dgm:spPr/>
-      <dgm:t>
-        <a:bodyPr/>
-        <a:lstStyle/>
-        <a:p>
-          <a:endParaRPr lang="en-US"/>
-        </a:p>
-      </dgm:t>
-    </dgm:pt>
-    <dgm:pt modelId="{57492D83-84C9-4484-8654-39D95D67E38B}">
-      <dgm:prSet/>
-      <dgm:spPr/>
-      <dgm:t>
-        <a:bodyPr/>
-        <a:lstStyle/>
-        <a:p>
-          <a:r>
-            <a:rPr lang="en-US"/>
-            <a:t>Written proposal up to 3 pages </a:t>
-          </a:r>
-        </a:p>
-      </dgm:t>
-    </dgm:pt>
-    <dgm:pt modelId="{C3904779-A0CF-40D5-B306-CB59720135CF}" type="parTrans" cxnId="{31FC4C77-B309-474C-A070-72A3C0A48EDF}">
-      <dgm:prSet/>
-      <dgm:spPr/>
-      <dgm:t>
-        <a:bodyPr/>
-        <a:lstStyle/>
-        <a:p>
-          <a:endParaRPr lang="en-US"/>
-        </a:p>
-      </dgm:t>
-    </dgm:pt>
-    <dgm:pt modelId="{6FE33BEC-A846-4DE3-A278-7971FE88F916}" type="sibTrans" cxnId="{31FC4C77-B309-474C-A070-72A3C0A48EDF}">
-      <dgm:prSet/>
-      <dgm:spPr/>
-      <dgm:t>
-        <a:bodyPr/>
-        <a:lstStyle/>
-        <a:p>
-          <a:endParaRPr lang="en-US"/>
-        </a:p>
-      </dgm:t>
-    </dgm:pt>
-    <dgm:pt modelId="{30E5B1A7-16FA-4CC7-B493-8985223A5CB5}">
-      <dgm:prSet/>
-      <dgm:spPr/>
-      <dgm:t>
-        <a:bodyPr/>
-        <a:lstStyle/>
-        <a:p>
-          <a:r>
-            <a:rPr lang="en-US"/>
-            <a:t>Proposals are due before March 20</a:t>
-          </a:r>
-          <a:r>
-            <a:rPr lang="en-US" baseline="30000"/>
-            <a:t>th</a:t>
-          </a:r>
-          <a:endParaRPr lang="en-US"/>
-        </a:p>
-      </dgm:t>
-    </dgm:pt>
-    <dgm:pt modelId="{E23FDFB6-1F15-410C-82EF-2D88452623F1}" type="parTrans" cxnId="{04E11F9B-1DCD-4A8E-9A96-8AA6B7D496E7}">
-      <dgm:prSet/>
-      <dgm:spPr/>
-      <dgm:t>
-        <a:bodyPr/>
-        <a:lstStyle/>
-        <a:p>
-          <a:endParaRPr lang="en-US"/>
-        </a:p>
-      </dgm:t>
-    </dgm:pt>
-    <dgm:pt modelId="{E262EB75-7C05-48C7-B54A-4B41868760D9}" type="sibTrans" cxnId="{04E11F9B-1DCD-4A8E-9A96-8AA6B7D496E7}">
-      <dgm:prSet/>
-      <dgm:spPr/>
-      <dgm:t>
-        <a:bodyPr/>
-        <a:lstStyle/>
-        <a:p>
-          <a:endParaRPr lang="en-US"/>
-        </a:p>
-      </dgm:t>
-    </dgm:pt>
-    <dgm:pt modelId="{47CAE1B7-A409-CA4E-8BAD-C525D7C9A781}" type="pres">
-      <dgm:prSet presAssocID="{4BC3B0D7-7E31-4E16-A270-91F8257499EC}" presName="hierChild1" presStyleCnt="0">
-        <dgm:presLayoutVars>
-          <dgm:chPref val="1"/>
-          <dgm:dir/>
-          <dgm:animOne val="branch"/>
-          <dgm:animLvl val="lvl"/>
-          <dgm:resizeHandles/>
-        </dgm:presLayoutVars>
-      </dgm:prSet>
-      <dgm:spPr/>
-    </dgm:pt>
-    <dgm:pt modelId="{331A4E6C-08E4-4440-8E52-CCBEDA0A09B8}" type="pres">
-      <dgm:prSet presAssocID="{0ED0DB0F-7BF6-4467-A92B-3A4F1FF3E34C}" presName="hierRoot1" presStyleCnt="0"/>
-      <dgm:spPr/>
-    </dgm:pt>
-    <dgm:pt modelId="{D88FE264-5BAF-4D48-B275-933F54BB2540}" type="pres">
-      <dgm:prSet presAssocID="{0ED0DB0F-7BF6-4467-A92B-3A4F1FF3E34C}" presName="composite" presStyleCnt="0"/>
-      <dgm:spPr/>
-    </dgm:pt>
-    <dgm:pt modelId="{B38C8681-0264-A74E-9A9C-D603A963692B}" type="pres">
-      <dgm:prSet presAssocID="{0ED0DB0F-7BF6-4467-A92B-3A4F1FF3E34C}" presName="background" presStyleLbl="node0" presStyleIdx="0" presStyleCnt="2"/>
-      <dgm:spPr/>
-    </dgm:pt>
-    <dgm:pt modelId="{B2E6C912-630D-8646-AC51-4B9C5E35BD46}" type="pres">
-      <dgm:prSet presAssocID="{0ED0DB0F-7BF6-4467-A92B-3A4F1FF3E34C}" presName="text" presStyleLbl="fgAcc0" presStyleIdx="0" presStyleCnt="2">
-        <dgm:presLayoutVars>
-          <dgm:chPref val="3"/>
-        </dgm:presLayoutVars>
-      </dgm:prSet>
-      <dgm:spPr/>
-    </dgm:pt>
-    <dgm:pt modelId="{5515DC79-8C69-2143-98A2-F4DBA5B968A4}" type="pres">
-      <dgm:prSet presAssocID="{0ED0DB0F-7BF6-4467-A92B-3A4F1FF3E34C}" presName="hierChild2" presStyleCnt="0"/>
-      <dgm:spPr/>
-    </dgm:pt>
-    <dgm:pt modelId="{18E0359F-92B7-924A-B422-3CB18E74C5B1}" type="pres">
-      <dgm:prSet presAssocID="{95411A98-A81F-4A74-BA7F-B65D8827C239}" presName="hierRoot1" presStyleCnt="0"/>
-      <dgm:spPr/>
-    </dgm:pt>
-    <dgm:pt modelId="{C9D1A5E5-AF1A-3B49-B894-023AD08BAAE1}" type="pres">
-      <dgm:prSet presAssocID="{95411A98-A81F-4A74-BA7F-B65D8827C239}" presName="composite" presStyleCnt="0"/>
-      <dgm:spPr/>
-    </dgm:pt>
-    <dgm:pt modelId="{74D00719-FDDF-2245-AF03-7EB734C6A178}" type="pres">
-      <dgm:prSet presAssocID="{95411A98-A81F-4A74-BA7F-B65D8827C239}" presName="background" presStyleLbl="node0" presStyleIdx="1" presStyleCnt="2"/>
-      <dgm:spPr/>
-    </dgm:pt>
-    <dgm:pt modelId="{1AA25082-2F81-6943-B74B-2115FFA0713F}" type="pres">
-      <dgm:prSet presAssocID="{95411A98-A81F-4A74-BA7F-B65D8827C239}" presName="text" presStyleLbl="fgAcc0" presStyleIdx="1" presStyleCnt="2">
-        <dgm:presLayoutVars>
-          <dgm:chPref val="3"/>
-        </dgm:presLayoutVars>
-      </dgm:prSet>
-      <dgm:spPr/>
-    </dgm:pt>
-    <dgm:pt modelId="{82F152BC-50F6-274F-890C-050B2B491C1E}" type="pres">
-      <dgm:prSet presAssocID="{95411A98-A81F-4A74-BA7F-B65D8827C239}" presName="hierChild2" presStyleCnt="0"/>
-      <dgm:spPr/>
-    </dgm:pt>
-    <dgm:pt modelId="{4C3DA1F8-8791-CA47-96F2-A7AECB194E39}" type="pres">
-      <dgm:prSet presAssocID="{C3904779-A0CF-40D5-B306-CB59720135CF}" presName="Name10" presStyleLbl="parChTrans1D2" presStyleIdx="0" presStyleCnt="2"/>
-      <dgm:spPr/>
-    </dgm:pt>
-    <dgm:pt modelId="{98F231FD-4A6A-D342-A711-68FA595181AE}" type="pres">
-      <dgm:prSet presAssocID="{57492D83-84C9-4484-8654-39D95D67E38B}" presName="hierRoot2" presStyleCnt="0"/>
-      <dgm:spPr/>
-    </dgm:pt>
-    <dgm:pt modelId="{87B37903-6E5D-8748-9AFD-B82D87B8FEA8}" type="pres">
-      <dgm:prSet presAssocID="{57492D83-84C9-4484-8654-39D95D67E38B}" presName="composite2" presStyleCnt="0"/>
-      <dgm:spPr/>
-    </dgm:pt>
-    <dgm:pt modelId="{09512367-F473-E94C-89E9-CCA294496C87}" type="pres">
-      <dgm:prSet presAssocID="{57492D83-84C9-4484-8654-39D95D67E38B}" presName="background2" presStyleLbl="node2" presStyleIdx="0" presStyleCnt="2"/>
-      <dgm:spPr/>
-    </dgm:pt>
-    <dgm:pt modelId="{A1CB4A09-0028-7744-B29B-D5D8B411F83C}" type="pres">
-      <dgm:prSet presAssocID="{57492D83-84C9-4484-8654-39D95D67E38B}" presName="text2" presStyleLbl="fgAcc2" presStyleIdx="0" presStyleCnt="2">
-        <dgm:presLayoutVars>
-          <dgm:chPref val="3"/>
-        </dgm:presLayoutVars>
-      </dgm:prSet>
-      <dgm:spPr/>
-    </dgm:pt>
-    <dgm:pt modelId="{B57373EA-465B-EF4E-941A-FDE96A77895A}" type="pres">
-      <dgm:prSet presAssocID="{57492D83-84C9-4484-8654-39D95D67E38B}" presName="hierChild3" presStyleCnt="0"/>
-      <dgm:spPr/>
-    </dgm:pt>
-    <dgm:pt modelId="{422F3121-AB3F-4544-897D-E3EA707B6E8C}" type="pres">
-      <dgm:prSet presAssocID="{E23FDFB6-1F15-410C-82EF-2D88452623F1}" presName="Name10" presStyleLbl="parChTrans1D2" presStyleIdx="1" presStyleCnt="2"/>
-      <dgm:spPr/>
-    </dgm:pt>
-    <dgm:pt modelId="{919F9AAC-B7CF-324A-9784-8A6EDA3C0939}" type="pres">
-      <dgm:prSet presAssocID="{30E5B1A7-16FA-4CC7-B493-8985223A5CB5}" presName="hierRoot2" presStyleCnt="0"/>
-      <dgm:spPr/>
-    </dgm:pt>
-    <dgm:pt modelId="{8E3C2C9D-712B-174B-9D6F-077C72BDD548}" type="pres">
-      <dgm:prSet presAssocID="{30E5B1A7-16FA-4CC7-B493-8985223A5CB5}" presName="composite2" presStyleCnt="0"/>
-      <dgm:spPr/>
-    </dgm:pt>
-    <dgm:pt modelId="{471A6F35-2235-D64F-83A2-60F527FC5520}" type="pres">
-      <dgm:prSet presAssocID="{30E5B1A7-16FA-4CC7-B493-8985223A5CB5}" presName="background2" presStyleLbl="node2" presStyleIdx="1" presStyleCnt="2"/>
-      <dgm:spPr/>
-    </dgm:pt>
-    <dgm:pt modelId="{C092CCCA-0FE0-7F43-94EB-D054F8001BFC}" type="pres">
-      <dgm:prSet presAssocID="{30E5B1A7-16FA-4CC7-B493-8985223A5CB5}" presName="text2" presStyleLbl="fgAcc2" presStyleIdx="1" presStyleCnt="2">
-        <dgm:presLayoutVars>
-          <dgm:chPref val="3"/>
-        </dgm:presLayoutVars>
-      </dgm:prSet>
-      <dgm:spPr/>
-    </dgm:pt>
-    <dgm:pt modelId="{6F7FFCC3-0A52-E645-96C6-4EAD653BA0A6}" type="pres">
-      <dgm:prSet presAssocID="{30E5B1A7-16FA-4CC7-B493-8985223A5CB5}" presName="hierChild3" presStyleCnt="0"/>
-      <dgm:spPr/>
-    </dgm:pt>
-  </dgm:ptLst>
-  <dgm:cxnLst>
-    <dgm:cxn modelId="{577FBC00-FD23-5B46-8ABC-392E12B05EB8}" type="presOf" srcId="{57492D83-84C9-4484-8654-39D95D67E38B}" destId="{A1CB4A09-0028-7744-B29B-D5D8B411F83C}" srcOrd="0" destOrd="0" presId="urn:microsoft.com/office/officeart/2005/8/layout/hierarchy1"/>
-    <dgm:cxn modelId="{7856432B-6C7C-49DA-AA0B-19AEBDF3B0C5}" srcId="{4BC3B0D7-7E31-4E16-A270-91F8257499EC}" destId="{95411A98-A81F-4A74-BA7F-B65D8827C239}" srcOrd="1" destOrd="0" parTransId="{1279262D-0A8E-4D24-ABDF-F9C1C779645E}" sibTransId="{2E2B1A5D-3662-4C7C-82AC-1FF96C6C8DCE}"/>
-    <dgm:cxn modelId="{870E6E30-4431-1B44-8115-A99652DB7A59}" type="presOf" srcId="{C3904779-A0CF-40D5-B306-CB59720135CF}" destId="{4C3DA1F8-8791-CA47-96F2-A7AECB194E39}" srcOrd="0" destOrd="0" presId="urn:microsoft.com/office/officeart/2005/8/layout/hierarchy1"/>
-    <dgm:cxn modelId="{29B6B642-0890-804E-9D28-415FD04CC78F}" type="presOf" srcId="{4BC3B0D7-7E31-4E16-A270-91F8257499EC}" destId="{47CAE1B7-A409-CA4E-8BAD-C525D7C9A781}" srcOrd="0" destOrd="0" presId="urn:microsoft.com/office/officeart/2005/8/layout/hierarchy1"/>
-    <dgm:cxn modelId="{1355DB44-86B4-4AEA-8B91-219B7CBB5B3C}" srcId="{4BC3B0D7-7E31-4E16-A270-91F8257499EC}" destId="{0ED0DB0F-7BF6-4467-A92B-3A4F1FF3E34C}" srcOrd="0" destOrd="0" parTransId="{E664F827-5262-4030-B26E-50B49F78EB4B}" sibTransId="{A2ED36D5-4D75-4A03-A4AE-5D0C2C122EAC}"/>
-    <dgm:cxn modelId="{1121EC67-EAEF-964F-B47A-2D875E184814}" type="presOf" srcId="{E23FDFB6-1F15-410C-82EF-2D88452623F1}" destId="{422F3121-AB3F-4544-897D-E3EA707B6E8C}" srcOrd="0" destOrd="0" presId="urn:microsoft.com/office/officeart/2005/8/layout/hierarchy1"/>
-    <dgm:cxn modelId="{EBF6EB6F-827D-104B-82B2-F978F612CA81}" type="presOf" srcId="{95411A98-A81F-4A74-BA7F-B65D8827C239}" destId="{1AA25082-2F81-6943-B74B-2115FFA0713F}" srcOrd="0" destOrd="0" presId="urn:microsoft.com/office/officeart/2005/8/layout/hierarchy1"/>
-    <dgm:cxn modelId="{31FC4C77-B309-474C-A070-72A3C0A48EDF}" srcId="{95411A98-A81F-4A74-BA7F-B65D8827C239}" destId="{57492D83-84C9-4484-8654-39D95D67E38B}" srcOrd="0" destOrd="0" parTransId="{C3904779-A0CF-40D5-B306-CB59720135CF}" sibTransId="{6FE33BEC-A846-4DE3-A278-7971FE88F916}"/>
-    <dgm:cxn modelId="{04E11F9B-1DCD-4A8E-9A96-8AA6B7D496E7}" srcId="{95411A98-A81F-4A74-BA7F-B65D8827C239}" destId="{30E5B1A7-16FA-4CC7-B493-8985223A5CB5}" srcOrd="1" destOrd="0" parTransId="{E23FDFB6-1F15-410C-82EF-2D88452623F1}" sibTransId="{E262EB75-7C05-48C7-B54A-4B41868760D9}"/>
-    <dgm:cxn modelId="{E1C226E8-6210-7D43-9667-04A792FF980F}" type="presOf" srcId="{0ED0DB0F-7BF6-4467-A92B-3A4F1FF3E34C}" destId="{B2E6C912-630D-8646-AC51-4B9C5E35BD46}" srcOrd="0" destOrd="0" presId="urn:microsoft.com/office/officeart/2005/8/layout/hierarchy1"/>
-    <dgm:cxn modelId="{081903F9-AE02-F84C-A9D4-862B17021CAB}" type="presOf" srcId="{30E5B1A7-16FA-4CC7-B493-8985223A5CB5}" destId="{C092CCCA-0FE0-7F43-94EB-D054F8001BFC}" srcOrd="0" destOrd="0" presId="urn:microsoft.com/office/officeart/2005/8/layout/hierarchy1"/>
-    <dgm:cxn modelId="{C695DC9F-F203-2349-9531-044D7CD3B690}" type="presParOf" srcId="{47CAE1B7-A409-CA4E-8BAD-C525D7C9A781}" destId="{331A4E6C-08E4-4440-8E52-CCBEDA0A09B8}" srcOrd="0" destOrd="0" presId="urn:microsoft.com/office/officeart/2005/8/layout/hierarchy1"/>
-    <dgm:cxn modelId="{067F3F74-CD45-3449-905D-7CCFC09C2E59}" type="presParOf" srcId="{331A4E6C-08E4-4440-8E52-CCBEDA0A09B8}" destId="{D88FE264-5BAF-4D48-B275-933F54BB2540}" srcOrd="0" destOrd="0" presId="urn:microsoft.com/office/officeart/2005/8/layout/hierarchy1"/>
-    <dgm:cxn modelId="{61DEFC20-6780-644E-AE01-E4A3ED8DA2C5}" type="presParOf" srcId="{D88FE264-5BAF-4D48-B275-933F54BB2540}" destId="{B38C8681-0264-A74E-9A9C-D603A963692B}" srcOrd="0" destOrd="0" presId="urn:microsoft.com/office/officeart/2005/8/layout/hierarchy1"/>
-    <dgm:cxn modelId="{495CBD33-550A-EA4E-AB56-424D2E94855F}" type="presParOf" srcId="{D88FE264-5BAF-4D48-B275-933F54BB2540}" destId="{B2E6C912-630D-8646-AC51-4B9C5E35BD46}" srcOrd="1" destOrd="0" presId="urn:microsoft.com/office/officeart/2005/8/layout/hierarchy1"/>
-    <dgm:cxn modelId="{2A7866E6-F8EC-9E47-AC4D-104360B0F937}" type="presParOf" srcId="{331A4E6C-08E4-4440-8E52-CCBEDA0A09B8}" destId="{5515DC79-8C69-2143-98A2-F4DBA5B968A4}" srcOrd="1" destOrd="0" presId="urn:microsoft.com/office/officeart/2005/8/layout/hierarchy1"/>
-    <dgm:cxn modelId="{875CB17F-AEF7-354D-A58D-E9E155DB8842}" type="presParOf" srcId="{47CAE1B7-A409-CA4E-8BAD-C525D7C9A781}" destId="{18E0359F-92B7-924A-B422-3CB18E74C5B1}" srcOrd="1" destOrd="0" presId="urn:microsoft.com/office/officeart/2005/8/layout/hierarchy1"/>
-    <dgm:cxn modelId="{3FAE887E-BDAC-1E4B-826E-7B8A89E6E22D}" type="presParOf" srcId="{18E0359F-92B7-924A-B422-3CB18E74C5B1}" destId="{C9D1A5E5-AF1A-3B49-B894-023AD08BAAE1}" srcOrd="0" destOrd="0" presId="urn:microsoft.com/office/officeart/2005/8/layout/hierarchy1"/>
-    <dgm:cxn modelId="{298023ED-1B99-344D-93CA-73C1410E4E9E}" type="presParOf" srcId="{C9D1A5E5-AF1A-3B49-B894-023AD08BAAE1}" destId="{74D00719-FDDF-2245-AF03-7EB734C6A178}" srcOrd="0" destOrd="0" presId="urn:microsoft.com/office/officeart/2005/8/layout/hierarchy1"/>
-    <dgm:cxn modelId="{831C52AB-3169-BE49-84BA-24F169BB1477}" type="presParOf" srcId="{C9D1A5E5-AF1A-3B49-B894-023AD08BAAE1}" destId="{1AA25082-2F81-6943-B74B-2115FFA0713F}" srcOrd="1" destOrd="0" presId="urn:microsoft.com/office/officeart/2005/8/layout/hierarchy1"/>
-    <dgm:cxn modelId="{A7719FE9-4544-344C-B1AD-DC14311D65D7}" type="presParOf" srcId="{18E0359F-92B7-924A-B422-3CB18E74C5B1}" destId="{82F152BC-50F6-274F-890C-050B2B491C1E}" srcOrd="1" destOrd="0" presId="urn:microsoft.com/office/officeart/2005/8/layout/hierarchy1"/>
-    <dgm:cxn modelId="{21ED5737-1031-714B-A6B2-91354CC9FD22}" type="presParOf" srcId="{82F152BC-50F6-274F-890C-050B2B491C1E}" destId="{4C3DA1F8-8791-CA47-96F2-A7AECB194E39}" srcOrd="0" destOrd="0" presId="urn:microsoft.com/office/officeart/2005/8/layout/hierarchy1"/>
-    <dgm:cxn modelId="{6C7D2D87-615F-2142-A415-F175CAF35AFE}" type="presParOf" srcId="{82F152BC-50F6-274F-890C-050B2B491C1E}" destId="{98F231FD-4A6A-D342-A711-68FA595181AE}" srcOrd="1" destOrd="0" presId="urn:microsoft.com/office/officeart/2005/8/layout/hierarchy1"/>
-    <dgm:cxn modelId="{3A2E3467-CF2E-2342-915E-6768389D5507}" type="presParOf" srcId="{98F231FD-4A6A-D342-A711-68FA595181AE}" destId="{87B37903-6E5D-8748-9AFD-B82D87B8FEA8}" srcOrd="0" destOrd="0" presId="urn:microsoft.com/office/officeart/2005/8/layout/hierarchy1"/>
-    <dgm:cxn modelId="{02A60BC6-D2E6-B645-87DE-19078AC960AE}" type="presParOf" srcId="{87B37903-6E5D-8748-9AFD-B82D87B8FEA8}" destId="{09512367-F473-E94C-89E9-CCA294496C87}" srcOrd="0" destOrd="0" presId="urn:microsoft.com/office/officeart/2005/8/layout/hierarchy1"/>
-    <dgm:cxn modelId="{63E503A5-9469-974B-BE59-74998E5F28E3}" type="presParOf" srcId="{87B37903-6E5D-8748-9AFD-B82D87B8FEA8}" destId="{A1CB4A09-0028-7744-B29B-D5D8B411F83C}" srcOrd="1" destOrd="0" presId="urn:microsoft.com/office/officeart/2005/8/layout/hierarchy1"/>
-    <dgm:cxn modelId="{2A60C0DE-F1B0-7247-9835-AF37E239F93C}" type="presParOf" srcId="{98F231FD-4A6A-D342-A711-68FA595181AE}" destId="{B57373EA-465B-EF4E-941A-FDE96A77895A}" srcOrd="1" destOrd="0" presId="urn:microsoft.com/office/officeart/2005/8/layout/hierarchy1"/>
-    <dgm:cxn modelId="{5892AA17-AA73-C149-B2F6-A88CC6B74709}" type="presParOf" srcId="{82F152BC-50F6-274F-890C-050B2B491C1E}" destId="{422F3121-AB3F-4544-897D-E3EA707B6E8C}" srcOrd="2" destOrd="0" presId="urn:microsoft.com/office/officeart/2005/8/layout/hierarchy1"/>
-    <dgm:cxn modelId="{0ED32E9B-D93F-9D44-91B1-9BB46B3F9FAB}" type="presParOf" srcId="{82F152BC-50F6-274F-890C-050B2B491C1E}" destId="{919F9AAC-B7CF-324A-9784-8A6EDA3C0939}" srcOrd="3" destOrd="0" presId="urn:microsoft.com/office/officeart/2005/8/layout/hierarchy1"/>
-    <dgm:cxn modelId="{10F133EF-24BC-E24F-92F5-C97CC6F02A4D}" type="presParOf" srcId="{919F9AAC-B7CF-324A-9784-8A6EDA3C0939}" destId="{8E3C2C9D-712B-174B-9D6F-077C72BDD548}" srcOrd="0" destOrd="0" presId="urn:microsoft.com/office/officeart/2005/8/layout/hierarchy1"/>
-    <dgm:cxn modelId="{72048D2C-BF39-0143-9231-65F884298598}" type="presParOf" srcId="{8E3C2C9D-712B-174B-9D6F-077C72BDD548}" destId="{471A6F35-2235-D64F-83A2-60F527FC5520}" srcOrd="0" destOrd="0" presId="urn:microsoft.com/office/officeart/2005/8/layout/hierarchy1"/>
-    <dgm:cxn modelId="{B817DBC9-D2F2-0C4E-9E6F-750E307EFD3C}" type="presParOf" srcId="{8E3C2C9D-712B-174B-9D6F-077C72BDD548}" destId="{C092CCCA-0FE0-7F43-94EB-D054F8001BFC}" srcOrd="1" destOrd="0" presId="urn:microsoft.com/office/officeart/2005/8/layout/hierarchy1"/>
-    <dgm:cxn modelId="{FA8775E2-A816-654A-9C7F-1DFD7174B13B}" type="presParOf" srcId="{919F9AAC-B7CF-324A-9784-8A6EDA3C0939}" destId="{6F7FFCC3-0A52-E645-96C6-4EAD653BA0A6}" srcOrd="1" destOrd="0" presId="urn:microsoft.com/office/officeart/2005/8/layout/hierarchy1"/>
-  </dgm:cxnLst>
-  <dgm:bg/>
-  <dgm:whole/>
-  <dgm:extLst>
-    <a:ext uri="http://schemas.microsoft.com/office/drawing/2008/diagram">
-      <dsp:dataModelExt xmlns:dsp="http://schemas.microsoft.com/office/drawing/2008/diagram" relId="rId6" minVer="http://schemas.openxmlformats.org/drawingml/2006/diagram"/>
-    </a:ext>
-  </dgm:extLst>
-</dgm:dataModel>
+      </dsp:txBody>
+      <dsp:txXfrm>
+        <a:off x="0" y="4646384"/>
+        <a:ext cx="6967728" cy="928732"/>
+      </dsp:txXfrm>
+    </dsp:sp>
+  </dsp:spTree>
+</dsp:drawing>
 </file>
 
-<file path=ppt/diagrams/drawing1.xml><?xml version="1.0" encoding="utf-8"?>
+<file path=ppt/diagrams/drawing2.xml><?xml version="1.0" encoding="utf-8"?>
 <dsp:drawing xmlns:dgm="http://schemas.openxmlformats.org/drawingml/2006/diagram" xmlns:dsp="http://schemas.microsoft.com/office/drawing/2008/diagram" xmlns:a="http://schemas.openxmlformats.org/drawingml/2006/main">
   <dsp:spTree>
     <dsp:nvGrpSpPr>
@@ -2773,672 +3526,473 @@
 </dsp:drawing>
 </file>
 
-<file path=ppt/diagrams/drawing2.xml><?xml version="1.0" encoding="utf-8"?>
-<dsp:drawing xmlns:dgm="http://schemas.openxmlformats.org/drawingml/2006/diagram" xmlns:dsp="http://schemas.microsoft.com/office/drawing/2008/diagram" xmlns:a="http://schemas.openxmlformats.org/drawingml/2006/main">
-  <dsp:spTree>
-    <dsp:nvGrpSpPr>
-      <dsp:cNvPr id="0" name=""/>
-      <dsp:cNvGrpSpPr/>
-    </dsp:nvGrpSpPr>
-    <dsp:grpSpPr/>
-    <dsp:sp modelId="{422F3121-AB3F-4544-897D-E3EA707B6E8C}">
-      <dsp:nvSpPr>
-        <dsp:cNvPr id="0" name=""/>
-        <dsp:cNvSpPr/>
-      </dsp:nvSpPr>
-      <dsp:spPr>
-        <a:xfrm>
-          <a:off x="5940020" y="1747998"/>
-          <a:ext cx="1678827" cy="798969"/>
-        </a:xfrm>
-        <a:custGeom>
-          <a:avLst/>
-          <a:gdLst/>
-          <a:ahLst/>
-          <a:cxnLst/>
-          <a:rect l="0" t="0" r="0" b="0"/>
-          <a:pathLst>
-            <a:path>
-              <a:moveTo>
-                <a:pt x="0" y="0"/>
-              </a:moveTo>
-              <a:lnTo>
-                <a:pt x="0" y="544474"/>
-              </a:lnTo>
-              <a:lnTo>
-                <a:pt x="1678827" y="544474"/>
-              </a:lnTo>
-              <a:lnTo>
-                <a:pt x="1678827" y="798969"/>
-              </a:lnTo>
-            </a:path>
-          </a:pathLst>
-        </a:custGeom>
-        <a:noFill/>
-        <a:ln w="12700" cap="flat" cmpd="sng" algn="ctr">
-          <a:solidFill>
-            <a:schemeClr val="accent1">
-              <a:shade val="60000"/>
-              <a:hueOff val="0"/>
-              <a:satOff val="0"/>
-              <a:lumOff val="0"/>
-              <a:alphaOff val="0"/>
-            </a:schemeClr>
-          </a:solidFill>
-          <a:prstDash val="solid"/>
-          <a:miter lim="800000"/>
-        </a:ln>
-        <a:effectLst/>
-      </dsp:spPr>
-      <dsp:style>
-        <a:lnRef idx="2">
-          <a:scrgbClr r="0" g="0" b="0"/>
-        </a:lnRef>
-        <a:fillRef idx="0">
-          <a:scrgbClr r="0" g="0" b="0"/>
-        </a:fillRef>
-        <a:effectRef idx="0">
-          <a:scrgbClr r="0" g="0" b="0"/>
-        </a:effectRef>
-        <a:fontRef idx="minor"/>
-      </dsp:style>
-    </dsp:sp>
-    <dsp:sp modelId="{4C3DA1F8-8791-CA47-96F2-A7AECB194E39}">
-      <dsp:nvSpPr>
-        <dsp:cNvPr id="0" name=""/>
-        <dsp:cNvSpPr/>
-      </dsp:nvSpPr>
-      <dsp:spPr>
-        <a:xfrm>
-          <a:off x="4261193" y="1747998"/>
-          <a:ext cx="1678827" cy="798969"/>
-        </a:xfrm>
-        <a:custGeom>
-          <a:avLst/>
-          <a:gdLst/>
-          <a:ahLst/>
-          <a:cxnLst/>
-          <a:rect l="0" t="0" r="0" b="0"/>
-          <a:pathLst>
-            <a:path>
-              <a:moveTo>
-                <a:pt x="1678827" y="0"/>
-              </a:moveTo>
-              <a:lnTo>
-                <a:pt x="1678827" y="544474"/>
-              </a:lnTo>
-              <a:lnTo>
-                <a:pt x="0" y="544474"/>
-              </a:lnTo>
-              <a:lnTo>
-                <a:pt x="0" y="798969"/>
-              </a:lnTo>
-            </a:path>
-          </a:pathLst>
-        </a:custGeom>
-        <a:noFill/>
-        <a:ln w="12700" cap="flat" cmpd="sng" algn="ctr">
-          <a:solidFill>
-            <a:schemeClr val="accent1">
-              <a:shade val="60000"/>
-              <a:hueOff val="0"/>
-              <a:satOff val="0"/>
-              <a:lumOff val="0"/>
-              <a:alphaOff val="0"/>
-            </a:schemeClr>
-          </a:solidFill>
-          <a:prstDash val="solid"/>
-          <a:miter lim="800000"/>
-        </a:ln>
-        <a:effectLst/>
-      </dsp:spPr>
-      <dsp:style>
-        <a:lnRef idx="2">
-          <a:scrgbClr r="0" g="0" b="0"/>
-        </a:lnRef>
-        <a:fillRef idx="0">
-          <a:scrgbClr r="0" g="0" b="0"/>
-        </a:fillRef>
-        <a:effectRef idx="0">
-          <a:scrgbClr r="0" g="0" b="0"/>
-        </a:effectRef>
-        <a:fontRef idx="minor"/>
-      </dsp:style>
-    </dsp:sp>
-    <dsp:sp modelId="{B38C8681-0264-A74E-9A9C-D603A963692B}">
-      <dsp:nvSpPr>
-        <dsp:cNvPr id="0" name=""/>
-        <dsp:cNvSpPr/>
-      </dsp:nvSpPr>
-      <dsp:spPr>
-        <a:xfrm>
-          <a:off x="1208781" y="3544"/>
-          <a:ext cx="2747171" cy="1744453"/>
-        </a:xfrm>
-        <a:prstGeom prst="roundRect">
-          <a:avLst>
-            <a:gd name="adj" fmla="val 10000"/>
-          </a:avLst>
-        </a:prstGeom>
-        <a:solidFill>
-          <a:schemeClr val="accent1">
-            <a:hueOff val="0"/>
-            <a:satOff val="0"/>
-            <a:lumOff val="0"/>
-            <a:alphaOff val="0"/>
-          </a:schemeClr>
-        </a:solidFill>
-        <a:ln w="12700" cap="flat" cmpd="sng" algn="ctr">
-          <a:solidFill>
-            <a:schemeClr val="lt1">
-              <a:hueOff val="0"/>
-              <a:satOff val="0"/>
-              <a:lumOff val="0"/>
-              <a:alphaOff val="0"/>
-            </a:schemeClr>
-          </a:solidFill>
-          <a:prstDash val="solid"/>
-          <a:miter lim="800000"/>
-        </a:ln>
-        <a:effectLst/>
-      </dsp:spPr>
-      <dsp:style>
-        <a:lnRef idx="2">
-          <a:scrgbClr r="0" g="0" b="0"/>
-        </a:lnRef>
-        <a:fillRef idx="1">
-          <a:scrgbClr r="0" g="0" b="0"/>
-        </a:fillRef>
-        <a:effectRef idx="0">
-          <a:scrgbClr r="0" g="0" b="0"/>
-        </a:effectRef>
-        <a:fontRef idx="minor">
-          <a:schemeClr val="lt1"/>
-        </a:fontRef>
-      </dsp:style>
-    </dsp:sp>
-    <dsp:sp modelId="{B2E6C912-630D-8646-AC51-4B9C5E35BD46}">
-      <dsp:nvSpPr>
-        <dsp:cNvPr id="0" name=""/>
-        <dsp:cNvSpPr/>
-      </dsp:nvSpPr>
-      <dsp:spPr>
-        <a:xfrm>
-          <a:off x="1514022" y="293524"/>
-          <a:ext cx="2747171" cy="1744453"/>
-        </a:xfrm>
-        <a:prstGeom prst="roundRect">
-          <a:avLst>
-            <a:gd name="adj" fmla="val 10000"/>
-          </a:avLst>
-        </a:prstGeom>
-        <a:solidFill>
-          <a:schemeClr val="lt1">
-            <a:alpha val="90000"/>
-            <a:hueOff val="0"/>
-            <a:satOff val="0"/>
-            <a:lumOff val="0"/>
-            <a:alphaOff val="0"/>
-          </a:schemeClr>
-        </a:solidFill>
-        <a:ln w="12700" cap="flat" cmpd="sng" algn="ctr">
-          <a:solidFill>
-            <a:schemeClr val="accent1">
-              <a:hueOff val="0"/>
-              <a:satOff val="0"/>
-              <a:lumOff val="0"/>
-              <a:alphaOff val="0"/>
-            </a:schemeClr>
-          </a:solidFill>
-          <a:prstDash val="solid"/>
-          <a:miter lim="800000"/>
-        </a:ln>
-        <a:effectLst/>
-      </dsp:spPr>
-      <dsp:style>
-        <a:lnRef idx="2">
-          <a:scrgbClr r="0" g="0" b="0"/>
-        </a:lnRef>
-        <a:fillRef idx="1">
-          <a:scrgbClr r="0" g="0" b="0"/>
-        </a:fillRef>
-        <a:effectRef idx="0">
-          <a:scrgbClr r="0" g="0" b="0"/>
-        </a:effectRef>
-        <a:fontRef idx="minor"/>
-      </dsp:style>
-      <dsp:txBody>
-        <a:bodyPr spcFirstLastPara="0" vert="horz" wrap="square" lIns="99060" tIns="99060" rIns="99060" bIns="99060" numCol="1" spcCol="1270" anchor="ctr" anchorCtr="0">
-          <a:noAutofit/>
-        </a:bodyPr>
-        <a:lstStyle/>
-        <a:p>
-          <a:pPr marL="0" lvl="0" indent="0" algn="ctr" defTabSz="1155700">
-            <a:lnSpc>
-              <a:spcPct val="90000"/>
-            </a:lnSpc>
-            <a:spcBef>
-              <a:spcPct val="0"/>
-            </a:spcBef>
-            <a:spcAft>
-              <a:spcPct val="35000"/>
-            </a:spcAft>
-            <a:buNone/>
-          </a:pPr>
-          <a:r>
-            <a:rPr lang="en-US" sz="2600" kern="1200"/>
-            <a:t>Office Hours: Tuesdays @ 10am at Mugar 334  </a:t>
-          </a:r>
-        </a:p>
-      </dsp:txBody>
-      <dsp:txXfrm>
-        <a:off x="1565115" y="344617"/>
-        <a:ext cx="2644985" cy="1642267"/>
-      </dsp:txXfrm>
-    </dsp:sp>
-    <dsp:sp modelId="{74D00719-FDDF-2245-AF03-7EB734C6A178}">
-      <dsp:nvSpPr>
-        <dsp:cNvPr id="0" name=""/>
-        <dsp:cNvSpPr/>
-      </dsp:nvSpPr>
-      <dsp:spPr>
-        <a:xfrm>
-          <a:off x="4566435" y="3544"/>
-          <a:ext cx="2747171" cy="1744453"/>
-        </a:xfrm>
-        <a:prstGeom prst="roundRect">
-          <a:avLst>
-            <a:gd name="adj" fmla="val 10000"/>
-          </a:avLst>
-        </a:prstGeom>
-        <a:solidFill>
-          <a:schemeClr val="accent1">
-            <a:hueOff val="0"/>
-            <a:satOff val="0"/>
-            <a:lumOff val="0"/>
-            <a:alphaOff val="0"/>
-          </a:schemeClr>
-        </a:solidFill>
-        <a:ln w="12700" cap="flat" cmpd="sng" algn="ctr">
-          <a:solidFill>
-            <a:schemeClr val="lt1">
-              <a:hueOff val="0"/>
-              <a:satOff val="0"/>
-              <a:lumOff val="0"/>
-              <a:alphaOff val="0"/>
-            </a:schemeClr>
-          </a:solidFill>
-          <a:prstDash val="solid"/>
-          <a:miter lim="800000"/>
-        </a:ln>
-        <a:effectLst/>
-      </dsp:spPr>
-      <dsp:style>
-        <a:lnRef idx="2">
-          <a:scrgbClr r="0" g="0" b="0"/>
-        </a:lnRef>
-        <a:fillRef idx="1">
-          <a:scrgbClr r="0" g="0" b="0"/>
-        </a:fillRef>
-        <a:effectRef idx="0">
-          <a:scrgbClr r="0" g="0" b="0"/>
-        </a:effectRef>
-        <a:fontRef idx="minor">
-          <a:schemeClr val="lt1"/>
-        </a:fontRef>
-      </dsp:style>
-    </dsp:sp>
-    <dsp:sp modelId="{1AA25082-2F81-6943-B74B-2115FFA0713F}">
-      <dsp:nvSpPr>
-        <dsp:cNvPr id="0" name=""/>
-        <dsp:cNvSpPr/>
-      </dsp:nvSpPr>
-      <dsp:spPr>
-        <a:xfrm>
-          <a:off x="4871676" y="293524"/>
-          <a:ext cx="2747171" cy="1744453"/>
-        </a:xfrm>
-        <a:prstGeom prst="roundRect">
-          <a:avLst>
-            <a:gd name="adj" fmla="val 10000"/>
-          </a:avLst>
-        </a:prstGeom>
-        <a:solidFill>
-          <a:schemeClr val="lt1">
-            <a:alpha val="90000"/>
-            <a:hueOff val="0"/>
-            <a:satOff val="0"/>
-            <a:lumOff val="0"/>
-            <a:alphaOff val="0"/>
-          </a:schemeClr>
-        </a:solidFill>
-        <a:ln w="12700" cap="flat" cmpd="sng" algn="ctr">
-          <a:solidFill>
-            <a:schemeClr val="accent1">
-              <a:hueOff val="0"/>
-              <a:satOff val="0"/>
-              <a:lumOff val="0"/>
-              <a:alphaOff val="0"/>
-            </a:schemeClr>
-          </a:solidFill>
-          <a:prstDash val="solid"/>
-          <a:miter lim="800000"/>
-        </a:ln>
-        <a:effectLst/>
-      </dsp:spPr>
-      <dsp:style>
-        <a:lnRef idx="2">
-          <a:scrgbClr r="0" g="0" b="0"/>
-        </a:lnRef>
-        <a:fillRef idx="1">
-          <a:scrgbClr r="0" g="0" b="0"/>
-        </a:fillRef>
-        <a:effectRef idx="0">
-          <a:scrgbClr r="0" g="0" b="0"/>
-        </a:effectRef>
-        <a:fontRef idx="minor"/>
-      </dsp:style>
-      <dsp:txBody>
-        <a:bodyPr spcFirstLastPara="0" vert="horz" wrap="square" lIns="99060" tIns="99060" rIns="99060" bIns="99060" numCol="1" spcCol="1270" anchor="ctr" anchorCtr="0">
-          <a:noAutofit/>
-        </a:bodyPr>
-        <a:lstStyle/>
-        <a:p>
-          <a:pPr marL="0" lvl="0" indent="0" algn="ctr" defTabSz="1155700">
-            <a:lnSpc>
-              <a:spcPct val="90000"/>
-            </a:lnSpc>
-            <a:spcBef>
-              <a:spcPct val="0"/>
-            </a:spcBef>
-            <a:spcAft>
-              <a:spcPct val="35000"/>
-            </a:spcAft>
-            <a:buNone/>
-          </a:pPr>
-          <a:r>
-            <a:rPr lang="en-US" sz="2600" kern="1200"/>
-            <a:t>Student presentations: 20 +5 min / student  </a:t>
-          </a:r>
-        </a:p>
-      </dsp:txBody>
-      <dsp:txXfrm>
-        <a:off x="4922769" y="344617"/>
-        <a:ext cx="2644985" cy="1642267"/>
-      </dsp:txXfrm>
-    </dsp:sp>
-    <dsp:sp modelId="{09512367-F473-E94C-89E9-CCA294496C87}">
-      <dsp:nvSpPr>
-        <dsp:cNvPr id="0" name=""/>
-        <dsp:cNvSpPr/>
-      </dsp:nvSpPr>
-      <dsp:spPr>
-        <a:xfrm>
-          <a:off x="2887608" y="2546967"/>
-          <a:ext cx="2747171" cy="1744453"/>
-        </a:xfrm>
-        <a:prstGeom prst="roundRect">
-          <a:avLst>
-            <a:gd name="adj" fmla="val 10000"/>
-          </a:avLst>
-        </a:prstGeom>
-        <a:solidFill>
-          <a:schemeClr val="accent1">
-            <a:hueOff val="0"/>
-            <a:satOff val="0"/>
-            <a:lumOff val="0"/>
-            <a:alphaOff val="0"/>
-          </a:schemeClr>
-        </a:solidFill>
-        <a:ln w="12700" cap="flat" cmpd="sng" algn="ctr">
-          <a:solidFill>
-            <a:schemeClr val="lt1">
-              <a:hueOff val="0"/>
-              <a:satOff val="0"/>
-              <a:lumOff val="0"/>
-              <a:alphaOff val="0"/>
-            </a:schemeClr>
-          </a:solidFill>
-          <a:prstDash val="solid"/>
-          <a:miter lim="800000"/>
-        </a:ln>
-        <a:effectLst/>
-      </dsp:spPr>
-      <dsp:style>
-        <a:lnRef idx="2">
-          <a:scrgbClr r="0" g="0" b="0"/>
-        </a:lnRef>
-        <a:fillRef idx="1">
-          <a:scrgbClr r="0" g="0" b="0"/>
-        </a:fillRef>
-        <a:effectRef idx="0">
-          <a:scrgbClr r="0" g="0" b="0"/>
-        </a:effectRef>
-        <a:fontRef idx="minor">
-          <a:schemeClr val="lt1"/>
-        </a:fontRef>
-      </dsp:style>
-    </dsp:sp>
-    <dsp:sp modelId="{A1CB4A09-0028-7744-B29B-D5D8B411F83C}">
-      <dsp:nvSpPr>
-        <dsp:cNvPr id="0" name=""/>
-        <dsp:cNvSpPr/>
-      </dsp:nvSpPr>
-      <dsp:spPr>
-        <a:xfrm>
-          <a:off x="3192849" y="2836947"/>
-          <a:ext cx="2747171" cy="1744453"/>
-        </a:xfrm>
-        <a:prstGeom prst="roundRect">
-          <a:avLst>
-            <a:gd name="adj" fmla="val 10000"/>
-          </a:avLst>
-        </a:prstGeom>
-        <a:solidFill>
-          <a:schemeClr val="lt1">
-            <a:alpha val="90000"/>
-            <a:hueOff val="0"/>
-            <a:satOff val="0"/>
-            <a:lumOff val="0"/>
-            <a:alphaOff val="0"/>
-          </a:schemeClr>
-        </a:solidFill>
-        <a:ln w="12700" cap="flat" cmpd="sng" algn="ctr">
-          <a:solidFill>
-            <a:schemeClr val="accent1">
-              <a:hueOff val="0"/>
-              <a:satOff val="0"/>
-              <a:lumOff val="0"/>
-              <a:alphaOff val="0"/>
-            </a:schemeClr>
-          </a:solidFill>
-          <a:prstDash val="solid"/>
-          <a:miter lim="800000"/>
-        </a:ln>
-        <a:effectLst/>
-      </dsp:spPr>
-      <dsp:style>
-        <a:lnRef idx="2">
-          <a:scrgbClr r="0" g="0" b="0"/>
-        </a:lnRef>
-        <a:fillRef idx="1">
-          <a:scrgbClr r="0" g="0" b="0"/>
-        </a:fillRef>
-        <a:effectRef idx="0">
-          <a:scrgbClr r="0" g="0" b="0"/>
-        </a:effectRef>
-        <a:fontRef idx="minor"/>
-      </dsp:style>
-      <dsp:txBody>
-        <a:bodyPr spcFirstLastPara="0" vert="horz" wrap="square" lIns="99060" tIns="99060" rIns="99060" bIns="99060" numCol="1" spcCol="1270" anchor="ctr" anchorCtr="0">
-          <a:noAutofit/>
-        </a:bodyPr>
-        <a:lstStyle/>
-        <a:p>
-          <a:pPr marL="0" lvl="0" indent="0" algn="ctr" defTabSz="1155700">
-            <a:lnSpc>
-              <a:spcPct val="90000"/>
-            </a:lnSpc>
-            <a:spcBef>
-              <a:spcPct val="0"/>
-            </a:spcBef>
-            <a:spcAft>
-              <a:spcPct val="35000"/>
-            </a:spcAft>
-            <a:buNone/>
-          </a:pPr>
-          <a:r>
-            <a:rPr lang="en-US" sz="2600" kern="1200"/>
-            <a:t>Written proposal up to 3 pages </a:t>
-          </a:r>
-        </a:p>
-      </dsp:txBody>
-      <dsp:txXfrm>
-        <a:off x="3243942" y="2888040"/>
-        <a:ext cx="2644985" cy="1642267"/>
-      </dsp:txXfrm>
-    </dsp:sp>
-    <dsp:sp modelId="{471A6F35-2235-D64F-83A2-60F527FC5520}">
-      <dsp:nvSpPr>
-        <dsp:cNvPr id="0" name=""/>
-        <dsp:cNvSpPr/>
-      </dsp:nvSpPr>
-      <dsp:spPr>
-        <a:xfrm>
-          <a:off x="6245262" y="2546967"/>
-          <a:ext cx="2747171" cy="1744453"/>
-        </a:xfrm>
-        <a:prstGeom prst="roundRect">
-          <a:avLst>
-            <a:gd name="adj" fmla="val 10000"/>
-          </a:avLst>
-        </a:prstGeom>
-        <a:solidFill>
-          <a:schemeClr val="accent1">
-            <a:hueOff val="0"/>
-            <a:satOff val="0"/>
-            <a:lumOff val="0"/>
-            <a:alphaOff val="0"/>
-          </a:schemeClr>
-        </a:solidFill>
-        <a:ln w="12700" cap="flat" cmpd="sng" algn="ctr">
-          <a:solidFill>
-            <a:schemeClr val="lt1">
-              <a:hueOff val="0"/>
-              <a:satOff val="0"/>
-              <a:lumOff val="0"/>
-              <a:alphaOff val="0"/>
-            </a:schemeClr>
-          </a:solidFill>
-          <a:prstDash val="solid"/>
-          <a:miter lim="800000"/>
-        </a:ln>
-        <a:effectLst/>
-      </dsp:spPr>
-      <dsp:style>
-        <a:lnRef idx="2">
-          <a:scrgbClr r="0" g="0" b="0"/>
-        </a:lnRef>
-        <a:fillRef idx="1">
-          <a:scrgbClr r="0" g="0" b="0"/>
-        </a:fillRef>
-        <a:effectRef idx="0">
-          <a:scrgbClr r="0" g="0" b="0"/>
-        </a:effectRef>
-        <a:fontRef idx="minor">
-          <a:schemeClr val="lt1"/>
-        </a:fontRef>
-      </dsp:style>
-    </dsp:sp>
-    <dsp:sp modelId="{C092CCCA-0FE0-7F43-94EB-D054F8001BFC}">
-      <dsp:nvSpPr>
-        <dsp:cNvPr id="0" name=""/>
-        <dsp:cNvSpPr/>
-      </dsp:nvSpPr>
-      <dsp:spPr>
-        <a:xfrm>
-          <a:off x="6550503" y="2836947"/>
-          <a:ext cx="2747171" cy="1744453"/>
-        </a:xfrm>
-        <a:prstGeom prst="roundRect">
-          <a:avLst>
-            <a:gd name="adj" fmla="val 10000"/>
-          </a:avLst>
-        </a:prstGeom>
-        <a:solidFill>
-          <a:schemeClr val="lt1">
-            <a:alpha val="90000"/>
-            <a:hueOff val="0"/>
-            <a:satOff val="0"/>
-            <a:lumOff val="0"/>
-            <a:alphaOff val="0"/>
-          </a:schemeClr>
-        </a:solidFill>
-        <a:ln w="12700" cap="flat" cmpd="sng" algn="ctr">
-          <a:solidFill>
-            <a:schemeClr val="accent1">
-              <a:hueOff val="0"/>
-              <a:satOff val="0"/>
-              <a:lumOff val="0"/>
-              <a:alphaOff val="0"/>
-            </a:schemeClr>
-          </a:solidFill>
-          <a:prstDash val="solid"/>
-          <a:miter lim="800000"/>
-        </a:ln>
-        <a:effectLst/>
-      </dsp:spPr>
-      <dsp:style>
-        <a:lnRef idx="2">
-          <a:scrgbClr r="0" g="0" b="0"/>
-        </a:lnRef>
-        <a:fillRef idx="1">
-          <a:scrgbClr r="0" g="0" b="0"/>
-        </a:fillRef>
-        <a:effectRef idx="0">
-          <a:scrgbClr r="0" g="0" b="0"/>
-        </a:effectRef>
-        <a:fontRef idx="minor"/>
-      </dsp:style>
-      <dsp:txBody>
-        <a:bodyPr spcFirstLastPara="0" vert="horz" wrap="square" lIns="99060" tIns="99060" rIns="99060" bIns="99060" numCol="1" spcCol="1270" anchor="ctr" anchorCtr="0">
-          <a:noAutofit/>
-        </a:bodyPr>
-        <a:lstStyle/>
-        <a:p>
-          <a:pPr marL="0" lvl="0" indent="0" algn="ctr" defTabSz="1155700">
-            <a:lnSpc>
-              <a:spcPct val="90000"/>
-            </a:lnSpc>
-            <a:spcBef>
-              <a:spcPct val="0"/>
-            </a:spcBef>
-            <a:spcAft>
-              <a:spcPct val="35000"/>
-            </a:spcAft>
-            <a:buNone/>
-          </a:pPr>
-          <a:r>
-            <a:rPr lang="en-US" sz="2600" kern="1200"/>
-            <a:t>Proposals are due before March 20</a:t>
-          </a:r>
-          <a:r>
-            <a:rPr lang="en-US" sz="2600" kern="1200" baseline="30000"/>
-            <a:t>th</a:t>
-          </a:r>
-          <a:endParaRPr lang="en-US" sz="2600" kern="1200"/>
-        </a:p>
-      </dsp:txBody>
-      <dsp:txXfrm>
-        <a:off x="6601596" y="2888040"/>
-        <a:ext cx="2644985" cy="1642267"/>
-      </dsp:txXfrm>
-    </dsp:sp>
-  </dsp:spTree>
-</dsp:drawing>
+<file path=ppt/diagrams/layout1.xml><?xml version="1.0" encoding="utf-8"?>
+<dgm:layoutDef xmlns:dgm="http://schemas.openxmlformats.org/drawingml/2006/diagram" xmlns:a="http://schemas.openxmlformats.org/drawingml/2006/main" uniqueId="urn:microsoft.com/office/officeart/2008/layout/LinedList">
+  <dgm:title val=""/>
+  <dgm:desc val=""/>
+  <dgm:catLst>
+    <dgm:cat type="hierarchy" pri="8000"/>
+    <dgm:cat type="list" pri="2500"/>
+  </dgm:catLst>
+  <dgm:sampData>
+    <dgm:dataModel>
+      <dgm:ptLst>
+        <dgm:pt modelId="0" type="doc"/>
+        <dgm:pt modelId="1">
+          <dgm:prSet phldr="1"/>
+        </dgm:pt>
+        <dgm:pt modelId="11">
+          <dgm:prSet phldr="1"/>
+        </dgm:pt>
+        <dgm:pt modelId="12">
+          <dgm:prSet phldr="1"/>
+        </dgm:pt>
+        <dgm:pt modelId="13">
+          <dgm:prSet phldr="1"/>
+        </dgm:pt>
+      </dgm:ptLst>
+      <dgm:cxnLst>
+        <dgm:cxn modelId="2" srcId="0" destId="1" srcOrd="0" destOrd="0"/>
+        <dgm:cxn modelId="3" srcId="1" destId="11" srcOrd="0" destOrd="0"/>
+        <dgm:cxn modelId="4" srcId="1" destId="12" srcOrd="1" destOrd="0"/>
+        <dgm:cxn modelId="5" srcId="1" destId="13" srcOrd="2" destOrd="0"/>
+      </dgm:cxnLst>
+      <dgm:bg/>
+      <dgm:whole/>
+    </dgm:dataModel>
+  </dgm:sampData>
+  <dgm:styleData>
+    <dgm:dataModel>
+      <dgm:ptLst>
+        <dgm:pt modelId="0" type="doc"/>
+        <dgm:pt modelId="1">
+          <dgm:prSet phldr="1"/>
+        </dgm:pt>
+        <dgm:pt modelId="11">
+          <dgm:prSet phldr="1"/>
+        </dgm:pt>
+        <dgm:pt modelId="12">
+          <dgm:prSet phldr="1"/>
+        </dgm:pt>
+      </dgm:ptLst>
+      <dgm:cxnLst>
+        <dgm:cxn modelId="2" srcId="0" destId="1" srcOrd="0" destOrd="0"/>
+        <dgm:cxn modelId="3" srcId="1" destId="11" srcOrd="0" destOrd="0"/>
+        <dgm:cxn modelId="4" srcId="1" destId="12" srcOrd="1" destOrd="0"/>
+      </dgm:cxnLst>
+      <dgm:bg/>
+      <dgm:whole/>
+    </dgm:dataModel>
+  </dgm:styleData>
+  <dgm:clrData>
+    <dgm:dataModel>
+      <dgm:ptLst>
+        <dgm:pt modelId="0" type="doc"/>
+        <dgm:pt modelId="1">
+          <dgm:prSet phldr="1"/>
+        </dgm:pt>
+        <dgm:pt modelId="11">
+          <dgm:prSet phldr="1"/>
+        </dgm:pt>
+        <dgm:pt modelId="12">
+          <dgm:prSet phldr="1"/>
+        </dgm:pt>
+      </dgm:ptLst>
+      <dgm:cxnLst>
+        <dgm:cxn modelId="2" srcId="0" destId="1" srcOrd="0" destOrd="0"/>
+        <dgm:cxn modelId="3" srcId="1" destId="11" srcOrd="0" destOrd="0"/>
+        <dgm:cxn modelId="4" srcId="1" destId="12" srcOrd="1" destOrd="0"/>
+      </dgm:cxnLst>
+      <dgm:bg/>
+      <dgm:whole/>
+    </dgm:dataModel>
+  </dgm:clrData>
+  <dgm:layoutNode name="vert0">
+    <dgm:varLst>
+      <dgm:dir/>
+      <dgm:animOne val="branch"/>
+      <dgm:animLvl val="lvl"/>
+    </dgm:varLst>
+    <dgm:choose name="Name0">
+      <dgm:if name="Name1" func="var" arg="dir" op="equ" val="norm">
+        <dgm:alg type="lin">
+          <dgm:param type="linDir" val="fromT"/>
+          <dgm:param type="nodeHorzAlign" val="l"/>
+        </dgm:alg>
+      </dgm:if>
+      <dgm:else name="Name2">
+        <dgm:alg type="lin">
+          <dgm:param type="linDir" val="fromT"/>
+          <dgm:param type="nodeHorzAlign" val="r"/>
+        </dgm:alg>
+      </dgm:else>
+    </dgm:choose>
+    <dgm:shape xmlns:r="http://schemas.openxmlformats.org/officeDocument/2006/relationships" r:blip="">
+      <dgm:adjLst/>
+    </dgm:shape>
+    <dgm:presOf/>
+    <dgm:constrLst>
+      <dgm:constr type="w" for="ch" forName="horz1" refType="w"/>
+      <dgm:constr type="h" for="ch" forName="horz1" refType="h"/>
+      <dgm:constr type="h" for="des" forName="vert1" refType="h"/>
+      <dgm:constr type="h" for="des" forName="tx1" refType="h"/>
+      <dgm:constr type="h" for="des" forName="horz2" refType="h"/>
+      <dgm:constr type="h" for="des" forName="vert2" refType="h"/>
+      <dgm:constr type="h" for="des" forName="horz3" refType="h"/>
+      <dgm:constr type="h" for="des" forName="vert3" refType="h"/>
+      <dgm:constr type="h" for="des" forName="horz4" refType="h"/>
+      <dgm:constr type="h" for="des" ptType="node" refType="h"/>
+      <dgm:constr type="primFontSz" for="des" forName="tx1" op="equ" val="65"/>
+      <dgm:constr type="primFontSz" for="des" forName="tx2" op="equ" val="65"/>
+      <dgm:constr type="primFontSz" for="des" forName="tx3" op="equ" val="65"/>
+      <dgm:constr type="primFontSz" for="des" forName="tx4" op="equ" val="65"/>
+      <dgm:constr type="w" for="des" forName="thickLine" refType="w"/>
+      <dgm:constr type="h" for="des" forName="thickLine"/>
+      <dgm:constr type="h" for="des" forName="thinLine1"/>
+      <dgm:constr type="h" for="des" forName="thinLine2b"/>
+      <dgm:constr type="h" for="des" forName="thinLine3"/>
+      <dgm:constr type="h" for="des" forName="vertSpace2a" refType="h" fact="0.05"/>
+      <dgm:constr type="h" for="des" forName="vertSpace2b" refType="h" refFor="des" refForName="vertSpace2a"/>
+    </dgm:constrLst>
+    <dgm:forEach name="Name3" axis="ch" ptType="node">
+      <dgm:layoutNode name="thickLine" styleLbl="alignNode1">
+        <dgm:alg type="sp"/>
+        <dgm:shape xmlns:r="http://schemas.openxmlformats.org/officeDocument/2006/relationships" type="line" r:blip="">
+          <dgm:adjLst/>
+        </dgm:shape>
+        <dgm:presOf/>
+      </dgm:layoutNode>
+      <dgm:layoutNode name="horz1">
+        <dgm:choose name="Name4">
+          <dgm:if name="Name5" func="var" arg="dir" op="equ" val="norm">
+            <dgm:alg type="lin">
+              <dgm:param type="linDir" val="fromL"/>
+              <dgm:param type="nodeVertAlign" val="t"/>
+            </dgm:alg>
+          </dgm:if>
+          <dgm:else name="Name6">
+            <dgm:alg type="lin">
+              <dgm:param type="linDir" val="fromR"/>
+              <dgm:param type="nodeVertAlign" val="t"/>
+            </dgm:alg>
+          </dgm:else>
+        </dgm:choose>
+        <dgm:shape xmlns:r="http://schemas.openxmlformats.org/officeDocument/2006/relationships" r:blip="">
+          <dgm:adjLst/>
+        </dgm:shape>
+        <dgm:presOf/>
+        <dgm:choose name="Name7">
+          <dgm:if name="Name8" axis="root des" func="maxDepth" op="equ" val="1">
+            <dgm:constrLst>
+              <dgm:constr type="w" for="ch" forName="tx1" refType="w"/>
+            </dgm:constrLst>
+          </dgm:if>
+          <dgm:if name="Name9" axis="root des" func="maxDepth" op="equ" val="2">
+            <dgm:constrLst>
+              <dgm:constr type="w" for="ch" forName="tx1" refType="w" fact="0.2"/>
+              <dgm:constr type="w" for="des" forName="tx2" refType="w" fact="0.785"/>
+              <dgm:constr type="w" for="des" forName="horzSpace2" refType="w" fact="0.015"/>
+              <dgm:constr type="w" for="des" forName="thinLine2b" refType="w" fact="0.8"/>
+            </dgm:constrLst>
+          </dgm:if>
+          <dgm:if name="Name10" axis="root des" func="maxDepth" op="equ" val="3">
+            <dgm:constrLst>
+              <dgm:constr type="w" for="ch" forName="tx1" refType="w" fact="0.2"/>
+              <dgm:constr type="w" for="des" forName="tx2" refType="w" fact="0.385"/>
+              <dgm:constr type="w" for="des" forName="tx3" refType="w" fact="0.385"/>
+              <dgm:constr type="w" for="des" forName="horzSpace2" refType="w" fact="0.015"/>
+              <dgm:constr type="w" for="des" forName="horzSpace3" refType="w" fact="0.015"/>
+              <dgm:constr type="w" for="des" forName="thinLine2b" refType="w" fact="0.8"/>
+              <dgm:constr type="w" for="des" forName="thinLine3" refType="w" fact="0.385"/>
+            </dgm:constrLst>
+          </dgm:if>
+          <dgm:if name="Name11" axis="root des" func="maxDepth" op="gte" val="4">
+            <dgm:constrLst>
+              <dgm:constr type="w" for="ch" forName="tx1" refType="w" fact="0.2"/>
+              <dgm:constr type="w" for="des" forName="tx2" refType="w" fact="0.2516"/>
+              <dgm:constr type="w" for="des" forName="tx3" refType="w" fact="0.2516"/>
+              <dgm:constr type="w" for="des" forName="tx4" refType="w" fact="0.2516"/>
+              <dgm:constr type="w" for="des" forName="horzSpace2" refType="w" fact="0.015"/>
+              <dgm:constr type="w" for="des" forName="horzSpace3" refType="w" fact="0.015"/>
+              <dgm:constr type="w" for="des" forName="horzSpace4" refType="w" fact="0.015"/>
+              <dgm:constr type="w" for="des" forName="thinLine2b" refType="w" fact="0.8"/>
+              <dgm:constr type="w" for="des" forName="thinLine3" refType="w" fact="0.5332"/>
+            </dgm:constrLst>
+          </dgm:if>
+          <dgm:else name="Name12"/>
+        </dgm:choose>
+        <dgm:layoutNode name="tx1" styleLbl="revTx">
+          <dgm:alg type="tx">
+            <dgm:param type="parTxLTRAlign" val="l"/>
+            <dgm:param type="parTxRTLAlign" val="r"/>
+            <dgm:param type="txAnchorVert" val="t"/>
+          </dgm:alg>
+          <dgm:shape xmlns:r="http://schemas.openxmlformats.org/officeDocument/2006/relationships" type="rect" r:blip="">
+            <dgm:adjLst/>
+          </dgm:shape>
+          <dgm:presOf axis="self"/>
+          <dgm:constrLst>
+            <dgm:constr type="tMarg" refType="primFontSz" fact="0.3"/>
+            <dgm:constr type="bMarg" refType="primFontSz" fact="0.3"/>
+            <dgm:constr type="lMarg" refType="primFontSz" fact="0.3"/>
+            <dgm:constr type="rMarg" refType="primFontSz" fact="0.3"/>
+          </dgm:constrLst>
+          <dgm:ruleLst>
+            <dgm:rule type="primFontSz" val="5" fact="NaN" max="NaN"/>
+          </dgm:ruleLst>
+        </dgm:layoutNode>
+        <dgm:layoutNode name="vert1">
+          <dgm:choose name="Name13">
+            <dgm:if name="Name14" func="var" arg="dir" op="equ" val="norm">
+              <dgm:alg type="lin">
+                <dgm:param type="linDir" val="fromT"/>
+                <dgm:param type="nodeHorzAlign" val="l"/>
+              </dgm:alg>
+            </dgm:if>
+            <dgm:else name="Name15">
+              <dgm:alg type="lin">
+                <dgm:param type="linDir" val="fromT"/>
+                <dgm:param type="nodeHorzAlign" val="r"/>
+              </dgm:alg>
+            </dgm:else>
+          </dgm:choose>
+          <dgm:shape xmlns:r="http://schemas.openxmlformats.org/officeDocument/2006/relationships" r:blip="">
+            <dgm:adjLst/>
+          </dgm:shape>
+          <dgm:presOf/>
+          <dgm:forEach name="Name16" axis="ch" ptType="node">
+            <dgm:choose name="Name17">
+              <dgm:if name="Name18" axis="self" ptType="node" func="pos" op="equ" val="1">
+                <dgm:layoutNode name="vertSpace2a">
+                  <dgm:alg type="sp"/>
+                  <dgm:shape xmlns:r="http://schemas.openxmlformats.org/officeDocument/2006/relationships" r:blip="">
+                    <dgm:adjLst/>
+                  </dgm:shape>
+                  <dgm:presOf/>
+                </dgm:layoutNode>
+              </dgm:if>
+              <dgm:else name="Name19"/>
+            </dgm:choose>
+            <dgm:layoutNode name="horz2">
+              <dgm:choose name="Name20">
+                <dgm:if name="Name21" func="var" arg="dir" op="equ" val="norm">
+                  <dgm:alg type="lin">
+                    <dgm:param type="linDir" val="fromL"/>
+                    <dgm:param type="nodeVertAlign" val="t"/>
+                  </dgm:alg>
+                </dgm:if>
+                <dgm:else name="Name22">
+                  <dgm:alg type="lin">
+                    <dgm:param type="linDir" val="fromR"/>
+                    <dgm:param type="nodeVertAlign" val="t"/>
+                  </dgm:alg>
+                </dgm:else>
+              </dgm:choose>
+              <dgm:shape xmlns:r="http://schemas.openxmlformats.org/officeDocument/2006/relationships" r:blip="">
+                <dgm:adjLst/>
+              </dgm:shape>
+              <dgm:presOf/>
+              <dgm:layoutNode name="horzSpace2">
+                <dgm:alg type="sp"/>
+                <dgm:shape xmlns:r="http://schemas.openxmlformats.org/officeDocument/2006/relationships" r:blip="">
+                  <dgm:adjLst/>
+                </dgm:shape>
+                <dgm:presOf/>
+              </dgm:layoutNode>
+              <dgm:layoutNode name="tx2" styleLbl="revTx">
+                <dgm:alg type="tx">
+                  <dgm:param type="parTxLTRAlign" val="l"/>
+                  <dgm:param type="parTxRTLAlign" val="r"/>
+                  <dgm:param type="txAnchorVert" val="t"/>
+                </dgm:alg>
+                <dgm:shape xmlns:r="http://schemas.openxmlformats.org/officeDocument/2006/relationships" type="rect" r:blip="">
+                  <dgm:adjLst/>
+                </dgm:shape>
+                <dgm:presOf axis="self"/>
+                <dgm:constrLst>
+                  <dgm:constr type="tMarg" refType="primFontSz" fact="0.3"/>
+                  <dgm:constr type="bMarg" refType="primFontSz" fact="0.3"/>
+                  <dgm:constr type="lMarg" refType="primFontSz" fact="0.3"/>
+                  <dgm:constr type="rMarg" refType="primFontSz" fact="0.3"/>
+                </dgm:constrLst>
+                <dgm:ruleLst>
+                  <dgm:rule type="primFontSz" val="5" fact="NaN" max="NaN"/>
+                </dgm:ruleLst>
+              </dgm:layoutNode>
+              <dgm:layoutNode name="vert2">
+                <dgm:choose name="Name23">
+                  <dgm:if name="Name24" func="var" arg="dir" op="equ" val="norm">
+                    <dgm:alg type="lin">
+                      <dgm:param type="linDir" val="fromT"/>
+                      <dgm:param type="nodeHorzAlign" val="l"/>
+                    </dgm:alg>
+                  </dgm:if>
+                  <dgm:else name="Name25">
+                    <dgm:alg type="lin">
+                      <dgm:param type="linDir" val="fromT"/>
+                      <dgm:param type="nodeHorzAlign" val="r"/>
+                    </dgm:alg>
+                  </dgm:else>
+                </dgm:choose>
+                <dgm:shape xmlns:r="http://schemas.openxmlformats.org/officeDocument/2006/relationships" r:blip="">
+                  <dgm:adjLst/>
+                </dgm:shape>
+                <dgm:presOf/>
+                <dgm:forEach name="Name26" axis="ch" ptType="node">
+                  <dgm:layoutNode name="horz3">
+                    <dgm:choose name="Name27">
+                      <dgm:if name="Name28" func="var" arg="dir" op="equ" val="norm">
+                        <dgm:alg type="lin">
+                          <dgm:param type="linDir" val="fromL"/>
+                          <dgm:param type="nodeVertAlign" val="t"/>
+                        </dgm:alg>
+                      </dgm:if>
+                      <dgm:else name="Name29">
+                        <dgm:alg type="lin">
+                          <dgm:param type="linDir" val="fromR"/>
+                          <dgm:param type="nodeVertAlign" val="t"/>
+                        </dgm:alg>
+                      </dgm:else>
+                    </dgm:choose>
+                    <dgm:shape xmlns:r="http://schemas.openxmlformats.org/officeDocument/2006/relationships" r:blip="">
+                      <dgm:adjLst/>
+                    </dgm:shape>
+                    <dgm:presOf/>
+                    <dgm:layoutNode name="horzSpace3">
+                      <dgm:alg type="sp"/>
+                      <dgm:shape xmlns:r="http://schemas.openxmlformats.org/officeDocument/2006/relationships" r:blip="">
+                        <dgm:adjLst/>
+                      </dgm:shape>
+                      <dgm:presOf/>
+                    </dgm:layoutNode>
+                    <dgm:layoutNode name="tx3" styleLbl="revTx">
+                      <dgm:alg type="tx">
+                        <dgm:param type="parTxLTRAlign" val="l"/>
+                        <dgm:param type="parTxRTLAlign" val="r"/>
+                        <dgm:param type="txAnchorVert" val="t"/>
+                      </dgm:alg>
+                      <dgm:shape xmlns:r="http://schemas.openxmlformats.org/officeDocument/2006/relationships" type="rect" r:blip="">
+                        <dgm:adjLst/>
+                      </dgm:shape>
+                      <dgm:presOf axis="self"/>
+                      <dgm:constrLst>
+                        <dgm:constr type="tMarg" refType="primFontSz" fact="0.3"/>
+                        <dgm:constr type="bMarg" refType="primFontSz" fact="0.3"/>
+                        <dgm:constr type="lMarg" refType="primFontSz" fact="0.3"/>
+                        <dgm:constr type="rMarg" refType="primFontSz" fact="0.3"/>
+                      </dgm:constrLst>
+                      <dgm:ruleLst>
+                        <dgm:rule type="primFontSz" val="5" fact="NaN" max="NaN"/>
+                      </dgm:ruleLst>
+                    </dgm:layoutNode>
+                    <dgm:layoutNode name="vert3">
+                      <dgm:choose name="Name30">
+                        <dgm:if name="Name31" func="var" arg="dir" op="equ" val="norm">
+                          <dgm:alg type="lin">
+                            <dgm:param type="linDir" val="fromT"/>
+                            <dgm:param type="nodeHorzAlign" val="l"/>
+                          </dgm:alg>
+                        </dgm:if>
+                        <dgm:else name="Name32">
+                          <dgm:alg type="lin">
+                            <dgm:param type="linDir" val="fromT"/>
+                            <dgm:param type="nodeHorzAlign" val="r"/>
+                          </dgm:alg>
+                        </dgm:else>
+                      </dgm:choose>
+                      <dgm:shape xmlns:r="http://schemas.openxmlformats.org/officeDocument/2006/relationships" r:blip="">
+                        <dgm:adjLst/>
+                      </dgm:shape>
+                      <dgm:presOf/>
+                      <dgm:forEach name="Name33" axis="ch" ptType="node">
+                        <dgm:layoutNode name="horz4">
+                          <dgm:choose name="Name34">
+                            <dgm:if name="Name35" func="var" arg="dir" op="equ" val="norm">
+                              <dgm:alg type="lin">
+                                <dgm:param type="linDir" val="fromL"/>
+                                <dgm:param type="nodeVertAlign" val="t"/>
+                              </dgm:alg>
+                            </dgm:if>
+                            <dgm:else name="Name36">
+                              <dgm:alg type="lin">
+                                <dgm:param type="linDir" val="fromR"/>
+                                <dgm:param type="nodeVertAlign" val="t"/>
+                              </dgm:alg>
+                            </dgm:else>
+                          </dgm:choose>
+                          <dgm:shape xmlns:r="http://schemas.openxmlformats.org/officeDocument/2006/relationships" r:blip="">
+                            <dgm:adjLst/>
+                          </dgm:shape>
+                          <dgm:presOf/>
+                          <dgm:layoutNode name="horzSpace4">
+                            <dgm:alg type="sp"/>
+                            <dgm:shape xmlns:r="http://schemas.openxmlformats.org/officeDocument/2006/relationships" r:blip="">
+                              <dgm:adjLst/>
+                            </dgm:shape>
+                            <dgm:presOf/>
+                          </dgm:layoutNode>
+                          <dgm:layoutNode name="tx4" styleLbl="revTx">
+                            <dgm:varLst>
+                              <dgm:bulletEnabled val="1"/>
+                            </dgm:varLst>
+                            <dgm:alg type="tx">
+                              <dgm:param type="parTxLTRAlign" val="l"/>
+                              <dgm:param type="parTxRTLAlign" val="r"/>
+                              <dgm:param type="txAnchorVert" val="t"/>
+                            </dgm:alg>
+                            <dgm:shape xmlns:r="http://schemas.openxmlformats.org/officeDocument/2006/relationships" type="rect" r:blip="">
+                              <dgm:adjLst/>
+                            </dgm:shape>
+                            <dgm:presOf axis="desOrSelf" ptType="node"/>
+                            <dgm:constrLst>
+                              <dgm:constr type="tMarg" refType="primFontSz" fact="0.3"/>
+                              <dgm:constr type="bMarg" refType="primFontSz" fact="0.3"/>
+                              <dgm:constr type="lMarg" refType="primFontSz" fact="0.3"/>
+                              <dgm:constr type="rMarg" refType="primFontSz" fact="0.3"/>
+                            </dgm:constrLst>
+                            <dgm:ruleLst>
+                              <dgm:rule type="primFontSz" val="5" fact="NaN" max="NaN"/>
+                            </dgm:ruleLst>
+                          </dgm:layoutNode>
+                        </dgm:layoutNode>
+                      </dgm:forEach>
+                    </dgm:layoutNode>
+                  </dgm:layoutNode>
+                  <dgm:forEach name="Name37" axis="followSib" ptType="sibTrans" cnt="1">
+                    <dgm:layoutNode name="thinLine3" styleLbl="callout">
+                      <dgm:alg type="sp"/>
+                      <dgm:shape xmlns:r="http://schemas.openxmlformats.org/officeDocument/2006/relationships" type="line" r:blip="">
+                        <dgm:adjLst/>
+                      </dgm:shape>
+                      <dgm:presOf/>
+                    </dgm:layoutNode>
+                  </dgm:forEach>
+                </dgm:forEach>
+              </dgm:layoutNode>
+            </dgm:layoutNode>
+            <dgm:layoutNode name="thinLine2b" styleLbl="callout">
+              <dgm:alg type="sp"/>
+              <dgm:shape xmlns:r="http://schemas.openxmlformats.org/officeDocument/2006/relationships" type="line" r:blip="">
+                <dgm:adjLst/>
+              </dgm:shape>
+              <dgm:presOf/>
+            </dgm:layoutNode>
+            <dgm:layoutNode name="vertSpace2b">
+              <dgm:alg type="sp"/>
+              <dgm:shape xmlns:r="http://schemas.openxmlformats.org/officeDocument/2006/relationships" r:blip="">
+                <dgm:adjLst/>
+              </dgm:shape>
+              <dgm:presOf/>
+            </dgm:layoutNode>
+          </dgm:forEach>
+        </dgm:layoutNode>
+      </dgm:layoutNode>
+    </dgm:forEach>
+  </dgm:layoutNode>
+</dgm:layoutDef>
 </file>
 
-<file path=ppt/diagrams/layout1.xml><?xml version="1.0" encoding="utf-8"?>
+<file path=ppt/diagrams/layout2.xml><?xml version="1.0" encoding="utf-8"?>
 <dgm:layoutDef xmlns:dgm="http://schemas.openxmlformats.org/drawingml/2006/diagram" xmlns:a="http://schemas.openxmlformats.org/drawingml/2006/main" uniqueId="urn:microsoft.com/office/officeart/2018/2/layout/IconLabelList">
   <dgm:title val="Icon Label List"/>
   <dgm:desc val="Use to show non-sequential or grouped chunks of information accompanied by a related visuals. Works best with icons or small pictures with short text captions."/>
@@ -3628,569 +4182,6 @@
 </dgm:layoutDef>
 </file>
 
-<file path=ppt/diagrams/layout2.xml><?xml version="1.0" encoding="utf-8"?>
-<dgm:layoutDef xmlns:dgm="http://schemas.openxmlformats.org/drawingml/2006/diagram" xmlns:a="http://schemas.openxmlformats.org/drawingml/2006/main" uniqueId="urn:microsoft.com/office/officeart/2005/8/layout/hierarchy1">
-  <dgm:title val=""/>
-  <dgm:desc val=""/>
-  <dgm:catLst>
-    <dgm:cat type="hierarchy" pri="2000"/>
-  </dgm:catLst>
-  <dgm:sampData>
-    <dgm:dataModel>
-      <dgm:ptLst>
-        <dgm:pt modelId="0" type="doc"/>
-        <dgm:pt modelId="1">
-          <dgm:prSet phldr="1"/>
-        </dgm:pt>
-        <dgm:pt modelId="2">
-          <dgm:prSet phldr="1"/>
-        </dgm:pt>
-        <dgm:pt modelId="21">
-          <dgm:prSet phldr="1"/>
-        </dgm:pt>
-        <dgm:pt modelId="22">
-          <dgm:prSet phldr="1"/>
-        </dgm:pt>
-        <dgm:pt modelId="3">
-          <dgm:prSet phldr="1"/>
-        </dgm:pt>
-        <dgm:pt modelId="31">
-          <dgm:prSet phldr="1"/>
-        </dgm:pt>
-      </dgm:ptLst>
-      <dgm:cxnLst>
-        <dgm:cxn modelId="4" srcId="0" destId="1" srcOrd="0" destOrd="0"/>
-        <dgm:cxn modelId="5" srcId="1" destId="2" srcOrd="0" destOrd="0"/>
-        <dgm:cxn modelId="6" srcId="1" destId="3" srcOrd="1" destOrd="0"/>
-        <dgm:cxn modelId="23" srcId="2" destId="21" srcOrd="0" destOrd="0"/>
-        <dgm:cxn modelId="24" srcId="2" destId="22" srcOrd="1" destOrd="0"/>
-        <dgm:cxn modelId="33" srcId="3" destId="31" srcOrd="0" destOrd="0"/>
-      </dgm:cxnLst>
-      <dgm:bg/>
-      <dgm:whole/>
-    </dgm:dataModel>
-  </dgm:sampData>
-  <dgm:styleData>
-    <dgm:dataModel>
-      <dgm:ptLst>
-        <dgm:pt modelId="0" type="doc"/>
-        <dgm:pt modelId="1"/>
-        <dgm:pt modelId="11"/>
-        <dgm:pt modelId="12"/>
-      </dgm:ptLst>
-      <dgm:cxnLst>
-        <dgm:cxn modelId="2" srcId="0" destId="1" srcOrd="0" destOrd="0"/>
-        <dgm:cxn modelId="13" srcId="1" destId="11" srcOrd="0" destOrd="0"/>
-        <dgm:cxn modelId="14" srcId="1" destId="12" srcOrd="1" destOrd="0"/>
-      </dgm:cxnLst>
-      <dgm:bg/>
-      <dgm:whole/>
-    </dgm:dataModel>
-  </dgm:styleData>
-  <dgm:clrData>
-    <dgm:dataModel>
-      <dgm:ptLst>
-        <dgm:pt modelId="0" type="doc"/>
-        <dgm:pt modelId="1"/>
-        <dgm:pt modelId="2"/>
-        <dgm:pt modelId="21"/>
-        <dgm:pt modelId="211"/>
-        <dgm:pt modelId="3"/>
-        <dgm:pt modelId="31"/>
-        <dgm:pt modelId="311"/>
-      </dgm:ptLst>
-      <dgm:cxnLst>
-        <dgm:cxn modelId="4" srcId="0" destId="1" srcOrd="0" destOrd="0"/>
-        <dgm:cxn modelId="5" srcId="1" destId="2" srcOrd="0" destOrd="0"/>
-        <dgm:cxn modelId="6" srcId="1" destId="3" srcOrd="1" destOrd="0"/>
-        <dgm:cxn modelId="23" srcId="2" destId="21" srcOrd="0" destOrd="0"/>
-        <dgm:cxn modelId="24" srcId="21" destId="211" srcOrd="0" destOrd="0"/>
-        <dgm:cxn modelId="33" srcId="3" destId="31" srcOrd="0" destOrd="0"/>
-        <dgm:cxn modelId="34" srcId="31" destId="311" srcOrd="0" destOrd="0"/>
-      </dgm:cxnLst>
-      <dgm:bg/>
-      <dgm:whole/>
-    </dgm:dataModel>
-  </dgm:clrData>
-  <dgm:layoutNode name="hierChild1">
-    <dgm:varLst>
-      <dgm:chPref val="1"/>
-      <dgm:dir/>
-      <dgm:animOne val="branch"/>
-      <dgm:animLvl val="lvl"/>
-      <dgm:resizeHandles/>
-    </dgm:varLst>
-    <dgm:choose name="Name0">
-      <dgm:if name="Name1" func="var" arg="dir" op="equ" val="norm">
-        <dgm:alg type="hierChild">
-          <dgm:param type="linDir" val="fromL"/>
-        </dgm:alg>
-      </dgm:if>
-      <dgm:else name="Name2">
-        <dgm:alg type="hierChild">
-          <dgm:param type="linDir" val="fromR"/>
-        </dgm:alg>
-      </dgm:else>
-    </dgm:choose>
-    <dgm:shape xmlns:r="http://schemas.openxmlformats.org/officeDocument/2006/relationships" r:blip="">
-      <dgm:adjLst/>
-    </dgm:shape>
-    <dgm:presOf/>
-    <dgm:constrLst>
-      <dgm:constr type="primFontSz" for="des" ptType="node" op="equ" val="65"/>
-      <dgm:constr type="w" for="des" forName="composite" refType="w"/>
-      <dgm:constr type="h" for="des" forName="composite" refType="w" refFor="des" refForName="composite" fact="0.667"/>
-      <dgm:constr type="w" for="des" forName="composite2" refType="w" refFor="des" refForName="composite"/>
-      <dgm:constr type="h" for="des" forName="composite2" refType="h" refFor="des" refForName="composite"/>
-      <dgm:constr type="w" for="des" forName="composite3" refType="w" refFor="des" refForName="composite"/>
-      <dgm:constr type="h" for="des" forName="composite3" refType="h" refFor="des" refForName="composite"/>
-      <dgm:constr type="w" for="des" forName="composite4" refType="w" refFor="des" refForName="composite"/>
-      <dgm:constr type="h" for="des" forName="composite4" refType="h" refFor="des" refForName="composite"/>
-      <dgm:constr type="w" for="des" forName="composite5" refType="w" refFor="des" refForName="composite"/>
-      <dgm:constr type="h" for="des" forName="composite5" refType="h" refFor="des" refForName="composite"/>
-      <dgm:constr type="sibSp" refType="w" refFor="des" refForName="composite" fact="0.1"/>
-      <dgm:constr type="sibSp" for="des" forName="hierChild2" refType="sibSp"/>
-      <dgm:constr type="sibSp" for="des" forName="hierChild3" refType="sibSp"/>
-      <dgm:constr type="sibSp" for="des" forName="hierChild4" refType="sibSp"/>
-      <dgm:constr type="sibSp" for="des" forName="hierChild5" refType="sibSp"/>
-      <dgm:constr type="sibSp" for="des" forName="hierChild6" refType="sibSp"/>
-      <dgm:constr type="sp" for="des" forName="hierRoot1" refType="h" refFor="des" refForName="composite" fact="0.25"/>
-      <dgm:constr type="sp" for="des" forName="hierRoot2" refType="sp" refFor="des" refForName="hierRoot1"/>
-      <dgm:constr type="sp" for="des" forName="hierRoot3" refType="sp" refFor="des" refForName="hierRoot1"/>
-      <dgm:constr type="sp" for="des" forName="hierRoot4" refType="sp" refFor="des" refForName="hierRoot1"/>
-      <dgm:constr type="sp" for="des" forName="hierRoot5" refType="sp" refFor="des" refForName="hierRoot1"/>
-    </dgm:constrLst>
-    <dgm:ruleLst/>
-    <dgm:forEach name="Name3" axis="ch">
-      <dgm:forEach name="Name4" axis="self" ptType="node">
-        <dgm:layoutNode name="hierRoot1">
-          <dgm:alg type="hierRoot"/>
-          <dgm:shape xmlns:r="http://schemas.openxmlformats.org/officeDocument/2006/relationships" r:blip="">
-            <dgm:adjLst/>
-          </dgm:shape>
-          <dgm:presOf/>
-          <dgm:constrLst>
-            <dgm:constr type="bendDist" for="des" ptType="parTrans" refType="sp" fact="0.5"/>
-          </dgm:constrLst>
-          <dgm:ruleLst/>
-          <dgm:layoutNode name="composite">
-            <dgm:alg type="composite"/>
-            <dgm:shape xmlns:r="http://schemas.openxmlformats.org/officeDocument/2006/relationships" r:blip="">
-              <dgm:adjLst/>
-            </dgm:shape>
-            <dgm:presOf/>
-            <dgm:constrLst>
-              <dgm:constr type="w" for="ch" forName="background" refType="w" fact="0.9"/>
-              <dgm:constr type="h" for="ch" forName="background" refType="w" refFor="ch" refForName="background" fact="0.635"/>
-              <dgm:constr type="t" for="ch" forName="background"/>
-              <dgm:constr type="l" for="ch" forName="background"/>
-              <dgm:constr type="w" for="ch" forName="text" refType="w" fact="0.9"/>
-              <dgm:constr type="h" for="ch" forName="text" refType="w" refFor="ch" refForName="text" fact="0.635"/>
-              <dgm:constr type="t" for="ch" forName="text" refType="w" fact="0.095"/>
-              <dgm:constr type="l" for="ch" forName="text" refType="w" fact="0.1"/>
-            </dgm:constrLst>
-            <dgm:ruleLst/>
-            <dgm:layoutNode name="background" styleLbl="node0" moveWith="text">
-              <dgm:alg type="sp"/>
-              <dgm:shape xmlns:r="http://schemas.openxmlformats.org/officeDocument/2006/relationships" type="roundRect" r:blip="">
-                <dgm:adjLst>
-                  <dgm:adj idx="1" val="0.1"/>
-                </dgm:adjLst>
-              </dgm:shape>
-              <dgm:presOf/>
-              <dgm:constrLst/>
-              <dgm:ruleLst/>
-            </dgm:layoutNode>
-            <dgm:layoutNode name="text" styleLbl="fgAcc0">
-              <dgm:varLst>
-                <dgm:chPref val="3"/>
-              </dgm:varLst>
-              <dgm:alg type="tx"/>
-              <dgm:shape xmlns:r="http://schemas.openxmlformats.org/officeDocument/2006/relationships" type="roundRect" r:blip="">
-                <dgm:adjLst>
-                  <dgm:adj idx="1" val="0.1"/>
-                </dgm:adjLst>
-              </dgm:shape>
-              <dgm:presOf axis="self"/>
-              <dgm:constrLst>
-                <dgm:constr type="tMarg" refType="primFontSz" fact="0.3"/>
-                <dgm:constr type="bMarg" refType="primFontSz" fact="0.3"/>
-                <dgm:constr type="lMarg" refType="primFontSz" fact="0.3"/>
-                <dgm:constr type="rMarg" refType="primFontSz" fact="0.3"/>
-              </dgm:constrLst>
-              <dgm:ruleLst>
-                <dgm:rule type="primFontSz" val="5" fact="NaN" max="NaN"/>
-              </dgm:ruleLst>
-            </dgm:layoutNode>
-          </dgm:layoutNode>
-          <dgm:layoutNode name="hierChild2">
-            <dgm:choose name="Name5">
-              <dgm:if name="Name6" func="var" arg="dir" op="equ" val="norm">
-                <dgm:alg type="hierChild">
-                  <dgm:param type="linDir" val="fromL"/>
-                </dgm:alg>
-              </dgm:if>
-              <dgm:else name="Name7">
-                <dgm:alg type="hierChild">
-                  <dgm:param type="linDir" val="fromR"/>
-                </dgm:alg>
-              </dgm:else>
-            </dgm:choose>
-            <dgm:shape xmlns:r="http://schemas.openxmlformats.org/officeDocument/2006/relationships" r:blip="">
-              <dgm:adjLst/>
-            </dgm:shape>
-            <dgm:presOf/>
-            <dgm:constrLst/>
-            <dgm:ruleLst/>
-            <dgm:forEach name="Name8" axis="ch">
-              <dgm:forEach name="Name9" axis="self" ptType="parTrans" cnt="1">
-                <dgm:layoutNode name="Name10">
-                  <dgm:alg type="conn">
-                    <dgm:param type="dim" val="1D"/>
-                    <dgm:param type="endSty" val="noArr"/>
-                    <dgm:param type="connRout" val="bend"/>
-                    <dgm:param type="bendPt" val="end"/>
-                    <dgm:param type="begPts" val="bCtr"/>
-                    <dgm:param type="endPts" val="tCtr"/>
-                    <dgm:param type="srcNode" val="background"/>
-                    <dgm:param type="dstNode" val="background2"/>
-                  </dgm:alg>
-                  <dgm:shape xmlns:r="http://schemas.openxmlformats.org/officeDocument/2006/relationships" type="conn" r:blip="" zOrderOff="-999">
-                    <dgm:adjLst/>
-                  </dgm:shape>
-                  <dgm:presOf axis="self"/>
-                  <dgm:constrLst>
-                    <dgm:constr type="begPad"/>
-                    <dgm:constr type="endPad"/>
-                  </dgm:constrLst>
-                  <dgm:ruleLst/>
-                </dgm:layoutNode>
-              </dgm:forEach>
-              <dgm:forEach name="Name11" axis="self" ptType="node">
-                <dgm:layoutNode name="hierRoot2">
-                  <dgm:alg type="hierRoot"/>
-                  <dgm:shape xmlns:r="http://schemas.openxmlformats.org/officeDocument/2006/relationships" r:blip="">
-                    <dgm:adjLst/>
-                  </dgm:shape>
-                  <dgm:presOf/>
-                  <dgm:constrLst>
-                    <dgm:constr type="bendDist" for="des" ptType="parTrans" refType="sp" fact="0.5"/>
-                  </dgm:constrLst>
-                  <dgm:ruleLst/>
-                  <dgm:layoutNode name="composite2">
-                    <dgm:alg type="composite"/>
-                    <dgm:shape xmlns:r="http://schemas.openxmlformats.org/officeDocument/2006/relationships" r:blip="">
-                      <dgm:adjLst/>
-                    </dgm:shape>
-                    <dgm:presOf/>
-                    <dgm:constrLst>
-                      <dgm:constr type="w" for="ch" forName="background2" refType="w" fact="0.9"/>
-                      <dgm:constr type="h" for="ch" forName="background2" refType="w" refFor="ch" refForName="background2" fact="0.635"/>
-                      <dgm:constr type="t" for="ch" forName="background2"/>
-                      <dgm:constr type="l" for="ch" forName="background2"/>
-                      <dgm:constr type="w" for="ch" forName="text2" refType="w" fact="0.9"/>
-                      <dgm:constr type="h" for="ch" forName="text2" refType="w" refFor="ch" refForName="text2" fact="0.635"/>
-                      <dgm:constr type="t" for="ch" forName="text2" refType="w" fact="0.095"/>
-                      <dgm:constr type="l" for="ch" forName="text2" refType="w" fact="0.1"/>
-                    </dgm:constrLst>
-                    <dgm:ruleLst/>
-                    <dgm:layoutNode name="background2" moveWith="text2">
-                      <dgm:alg type="sp"/>
-                      <dgm:shape xmlns:r="http://schemas.openxmlformats.org/officeDocument/2006/relationships" type="roundRect" r:blip="">
-                        <dgm:adjLst>
-                          <dgm:adj idx="1" val="0.1"/>
-                        </dgm:adjLst>
-                      </dgm:shape>
-                      <dgm:presOf/>
-                      <dgm:constrLst/>
-                      <dgm:ruleLst/>
-                    </dgm:layoutNode>
-                    <dgm:layoutNode name="text2" styleLbl="fgAcc2">
-                      <dgm:varLst>
-                        <dgm:chPref val="3"/>
-                      </dgm:varLst>
-                      <dgm:alg type="tx"/>
-                      <dgm:shape xmlns:r="http://schemas.openxmlformats.org/officeDocument/2006/relationships" type="roundRect" r:blip="">
-                        <dgm:adjLst>
-                          <dgm:adj idx="1" val="0.1"/>
-                        </dgm:adjLst>
-                      </dgm:shape>
-                      <dgm:presOf axis="self"/>
-                      <dgm:constrLst>
-                        <dgm:constr type="tMarg" refType="primFontSz" fact="0.3"/>
-                        <dgm:constr type="bMarg" refType="primFontSz" fact="0.3"/>
-                        <dgm:constr type="lMarg" refType="primFontSz" fact="0.3"/>
-                        <dgm:constr type="rMarg" refType="primFontSz" fact="0.3"/>
-                      </dgm:constrLst>
-                      <dgm:ruleLst>
-                        <dgm:rule type="primFontSz" val="5" fact="NaN" max="NaN"/>
-                      </dgm:ruleLst>
-                    </dgm:layoutNode>
-                  </dgm:layoutNode>
-                  <dgm:layoutNode name="hierChild3">
-                    <dgm:choose name="Name12">
-                      <dgm:if name="Name13" func="var" arg="dir" op="equ" val="norm">
-                        <dgm:alg type="hierChild">
-                          <dgm:param type="linDir" val="fromL"/>
-                        </dgm:alg>
-                      </dgm:if>
-                      <dgm:else name="Name14">
-                        <dgm:alg type="hierChild">
-                          <dgm:param type="linDir" val="fromR"/>
-                        </dgm:alg>
-                      </dgm:else>
-                    </dgm:choose>
-                    <dgm:shape xmlns:r="http://schemas.openxmlformats.org/officeDocument/2006/relationships" r:blip="">
-                      <dgm:adjLst/>
-                    </dgm:shape>
-                    <dgm:presOf/>
-                    <dgm:constrLst/>
-                    <dgm:ruleLst/>
-                    <dgm:forEach name="Name15" axis="ch">
-                      <dgm:forEach name="Name16" axis="self" ptType="parTrans" cnt="1">
-                        <dgm:layoutNode name="Name17">
-                          <dgm:alg type="conn">
-                            <dgm:param type="dim" val="1D"/>
-                            <dgm:param type="endSty" val="noArr"/>
-                            <dgm:param type="connRout" val="bend"/>
-                            <dgm:param type="bendPt" val="end"/>
-                            <dgm:param type="begPts" val="bCtr"/>
-                            <dgm:param type="endPts" val="tCtr"/>
-                            <dgm:param type="srcNode" val="background2"/>
-                            <dgm:param type="dstNode" val="background3"/>
-                          </dgm:alg>
-                          <dgm:shape xmlns:r="http://schemas.openxmlformats.org/officeDocument/2006/relationships" type="conn" r:blip="" zOrderOff="-999">
-                            <dgm:adjLst/>
-                          </dgm:shape>
-                          <dgm:presOf axis="self"/>
-                          <dgm:constrLst>
-                            <dgm:constr type="begPad"/>
-                            <dgm:constr type="endPad"/>
-                          </dgm:constrLst>
-                          <dgm:ruleLst/>
-                        </dgm:layoutNode>
-                      </dgm:forEach>
-                      <dgm:forEach name="Name18" axis="self" ptType="node">
-                        <dgm:layoutNode name="hierRoot3">
-                          <dgm:alg type="hierRoot"/>
-                          <dgm:shape xmlns:r="http://schemas.openxmlformats.org/officeDocument/2006/relationships" r:blip="">
-                            <dgm:adjLst/>
-                          </dgm:shape>
-                          <dgm:presOf/>
-                          <dgm:constrLst>
-                            <dgm:constr type="bendDist" for="des" ptType="parTrans" refType="sp" fact="0.5"/>
-                          </dgm:constrLst>
-                          <dgm:ruleLst/>
-                          <dgm:layoutNode name="composite3">
-                            <dgm:alg type="composite"/>
-                            <dgm:shape xmlns:r="http://schemas.openxmlformats.org/officeDocument/2006/relationships" r:blip="">
-                              <dgm:adjLst/>
-                            </dgm:shape>
-                            <dgm:presOf/>
-                            <dgm:constrLst>
-                              <dgm:constr type="w" for="ch" forName="background3" refType="w" fact="0.9"/>
-                              <dgm:constr type="h" for="ch" forName="background3" refType="w" refFor="ch" refForName="background3" fact="0.635"/>
-                              <dgm:constr type="t" for="ch" forName="background3"/>
-                              <dgm:constr type="l" for="ch" forName="background3"/>
-                              <dgm:constr type="w" for="ch" forName="text3" refType="w" fact="0.9"/>
-                              <dgm:constr type="h" for="ch" forName="text3" refType="w" refFor="ch" refForName="text3" fact="0.635"/>
-                              <dgm:constr type="t" for="ch" forName="text3" refType="w" fact="0.095"/>
-                              <dgm:constr type="l" for="ch" forName="text3" refType="w" fact="0.1"/>
-                            </dgm:constrLst>
-                            <dgm:ruleLst/>
-                            <dgm:layoutNode name="background3" moveWith="text3">
-                              <dgm:alg type="sp"/>
-                              <dgm:shape xmlns:r="http://schemas.openxmlformats.org/officeDocument/2006/relationships" type="roundRect" r:blip="">
-                                <dgm:adjLst>
-                                  <dgm:adj idx="1" val="0.1"/>
-                                </dgm:adjLst>
-                              </dgm:shape>
-                              <dgm:presOf/>
-                              <dgm:constrLst/>
-                              <dgm:ruleLst/>
-                            </dgm:layoutNode>
-                            <dgm:layoutNode name="text3" styleLbl="fgAcc3">
-                              <dgm:varLst>
-                                <dgm:chPref val="3"/>
-                              </dgm:varLst>
-                              <dgm:alg type="tx"/>
-                              <dgm:shape xmlns:r="http://schemas.openxmlformats.org/officeDocument/2006/relationships" type="roundRect" r:blip="">
-                                <dgm:adjLst>
-                                  <dgm:adj idx="1" val="0.1"/>
-                                </dgm:adjLst>
-                              </dgm:shape>
-                              <dgm:presOf axis="self"/>
-                              <dgm:constrLst>
-                                <dgm:constr type="tMarg" refType="primFontSz" fact="0.3"/>
-                                <dgm:constr type="bMarg" refType="primFontSz" fact="0.3"/>
-                                <dgm:constr type="lMarg" refType="primFontSz" fact="0.3"/>
-                                <dgm:constr type="rMarg" refType="primFontSz" fact="0.3"/>
-                              </dgm:constrLst>
-                              <dgm:ruleLst>
-                                <dgm:rule type="primFontSz" val="5" fact="NaN" max="NaN"/>
-                              </dgm:ruleLst>
-                            </dgm:layoutNode>
-                          </dgm:layoutNode>
-                          <dgm:layoutNode name="hierChild4">
-                            <dgm:choose name="Name19">
-                              <dgm:if name="Name20" func="var" arg="dir" op="equ" val="norm">
-                                <dgm:alg type="hierChild">
-                                  <dgm:param type="linDir" val="fromL"/>
-                                </dgm:alg>
-                              </dgm:if>
-                              <dgm:else name="Name21">
-                                <dgm:alg type="hierChild">
-                                  <dgm:param type="linDir" val="fromR"/>
-                                </dgm:alg>
-                              </dgm:else>
-                            </dgm:choose>
-                            <dgm:shape xmlns:r="http://schemas.openxmlformats.org/officeDocument/2006/relationships" r:blip="">
-                              <dgm:adjLst/>
-                            </dgm:shape>
-                            <dgm:presOf/>
-                            <dgm:constrLst/>
-                            <dgm:ruleLst/>
-                            <dgm:forEach name="repeat" axis="ch">
-                              <dgm:forEach name="Name22" axis="self" ptType="parTrans" cnt="1">
-                                <dgm:layoutNode name="Name23">
-                                  <dgm:choose name="Name24">
-                                    <dgm:if name="Name25" axis="self" func="depth" op="lte" val="4">
-                                      <dgm:alg type="conn">
-                                        <dgm:param type="dim" val="1D"/>
-                                        <dgm:param type="endSty" val="noArr"/>
-                                        <dgm:param type="connRout" val="bend"/>
-                                        <dgm:param type="bendPt" val="end"/>
-                                        <dgm:param type="begPts" val="bCtr"/>
-                                        <dgm:param type="endPts" val="tCtr"/>
-                                        <dgm:param type="srcNode" val="background3"/>
-                                        <dgm:param type="dstNode" val="background4"/>
-                                      </dgm:alg>
-                                    </dgm:if>
-                                    <dgm:else name="Name26">
-                                      <dgm:alg type="conn">
-                                        <dgm:param type="dim" val="1D"/>
-                                        <dgm:param type="endSty" val="noArr"/>
-                                        <dgm:param type="connRout" val="bend"/>
-                                        <dgm:param type="bendPt" val="end"/>
-                                        <dgm:param type="begPts" val="bCtr"/>
-                                        <dgm:param type="endPts" val="tCtr"/>
-                                        <dgm:param type="srcNode" val="background4"/>
-                                        <dgm:param type="dstNode" val="background4"/>
-                                      </dgm:alg>
-                                    </dgm:else>
-                                  </dgm:choose>
-                                  <dgm:shape xmlns:r="http://schemas.openxmlformats.org/officeDocument/2006/relationships" type="conn" r:blip="" zOrderOff="-999">
-                                    <dgm:adjLst/>
-                                  </dgm:shape>
-                                  <dgm:presOf axis="self"/>
-                                  <dgm:constrLst>
-                                    <dgm:constr type="begPad"/>
-                                    <dgm:constr type="endPad"/>
-                                  </dgm:constrLst>
-                                  <dgm:ruleLst/>
-                                </dgm:layoutNode>
-                              </dgm:forEach>
-                              <dgm:forEach name="Name27" axis="self" ptType="node">
-                                <dgm:layoutNode name="hierRoot4">
-                                  <dgm:alg type="hierRoot"/>
-                                  <dgm:shape xmlns:r="http://schemas.openxmlformats.org/officeDocument/2006/relationships" r:blip="">
-                                    <dgm:adjLst/>
-                                  </dgm:shape>
-                                  <dgm:presOf/>
-                                  <dgm:constrLst>
-                                    <dgm:constr type="bendDist" for="des" ptType="parTrans" refType="sp" fact="0.5"/>
-                                  </dgm:constrLst>
-                                  <dgm:ruleLst/>
-                                  <dgm:layoutNode name="composite4">
-                                    <dgm:alg type="composite"/>
-                                    <dgm:shape xmlns:r="http://schemas.openxmlformats.org/officeDocument/2006/relationships" r:blip="">
-                                      <dgm:adjLst/>
-                                    </dgm:shape>
-                                    <dgm:presOf/>
-                                    <dgm:constrLst>
-                                      <dgm:constr type="w" for="ch" forName="background4" refType="w" fact="0.9"/>
-                                      <dgm:constr type="h" for="ch" forName="background4" refType="w" refFor="ch" refForName="background4" fact="0.635"/>
-                                      <dgm:constr type="t" for="ch" forName="background4"/>
-                                      <dgm:constr type="l" for="ch" forName="background4"/>
-                                      <dgm:constr type="w" for="ch" forName="text4" refType="w" fact="0.9"/>
-                                      <dgm:constr type="h" for="ch" forName="text4" refType="w" refFor="ch" refForName="text4" fact="0.635"/>
-                                      <dgm:constr type="t" for="ch" forName="text4" refType="w" fact="0.095"/>
-                                      <dgm:constr type="l" for="ch" forName="text4" refType="w" fact="0.1"/>
-                                    </dgm:constrLst>
-                                    <dgm:ruleLst/>
-                                    <dgm:layoutNode name="background4" moveWith="text4">
-                                      <dgm:alg type="sp"/>
-                                      <dgm:shape xmlns:r="http://schemas.openxmlformats.org/officeDocument/2006/relationships" type="roundRect" r:blip="">
-                                        <dgm:adjLst>
-                                          <dgm:adj idx="1" val="0.1"/>
-                                        </dgm:adjLst>
-                                      </dgm:shape>
-                                      <dgm:presOf/>
-                                      <dgm:constrLst/>
-                                      <dgm:ruleLst/>
-                                    </dgm:layoutNode>
-                                    <dgm:layoutNode name="text4" styleLbl="fgAcc4">
-                                      <dgm:varLst>
-                                        <dgm:chPref val="3"/>
-                                      </dgm:varLst>
-                                      <dgm:alg type="tx"/>
-                                      <dgm:shape xmlns:r="http://schemas.openxmlformats.org/officeDocument/2006/relationships" type="roundRect" r:blip="">
-                                        <dgm:adjLst>
-                                          <dgm:adj idx="1" val="0.1"/>
-                                        </dgm:adjLst>
-                                      </dgm:shape>
-                                      <dgm:presOf axis="self"/>
-                                      <dgm:constrLst>
-                                        <dgm:constr type="tMarg" refType="primFontSz" fact="0.3"/>
-                                        <dgm:constr type="bMarg" refType="primFontSz" fact="0.3"/>
-                                        <dgm:constr type="lMarg" refType="primFontSz" fact="0.3"/>
-                                        <dgm:constr type="rMarg" refType="primFontSz" fact="0.3"/>
-                                      </dgm:constrLst>
-                                      <dgm:ruleLst>
-                                        <dgm:rule type="primFontSz" val="5" fact="NaN" max="NaN"/>
-                                      </dgm:ruleLst>
-                                    </dgm:layoutNode>
-                                  </dgm:layoutNode>
-                                  <dgm:layoutNode name="hierChild5">
-                                    <dgm:choose name="Name28">
-                                      <dgm:if name="Name29" func="var" arg="dir" op="equ" val="norm">
-                                        <dgm:alg type="hierChild">
-                                          <dgm:param type="linDir" val="fromL"/>
-                                        </dgm:alg>
-                                      </dgm:if>
-                                      <dgm:else name="Name30">
-                                        <dgm:alg type="hierChild">
-                                          <dgm:param type="linDir" val="fromR"/>
-                                        </dgm:alg>
-                                      </dgm:else>
-                                    </dgm:choose>
-                                    <dgm:shape xmlns:r="http://schemas.openxmlformats.org/officeDocument/2006/relationships" r:blip="">
-                                      <dgm:adjLst/>
-                                    </dgm:shape>
-                                    <dgm:presOf/>
-                                    <dgm:constrLst/>
-                                    <dgm:ruleLst/>
-                                    <dgm:forEach name="Name31" ref="repeat"/>
-                                  </dgm:layoutNode>
-                                </dgm:layoutNode>
-                              </dgm:forEach>
-                            </dgm:forEach>
-                          </dgm:layoutNode>
-                        </dgm:layoutNode>
-                      </dgm:forEach>
-                    </dgm:forEach>
-                  </dgm:layoutNode>
-                </dgm:layoutNode>
-              </dgm:forEach>
-            </dgm:forEach>
-          </dgm:layoutNode>
-        </dgm:layoutNode>
-      </dgm:forEach>
-    </dgm:forEach>
-  </dgm:layoutNode>
-</dgm:layoutDef>
-</file>
-
 <file path=ppt/diagrams/quickStyle1.xml><?xml version="1.0" encoding="utf-8"?>
 <dgm:styleDef xmlns:dgm="http://schemas.openxmlformats.org/drawingml/2006/diagram" xmlns:a="http://schemas.openxmlformats.org/drawingml/2006/main" uniqueId="urn:microsoft.com/office/officeart/2005/8/quickstyle/simple1">
   <dgm:title val=""/>
@@ -6341,7 +6332,7 @@
           <a:p>
             <a:fld id="{C59A27D3-0CC7-934B-85C6-96FBF84258AF}" type="datetimeFigureOut">
               <a:rPr lang="en-US" smtClean="0"/>
-              <a:t>1/9/25</a:t>
+              <a:t>1/13/26</a:t>
             </a:fld>
             <a:endParaRPr lang="en-US"/>
           </a:p>
@@ -6673,7 +6664,7 @@
           <a:p>
             <a:fld id="{9225597C-1557-0B42-95FD-84BAB43A25E1}" type="slidenum">
               <a:rPr lang="en-US" smtClean="0"/>
-              <a:t>8</a:t>
+              <a:t>5</a:t>
             </a:fld>
             <a:endParaRPr lang="en-US"/>
           </a:p>
@@ -6682,7 +6673,7 @@
     </p:spTree>
     <p:extLst>
       <p:ext uri="{BB962C8B-B14F-4D97-AF65-F5344CB8AC3E}">
-        <p14:creationId xmlns:p14="http://schemas.microsoft.com/office/powerpoint/2010/main" val="2500169542"/>
+        <p14:creationId xmlns:p14="http://schemas.microsoft.com/office/powerpoint/2010/main" val="1145891878"/>
       </p:ext>
     </p:extLst>
   </p:cSld>
@@ -6736,10 +6727,7 @@
           <a:bodyPr/>
           <a:lstStyle/>
           <a:p>
-            <a:r>
-              <a:rPr lang="en-US" dirty="0"/>
-              <a:t>Start the process. You need many skills </a:t>
-            </a:r>
+            <a:endParaRPr lang="en-US" dirty="0"/>
           </a:p>
         </p:txBody>
       </p:sp>
@@ -6760,7 +6748,7 @@
           <a:p>
             <a:fld id="{9225597C-1557-0B42-95FD-84BAB43A25E1}" type="slidenum">
               <a:rPr lang="en-US" smtClean="0"/>
-              <a:t>9</a:t>
+              <a:t>16</a:t>
             </a:fld>
             <a:endParaRPr lang="en-US"/>
           </a:p>
@@ -6769,7 +6757,7 @@
     </p:spTree>
     <p:extLst>
       <p:ext uri="{BB962C8B-B14F-4D97-AF65-F5344CB8AC3E}">
-        <p14:creationId xmlns:p14="http://schemas.microsoft.com/office/powerpoint/2010/main" val="4263734497"/>
+        <p14:creationId xmlns:p14="http://schemas.microsoft.com/office/powerpoint/2010/main" val="2500169542"/>
       </p:ext>
     </p:extLst>
   </p:cSld>
@@ -6823,7 +6811,10 @@
           <a:bodyPr/>
           <a:lstStyle/>
           <a:p>
-            <a:endParaRPr lang="en-US" dirty="0"/>
+            <a:r>
+              <a:rPr lang="en-US" dirty="0"/>
+              <a:t>Start the process. You need many skills </a:t>
+            </a:r>
           </a:p>
         </p:txBody>
       </p:sp>
@@ -6844,7 +6835,7 @@
           <a:p>
             <a:fld id="{9225597C-1557-0B42-95FD-84BAB43A25E1}" type="slidenum">
               <a:rPr lang="en-US" smtClean="0"/>
-              <a:t>10</a:t>
+              <a:t>17</a:t>
             </a:fld>
             <a:endParaRPr lang="en-US"/>
           </a:p>
@@ -6853,7 +6844,7 @@
     </p:spTree>
     <p:extLst>
       <p:ext uri="{BB962C8B-B14F-4D97-AF65-F5344CB8AC3E}">
-        <p14:creationId xmlns:p14="http://schemas.microsoft.com/office/powerpoint/2010/main" val="983829278"/>
+        <p14:creationId xmlns:p14="http://schemas.microsoft.com/office/powerpoint/2010/main" val="4263734497"/>
       </p:ext>
     </p:extLst>
   </p:cSld>
@@ -6928,7 +6919,7 @@
           <a:p>
             <a:fld id="{9225597C-1557-0B42-95FD-84BAB43A25E1}" type="slidenum">
               <a:rPr lang="en-US" smtClean="0"/>
-              <a:t>11</a:t>
+              <a:t>18</a:t>
             </a:fld>
             <a:endParaRPr lang="en-US"/>
           </a:p>
@@ -6937,7 +6928,7 @@
     </p:spTree>
     <p:extLst>
       <p:ext uri="{BB962C8B-B14F-4D97-AF65-F5344CB8AC3E}">
-        <p14:creationId xmlns:p14="http://schemas.microsoft.com/office/powerpoint/2010/main" val="1994861047"/>
+        <p14:creationId xmlns:p14="http://schemas.microsoft.com/office/powerpoint/2010/main" val="983829278"/>
       </p:ext>
     </p:extLst>
   </p:cSld>
@@ -7012,7 +7003,7 @@
           <a:p>
             <a:fld id="{9225597C-1557-0B42-95FD-84BAB43A25E1}" type="slidenum">
               <a:rPr lang="en-US" smtClean="0"/>
-              <a:t>12</a:t>
+              <a:t>19</a:t>
             </a:fld>
             <a:endParaRPr lang="en-US"/>
           </a:p>
@@ -7021,7 +7012,7 @@
     </p:spTree>
     <p:extLst>
       <p:ext uri="{BB962C8B-B14F-4D97-AF65-F5344CB8AC3E}">
-        <p14:creationId xmlns:p14="http://schemas.microsoft.com/office/powerpoint/2010/main" val="2466685589"/>
+        <p14:creationId xmlns:p14="http://schemas.microsoft.com/office/powerpoint/2010/main" val="1994861047"/>
       </p:ext>
     </p:extLst>
   </p:cSld>
@@ -7096,7 +7087,7 @@
           <a:p>
             <a:fld id="{9225597C-1557-0B42-95FD-84BAB43A25E1}" type="slidenum">
               <a:rPr lang="en-US" smtClean="0"/>
-              <a:t>13</a:t>
+              <a:t>20</a:t>
             </a:fld>
             <a:endParaRPr lang="en-US"/>
           </a:p>
@@ -7105,7 +7096,7 @@
     </p:spTree>
     <p:extLst>
       <p:ext uri="{BB962C8B-B14F-4D97-AF65-F5344CB8AC3E}">
-        <p14:creationId xmlns:p14="http://schemas.microsoft.com/office/powerpoint/2010/main" val="2931876631"/>
+        <p14:creationId xmlns:p14="http://schemas.microsoft.com/office/powerpoint/2010/main" val="2466685589"/>
       </p:ext>
     </p:extLst>
   </p:cSld>
@@ -7180,7 +7171,7 @@
           <a:p>
             <a:fld id="{9225597C-1557-0B42-95FD-84BAB43A25E1}" type="slidenum">
               <a:rPr lang="en-US" smtClean="0"/>
-              <a:t>14</a:t>
+              <a:t>21</a:t>
             </a:fld>
             <a:endParaRPr lang="en-US"/>
           </a:p>
@@ -7189,7 +7180,7 @@
     </p:spTree>
     <p:extLst>
       <p:ext uri="{BB962C8B-B14F-4D97-AF65-F5344CB8AC3E}">
-        <p14:creationId xmlns:p14="http://schemas.microsoft.com/office/powerpoint/2010/main" val="346408991"/>
+        <p14:creationId xmlns:p14="http://schemas.microsoft.com/office/powerpoint/2010/main" val="2931876631"/>
       </p:ext>
     </p:extLst>
   </p:cSld>
@@ -7264,7 +7255,91 @@
           <a:p>
             <a:fld id="{9225597C-1557-0B42-95FD-84BAB43A25E1}" type="slidenum">
               <a:rPr lang="en-US" smtClean="0"/>
-              <a:t>15</a:t>
+              <a:t>22</a:t>
+            </a:fld>
+            <a:endParaRPr lang="en-US"/>
+          </a:p>
+        </p:txBody>
+      </p:sp>
+    </p:spTree>
+    <p:extLst>
+      <p:ext uri="{BB962C8B-B14F-4D97-AF65-F5344CB8AC3E}">
+        <p14:creationId xmlns:p14="http://schemas.microsoft.com/office/powerpoint/2010/main" val="346408991"/>
+      </p:ext>
+    </p:extLst>
+  </p:cSld>
+  <p:clrMapOvr>
+    <a:masterClrMapping/>
+  </p:clrMapOvr>
+</p:notes>
+</file>
+
+<file path=ppt/notesSlides/notesSlide9.xml><?xml version="1.0" encoding="utf-8"?>
+<p:notes xmlns:a="http://schemas.openxmlformats.org/drawingml/2006/main" xmlns:r="http://schemas.openxmlformats.org/officeDocument/2006/relationships" xmlns:p="http://schemas.openxmlformats.org/presentationml/2006/main">
+  <p:cSld>
+    <p:spTree>
+      <p:nvGrpSpPr>
+        <p:cNvPr id="1" name=""/>
+        <p:cNvGrpSpPr/>
+        <p:nvPr/>
+      </p:nvGrpSpPr>
+      <p:grpSpPr>
+        <a:xfrm>
+          <a:off x="0" y="0"/>
+          <a:ext cx="0" cy="0"/>
+          <a:chOff x="0" y="0"/>
+          <a:chExt cx="0" cy="0"/>
+        </a:xfrm>
+      </p:grpSpPr>
+      <p:sp>
+        <p:nvSpPr>
+          <p:cNvPr id="2" name="Slide Image Placeholder 1"/>
+          <p:cNvSpPr>
+            <a:spLocks noGrp="1" noRot="1" noChangeAspect="1"/>
+          </p:cNvSpPr>
+          <p:nvPr>
+            <p:ph type="sldImg"/>
+          </p:nvPr>
+        </p:nvSpPr>
+        <p:spPr/>
+      </p:sp>
+      <p:sp>
+        <p:nvSpPr>
+          <p:cNvPr id="3" name="Notes Placeholder 2"/>
+          <p:cNvSpPr>
+            <a:spLocks noGrp="1"/>
+          </p:cNvSpPr>
+          <p:nvPr>
+            <p:ph type="body" idx="1"/>
+          </p:nvPr>
+        </p:nvSpPr>
+        <p:spPr/>
+        <p:txBody>
+          <a:bodyPr/>
+          <a:lstStyle/>
+          <a:p>
+            <a:endParaRPr lang="en-US" dirty="0"/>
+          </a:p>
+        </p:txBody>
+      </p:sp>
+      <p:sp>
+        <p:nvSpPr>
+          <p:cNvPr id="4" name="Slide Number Placeholder 3"/>
+          <p:cNvSpPr>
+            <a:spLocks noGrp="1"/>
+          </p:cNvSpPr>
+          <p:nvPr>
+            <p:ph type="sldNum" sz="quarter" idx="5"/>
+          </p:nvPr>
+        </p:nvSpPr>
+        <p:spPr/>
+        <p:txBody>
+          <a:bodyPr/>
+          <a:lstStyle/>
+          <a:p>
+            <a:fld id="{9225597C-1557-0B42-95FD-84BAB43A25E1}" type="slidenum">
+              <a:rPr lang="en-US" smtClean="0"/>
+              <a:t>23</a:t>
             </a:fld>
             <a:endParaRPr lang="en-US"/>
           </a:p>
@@ -7439,7 +7514,7 @@
           <a:p>
             <a:fld id="{02AC24A9-CCB6-4F8D-B8DB-C2F3692CFA5A}" type="datetimeFigureOut">
               <a:rPr lang="en-US" smtClean="0"/>
-              <a:t>1/9/25</a:t>
+              <a:t>1/13/26</a:t>
             </a:fld>
             <a:endParaRPr lang="en-US" dirty="0"/>
           </a:p>
@@ -7809,7 +7884,7 @@
           <a:p>
             <a:fld id="{02AC24A9-CCB6-4F8D-B8DB-C2F3692CFA5A}" type="datetimeFigureOut">
               <a:rPr lang="en-US" smtClean="0"/>
-              <a:t>1/9/25</a:t>
+              <a:t>1/13/26</a:t>
             </a:fld>
             <a:endParaRPr lang="en-US"/>
           </a:p>
@@ -8018,7 +8093,7 @@
           <a:p>
             <a:fld id="{02AC24A9-CCB6-4F8D-B8DB-C2F3692CFA5A}" type="datetimeFigureOut">
               <a:rPr lang="en-US" smtClean="0"/>
-              <a:t>1/9/25</a:t>
+              <a:t>1/13/26</a:t>
             </a:fld>
             <a:endParaRPr lang="en-US"/>
           </a:p>
@@ -8488,7 +8563,7 @@
           <a:p>
             <a:fld id="{02AC24A9-CCB6-4F8D-B8DB-C2F3692CFA5A}" type="datetimeFigureOut">
               <a:rPr lang="en-US" smtClean="0"/>
-              <a:t>1/9/25</a:t>
+              <a:t>1/13/26</a:t>
             </a:fld>
             <a:endParaRPr lang="en-US"/>
           </a:p>
@@ -8942,7 +9017,7 @@
           <a:p>
             <a:fld id="{02AC24A9-CCB6-4F8D-B8DB-C2F3692CFA5A}" type="datetimeFigureOut">
               <a:rPr lang="en-US" smtClean="0"/>
-              <a:t>1/9/25</a:t>
+              <a:t>1/13/26</a:t>
             </a:fld>
             <a:endParaRPr lang="en-US"/>
           </a:p>
@@ -9474,7 +9549,7 @@
           <a:p>
             <a:fld id="{02AC24A9-CCB6-4F8D-B8DB-C2F3692CFA5A}" type="datetimeFigureOut">
               <a:rPr lang="en-US" smtClean="0"/>
-              <a:t>1/9/25</a:t>
+              <a:t>1/13/26</a:t>
             </a:fld>
             <a:endParaRPr lang="en-US"/>
           </a:p>
@@ -10173,7 +10248,7 @@
           <a:p>
             <a:fld id="{02AC24A9-CCB6-4F8D-B8DB-C2F3692CFA5A}" type="datetimeFigureOut">
               <a:rPr lang="en-US" smtClean="0"/>
-              <a:t>1/9/25</a:t>
+              <a:t>1/13/26</a:t>
             </a:fld>
             <a:endParaRPr lang="en-US"/>
           </a:p>
@@ -10502,7 +10577,7 @@
           <a:p>
             <a:fld id="{02AC24A9-CCB6-4F8D-B8DB-C2F3692CFA5A}" type="datetimeFigureOut">
               <a:rPr lang="en-US" smtClean="0"/>
-              <a:t>1/9/25</a:t>
+              <a:t>1/13/26</a:t>
             </a:fld>
             <a:endParaRPr lang="en-US"/>
           </a:p>
@@ -10615,7 +10690,7 @@
           <a:p>
             <a:fld id="{02AC24A9-CCB6-4F8D-B8DB-C2F3692CFA5A}" type="datetimeFigureOut">
               <a:rPr lang="en-US" smtClean="0"/>
-              <a:t>1/9/25</a:t>
+              <a:t>1/13/26</a:t>
             </a:fld>
             <a:endParaRPr lang="en-US"/>
           </a:p>
@@ -11110,7 +11185,7 @@
           <a:p>
             <a:fld id="{02AC24A9-CCB6-4F8D-B8DB-C2F3692CFA5A}" type="datetimeFigureOut">
               <a:rPr lang="en-US" smtClean="0"/>
-              <a:t>1/9/25</a:t>
+              <a:t>1/13/26</a:t>
             </a:fld>
             <a:endParaRPr lang="en-US" dirty="0"/>
           </a:p>
@@ -11587,7 +11662,7 @@
           <a:p>
             <a:fld id="{02AC24A9-CCB6-4F8D-B8DB-C2F3692CFA5A}" type="datetimeFigureOut">
               <a:rPr lang="en-US" smtClean="0"/>
-              <a:t>1/9/25</a:t>
+              <a:t>1/13/26</a:t>
             </a:fld>
             <a:endParaRPr lang="en-US"/>
           </a:p>
@@ -11830,7 +11905,7 @@
           <a:p>
             <a:fld id="{02AC24A9-CCB6-4F8D-B8DB-C2F3692CFA5A}" type="datetimeFigureOut">
               <a:rPr lang="en-US" smtClean="0"/>
-              <a:t>1/9/25</a:t>
+              <a:t>1/13/26</a:t>
             </a:fld>
             <a:endParaRPr lang="en-US"/>
           </a:p>
@@ -12233,14 +12308,6 @@
 <file path=ppt/slides/slide1.xml><?xml version="1.0" encoding="utf-8"?>
 <p:sld xmlns:a="http://schemas.openxmlformats.org/drawingml/2006/main" xmlns:r="http://schemas.openxmlformats.org/officeDocument/2006/relationships" xmlns:p="http://schemas.openxmlformats.org/presentationml/2006/main">
   <p:cSld>
-    <p:bg>
-      <p:bgPr>
-        <a:solidFill>
-          <a:schemeClr val="bg1"/>
-        </a:solidFill>
-        <a:effectLst/>
-      </p:bgPr>
-    </p:bg>
     <p:spTree>
       <p:nvGrpSpPr>
         <p:cNvPr id="1" name=""/>
@@ -12255,166 +12322,6 @@
           <a:chExt cx="0" cy="0"/>
         </a:xfrm>
       </p:grpSpPr>
-      <p:sp useBgFill="1">
-        <p:nvSpPr>
-          <p:cNvPr id="15" name="Rectangle 8">
-            <a:extLst>
-              <a:ext uri="{FF2B5EF4-FFF2-40B4-BE49-F238E27FC236}">
-                <a16:creationId xmlns:a16="http://schemas.microsoft.com/office/drawing/2014/main" id="{2FB82883-1DC0-4BE1-A607-009095F3355A}"/>
-              </a:ext>
-              <a:ext uri="{C183D7F6-B498-43B3-948B-1728B52AA6E4}">
-                <adec:decorative xmlns:adec="http://schemas.microsoft.com/office/drawing/2017/decorative" val="1"/>
-              </a:ext>
-            </a:extLst>
-          </p:cNvPr>
-          <p:cNvSpPr>
-            <a:spLocks noGrp="1" noRot="1" noChangeAspect="1" noMove="1" noResize="1" noEditPoints="1" noAdjustHandles="1" noChangeArrowheads="1" noChangeShapeType="1" noTextEdit="1"/>
-          </p:cNvSpPr>
-          <p:nvPr>
-            <p:extLst>
-              <p:ext uri="{386F3935-93C4-4BCD-93E2-E3B085C9AB24}">
-                <p16:designElem xmlns:p16="http://schemas.microsoft.com/office/powerpoint/2015/main" val="1"/>
-              </p:ext>
-            </p:extLst>
-          </p:nvPr>
-        </p:nvSpPr>
-        <p:spPr>
-          <a:xfrm>
-            <a:off x="0" y="0"/>
-            <a:ext cx="12192000" cy="6858000"/>
-          </a:xfrm>
-          <a:prstGeom prst="rect">
-            <a:avLst/>
-          </a:prstGeom>
-          <a:ln>
-            <a:noFill/>
-          </a:ln>
-        </p:spPr>
-        <p:style>
-          <a:lnRef idx="2">
-            <a:schemeClr val="accent1">
-              <a:shade val="50000"/>
-            </a:schemeClr>
-          </a:lnRef>
-          <a:fillRef idx="1">
-            <a:schemeClr val="accent1"/>
-          </a:fillRef>
-          <a:effectRef idx="0">
-            <a:schemeClr val="accent1"/>
-          </a:effectRef>
-          <a:fontRef idx="minor">
-            <a:schemeClr val="lt1"/>
-          </a:fontRef>
-        </p:style>
-        <p:txBody>
-          <a:bodyPr rtlCol="0" anchor="ctr"/>
-          <a:lstStyle/>
-          <a:p>
-            <a:pPr algn="ctr"/>
-            <a:endParaRPr lang="en-US"/>
-          </a:p>
-        </p:txBody>
-      </p:sp>
-      <p:sp>
-        <p:nvSpPr>
-          <p:cNvPr id="17" name="Rectangle 10">
-            <a:extLst>
-              <a:ext uri="{FF2B5EF4-FFF2-40B4-BE49-F238E27FC236}">
-                <a16:creationId xmlns:a16="http://schemas.microsoft.com/office/drawing/2014/main" id="{A3473CF9-37EB-43E7-89EF-D2D1C53D1DAC}"/>
-              </a:ext>
-              <a:ext uri="{C183D7F6-B498-43B3-948B-1728B52AA6E4}">
-                <adec:decorative xmlns:adec="http://schemas.microsoft.com/office/drawing/2017/decorative" val="1"/>
-              </a:ext>
-            </a:extLst>
-          </p:cNvPr>
-          <p:cNvSpPr>
-            <a:spLocks noGrp="1" noRot="1" noChangeAspect="1" noMove="1" noResize="1" noEditPoints="1" noAdjustHandles="1" noChangeArrowheads="1" noChangeShapeType="1" noTextEdit="1"/>
-          </p:cNvSpPr>
-          <p:nvPr>
-            <p:extLst>
-              <p:ext uri="{386F3935-93C4-4BCD-93E2-E3B085C9AB24}">
-                <p16:designElem xmlns:p16="http://schemas.microsoft.com/office/powerpoint/2015/main" val="1"/>
-              </p:ext>
-            </p:extLst>
-          </p:nvPr>
-        </p:nvSpPr>
-        <p:spPr>
-          <a:xfrm>
-            <a:off x="1903615" y="4638503"/>
-            <a:ext cx="8384770" cy="1332634"/>
-          </a:xfrm>
-          <a:prstGeom prst="rect">
-            <a:avLst/>
-          </a:prstGeom>
-          <a:solidFill>
-            <a:schemeClr val="bg1">
-              <a:alpha val="95000"/>
-            </a:schemeClr>
-          </a:solidFill>
-          <a:ln w="12700">
-            <a:solidFill>
-              <a:schemeClr val="tx2">
-                <a:lumMod val="10000"/>
-                <a:lumOff val="90000"/>
-              </a:schemeClr>
-            </a:solidFill>
-          </a:ln>
-          <a:effectLst/>
-        </p:spPr>
-        <p:style>
-          <a:lnRef idx="2">
-            <a:schemeClr val="accent1">
-              <a:shade val="50000"/>
-            </a:schemeClr>
-          </a:lnRef>
-          <a:fillRef idx="1">
-            <a:schemeClr val="accent1"/>
-          </a:fillRef>
-          <a:effectRef idx="0">
-            <a:schemeClr val="accent1"/>
-          </a:effectRef>
-          <a:fontRef idx="minor">
-            <a:schemeClr val="lt1"/>
-          </a:fontRef>
-        </p:style>
-        <p:txBody>
-          <a:bodyPr rtlCol="0" anchor="ctr"/>
-          <a:lstStyle/>
-          <a:p>
-            <a:pPr marL="0" marR="0" lvl="0" indent="0" algn="ctr" defTabSz="914400" rtl="0" eaLnBrk="1" fontAlgn="auto" latinLnBrk="0" hangingPunct="1">
-              <a:lnSpc>
-                <a:spcPct val="100000"/>
-              </a:lnSpc>
-              <a:spcBef>
-                <a:spcPts val="0"/>
-              </a:spcBef>
-              <a:spcAft>
-                <a:spcPts val="0"/>
-              </a:spcAft>
-              <a:buClrTx/>
-              <a:buSzTx/>
-              <a:buFontTx/>
-              <a:buNone/>
-              <a:tabLst/>
-              <a:defRPr/>
-            </a:pPr>
-            <a:endParaRPr kumimoji="0" lang="en-US" sz="1800" b="0" i="0" u="none" strike="noStrike" kern="1200" cap="none" spc="0" normalizeH="0" baseline="0" noProof="0">
-              <a:ln>
-                <a:noFill/>
-              </a:ln>
-              <a:solidFill>
-                <a:prstClr val="white"/>
-              </a:solidFill>
-              <a:effectLst/>
-              <a:uLnTx/>
-              <a:uFillTx/>
-              <a:latin typeface="Calibri" panose="020F0502020204030204"/>
-              <a:ea typeface="+mn-ea"/>
-              <a:cs typeface="+mn-cs"/>
-            </a:endParaRPr>
-          </a:p>
-        </p:txBody>
-      </p:sp>
       <p:sp>
         <p:nvSpPr>
           <p:cNvPr id="2" name="Title 1">
@@ -12433,8 +12340,8 @@
         </p:nvSpPr>
         <p:spPr>
           <a:xfrm>
-            <a:off x="1903615" y="2219497"/>
-            <a:ext cx="7985759" cy="868823"/>
+            <a:off x="1903615" y="1174485"/>
+            <a:ext cx="7985759" cy="2289534"/>
           </a:xfrm>
         </p:spPr>
         <p:txBody>
@@ -12446,73 +12353,8 @@
             <a:pPr algn="ctr"/>
             <a:r>
               <a:rPr lang="en-US" sz="7200" dirty="0"/>
-              <a:t>Writing proposals</a:t>
-            </a:r>
-          </a:p>
-        </p:txBody>
-      </p:sp>
-      <p:sp>
-        <p:nvSpPr>
-          <p:cNvPr id="18" name="Rectangle: Rounded Corners 12">
-            <a:extLst>
-              <a:ext uri="{FF2B5EF4-FFF2-40B4-BE49-F238E27FC236}">
-                <a16:creationId xmlns:a16="http://schemas.microsoft.com/office/drawing/2014/main" id="{586B4EF9-43BA-4655-A6FF-1D8E21574C95}"/>
-              </a:ext>
-              <a:ext uri="{C183D7F6-B498-43B3-948B-1728B52AA6E4}">
-                <adec:decorative xmlns:adec="http://schemas.microsoft.com/office/drawing/2017/decorative" val="1"/>
-              </a:ext>
-            </a:extLst>
-          </p:cNvPr>
-          <p:cNvSpPr>
-            <a:spLocks noGrp="1" noRot="1" noChangeAspect="1" noMove="1" noResize="1" noEditPoints="1" noAdjustHandles="1" noChangeArrowheads="1" noChangeShapeType="1" noTextEdit="1"/>
-          </p:cNvSpPr>
-          <p:nvPr>
-            <p:extLst>
-              <p:ext uri="{386F3935-93C4-4BCD-93E2-E3B085C9AB24}">
-                <p16:designElem xmlns:p16="http://schemas.microsoft.com/office/powerpoint/2015/main" val="1"/>
-              </p:ext>
-            </p:extLst>
-          </p:nvPr>
-        </p:nvSpPr>
-        <p:spPr>
-          <a:xfrm>
-            <a:off x="2483110" y="5628237"/>
-            <a:ext cx="7225780" cy="685800"/>
-          </a:xfrm>
-          <a:prstGeom prst="roundRect">
-            <a:avLst>
-              <a:gd name="adj" fmla="val 0"/>
-            </a:avLst>
-          </a:prstGeom>
-          <a:solidFill>
-            <a:schemeClr val="accent1"/>
-          </a:solidFill>
-          <a:ln>
-            <a:noFill/>
-          </a:ln>
-        </p:spPr>
-        <p:style>
-          <a:lnRef idx="2">
-            <a:schemeClr val="accent1">
-              <a:shade val="50000"/>
-            </a:schemeClr>
-          </a:lnRef>
-          <a:fillRef idx="1">
-            <a:schemeClr val="accent1"/>
-          </a:fillRef>
-          <a:effectRef idx="0">
-            <a:schemeClr val="accent1"/>
-          </a:effectRef>
-          <a:fontRef idx="minor">
-            <a:schemeClr val="lt1"/>
-          </a:fontRef>
-        </p:style>
-        <p:txBody>
-          <a:bodyPr rtlCol="0" anchor="ctr"/>
-          <a:lstStyle/>
-          <a:p>
-            <a:pPr algn="ctr"/>
-            <a:endParaRPr lang="en-US"/>
+              <a:t>Scientific communication</a:t>
+            </a:r>
           </a:p>
         </p:txBody>
       </p:sp>
@@ -12559,7 +12401,7 @@
     </p:spTree>
     <p:extLst>
       <p:ext uri="{BB962C8B-B14F-4D97-AF65-F5344CB8AC3E}">
-        <p14:creationId xmlns:p14="http://schemas.microsoft.com/office/powerpoint/2010/main" val="682725868"/>
+        <p14:creationId xmlns:p14="http://schemas.microsoft.com/office/powerpoint/2010/main" val="2126690081"/>
       </p:ext>
     </p:extLst>
   </p:cSld>
@@ -12586,86 +12428,72 @@
           <a:chExt cx="0" cy="0"/>
         </a:xfrm>
       </p:grpSpPr>
-      <p:sp>
-        <p:nvSpPr>
-          <p:cNvPr id="2" name="Title 1">
+      <p:pic>
+        <p:nvPicPr>
+          <p:cNvPr id="3" name="Picture 2" descr="A screenshot of a computer&#10;&#10;Description automatically generated">
             <a:extLst>
               <a:ext uri="{FF2B5EF4-FFF2-40B4-BE49-F238E27FC236}">
-                <a16:creationId xmlns:a16="http://schemas.microsoft.com/office/drawing/2014/main" id="{F5C5AB4B-E0E1-5941-8EF8-96D616F939F7}"/>
+                <a16:creationId xmlns:a16="http://schemas.microsoft.com/office/drawing/2014/main" id="{2D726148-8FA9-BB2C-4EE3-B854DF5FC222}"/>
               </a:ext>
             </a:extLst>
           </p:cNvPr>
-          <p:cNvSpPr>
-            <a:spLocks noGrp="1"/>
-          </p:cNvSpPr>
-          <p:nvPr>
-            <p:ph type="title"/>
-          </p:nvPr>
-        </p:nvSpPr>
-        <p:spPr/>
-        <p:txBody>
-          <a:bodyPr>
-            <a:normAutofit/>
-          </a:bodyPr>
-          <a:lstStyle/>
-          <a:p>
-            <a:r>
-              <a:rPr lang="en-US" sz="6000" dirty="0"/>
-              <a:t>Determinants of success</a:t>
-            </a:r>
-          </a:p>
-        </p:txBody>
-      </p:sp>
+          <p:cNvPicPr>
+            <a:picLocks noChangeAspect="1"/>
+          </p:cNvPicPr>
+          <p:nvPr/>
+        </p:nvPicPr>
+        <p:blipFill>
+          <a:blip r:embed="rId2"/>
+          <a:srcRect r="21999"/>
+          <a:stretch/>
+        </p:blipFill>
+        <p:spPr>
+          <a:xfrm>
+            <a:off x="583656" y="499236"/>
+            <a:ext cx="11024687" cy="5688918"/>
+          </a:xfrm>
+          <a:prstGeom prst="rect">
+            <a:avLst/>
+          </a:prstGeom>
+        </p:spPr>
+      </p:pic>
       <p:sp>
         <p:nvSpPr>
-          <p:cNvPr id="3" name="Content Placeholder 2">
+          <p:cNvPr id="4" name="TextBox 3">
             <a:extLst>
               <a:ext uri="{FF2B5EF4-FFF2-40B4-BE49-F238E27FC236}">
-                <a16:creationId xmlns:a16="http://schemas.microsoft.com/office/drawing/2014/main" id="{DB85285A-6D63-3343-B7B6-EEAF18C7C58B}"/>
+                <a16:creationId xmlns:a16="http://schemas.microsoft.com/office/drawing/2014/main" id="{6C120AE0-2BDA-2EB8-B139-5A7C763AEE19}"/>
               </a:ext>
             </a:extLst>
           </p:cNvPr>
-          <p:cNvSpPr>
-            <a:spLocks noGrp="1"/>
-          </p:cNvSpPr>
-          <p:nvPr>
-            <p:ph idx="1"/>
-          </p:nvPr>
+          <p:cNvSpPr txBox="1"/>
+          <p:nvPr/>
         </p:nvSpPr>
         <p:spPr>
           <a:xfrm>
-            <a:off x="832232" y="2297720"/>
-            <a:ext cx="10168128" cy="3694176"/>
+            <a:off x="583656" y="6358764"/>
+            <a:ext cx="11531042" cy="461665"/>
           </a:xfrm>
+          <a:prstGeom prst="rect">
+            <a:avLst/>
+          </a:prstGeom>
+          <a:noFill/>
         </p:spPr>
         <p:txBody>
-          <a:bodyPr>
-            <a:normAutofit/>
+          <a:bodyPr wrap="none" rtlCol="0">
+            <a:spAutoFit/>
           </a:bodyPr>
           <a:lstStyle/>
           <a:p>
-            <a:pPr lvl="0"/>
-            <a:r>
-              <a:rPr lang="en-US" sz="4800" b="1" dirty="0"/>
-              <a:t>The proposal </a:t>
-            </a:r>
-          </a:p>
-          <a:p>
-            <a:pPr lvl="0"/>
-            <a:endParaRPr lang="en-US" sz="4800" b="1" dirty="0"/>
-          </a:p>
-          <a:p>
-            <a:pPr lvl="0"/>
-            <a:r>
-              <a:rPr lang="en-US" sz="4800" b="1" dirty="0"/>
-              <a:t>The perceived strength on the PI </a:t>
-            </a:r>
-          </a:p>
-          <a:p>
-            <a:pPr lvl="1"/>
-            <a:r>
-              <a:rPr lang="en-US" sz="4000" b="1" dirty="0"/>
-              <a:t>HHMI funding </a:t>
+            <a:r>
+              <a:rPr lang="en-US" sz="2400" b="1" dirty="0">
+                <a:hlinkClick r:id="rId3"/>
+              </a:rPr>
+              <a:t>https://blog.slavovlab.net/2024/02/12/communicating-writing-up-research</a:t>
+            </a:r>
+            <a:r>
+              <a:rPr lang="en-US" sz="2400" b="1" dirty="0"/>
+              <a:t> </a:t>
             </a:r>
           </a:p>
         </p:txBody>
@@ -12673,7 +12501,7 @@
     </p:spTree>
     <p:extLst>
       <p:ext uri="{BB962C8B-B14F-4D97-AF65-F5344CB8AC3E}">
-        <p14:creationId xmlns:p14="http://schemas.microsoft.com/office/powerpoint/2010/main" val="3636287700"/>
+        <p14:creationId xmlns:p14="http://schemas.microsoft.com/office/powerpoint/2010/main" val="1257680742"/>
       </p:ext>
     </p:extLst>
   </p:cSld>
@@ -12684,701 +12512,6 @@
 </file>
 
 <file path=ppt/slides/slide11.xml><?xml version="1.0" encoding="utf-8"?>
-<p:sld xmlns:a="http://schemas.openxmlformats.org/drawingml/2006/main" xmlns:r="http://schemas.openxmlformats.org/officeDocument/2006/relationships" xmlns:p="http://schemas.openxmlformats.org/presentationml/2006/main">
-  <p:cSld>
-    <p:spTree>
-      <p:nvGrpSpPr>
-        <p:cNvPr id="1" name=""/>
-        <p:cNvGrpSpPr/>
-        <p:nvPr/>
-      </p:nvGrpSpPr>
-      <p:grpSpPr>
-        <a:xfrm>
-          <a:off x="0" y="0"/>
-          <a:ext cx="0" cy="0"/>
-          <a:chOff x="0" y="0"/>
-          <a:chExt cx="0" cy="0"/>
-        </a:xfrm>
-      </p:grpSpPr>
-      <p:sp>
-        <p:nvSpPr>
-          <p:cNvPr id="2" name="Title 1">
-            <a:extLst>
-              <a:ext uri="{FF2B5EF4-FFF2-40B4-BE49-F238E27FC236}">
-                <a16:creationId xmlns:a16="http://schemas.microsoft.com/office/drawing/2014/main" id="{F5C5AB4B-E0E1-5941-8EF8-96D616F939F7}"/>
-              </a:ext>
-            </a:extLst>
-          </p:cNvPr>
-          <p:cNvSpPr>
-            <a:spLocks noGrp="1"/>
-          </p:cNvSpPr>
-          <p:nvPr>
-            <p:ph type="title"/>
-          </p:nvPr>
-        </p:nvSpPr>
-        <p:spPr/>
-        <p:txBody>
-          <a:bodyPr>
-            <a:normAutofit/>
-          </a:bodyPr>
-          <a:lstStyle/>
-          <a:p>
-            <a:r>
-              <a:rPr lang="en-US" sz="6000" dirty="0"/>
-              <a:t>Determinants of success</a:t>
-            </a:r>
-          </a:p>
-        </p:txBody>
-      </p:sp>
-      <p:sp>
-        <p:nvSpPr>
-          <p:cNvPr id="3" name="Content Placeholder 2">
-            <a:extLst>
-              <a:ext uri="{FF2B5EF4-FFF2-40B4-BE49-F238E27FC236}">
-                <a16:creationId xmlns:a16="http://schemas.microsoft.com/office/drawing/2014/main" id="{DB85285A-6D63-3343-B7B6-EEAF18C7C58B}"/>
-              </a:ext>
-            </a:extLst>
-          </p:cNvPr>
-          <p:cNvSpPr>
-            <a:spLocks noGrp="1"/>
-          </p:cNvSpPr>
-          <p:nvPr>
-            <p:ph idx="1"/>
-          </p:nvPr>
-        </p:nvSpPr>
-        <p:spPr>
-          <a:xfrm>
-            <a:off x="832232" y="2297720"/>
-            <a:ext cx="10168128" cy="4011640"/>
-          </a:xfrm>
-        </p:spPr>
-        <p:txBody>
-          <a:bodyPr>
-            <a:normAutofit fontScale="92500" lnSpcReduction="10000"/>
-          </a:bodyPr>
-          <a:lstStyle/>
-          <a:p>
-            <a:pPr lvl="0"/>
-            <a:r>
-              <a:rPr lang="en-US" sz="4000" b="1" dirty="0"/>
-              <a:t>The proposal </a:t>
-            </a:r>
-          </a:p>
-          <a:p>
-            <a:pPr lvl="0"/>
-            <a:r>
-              <a:rPr lang="en-US" sz="4000" b="1" dirty="0"/>
-              <a:t>The perceived strength on the PI </a:t>
-            </a:r>
-          </a:p>
-          <a:p>
-            <a:pPr lvl="1"/>
-            <a:r>
-              <a:rPr lang="en-US" sz="3600" b="1" dirty="0"/>
-              <a:t>HHMI funding </a:t>
-            </a:r>
-            <a:endParaRPr lang="en-US" sz="3600" dirty="0"/>
-          </a:p>
-          <a:p>
-            <a:r>
-              <a:rPr lang="en-US" sz="4000" dirty="0"/>
-              <a:t>Strategy</a:t>
-            </a:r>
-          </a:p>
-          <a:p>
-            <a:pPr lvl="1"/>
-            <a:r>
-              <a:rPr lang="en-US" sz="3600" dirty="0"/>
-              <a:t>Fining the right RFA</a:t>
-            </a:r>
-          </a:p>
-          <a:p>
-            <a:pPr lvl="1"/>
-            <a:r>
-              <a:rPr lang="en-US" sz="3600" dirty="0"/>
-              <a:t>Knowing the members of the review section </a:t>
-            </a:r>
-          </a:p>
-        </p:txBody>
-      </p:sp>
-    </p:spTree>
-    <p:extLst>
-      <p:ext uri="{BB962C8B-B14F-4D97-AF65-F5344CB8AC3E}">
-        <p14:creationId xmlns:p14="http://schemas.microsoft.com/office/powerpoint/2010/main" val="1583635892"/>
-      </p:ext>
-    </p:extLst>
-  </p:cSld>
-  <p:clrMapOvr>
-    <a:masterClrMapping/>
-  </p:clrMapOvr>
-</p:sld>
-</file>
-
-<file path=ppt/slides/slide12.xml><?xml version="1.0" encoding="utf-8"?>
-<p:sld xmlns:a="http://schemas.openxmlformats.org/drawingml/2006/main" xmlns:r="http://schemas.openxmlformats.org/officeDocument/2006/relationships" xmlns:p="http://schemas.openxmlformats.org/presentationml/2006/main">
-  <p:cSld>
-    <p:spTree>
-      <p:nvGrpSpPr>
-        <p:cNvPr id="1" name=""/>
-        <p:cNvGrpSpPr/>
-        <p:nvPr/>
-      </p:nvGrpSpPr>
-      <p:grpSpPr>
-        <a:xfrm>
-          <a:off x="0" y="0"/>
-          <a:ext cx="0" cy="0"/>
-          <a:chOff x="0" y="0"/>
-          <a:chExt cx="0" cy="0"/>
-        </a:xfrm>
-      </p:grpSpPr>
-      <p:sp>
-        <p:nvSpPr>
-          <p:cNvPr id="2" name="Title 1">
-            <a:extLst>
-              <a:ext uri="{FF2B5EF4-FFF2-40B4-BE49-F238E27FC236}">
-                <a16:creationId xmlns:a16="http://schemas.microsoft.com/office/drawing/2014/main" id="{F5C5AB4B-E0E1-5941-8EF8-96D616F939F7}"/>
-              </a:ext>
-            </a:extLst>
-          </p:cNvPr>
-          <p:cNvSpPr>
-            <a:spLocks noGrp="1"/>
-          </p:cNvSpPr>
-          <p:nvPr>
-            <p:ph type="title"/>
-          </p:nvPr>
-        </p:nvSpPr>
-        <p:spPr/>
-        <p:txBody>
-          <a:bodyPr>
-            <a:normAutofit/>
-          </a:bodyPr>
-          <a:lstStyle/>
-          <a:p>
-            <a:r>
-              <a:rPr lang="en-US" sz="6000" dirty="0"/>
-              <a:t>Collaboration </a:t>
-            </a:r>
-          </a:p>
-        </p:txBody>
-      </p:sp>
-      <p:sp>
-        <p:nvSpPr>
-          <p:cNvPr id="3" name="Content Placeholder 2">
-            <a:extLst>
-              <a:ext uri="{FF2B5EF4-FFF2-40B4-BE49-F238E27FC236}">
-                <a16:creationId xmlns:a16="http://schemas.microsoft.com/office/drawing/2014/main" id="{DB85285A-6D63-3343-B7B6-EEAF18C7C58B}"/>
-              </a:ext>
-            </a:extLst>
-          </p:cNvPr>
-          <p:cNvSpPr>
-            <a:spLocks noGrp="1"/>
-          </p:cNvSpPr>
-          <p:nvPr>
-            <p:ph idx="1"/>
-          </p:nvPr>
-        </p:nvSpPr>
-        <p:spPr>
-          <a:xfrm>
-            <a:off x="1115568" y="2478024"/>
-            <a:ext cx="10168128" cy="3317469"/>
-          </a:xfrm>
-        </p:spPr>
-        <p:txBody>
-          <a:bodyPr>
-            <a:normAutofit fontScale="92500" lnSpcReduction="10000"/>
-          </a:bodyPr>
-          <a:lstStyle/>
-          <a:p>
-            <a:endParaRPr lang="en-US" sz="4800" dirty="0"/>
-          </a:p>
-          <a:p>
-            <a:r>
-              <a:rPr lang="en-US" sz="4800" dirty="0"/>
-              <a:t>Is it advantageous or adventitious?</a:t>
-            </a:r>
-          </a:p>
-          <a:p>
-            <a:pPr marL="0" indent="0">
-              <a:buNone/>
-            </a:pPr>
-            <a:r>
-              <a:rPr lang="en-US" sz="4800" dirty="0"/>
-              <a:t> </a:t>
-            </a:r>
-          </a:p>
-          <a:p>
-            <a:r>
-              <a:rPr lang="en-US" sz="4800" dirty="0"/>
-              <a:t>Have you worked together?</a:t>
-            </a:r>
-          </a:p>
-        </p:txBody>
-      </p:sp>
-    </p:spTree>
-    <p:extLst>
-      <p:ext uri="{BB962C8B-B14F-4D97-AF65-F5344CB8AC3E}">
-        <p14:creationId xmlns:p14="http://schemas.microsoft.com/office/powerpoint/2010/main" val="2723289967"/>
-      </p:ext>
-    </p:extLst>
-  </p:cSld>
-  <p:clrMapOvr>
-    <a:masterClrMapping/>
-  </p:clrMapOvr>
-</p:sld>
-</file>
-
-<file path=ppt/slides/slide13.xml><?xml version="1.0" encoding="utf-8"?>
-<p:sld xmlns:a="http://schemas.openxmlformats.org/drawingml/2006/main" xmlns:r="http://schemas.openxmlformats.org/officeDocument/2006/relationships" xmlns:p="http://schemas.openxmlformats.org/presentationml/2006/main">
-  <p:cSld>
-    <p:spTree>
-      <p:nvGrpSpPr>
-        <p:cNvPr id="1" name=""/>
-        <p:cNvGrpSpPr/>
-        <p:nvPr/>
-      </p:nvGrpSpPr>
-      <p:grpSpPr>
-        <a:xfrm>
-          <a:off x="0" y="0"/>
-          <a:ext cx="0" cy="0"/>
-          <a:chOff x="0" y="0"/>
-          <a:chExt cx="0" cy="0"/>
-        </a:xfrm>
-      </p:grpSpPr>
-      <p:sp>
-        <p:nvSpPr>
-          <p:cNvPr id="2" name="Title 1">
-            <a:extLst>
-              <a:ext uri="{FF2B5EF4-FFF2-40B4-BE49-F238E27FC236}">
-                <a16:creationId xmlns:a16="http://schemas.microsoft.com/office/drawing/2014/main" id="{F5C5AB4B-E0E1-5941-8EF8-96D616F939F7}"/>
-              </a:ext>
-            </a:extLst>
-          </p:cNvPr>
-          <p:cNvSpPr>
-            <a:spLocks noGrp="1"/>
-          </p:cNvSpPr>
-          <p:nvPr>
-            <p:ph type="title"/>
-          </p:nvPr>
-        </p:nvSpPr>
-        <p:spPr/>
-        <p:txBody>
-          <a:bodyPr>
-            <a:normAutofit/>
-          </a:bodyPr>
-          <a:lstStyle/>
-          <a:p>
-            <a:r>
-              <a:rPr lang="en-US" sz="6000" dirty="0"/>
-              <a:t>Preliminary data</a:t>
-            </a:r>
-          </a:p>
-        </p:txBody>
-      </p:sp>
-      <p:sp>
-        <p:nvSpPr>
-          <p:cNvPr id="3" name="Content Placeholder 2">
-            <a:extLst>
-              <a:ext uri="{FF2B5EF4-FFF2-40B4-BE49-F238E27FC236}">
-                <a16:creationId xmlns:a16="http://schemas.microsoft.com/office/drawing/2014/main" id="{DB85285A-6D63-3343-B7B6-EEAF18C7C58B}"/>
-              </a:ext>
-            </a:extLst>
-          </p:cNvPr>
-          <p:cNvSpPr>
-            <a:spLocks noGrp="1"/>
-          </p:cNvSpPr>
-          <p:nvPr>
-            <p:ph idx="1"/>
-          </p:nvPr>
-        </p:nvSpPr>
-        <p:spPr>
-          <a:xfrm>
-            <a:off x="1115568" y="2347415"/>
-            <a:ext cx="10168128" cy="3961945"/>
-          </a:xfrm>
-        </p:spPr>
-        <p:txBody>
-          <a:bodyPr>
-            <a:normAutofit fontScale="92500" lnSpcReduction="20000"/>
-          </a:bodyPr>
-          <a:lstStyle/>
-          <a:p>
-            <a:r>
-              <a:rPr lang="en-US" sz="4000" dirty="0"/>
-              <a:t>Published</a:t>
-            </a:r>
-          </a:p>
-          <a:p>
-            <a:pPr lvl="0"/>
-            <a:r>
-              <a:rPr lang="en-US" sz="4000" dirty="0"/>
-              <a:t>Unpublished </a:t>
-            </a:r>
-          </a:p>
-          <a:p>
-            <a:pPr lvl="0"/>
-            <a:r>
-              <a:rPr lang="en-US" sz="4000" dirty="0"/>
-              <a:t>How much? </a:t>
-            </a:r>
-          </a:p>
-          <a:p>
-            <a:pPr lvl="1"/>
-            <a:r>
-              <a:rPr lang="en-US" sz="3600" dirty="0"/>
-              <a:t>R21</a:t>
-            </a:r>
-          </a:p>
-          <a:p>
-            <a:pPr lvl="1"/>
-            <a:r>
-              <a:rPr lang="en-US" sz="3600" dirty="0"/>
-              <a:t>R01</a:t>
-            </a:r>
-          </a:p>
-          <a:p>
-            <a:pPr lvl="1"/>
-            <a:r>
-              <a:rPr lang="en-US" sz="3600" dirty="0"/>
-              <a:t>High-risk high-reward RFAs </a:t>
-            </a:r>
-          </a:p>
-          <a:p>
-            <a:pPr lvl="2"/>
-            <a:r>
-              <a:rPr lang="en-US" sz="3200" dirty="0"/>
-              <a:t>Emphasis on the PI qualifications  </a:t>
-            </a:r>
-          </a:p>
-        </p:txBody>
-      </p:sp>
-    </p:spTree>
-    <p:extLst>
-      <p:ext uri="{BB962C8B-B14F-4D97-AF65-F5344CB8AC3E}">
-        <p14:creationId xmlns:p14="http://schemas.microsoft.com/office/powerpoint/2010/main" val="1596832331"/>
-      </p:ext>
-    </p:extLst>
-  </p:cSld>
-  <p:clrMapOvr>
-    <a:masterClrMapping/>
-  </p:clrMapOvr>
-</p:sld>
-</file>
-
-<file path=ppt/slides/slide14.xml><?xml version="1.0" encoding="utf-8"?>
-<p:sld xmlns:a="http://schemas.openxmlformats.org/drawingml/2006/main" xmlns:r="http://schemas.openxmlformats.org/officeDocument/2006/relationships" xmlns:p="http://schemas.openxmlformats.org/presentationml/2006/main">
-  <p:cSld>
-    <p:spTree>
-      <p:nvGrpSpPr>
-        <p:cNvPr id="1" name=""/>
-        <p:cNvGrpSpPr/>
-        <p:nvPr/>
-      </p:nvGrpSpPr>
-      <p:grpSpPr>
-        <a:xfrm>
-          <a:off x="0" y="0"/>
-          <a:ext cx="0" cy="0"/>
-          <a:chOff x="0" y="0"/>
-          <a:chExt cx="0" cy="0"/>
-        </a:xfrm>
-      </p:grpSpPr>
-      <p:sp>
-        <p:nvSpPr>
-          <p:cNvPr id="2" name="Title 1">
-            <a:extLst>
-              <a:ext uri="{FF2B5EF4-FFF2-40B4-BE49-F238E27FC236}">
-                <a16:creationId xmlns:a16="http://schemas.microsoft.com/office/drawing/2014/main" id="{F5C5AB4B-E0E1-5941-8EF8-96D616F939F7}"/>
-              </a:ext>
-            </a:extLst>
-          </p:cNvPr>
-          <p:cNvSpPr>
-            <a:spLocks noGrp="1"/>
-          </p:cNvSpPr>
-          <p:nvPr>
-            <p:ph type="title"/>
-          </p:nvPr>
-        </p:nvSpPr>
-        <p:spPr/>
-        <p:txBody>
-          <a:bodyPr>
-            <a:normAutofit/>
-          </a:bodyPr>
-          <a:lstStyle/>
-          <a:p>
-            <a:pPr lvl="1"/>
-            <a:r>
-              <a:rPr lang="en-US" sz="6000" dirty="0"/>
-              <a:t>Writing proposals </a:t>
-            </a:r>
-          </a:p>
-        </p:txBody>
-      </p:sp>
-      <p:sp>
-        <p:nvSpPr>
-          <p:cNvPr id="3" name="Content Placeholder 2">
-            <a:extLst>
-              <a:ext uri="{FF2B5EF4-FFF2-40B4-BE49-F238E27FC236}">
-                <a16:creationId xmlns:a16="http://schemas.microsoft.com/office/drawing/2014/main" id="{DB85285A-6D63-3343-B7B6-EEAF18C7C58B}"/>
-              </a:ext>
-            </a:extLst>
-          </p:cNvPr>
-          <p:cNvSpPr>
-            <a:spLocks noGrp="1"/>
-          </p:cNvSpPr>
-          <p:nvPr>
-            <p:ph idx="1"/>
-          </p:nvPr>
-        </p:nvSpPr>
-        <p:spPr>
-          <a:xfrm>
-            <a:off x="1115568" y="2369712"/>
-            <a:ext cx="10168128" cy="4150217"/>
-          </a:xfrm>
-        </p:spPr>
-        <p:txBody>
-          <a:bodyPr>
-            <a:normAutofit fontScale="92500"/>
-          </a:bodyPr>
-          <a:lstStyle/>
-          <a:p>
-            <a:r>
-              <a:rPr lang="en-US" sz="4000" dirty="0"/>
-              <a:t>Have a clear message</a:t>
-            </a:r>
-          </a:p>
-          <a:p>
-            <a:pPr lvl="1"/>
-            <a:r>
-              <a:rPr lang="en-US" sz="3600" dirty="0"/>
-              <a:t>Conceptual clarity first, technical clarity second</a:t>
-            </a:r>
-          </a:p>
-          <a:p>
-            <a:pPr lvl="0"/>
-            <a:r>
-              <a:rPr lang="en-US" sz="3600" dirty="0"/>
-              <a:t>Frame the questions &amp; expected conclusions</a:t>
-            </a:r>
-          </a:p>
-          <a:p>
-            <a:pPr lvl="0"/>
-            <a:r>
-              <a:rPr lang="en-US" sz="3600" dirty="0"/>
-              <a:t>What is plan B? C ?  </a:t>
-            </a:r>
-          </a:p>
-          <a:p>
-            <a:pPr lvl="0"/>
-            <a:r>
-              <a:rPr lang="en-US" sz="4000" dirty="0"/>
-              <a:t>Communication clarity</a:t>
-            </a:r>
-          </a:p>
-          <a:p>
-            <a:pPr lvl="0"/>
-            <a:r>
-              <a:rPr lang="en-US" sz="4000" dirty="0"/>
-              <a:t>Quantity cannot substitute quality </a:t>
-            </a:r>
-          </a:p>
-        </p:txBody>
-      </p:sp>
-    </p:spTree>
-    <p:extLst>
-      <p:ext uri="{BB962C8B-B14F-4D97-AF65-F5344CB8AC3E}">
-        <p14:creationId xmlns:p14="http://schemas.microsoft.com/office/powerpoint/2010/main" val="1715874542"/>
-      </p:ext>
-    </p:extLst>
-  </p:cSld>
-  <p:clrMapOvr>
-    <a:masterClrMapping/>
-  </p:clrMapOvr>
-</p:sld>
-</file>
-
-<file path=ppt/slides/slide15.xml><?xml version="1.0" encoding="utf-8"?>
-<p:sld xmlns:a="http://schemas.openxmlformats.org/drawingml/2006/main" xmlns:r="http://schemas.openxmlformats.org/officeDocument/2006/relationships" xmlns:p="http://schemas.openxmlformats.org/presentationml/2006/main">
-  <p:cSld>
-    <p:spTree>
-      <p:nvGrpSpPr>
-        <p:cNvPr id="1" name=""/>
-        <p:cNvGrpSpPr/>
-        <p:nvPr/>
-      </p:nvGrpSpPr>
-      <p:grpSpPr>
-        <a:xfrm>
-          <a:off x="0" y="0"/>
-          <a:ext cx="0" cy="0"/>
-          <a:chOff x="0" y="0"/>
-          <a:chExt cx="0" cy="0"/>
-        </a:xfrm>
-      </p:grpSpPr>
-      <p:sp>
-        <p:nvSpPr>
-          <p:cNvPr id="2" name="Title 1">
-            <a:extLst>
-              <a:ext uri="{FF2B5EF4-FFF2-40B4-BE49-F238E27FC236}">
-                <a16:creationId xmlns:a16="http://schemas.microsoft.com/office/drawing/2014/main" id="{F5C5AB4B-E0E1-5941-8EF8-96D616F939F7}"/>
-              </a:ext>
-            </a:extLst>
-          </p:cNvPr>
-          <p:cNvSpPr>
-            <a:spLocks noGrp="1"/>
-          </p:cNvSpPr>
-          <p:nvPr>
-            <p:ph type="title"/>
-          </p:nvPr>
-        </p:nvSpPr>
-        <p:spPr/>
-        <p:txBody>
-          <a:bodyPr>
-            <a:normAutofit/>
-          </a:bodyPr>
-          <a:lstStyle/>
-          <a:p>
-            <a:pPr lvl="1"/>
-            <a:r>
-              <a:rPr lang="en-US" sz="6000" dirty="0"/>
-              <a:t>The budget </a:t>
-            </a:r>
-          </a:p>
-        </p:txBody>
-      </p:sp>
-      <p:sp>
-        <p:nvSpPr>
-          <p:cNvPr id="3" name="Content Placeholder 2">
-            <a:extLst>
-              <a:ext uri="{FF2B5EF4-FFF2-40B4-BE49-F238E27FC236}">
-                <a16:creationId xmlns:a16="http://schemas.microsoft.com/office/drawing/2014/main" id="{DB85285A-6D63-3343-B7B6-EEAF18C7C58B}"/>
-              </a:ext>
-            </a:extLst>
-          </p:cNvPr>
-          <p:cNvSpPr>
-            <a:spLocks noGrp="1"/>
-          </p:cNvSpPr>
-          <p:nvPr>
-            <p:ph idx="1"/>
-          </p:nvPr>
-        </p:nvSpPr>
-        <p:spPr/>
-        <p:txBody>
-          <a:bodyPr>
-            <a:normAutofit lnSpcReduction="10000"/>
-          </a:bodyPr>
-          <a:lstStyle/>
-          <a:p>
-            <a:endParaRPr lang="en-US" sz="4000" dirty="0"/>
-          </a:p>
-          <a:p>
-            <a:r>
-              <a:rPr lang="en-US" sz="4000" dirty="0"/>
-              <a:t>Ask for what you need </a:t>
-            </a:r>
-          </a:p>
-          <a:p>
-            <a:endParaRPr lang="en-US" sz="4000" dirty="0"/>
-          </a:p>
-          <a:p>
-            <a:r>
-              <a:rPr lang="en-US" sz="4000" dirty="0"/>
-              <a:t>Too much or too little undermines the proposal</a:t>
-            </a:r>
-          </a:p>
-        </p:txBody>
-      </p:sp>
-    </p:spTree>
-    <p:extLst>
-      <p:ext uri="{BB962C8B-B14F-4D97-AF65-F5344CB8AC3E}">
-        <p14:creationId xmlns:p14="http://schemas.microsoft.com/office/powerpoint/2010/main" val="2194891398"/>
-      </p:ext>
-    </p:extLst>
-  </p:cSld>
-  <p:clrMapOvr>
-    <a:masterClrMapping/>
-  </p:clrMapOvr>
-</p:sld>
-</file>
-
-<file path=ppt/slides/slide16.xml><?xml version="1.0" encoding="utf-8"?>
-<p:sld xmlns:a="http://schemas.openxmlformats.org/drawingml/2006/main" xmlns:r="http://schemas.openxmlformats.org/officeDocument/2006/relationships" xmlns:p="http://schemas.openxmlformats.org/presentationml/2006/main">
-  <p:cSld>
-    <p:spTree>
-      <p:nvGrpSpPr>
-        <p:cNvPr id="1" name=""/>
-        <p:cNvGrpSpPr/>
-        <p:nvPr/>
-      </p:nvGrpSpPr>
-      <p:grpSpPr>
-        <a:xfrm>
-          <a:off x="0" y="0"/>
-          <a:ext cx="0" cy="0"/>
-          <a:chOff x="0" y="0"/>
-          <a:chExt cx="0" cy="0"/>
-        </a:xfrm>
-      </p:grpSpPr>
-      <p:sp>
-        <p:nvSpPr>
-          <p:cNvPr id="2" name="Title 1">
-            <a:extLst>
-              <a:ext uri="{FF2B5EF4-FFF2-40B4-BE49-F238E27FC236}">
-                <a16:creationId xmlns:a16="http://schemas.microsoft.com/office/drawing/2014/main" id="{B6240AE2-3A5C-9015-647E-515EF8AE5173}"/>
-              </a:ext>
-            </a:extLst>
-          </p:cNvPr>
-          <p:cNvSpPr>
-            <a:spLocks noGrp="1"/>
-          </p:cNvSpPr>
-          <p:nvPr>
-            <p:ph type="title"/>
-          </p:nvPr>
-        </p:nvSpPr>
-        <p:spPr/>
-        <p:txBody>
-          <a:bodyPr/>
-          <a:lstStyle/>
-          <a:p>
-            <a:endParaRPr lang="en-US"/>
-          </a:p>
-        </p:txBody>
-      </p:sp>
-      <p:sp>
-        <p:nvSpPr>
-          <p:cNvPr id="3" name="Content Placeholder 2">
-            <a:extLst>
-              <a:ext uri="{FF2B5EF4-FFF2-40B4-BE49-F238E27FC236}">
-                <a16:creationId xmlns:a16="http://schemas.microsoft.com/office/drawing/2014/main" id="{685A308C-A15E-53AC-CA3E-454A68E42E57}"/>
-              </a:ext>
-            </a:extLst>
-          </p:cNvPr>
-          <p:cNvSpPr>
-            <a:spLocks noGrp="1"/>
-          </p:cNvSpPr>
-          <p:nvPr>
-            <p:ph idx="1"/>
-          </p:nvPr>
-        </p:nvSpPr>
-        <p:spPr/>
-        <p:txBody>
-          <a:bodyPr/>
-          <a:lstStyle/>
-          <a:p>
-            <a:endParaRPr lang="en-US"/>
-          </a:p>
-        </p:txBody>
-      </p:sp>
-    </p:spTree>
-    <p:extLst>
-      <p:ext uri="{BB962C8B-B14F-4D97-AF65-F5344CB8AC3E}">
-        <p14:creationId xmlns:p14="http://schemas.microsoft.com/office/powerpoint/2010/main" val="2271058854"/>
-      </p:ext>
-    </p:extLst>
-  </p:cSld>
-  <p:clrMapOvr>
-    <a:masterClrMapping/>
-  </p:clrMapOvr>
-</p:sld>
-</file>
-
-<file path=ppt/slides/slide2.xml><?xml version="1.0" encoding="utf-8"?>
 <p:sld xmlns:a="http://schemas.openxmlformats.org/drawingml/2006/main" xmlns:r="http://schemas.openxmlformats.org/officeDocument/2006/relationships" xmlns:p="http://schemas.openxmlformats.org/presentationml/2006/main">
   <p:cSld>
     <p:spTree>
@@ -13510,7 +12643,7 @@
 </p:sld>
 </file>
 
-<file path=ppt/slides/slide3.xml><?xml version="1.0" encoding="utf-8"?>
+<file path=ppt/slides/slide12.xml><?xml version="1.0" encoding="utf-8"?>
 <p:sld xmlns:a="http://schemas.openxmlformats.org/drawingml/2006/main" xmlns:r="http://schemas.openxmlformats.org/officeDocument/2006/relationships" xmlns:p="http://schemas.openxmlformats.org/presentationml/2006/main">
   <p:cSld>
     <p:spTree>
@@ -13600,7 +12733,7 @@
 </p:sld>
 </file>
 
-<file path=ppt/slides/slide4.xml><?xml version="1.0" encoding="utf-8"?>
+<file path=ppt/slides/slide13.xml><?xml version="1.0" encoding="utf-8"?>
 <p:sld xmlns:a="http://schemas.openxmlformats.org/drawingml/2006/main" xmlns:r="http://schemas.openxmlformats.org/officeDocument/2006/relationships" xmlns:p="http://schemas.openxmlformats.org/presentationml/2006/main">
   <p:cSld>
     <p:spTree>
@@ -13617,107 +12750,71 @@
           <a:chExt cx="0" cy="0"/>
         </a:xfrm>
       </p:grpSpPr>
-      <p:pic>
-        <p:nvPicPr>
-          <p:cNvPr id="3" name="Picture 2">
+      <p:sp>
+        <p:nvSpPr>
+          <p:cNvPr id="2" name="Title 1">
             <a:extLst>
               <a:ext uri="{FF2B5EF4-FFF2-40B4-BE49-F238E27FC236}">
-                <a16:creationId xmlns:a16="http://schemas.microsoft.com/office/drawing/2014/main" id="{0CA693B2-C584-9844-95B6-0EAE35C409C4}"/>
+                <a16:creationId xmlns:a16="http://schemas.microsoft.com/office/drawing/2014/main" id="{74075FAB-C4CB-E84E-8E39-31784FA9ABAA}"/>
               </a:ext>
             </a:extLst>
           </p:cNvPr>
-          <p:cNvPicPr>
-            <a:picLocks noChangeAspect="1"/>
-          </p:cNvPicPr>
-          <p:nvPr/>
-        </p:nvPicPr>
-        <p:blipFill>
-          <a:blip r:embed="rId2"/>
-          <a:stretch>
-            <a:fillRect/>
-          </a:stretch>
-        </p:blipFill>
+          <p:cNvSpPr>
+            <a:spLocks noGrp="1"/>
+          </p:cNvSpPr>
+          <p:nvPr>
+            <p:ph type="ctrTitle"/>
+          </p:nvPr>
+        </p:nvSpPr>
         <p:spPr>
           <a:xfrm>
-            <a:off x="864695" y="0"/>
-            <a:ext cx="10462609" cy="6858000"/>
+            <a:off x="1903615" y="2219497"/>
+            <a:ext cx="7985759" cy="868823"/>
           </a:xfrm>
-          <a:prstGeom prst="rect">
-            <a:avLst/>
-          </a:prstGeom>
         </p:spPr>
-      </p:pic>
+        <p:txBody>
+          <a:bodyPr anchor="ctr">
+            <a:noAutofit/>
+          </a:bodyPr>
+          <a:lstStyle/>
+          <a:p>
+            <a:pPr algn="ctr"/>
+            <a:r>
+              <a:rPr lang="en-US" sz="7200" dirty="0"/>
+              <a:t>Writing proposals</a:t>
+            </a:r>
+          </a:p>
+        </p:txBody>
+      </p:sp>
       <p:sp>
         <p:nvSpPr>
-          <p:cNvPr id="4" name="Rectangle 3">
+          <p:cNvPr id="7" name="Subtitle 6">
             <a:extLst>
               <a:ext uri="{FF2B5EF4-FFF2-40B4-BE49-F238E27FC236}">
-                <a16:creationId xmlns:a16="http://schemas.microsoft.com/office/drawing/2014/main" id="{8798690C-DBED-0643-9F5F-0A9C36663AAB}"/>
+                <a16:creationId xmlns:a16="http://schemas.microsoft.com/office/drawing/2014/main" id="{DF171DD5-83B9-D3EA-3FD7-2B90FC75CBF8}"/>
               </a:ext>
             </a:extLst>
           </p:cNvPr>
-          <p:cNvSpPr/>
-          <p:nvPr/>
+          <p:cNvSpPr>
+            <a:spLocks noGrp="1"/>
+          </p:cNvSpPr>
+          <p:nvPr>
+            <p:ph type="subTitle" idx="1"/>
+          </p:nvPr>
         </p:nvSpPr>
-        <p:spPr>
-          <a:xfrm>
-            <a:off x="5665076" y="1076486"/>
-            <a:ext cx="6526924" cy="338554"/>
-          </a:xfrm>
-          <a:prstGeom prst="rect">
-            <a:avLst/>
-          </a:prstGeom>
-        </p:spPr>
+        <p:spPr/>
         <p:txBody>
-          <a:bodyPr wrap="square">
-            <a:spAutoFit/>
-          </a:bodyPr>
+          <a:bodyPr/>
           <a:lstStyle/>
           <a:p>
-            <a:r>
-              <a:rPr lang="en-US" sz="1600" dirty="0">
-                <a:solidFill>
-                  <a:srgbClr val="FF0000"/>
-                </a:solidFill>
-              </a:rPr>
-              <a:t>https://</a:t>
-            </a:r>
-            <a:r>
-              <a:rPr lang="en-US" sz="1600" dirty="0" err="1">
-                <a:solidFill>
-                  <a:srgbClr val="FF0000"/>
-                </a:solidFill>
-              </a:rPr>
-              <a:t>www.nature.com</a:t>
-            </a:r>
-            <a:r>
-              <a:rPr lang="en-US" sz="1600" dirty="0">
-                <a:solidFill>
-                  <a:srgbClr val="FF0000"/>
-                </a:solidFill>
-              </a:rPr>
-              <a:t>/documents/nature-summary-</a:t>
-            </a:r>
-            <a:r>
-              <a:rPr lang="en-US" sz="1600" dirty="0" err="1">
-                <a:solidFill>
-                  <a:srgbClr val="FF0000"/>
-                </a:solidFill>
-              </a:rPr>
-              <a:t>paragraph.pdf</a:t>
-            </a:r>
-            <a:endParaRPr lang="en-US" sz="1600" dirty="0">
-              <a:solidFill>
-                <a:srgbClr val="FF0000"/>
-              </a:solidFill>
-            </a:endParaRPr>
+            <a:endParaRPr lang="en-US"/>
           </a:p>
         </p:txBody>
       </p:sp>
     </p:spTree>
     <p:extLst>
       <p:ext uri="{BB962C8B-B14F-4D97-AF65-F5344CB8AC3E}">
-        <p14:creationId xmlns:p14="http://schemas.microsoft.com/office/powerpoint/2010/main" val="2188730285"/>
+        <p14:creationId xmlns:p14="http://schemas.microsoft.com/office/powerpoint/2010/main" val="3751545579"/>
       </p:ext>
     </p:extLst>
   </p:cSld>
@@ -13727,359 +12824,7 @@
 </p:sld>
 </file>
 
-<file path=ppt/slides/slide5.xml><?xml version="1.0" encoding="utf-8"?>
-<p:sld xmlns:a="http://schemas.openxmlformats.org/drawingml/2006/main" xmlns:r="http://schemas.openxmlformats.org/officeDocument/2006/relationships" xmlns:p="http://schemas.openxmlformats.org/presentationml/2006/main">
-  <p:cSld>
-    <p:bg>
-      <p:bgPr>
-        <a:solidFill>
-          <a:schemeClr val="bg1"/>
-        </a:solidFill>
-        <a:effectLst/>
-      </p:bgPr>
-    </p:bg>
-    <p:spTree>
-      <p:nvGrpSpPr>
-        <p:cNvPr id="1" name=""/>
-        <p:cNvGrpSpPr/>
-        <p:nvPr/>
-      </p:nvGrpSpPr>
-      <p:grpSpPr>
-        <a:xfrm>
-          <a:off x="0" y="0"/>
-          <a:ext cx="0" cy="0"/>
-          <a:chOff x="0" y="0"/>
-          <a:chExt cx="0" cy="0"/>
-        </a:xfrm>
-      </p:grpSpPr>
-      <p:sp useBgFill="1">
-        <p:nvSpPr>
-          <p:cNvPr id="9" name="Rectangle 8">
-            <a:extLst>
-              <a:ext uri="{FF2B5EF4-FFF2-40B4-BE49-F238E27FC236}">
-                <a16:creationId xmlns:a16="http://schemas.microsoft.com/office/drawing/2014/main" id="{AFF8D2E5-2C4E-47B1-930B-6C82B7C31331}"/>
-              </a:ext>
-              <a:ext uri="{C183D7F6-B498-43B3-948B-1728B52AA6E4}">
-                <adec:decorative xmlns:adec="http://schemas.microsoft.com/office/drawing/2017/decorative" val="1"/>
-              </a:ext>
-            </a:extLst>
-          </p:cNvPr>
-          <p:cNvSpPr>
-            <a:spLocks noGrp="1" noRot="1" noChangeAspect="1" noMove="1" noResize="1" noEditPoints="1" noAdjustHandles="1" noChangeArrowheads="1" noChangeShapeType="1" noTextEdit="1"/>
-          </p:cNvSpPr>
-          <p:nvPr>
-            <p:extLst>
-              <p:ext uri="{386F3935-93C4-4BCD-93E2-E3B085C9AB24}">
-                <p16:designElem xmlns:p16="http://schemas.microsoft.com/office/powerpoint/2015/main" val="1"/>
-              </p:ext>
-            </p:extLst>
-          </p:nvPr>
-        </p:nvSpPr>
-        <p:spPr>
-          <a:xfrm>
-            <a:off x="0" y="0"/>
-            <a:ext cx="12192000" cy="6858000"/>
-          </a:xfrm>
-          <a:prstGeom prst="rect">
-            <a:avLst/>
-          </a:prstGeom>
-          <a:ln>
-            <a:noFill/>
-          </a:ln>
-        </p:spPr>
-        <p:style>
-          <a:lnRef idx="2">
-            <a:schemeClr val="accent1">
-              <a:shade val="50000"/>
-            </a:schemeClr>
-          </a:lnRef>
-          <a:fillRef idx="1">
-            <a:schemeClr val="accent1"/>
-          </a:fillRef>
-          <a:effectRef idx="0">
-            <a:schemeClr val="accent1"/>
-          </a:effectRef>
-          <a:fontRef idx="minor">
-            <a:schemeClr val="lt1"/>
-          </a:fontRef>
-        </p:style>
-        <p:txBody>
-          <a:bodyPr rtlCol="0" anchor="ctr"/>
-          <a:lstStyle/>
-          <a:p>
-            <a:pPr algn="ctr"/>
-            <a:endParaRPr lang="en-US"/>
-          </a:p>
-        </p:txBody>
-      </p:sp>
-      <p:sp>
-        <p:nvSpPr>
-          <p:cNvPr id="2" name="Title 1">
-            <a:extLst>
-              <a:ext uri="{FF2B5EF4-FFF2-40B4-BE49-F238E27FC236}">
-                <a16:creationId xmlns:a16="http://schemas.microsoft.com/office/drawing/2014/main" id="{F5C5AB4B-E0E1-5941-8EF8-96D616F939F7}"/>
-              </a:ext>
-            </a:extLst>
-          </p:cNvPr>
-          <p:cNvSpPr>
-            <a:spLocks noGrp="1"/>
-          </p:cNvSpPr>
-          <p:nvPr>
-            <p:ph type="title"/>
-          </p:nvPr>
-        </p:nvSpPr>
-        <p:spPr>
-          <a:xfrm>
-            <a:off x="841248" y="251312"/>
-            <a:ext cx="10506456" cy="1010264"/>
-          </a:xfrm>
-        </p:spPr>
-        <p:txBody>
-          <a:bodyPr anchor="ctr">
-            <a:normAutofit/>
-          </a:bodyPr>
-          <a:lstStyle/>
-          <a:p>
-            <a:r>
-              <a:rPr lang="en-US"/>
-              <a:t>Logistics </a:t>
-            </a:r>
-          </a:p>
-        </p:txBody>
-      </p:sp>
-      <p:sp>
-        <p:nvSpPr>
-          <p:cNvPr id="11" name="Rectangle 10">
-            <a:extLst>
-              <a:ext uri="{FF2B5EF4-FFF2-40B4-BE49-F238E27FC236}">
-                <a16:creationId xmlns:a16="http://schemas.microsoft.com/office/drawing/2014/main" id="{801E4ADA-0EA9-4930-846E-3C11E8BED6DD}"/>
-              </a:ext>
-              <a:ext uri="{C183D7F6-B498-43B3-948B-1728B52AA6E4}">
-                <adec:decorative xmlns:adec="http://schemas.microsoft.com/office/drawing/2017/decorative" val="1"/>
-              </a:ext>
-            </a:extLst>
-          </p:cNvPr>
-          <p:cNvSpPr>
-            <a:spLocks noGrp="1" noRot="1" noChangeAspect="1" noMove="1" noResize="1" noEditPoints="1" noAdjustHandles="1" noChangeArrowheads="1" noChangeShapeType="1" noTextEdit="1"/>
-          </p:cNvSpPr>
-          <p:nvPr>
-            <p:extLst>
-              <p:ext uri="{386F3935-93C4-4BCD-93E2-E3B085C9AB24}">
-                <p16:designElem xmlns:p16="http://schemas.microsoft.com/office/powerpoint/2015/main" val="1"/>
-              </p:ext>
-            </p:extLst>
-          </p:nvPr>
-        </p:nvSpPr>
-        <p:spPr>
-          <a:xfrm>
-            <a:off x="0" y="417618"/>
-            <a:ext cx="128016" cy="631415"/>
-          </a:xfrm>
-          <a:prstGeom prst="rect">
-            <a:avLst/>
-          </a:prstGeom>
-          <a:solidFill>
-            <a:schemeClr val="accent1"/>
-          </a:solidFill>
-          <a:ln>
-            <a:noFill/>
-          </a:ln>
-        </p:spPr>
-        <p:style>
-          <a:lnRef idx="2">
-            <a:schemeClr val="accent1">
-              <a:shade val="50000"/>
-            </a:schemeClr>
-          </a:lnRef>
-          <a:fillRef idx="1">
-            <a:schemeClr val="accent1"/>
-          </a:fillRef>
-          <a:effectRef idx="0">
-            <a:schemeClr val="accent1"/>
-          </a:effectRef>
-          <a:fontRef idx="minor">
-            <a:schemeClr val="lt1"/>
-          </a:fontRef>
-        </p:style>
-        <p:txBody>
-          <a:bodyPr rtlCol="0" anchor="ctr"/>
-          <a:lstStyle/>
-          <a:p>
-            <a:pPr marL="0" marR="0" lvl="0" indent="0" algn="ctr" defTabSz="914400" rtl="0" eaLnBrk="1" fontAlgn="auto" latinLnBrk="0" hangingPunct="1">
-              <a:lnSpc>
-                <a:spcPct val="100000"/>
-              </a:lnSpc>
-              <a:spcBef>
-                <a:spcPts val="0"/>
-              </a:spcBef>
-              <a:spcAft>
-                <a:spcPts val="0"/>
-              </a:spcAft>
-              <a:buClrTx/>
-              <a:buSzTx/>
-              <a:buFontTx/>
-              <a:buNone/>
-              <a:tabLst/>
-              <a:defRPr/>
-            </a:pPr>
-            <a:endParaRPr kumimoji="0" lang="en-US" sz="1800" b="0" i="0" u="none" strike="noStrike" kern="1200" cap="none" spc="0" normalizeH="0" baseline="0" noProof="0">
-              <a:ln>
-                <a:noFill/>
-              </a:ln>
-              <a:solidFill>
-                <a:prstClr val="white"/>
-              </a:solidFill>
-              <a:effectLst/>
-              <a:uLnTx/>
-              <a:uFillTx/>
-              <a:latin typeface="Calibri" panose="020F0502020204030204"/>
-              <a:ea typeface="+mn-ea"/>
-              <a:cs typeface="+mn-cs"/>
-            </a:endParaRPr>
-          </a:p>
-        </p:txBody>
-      </p:sp>
-      <p:sp>
-        <p:nvSpPr>
-          <p:cNvPr id="13" name="Rectangle 12">
-            <a:extLst>
-              <a:ext uri="{FF2B5EF4-FFF2-40B4-BE49-F238E27FC236}">
-                <a16:creationId xmlns:a16="http://schemas.microsoft.com/office/drawing/2014/main" id="{FB92FFCE-0C90-454E-AA25-D4EE9A6C39C5}"/>
-              </a:ext>
-              <a:ext uri="{C183D7F6-B498-43B3-948B-1728B52AA6E4}">
-                <adec:decorative xmlns:adec="http://schemas.microsoft.com/office/drawing/2017/decorative" val="1"/>
-              </a:ext>
-            </a:extLst>
-          </p:cNvPr>
-          <p:cNvSpPr>
-            <a:spLocks noGrp="1" noRot="1" noChangeAspect="1" noMove="1" noResize="1" noEditPoints="1" noAdjustHandles="1" noChangeArrowheads="1" noChangeShapeType="1" noTextEdit="1"/>
-          </p:cNvSpPr>
-          <p:nvPr>
-            <p:extLst>
-              <p:ext uri="{386F3935-93C4-4BCD-93E2-E3B085C9AB24}">
-                <p16:designElem xmlns:p16="http://schemas.microsoft.com/office/powerpoint/2015/main" val="1"/>
-              </p:ext>
-            </p:extLst>
-          </p:nvPr>
-        </p:nvSpPr>
-        <p:spPr>
-          <a:xfrm>
-            <a:off x="841248" y="1380864"/>
-            <a:ext cx="10506456" cy="18288"/>
-          </a:xfrm>
-          <a:prstGeom prst="rect">
-            <a:avLst/>
-          </a:prstGeom>
-          <a:solidFill>
-            <a:schemeClr val="tx2">
-              <a:lumMod val="25000"/>
-              <a:lumOff val="75000"/>
-            </a:schemeClr>
-          </a:solidFill>
-          <a:ln w="3175">
-            <a:noFill/>
-          </a:ln>
-          <a:effectLst/>
-        </p:spPr>
-        <p:style>
-          <a:lnRef idx="2">
-            <a:schemeClr val="accent1">
-              <a:shade val="50000"/>
-            </a:schemeClr>
-          </a:lnRef>
-          <a:fillRef idx="1">
-            <a:schemeClr val="accent1"/>
-          </a:fillRef>
-          <a:effectRef idx="0">
-            <a:schemeClr val="accent1"/>
-          </a:effectRef>
-          <a:fontRef idx="minor">
-            <a:schemeClr val="lt1"/>
-          </a:fontRef>
-        </p:style>
-        <p:txBody>
-          <a:bodyPr rtlCol="0" anchor="ctr"/>
-          <a:lstStyle/>
-          <a:p>
-            <a:pPr marL="0" marR="0" lvl="0" indent="0" algn="ctr" defTabSz="914400" rtl="0" eaLnBrk="1" fontAlgn="auto" latinLnBrk="0" hangingPunct="1">
-              <a:lnSpc>
-                <a:spcPct val="100000"/>
-              </a:lnSpc>
-              <a:spcBef>
-                <a:spcPts val="0"/>
-              </a:spcBef>
-              <a:spcAft>
-                <a:spcPts val="0"/>
-              </a:spcAft>
-              <a:buClrTx/>
-              <a:buSzTx/>
-              <a:buFontTx/>
-              <a:buNone/>
-              <a:tabLst/>
-              <a:defRPr/>
-            </a:pPr>
-            <a:endParaRPr kumimoji="0" lang="en-US" sz="1800" b="0" i="0" u="none" strike="noStrike" kern="1200" cap="none" spc="0" normalizeH="0" baseline="0" noProof="0">
-              <a:ln>
-                <a:noFill/>
-              </a:ln>
-              <a:solidFill>
-                <a:prstClr val="white"/>
-              </a:solidFill>
-              <a:effectLst/>
-              <a:uLnTx/>
-              <a:uFillTx/>
-              <a:latin typeface="Calibri" panose="020F0502020204030204"/>
-              <a:ea typeface="+mn-ea"/>
-              <a:cs typeface="+mn-cs"/>
-            </a:endParaRPr>
-          </a:p>
-        </p:txBody>
-      </p:sp>
-      <p:graphicFrame>
-        <p:nvGraphicFramePr>
-          <p:cNvPr id="5" name="Content Placeholder 2">
-            <a:extLst>
-              <a:ext uri="{FF2B5EF4-FFF2-40B4-BE49-F238E27FC236}">
-                <a16:creationId xmlns:a16="http://schemas.microsoft.com/office/drawing/2014/main" id="{093D5F7E-CD38-66F1-2751-B6151560EA4C}"/>
-              </a:ext>
-            </a:extLst>
-          </p:cNvPr>
-          <p:cNvGraphicFramePr>
-            <a:graphicFrameLocks noGrp="1"/>
-          </p:cNvGraphicFramePr>
-          <p:nvPr>
-            <p:ph idx="1"/>
-            <p:extLst>
-              <p:ext uri="{D42A27DB-BD31-4B8C-83A1-F6EECF244321}">
-                <p14:modId xmlns:p14="http://schemas.microsoft.com/office/powerpoint/2010/main" val="1811981172"/>
-              </p:ext>
-            </p:extLst>
-          </p:nvPr>
-        </p:nvGraphicFramePr>
-        <p:xfrm>
-          <a:off x="838200" y="1650222"/>
-          <a:ext cx="10506456" cy="4584946"/>
-        </p:xfrm>
-        <a:graphic>
-          <a:graphicData uri="http://schemas.openxmlformats.org/drawingml/2006/diagram">
-            <dgm:relIds xmlns:dgm="http://schemas.openxmlformats.org/drawingml/2006/diagram" xmlns:r="http://schemas.openxmlformats.org/officeDocument/2006/relationships" r:dm="rId2" r:lo="rId3" r:qs="rId4" r:cs="rId5"/>
-          </a:graphicData>
-        </a:graphic>
-      </p:graphicFrame>
-    </p:spTree>
-    <p:extLst>
-      <p:ext uri="{BB962C8B-B14F-4D97-AF65-F5344CB8AC3E}">
-        <p14:creationId xmlns:p14="http://schemas.microsoft.com/office/powerpoint/2010/main" val="1564883310"/>
-      </p:ext>
-    </p:extLst>
-  </p:cSld>
-  <p:clrMapOvr>
-    <a:masterClrMapping/>
-  </p:clrMapOvr>
-</p:sld>
-</file>
-
-<file path=ppt/slides/slide6.xml><?xml version="1.0" encoding="utf-8"?>
+<file path=ppt/slides/slide14.xml><?xml version="1.0" encoding="utf-8"?>
 <p:sld xmlns:a="http://schemas.openxmlformats.org/drawingml/2006/main" xmlns:r="http://schemas.openxmlformats.org/officeDocument/2006/relationships" xmlns:p="http://schemas.openxmlformats.org/presentationml/2006/main">
   <p:cSld>
     <p:bg>
@@ -14566,7 +13311,7 @@
 </p:sld>
 </file>
 
-<file path=ppt/slides/slide7.xml><?xml version="1.0" encoding="utf-8"?>
+<file path=ppt/slides/slide15.xml><?xml version="1.0" encoding="utf-8"?>
 <p:sld xmlns:a="http://schemas.openxmlformats.org/drawingml/2006/main" xmlns:r="http://schemas.openxmlformats.org/officeDocument/2006/relationships" xmlns:p="http://schemas.openxmlformats.org/presentationml/2006/main">
   <p:cSld>
     <p:spTree>
@@ -14705,7 +13450,7 @@
 </p:sld>
 </file>
 
-<file path=ppt/slides/slide8.xml><?xml version="1.0" encoding="utf-8"?>
+<file path=ppt/slides/slide16.xml><?xml version="1.0" encoding="utf-8"?>
 <p:sld xmlns:a="http://schemas.openxmlformats.org/drawingml/2006/main" xmlns:r="http://schemas.openxmlformats.org/officeDocument/2006/relationships" xmlns:p="http://schemas.openxmlformats.org/presentationml/2006/main">
   <p:cSld>
     <p:spTree>
@@ -14829,7 +13574,7 @@
 </p:sld>
 </file>
 
-<file path=ppt/slides/slide9.xml><?xml version="1.0" encoding="utf-8"?>
+<file path=ppt/slides/slide17.xml><?xml version="1.0" encoding="utf-8"?>
 <p:sld xmlns:a="http://schemas.openxmlformats.org/drawingml/2006/main" xmlns:r="http://schemas.openxmlformats.org/officeDocument/2006/relationships" xmlns:p="http://schemas.openxmlformats.org/presentationml/2006/main">
   <p:cSld>
     <p:spTree>
@@ -14940,6 +13685,1992 @@
     <p:extLst>
       <p:ext uri="{BB962C8B-B14F-4D97-AF65-F5344CB8AC3E}">
         <p14:creationId xmlns:p14="http://schemas.microsoft.com/office/powerpoint/2010/main" val="2823895237"/>
+      </p:ext>
+    </p:extLst>
+  </p:cSld>
+  <p:clrMapOvr>
+    <a:masterClrMapping/>
+  </p:clrMapOvr>
+</p:sld>
+</file>
+
+<file path=ppt/slides/slide18.xml><?xml version="1.0" encoding="utf-8"?>
+<p:sld xmlns:a="http://schemas.openxmlformats.org/drawingml/2006/main" xmlns:r="http://schemas.openxmlformats.org/officeDocument/2006/relationships" xmlns:p="http://schemas.openxmlformats.org/presentationml/2006/main">
+  <p:cSld>
+    <p:spTree>
+      <p:nvGrpSpPr>
+        <p:cNvPr id="1" name=""/>
+        <p:cNvGrpSpPr/>
+        <p:nvPr/>
+      </p:nvGrpSpPr>
+      <p:grpSpPr>
+        <a:xfrm>
+          <a:off x="0" y="0"/>
+          <a:ext cx="0" cy="0"/>
+          <a:chOff x="0" y="0"/>
+          <a:chExt cx="0" cy="0"/>
+        </a:xfrm>
+      </p:grpSpPr>
+      <p:sp>
+        <p:nvSpPr>
+          <p:cNvPr id="2" name="Title 1">
+            <a:extLst>
+              <a:ext uri="{FF2B5EF4-FFF2-40B4-BE49-F238E27FC236}">
+                <a16:creationId xmlns:a16="http://schemas.microsoft.com/office/drawing/2014/main" id="{F5C5AB4B-E0E1-5941-8EF8-96D616F939F7}"/>
+              </a:ext>
+            </a:extLst>
+          </p:cNvPr>
+          <p:cNvSpPr>
+            <a:spLocks noGrp="1"/>
+          </p:cNvSpPr>
+          <p:nvPr>
+            <p:ph type="title"/>
+          </p:nvPr>
+        </p:nvSpPr>
+        <p:spPr/>
+        <p:txBody>
+          <a:bodyPr>
+            <a:normAutofit/>
+          </a:bodyPr>
+          <a:lstStyle/>
+          <a:p>
+            <a:r>
+              <a:rPr lang="en-US" sz="6000" dirty="0"/>
+              <a:t>Determinants of success</a:t>
+            </a:r>
+          </a:p>
+        </p:txBody>
+      </p:sp>
+      <p:sp>
+        <p:nvSpPr>
+          <p:cNvPr id="3" name="Content Placeholder 2">
+            <a:extLst>
+              <a:ext uri="{FF2B5EF4-FFF2-40B4-BE49-F238E27FC236}">
+                <a16:creationId xmlns:a16="http://schemas.microsoft.com/office/drawing/2014/main" id="{DB85285A-6D63-3343-B7B6-EEAF18C7C58B}"/>
+              </a:ext>
+            </a:extLst>
+          </p:cNvPr>
+          <p:cNvSpPr>
+            <a:spLocks noGrp="1"/>
+          </p:cNvSpPr>
+          <p:nvPr>
+            <p:ph idx="1"/>
+          </p:nvPr>
+        </p:nvSpPr>
+        <p:spPr>
+          <a:xfrm>
+            <a:off x="832232" y="2297720"/>
+            <a:ext cx="10168128" cy="3694176"/>
+          </a:xfrm>
+        </p:spPr>
+        <p:txBody>
+          <a:bodyPr>
+            <a:normAutofit/>
+          </a:bodyPr>
+          <a:lstStyle/>
+          <a:p>
+            <a:pPr lvl="0"/>
+            <a:r>
+              <a:rPr lang="en-US" sz="4800" b="1" dirty="0"/>
+              <a:t>The proposal </a:t>
+            </a:r>
+          </a:p>
+          <a:p>
+            <a:pPr lvl="0"/>
+            <a:endParaRPr lang="en-US" sz="4800" b="1" dirty="0"/>
+          </a:p>
+          <a:p>
+            <a:pPr lvl="0"/>
+            <a:r>
+              <a:rPr lang="en-US" sz="4800" b="1" dirty="0"/>
+              <a:t>The perceived strength on the PI </a:t>
+            </a:r>
+          </a:p>
+          <a:p>
+            <a:pPr lvl="1"/>
+            <a:r>
+              <a:rPr lang="en-US" sz="4000" b="1" dirty="0"/>
+              <a:t>HHMI funding </a:t>
+            </a:r>
+          </a:p>
+        </p:txBody>
+      </p:sp>
+    </p:spTree>
+    <p:extLst>
+      <p:ext uri="{BB962C8B-B14F-4D97-AF65-F5344CB8AC3E}">
+        <p14:creationId xmlns:p14="http://schemas.microsoft.com/office/powerpoint/2010/main" val="3636287700"/>
+      </p:ext>
+    </p:extLst>
+  </p:cSld>
+  <p:clrMapOvr>
+    <a:masterClrMapping/>
+  </p:clrMapOvr>
+</p:sld>
+</file>
+
+<file path=ppt/slides/slide19.xml><?xml version="1.0" encoding="utf-8"?>
+<p:sld xmlns:a="http://schemas.openxmlformats.org/drawingml/2006/main" xmlns:r="http://schemas.openxmlformats.org/officeDocument/2006/relationships" xmlns:p="http://schemas.openxmlformats.org/presentationml/2006/main">
+  <p:cSld>
+    <p:spTree>
+      <p:nvGrpSpPr>
+        <p:cNvPr id="1" name=""/>
+        <p:cNvGrpSpPr/>
+        <p:nvPr/>
+      </p:nvGrpSpPr>
+      <p:grpSpPr>
+        <a:xfrm>
+          <a:off x="0" y="0"/>
+          <a:ext cx="0" cy="0"/>
+          <a:chOff x="0" y="0"/>
+          <a:chExt cx="0" cy="0"/>
+        </a:xfrm>
+      </p:grpSpPr>
+      <p:sp>
+        <p:nvSpPr>
+          <p:cNvPr id="2" name="Title 1">
+            <a:extLst>
+              <a:ext uri="{FF2B5EF4-FFF2-40B4-BE49-F238E27FC236}">
+                <a16:creationId xmlns:a16="http://schemas.microsoft.com/office/drawing/2014/main" id="{F5C5AB4B-E0E1-5941-8EF8-96D616F939F7}"/>
+              </a:ext>
+            </a:extLst>
+          </p:cNvPr>
+          <p:cNvSpPr>
+            <a:spLocks noGrp="1"/>
+          </p:cNvSpPr>
+          <p:nvPr>
+            <p:ph type="title"/>
+          </p:nvPr>
+        </p:nvSpPr>
+        <p:spPr/>
+        <p:txBody>
+          <a:bodyPr>
+            <a:normAutofit/>
+          </a:bodyPr>
+          <a:lstStyle/>
+          <a:p>
+            <a:r>
+              <a:rPr lang="en-US" sz="6000" dirty="0"/>
+              <a:t>Determinants of success</a:t>
+            </a:r>
+          </a:p>
+        </p:txBody>
+      </p:sp>
+      <p:sp>
+        <p:nvSpPr>
+          <p:cNvPr id="3" name="Content Placeholder 2">
+            <a:extLst>
+              <a:ext uri="{FF2B5EF4-FFF2-40B4-BE49-F238E27FC236}">
+                <a16:creationId xmlns:a16="http://schemas.microsoft.com/office/drawing/2014/main" id="{DB85285A-6D63-3343-B7B6-EEAF18C7C58B}"/>
+              </a:ext>
+            </a:extLst>
+          </p:cNvPr>
+          <p:cNvSpPr>
+            <a:spLocks noGrp="1"/>
+          </p:cNvSpPr>
+          <p:nvPr>
+            <p:ph idx="1"/>
+          </p:nvPr>
+        </p:nvSpPr>
+        <p:spPr>
+          <a:xfrm>
+            <a:off x="832232" y="2297720"/>
+            <a:ext cx="10168128" cy="4011640"/>
+          </a:xfrm>
+        </p:spPr>
+        <p:txBody>
+          <a:bodyPr>
+            <a:normAutofit fontScale="92500" lnSpcReduction="10000"/>
+          </a:bodyPr>
+          <a:lstStyle/>
+          <a:p>
+            <a:pPr lvl="0"/>
+            <a:r>
+              <a:rPr lang="en-US" sz="4000" b="1" dirty="0"/>
+              <a:t>The proposal </a:t>
+            </a:r>
+          </a:p>
+          <a:p>
+            <a:pPr lvl="0"/>
+            <a:r>
+              <a:rPr lang="en-US" sz="4000" b="1" dirty="0"/>
+              <a:t>The perceived strength on the PI </a:t>
+            </a:r>
+          </a:p>
+          <a:p>
+            <a:pPr lvl="1"/>
+            <a:r>
+              <a:rPr lang="en-US" sz="3600" b="1" dirty="0"/>
+              <a:t>HHMI funding </a:t>
+            </a:r>
+            <a:endParaRPr lang="en-US" sz="3600" dirty="0"/>
+          </a:p>
+          <a:p>
+            <a:r>
+              <a:rPr lang="en-US" sz="4000" dirty="0"/>
+              <a:t>Strategy</a:t>
+            </a:r>
+          </a:p>
+          <a:p>
+            <a:pPr lvl="1"/>
+            <a:r>
+              <a:rPr lang="en-US" sz="3600" dirty="0"/>
+              <a:t>Fining the right RFA</a:t>
+            </a:r>
+          </a:p>
+          <a:p>
+            <a:pPr lvl="1"/>
+            <a:r>
+              <a:rPr lang="en-US" sz="3600" dirty="0"/>
+              <a:t>Knowing the members of the review section </a:t>
+            </a:r>
+          </a:p>
+        </p:txBody>
+      </p:sp>
+    </p:spTree>
+    <p:extLst>
+      <p:ext uri="{BB962C8B-B14F-4D97-AF65-F5344CB8AC3E}">
+        <p14:creationId xmlns:p14="http://schemas.microsoft.com/office/powerpoint/2010/main" val="1583635892"/>
+      </p:ext>
+    </p:extLst>
+  </p:cSld>
+  <p:clrMapOvr>
+    <a:masterClrMapping/>
+  </p:clrMapOvr>
+</p:sld>
+</file>
+
+<file path=ppt/slides/slide2.xml><?xml version="1.0" encoding="utf-8"?>
+<p:sld xmlns:a="http://schemas.openxmlformats.org/drawingml/2006/main" xmlns:r="http://schemas.openxmlformats.org/officeDocument/2006/relationships" xmlns:p="http://schemas.openxmlformats.org/presentationml/2006/main">
+  <p:cSld>
+    <p:spTree>
+      <p:nvGrpSpPr>
+        <p:cNvPr id="1" name="">
+          <a:extLst>
+            <a:ext uri="{FF2B5EF4-FFF2-40B4-BE49-F238E27FC236}">
+              <a16:creationId xmlns:a16="http://schemas.microsoft.com/office/drawing/2014/main" id="{08A3E4EB-FBDF-B796-1034-0A4C26A815F3}"/>
+            </a:ext>
+          </a:extLst>
+        </p:cNvPr>
+        <p:cNvGrpSpPr/>
+        <p:nvPr/>
+      </p:nvGrpSpPr>
+      <p:grpSpPr>
+        <a:xfrm>
+          <a:off x="0" y="0"/>
+          <a:ext cx="0" cy="0"/>
+          <a:chOff x="0" y="0"/>
+          <a:chExt cx="0" cy="0"/>
+        </a:xfrm>
+      </p:grpSpPr>
+      <p:sp>
+        <p:nvSpPr>
+          <p:cNvPr id="2" name="Title 1">
+            <a:extLst>
+              <a:ext uri="{FF2B5EF4-FFF2-40B4-BE49-F238E27FC236}">
+                <a16:creationId xmlns:a16="http://schemas.microsoft.com/office/drawing/2014/main" id="{59A961D2-BA28-76F0-5AB8-5DB6455C7885}"/>
+              </a:ext>
+            </a:extLst>
+          </p:cNvPr>
+          <p:cNvSpPr>
+            <a:spLocks noGrp="1"/>
+          </p:cNvSpPr>
+          <p:nvPr>
+            <p:ph type="title"/>
+          </p:nvPr>
+        </p:nvSpPr>
+        <p:spPr/>
+        <p:txBody>
+          <a:bodyPr>
+            <a:normAutofit/>
+          </a:bodyPr>
+          <a:lstStyle/>
+          <a:p>
+            <a:r>
+              <a:rPr lang="en-US" sz="4400" dirty="0"/>
+              <a:t>Research articles for discussion</a:t>
+            </a:r>
+          </a:p>
+        </p:txBody>
+      </p:sp>
+      <p:sp>
+        <p:nvSpPr>
+          <p:cNvPr id="7" name="TextBox 6">
+            <a:extLst>
+              <a:ext uri="{FF2B5EF4-FFF2-40B4-BE49-F238E27FC236}">
+                <a16:creationId xmlns:a16="http://schemas.microsoft.com/office/drawing/2014/main" id="{94F14953-3886-D24E-AC87-C3F4FBDA5C44}"/>
+              </a:ext>
+            </a:extLst>
+          </p:cNvPr>
+          <p:cNvSpPr txBox="1"/>
+          <p:nvPr/>
+        </p:nvSpPr>
+        <p:spPr>
+          <a:xfrm>
+            <a:off x="567558" y="2430545"/>
+            <a:ext cx="6096000" cy="646331"/>
+          </a:xfrm>
+          <a:prstGeom prst="rect">
+            <a:avLst/>
+          </a:prstGeom>
+          <a:noFill/>
+        </p:spPr>
+        <p:txBody>
+          <a:bodyPr wrap="square">
+            <a:spAutoFit/>
+          </a:bodyPr>
+          <a:lstStyle/>
+          <a:p>
+            <a:r>
+              <a:rPr lang="en-US" b="0" i="0" dirty="0">
+                <a:solidFill>
+                  <a:srgbClr val="273540"/>
+                </a:solidFill>
+                <a:effectLst/>
+                <a:latin typeface="Lato Extended"/>
+              </a:rPr>
+              <a:t>Schedule of </a:t>
+            </a:r>
+            <a:r>
+              <a:rPr lang="en-US" b="0" i="0" u="sng" dirty="0">
+                <a:solidFill>
+                  <a:srgbClr val="B52828"/>
+                </a:solidFill>
+                <a:effectLst/>
+                <a:latin typeface="Lato Extended"/>
+                <a:hlinkClick r:id="rId2"/>
+              </a:rPr>
+              <a:t>research articlesLinks to an external site.</a:t>
+            </a:r>
+            <a:r>
+              <a:rPr lang="en-US" b="0" i="0" dirty="0">
+                <a:solidFill>
+                  <a:srgbClr val="273540"/>
+                </a:solidFill>
+                <a:effectLst/>
+                <a:latin typeface="Lato Extended"/>
+              </a:rPr>
+              <a:t> for discussion. You can also suggest articles</a:t>
+            </a:r>
+            <a:endParaRPr lang="en-US" dirty="0"/>
+          </a:p>
+        </p:txBody>
+      </p:sp>
+      <p:pic>
+        <p:nvPicPr>
+          <p:cNvPr id="9" name="Picture 8">
+            <a:extLst>
+              <a:ext uri="{FF2B5EF4-FFF2-40B4-BE49-F238E27FC236}">
+                <a16:creationId xmlns:a16="http://schemas.microsoft.com/office/drawing/2014/main" id="{324BC3ED-F6C7-7DDF-784F-41771F44FA67}"/>
+              </a:ext>
+            </a:extLst>
+          </p:cNvPr>
+          <p:cNvPicPr>
+            <a:picLocks noChangeAspect="1"/>
+          </p:cNvPicPr>
+          <p:nvPr/>
+        </p:nvPicPr>
+        <p:blipFill>
+          <a:blip r:embed="rId3"/>
+          <a:stretch>
+            <a:fillRect/>
+          </a:stretch>
+        </p:blipFill>
+        <p:spPr>
+          <a:xfrm>
+            <a:off x="3258352" y="3429000"/>
+            <a:ext cx="7772400" cy="3167800"/>
+          </a:xfrm>
+          <a:prstGeom prst="rect">
+            <a:avLst/>
+          </a:prstGeom>
+        </p:spPr>
+      </p:pic>
+    </p:spTree>
+    <p:extLst>
+      <p:ext uri="{BB962C8B-B14F-4D97-AF65-F5344CB8AC3E}">
+        <p14:creationId xmlns:p14="http://schemas.microsoft.com/office/powerpoint/2010/main" val="2829248949"/>
+      </p:ext>
+    </p:extLst>
+  </p:cSld>
+  <p:clrMapOvr>
+    <a:masterClrMapping/>
+  </p:clrMapOvr>
+</p:sld>
+</file>
+
+<file path=ppt/slides/slide20.xml><?xml version="1.0" encoding="utf-8"?>
+<p:sld xmlns:a="http://schemas.openxmlformats.org/drawingml/2006/main" xmlns:r="http://schemas.openxmlformats.org/officeDocument/2006/relationships" xmlns:p="http://schemas.openxmlformats.org/presentationml/2006/main">
+  <p:cSld>
+    <p:spTree>
+      <p:nvGrpSpPr>
+        <p:cNvPr id="1" name=""/>
+        <p:cNvGrpSpPr/>
+        <p:nvPr/>
+      </p:nvGrpSpPr>
+      <p:grpSpPr>
+        <a:xfrm>
+          <a:off x="0" y="0"/>
+          <a:ext cx="0" cy="0"/>
+          <a:chOff x="0" y="0"/>
+          <a:chExt cx="0" cy="0"/>
+        </a:xfrm>
+      </p:grpSpPr>
+      <p:sp>
+        <p:nvSpPr>
+          <p:cNvPr id="2" name="Title 1">
+            <a:extLst>
+              <a:ext uri="{FF2B5EF4-FFF2-40B4-BE49-F238E27FC236}">
+                <a16:creationId xmlns:a16="http://schemas.microsoft.com/office/drawing/2014/main" id="{F5C5AB4B-E0E1-5941-8EF8-96D616F939F7}"/>
+              </a:ext>
+            </a:extLst>
+          </p:cNvPr>
+          <p:cNvSpPr>
+            <a:spLocks noGrp="1"/>
+          </p:cNvSpPr>
+          <p:nvPr>
+            <p:ph type="title"/>
+          </p:nvPr>
+        </p:nvSpPr>
+        <p:spPr/>
+        <p:txBody>
+          <a:bodyPr>
+            <a:normAutofit/>
+          </a:bodyPr>
+          <a:lstStyle/>
+          <a:p>
+            <a:r>
+              <a:rPr lang="en-US" sz="6000" dirty="0"/>
+              <a:t>Collaboration </a:t>
+            </a:r>
+          </a:p>
+        </p:txBody>
+      </p:sp>
+      <p:sp>
+        <p:nvSpPr>
+          <p:cNvPr id="3" name="Content Placeholder 2">
+            <a:extLst>
+              <a:ext uri="{FF2B5EF4-FFF2-40B4-BE49-F238E27FC236}">
+                <a16:creationId xmlns:a16="http://schemas.microsoft.com/office/drawing/2014/main" id="{DB85285A-6D63-3343-B7B6-EEAF18C7C58B}"/>
+              </a:ext>
+            </a:extLst>
+          </p:cNvPr>
+          <p:cNvSpPr>
+            <a:spLocks noGrp="1"/>
+          </p:cNvSpPr>
+          <p:nvPr>
+            <p:ph idx="1"/>
+          </p:nvPr>
+        </p:nvSpPr>
+        <p:spPr>
+          <a:xfrm>
+            <a:off x="1115568" y="2478024"/>
+            <a:ext cx="10168128" cy="3317469"/>
+          </a:xfrm>
+        </p:spPr>
+        <p:txBody>
+          <a:bodyPr>
+            <a:normAutofit fontScale="92500" lnSpcReduction="10000"/>
+          </a:bodyPr>
+          <a:lstStyle/>
+          <a:p>
+            <a:endParaRPr lang="en-US" sz="4800" dirty="0"/>
+          </a:p>
+          <a:p>
+            <a:r>
+              <a:rPr lang="en-US" sz="4800" dirty="0"/>
+              <a:t>Is it advantageous or adventitious?</a:t>
+            </a:r>
+          </a:p>
+          <a:p>
+            <a:pPr marL="0" indent="0">
+              <a:buNone/>
+            </a:pPr>
+            <a:r>
+              <a:rPr lang="en-US" sz="4800" dirty="0"/>
+              <a:t> </a:t>
+            </a:r>
+          </a:p>
+          <a:p>
+            <a:r>
+              <a:rPr lang="en-US" sz="4800" dirty="0"/>
+              <a:t>Have you worked together?</a:t>
+            </a:r>
+          </a:p>
+        </p:txBody>
+      </p:sp>
+    </p:spTree>
+    <p:extLst>
+      <p:ext uri="{BB962C8B-B14F-4D97-AF65-F5344CB8AC3E}">
+        <p14:creationId xmlns:p14="http://schemas.microsoft.com/office/powerpoint/2010/main" val="2723289967"/>
+      </p:ext>
+    </p:extLst>
+  </p:cSld>
+  <p:clrMapOvr>
+    <a:masterClrMapping/>
+  </p:clrMapOvr>
+</p:sld>
+</file>
+
+<file path=ppt/slides/slide21.xml><?xml version="1.0" encoding="utf-8"?>
+<p:sld xmlns:a="http://schemas.openxmlformats.org/drawingml/2006/main" xmlns:r="http://schemas.openxmlformats.org/officeDocument/2006/relationships" xmlns:p="http://schemas.openxmlformats.org/presentationml/2006/main">
+  <p:cSld>
+    <p:spTree>
+      <p:nvGrpSpPr>
+        <p:cNvPr id="1" name=""/>
+        <p:cNvGrpSpPr/>
+        <p:nvPr/>
+      </p:nvGrpSpPr>
+      <p:grpSpPr>
+        <a:xfrm>
+          <a:off x="0" y="0"/>
+          <a:ext cx="0" cy="0"/>
+          <a:chOff x="0" y="0"/>
+          <a:chExt cx="0" cy="0"/>
+        </a:xfrm>
+      </p:grpSpPr>
+      <p:sp>
+        <p:nvSpPr>
+          <p:cNvPr id="2" name="Title 1">
+            <a:extLst>
+              <a:ext uri="{FF2B5EF4-FFF2-40B4-BE49-F238E27FC236}">
+                <a16:creationId xmlns:a16="http://schemas.microsoft.com/office/drawing/2014/main" id="{F5C5AB4B-E0E1-5941-8EF8-96D616F939F7}"/>
+              </a:ext>
+            </a:extLst>
+          </p:cNvPr>
+          <p:cNvSpPr>
+            <a:spLocks noGrp="1"/>
+          </p:cNvSpPr>
+          <p:nvPr>
+            <p:ph type="title"/>
+          </p:nvPr>
+        </p:nvSpPr>
+        <p:spPr/>
+        <p:txBody>
+          <a:bodyPr>
+            <a:normAutofit/>
+          </a:bodyPr>
+          <a:lstStyle/>
+          <a:p>
+            <a:r>
+              <a:rPr lang="en-US" sz="6000" dirty="0"/>
+              <a:t>Preliminary data</a:t>
+            </a:r>
+          </a:p>
+        </p:txBody>
+      </p:sp>
+      <p:sp>
+        <p:nvSpPr>
+          <p:cNvPr id="3" name="Content Placeholder 2">
+            <a:extLst>
+              <a:ext uri="{FF2B5EF4-FFF2-40B4-BE49-F238E27FC236}">
+                <a16:creationId xmlns:a16="http://schemas.microsoft.com/office/drawing/2014/main" id="{DB85285A-6D63-3343-B7B6-EEAF18C7C58B}"/>
+              </a:ext>
+            </a:extLst>
+          </p:cNvPr>
+          <p:cNvSpPr>
+            <a:spLocks noGrp="1"/>
+          </p:cNvSpPr>
+          <p:nvPr>
+            <p:ph idx="1"/>
+          </p:nvPr>
+        </p:nvSpPr>
+        <p:spPr>
+          <a:xfrm>
+            <a:off x="1115568" y="2347415"/>
+            <a:ext cx="10168128" cy="3961945"/>
+          </a:xfrm>
+        </p:spPr>
+        <p:txBody>
+          <a:bodyPr>
+            <a:normAutofit fontScale="92500" lnSpcReduction="20000"/>
+          </a:bodyPr>
+          <a:lstStyle/>
+          <a:p>
+            <a:r>
+              <a:rPr lang="en-US" sz="4000" dirty="0"/>
+              <a:t>Published</a:t>
+            </a:r>
+          </a:p>
+          <a:p>
+            <a:pPr lvl="0"/>
+            <a:r>
+              <a:rPr lang="en-US" sz="4000" dirty="0"/>
+              <a:t>Unpublished </a:t>
+            </a:r>
+          </a:p>
+          <a:p>
+            <a:pPr lvl="0"/>
+            <a:r>
+              <a:rPr lang="en-US" sz="4000" dirty="0"/>
+              <a:t>How much? </a:t>
+            </a:r>
+          </a:p>
+          <a:p>
+            <a:pPr lvl="1"/>
+            <a:r>
+              <a:rPr lang="en-US" sz="3600" dirty="0"/>
+              <a:t>R21</a:t>
+            </a:r>
+          </a:p>
+          <a:p>
+            <a:pPr lvl="1"/>
+            <a:r>
+              <a:rPr lang="en-US" sz="3600" dirty="0"/>
+              <a:t>R01</a:t>
+            </a:r>
+          </a:p>
+          <a:p>
+            <a:pPr lvl="1"/>
+            <a:r>
+              <a:rPr lang="en-US" sz="3600" dirty="0"/>
+              <a:t>High-risk high-reward RFAs </a:t>
+            </a:r>
+          </a:p>
+          <a:p>
+            <a:pPr lvl="2"/>
+            <a:r>
+              <a:rPr lang="en-US" sz="3200" dirty="0"/>
+              <a:t>Emphasis on the PI qualifications  </a:t>
+            </a:r>
+          </a:p>
+        </p:txBody>
+      </p:sp>
+    </p:spTree>
+    <p:extLst>
+      <p:ext uri="{BB962C8B-B14F-4D97-AF65-F5344CB8AC3E}">
+        <p14:creationId xmlns:p14="http://schemas.microsoft.com/office/powerpoint/2010/main" val="1596832331"/>
+      </p:ext>
+    </p:extLst>
+  </p:cSld>
+  <p:clrMapOvr>
+    <a:masterClrMapping/>
+  </p:clrMapOvr>
+</p:sld>
+</file>
+
+<file path=ppt/slides/slide22.xml><?xml version="1.0" encoding="utf-8"?>
+<p:sld xmlns:a="http://schemas.openxmlformats.org/drawingml/2006/main" xmlns:r="http://schemas.openxmlformats.org/officeDocument/2006/relationships" xmlns:p="http://schemas.openxmlformats.org/presentationml/2006/main">
+  <p:cSld>
+    <p:spTree>
+      <p:nvGrpSpPr>
+        <p:cNvPr id="1" name=""/>
+        <p:cNvGrpSpPr/>
+        <p:nvPr/>
+      </p:nvGrpSpPr>
+      <p:grpSpPr>
+        <a:xfrm>
+          <a:off x="0" y="0"/>
+          <a:ext cx="0" cy="0"/>
+          <a:chOff x="0" y="0"/>
+          <a:chExt cx="0" cy="0"/>
+        </a:xfrm>
+      </p:grpSpPr>
+      <p:sp>
+        <p:nvSpPr>
+          <p:cNvPr id="2" name="Title 1">
+            <a:extLst>
+              <a:ext uri="{FF2B5EF4-FFF2-40B4-BE49-F238E27FC236}">
+                <a16:creationId xmlns:a16="http://schemas.microsoft.com/office/drawing/2014/main" id="{F5C5AB4B-E0E1-5941-8EF8-96D616F939F7}"/>
+              </a:ext>
+            </a:extLst>
+          </p:cNvPr>
+          <p:cNvSpPr>
+            <a:spLocks noGrp="1"/>
+          </p:cNvSpPr>
+          <p:nvPr>
+            <p:ph type="title"/>
+          </p:nvPr>
+        </p:nvSpPr>
+        <p:spPr/>
+        <p:txBody>
+          <a:bodyPr>
+            <a:normAutofit/>
+          </a:bodyPr>
+          <a:lstStyle/>
+          <a:p>
+            <a:pPr lvl="1"/>
+            <a:r>
+              <a:rPr lang="en-US" sz="6000" dirty="0"/>
+              <a:t>Writing proposals </a:t>
+            </a:r>
+          </a:p>
+        </p:txBody>
+      </p:sp>
+      <p:sp>
+        <p:nvSpPr>
+          <p:cNvPr id="3" name="Content Placeholder 2">
+            <a:extLst>
+              <a:ext uri="{FF2B5EF4-FFF2-40B4-BE49-F238E27FC236}">
+                <a16:creationId xmlns:a16="http://schemas.microsoft.com/office/drawing/2014/main" id="{DB85285A-6D63-3343-B7B6-EEAF18C7C58B}"/>
+              </a:ext>
+            </a:extLst>
+          </p:cNvPr>
+          <p:cNvSpPr>
+            <a:spLocks noGrp="1"/>
+          </p:cNvSpPr>
+          <p:nvPr>
+            <p:ph idx="1"/>
+          </p:nvPr>
+        </p:nvSpPr>
+        <p:spPr>
+          <a:xfrm>
+            <a:off x="1115568" y="2369712"/>
+            <a:ext cx="10168128" cy="4150217"/>
+          </a:xfrm>
+        </p:spPr>
+        <p:txBody>
+          <a:bodyPr>
+            <a:normAutofit fontScale="92500"/>
+          </a:bodyPr>
+          <a:lstStyle/>
+          <a:p>
+            <a:r>
+              <a:rPr lang="en-US" sz="4000" dirty="0"/>
+              <a:t>Have a clear message</a:t>
+            </a:r>
+          </a:p>
+          <a:p>
+            <a:pPr lvl="1"/>
+            <a:r>
+              <a:rPr lang="en-US" sz="3600" dirty="0"/>
+              <a:t>Conceptual clarity first, technical clarity second</a:t>
+            </a:r>
+          </a:p>
+          <a:p>
+            <a:pPr lvl="0"/>
+            <a:r>
+              <a:rPr lang="en-US" sz="3600" dirty="0"/>
+              <a:t>Frame the questions &amp; expected conclusions</a:t>
+            </a:r>
+          </a:p>
+          <a:p>
+            <a:pPr lvl="0"/>
+            <a:r>
+              <a:rPr lang="en-US" sz="3600" dirty="0"/>
+              <a:t>What is plan B? C ?  </a:t>
+            </a:r>
+          </a:p>
+          <a:p>
+            <a:pPr lvl="0"/>
+            <a:r>
+              <a:rPr lang="en-US" sz="4000" dirty="0"/>
+              <a:t>Communication clarity</a:t>
+            </a:r>
+          </a:p>
+          <a:p>
+            <a:pPr lvl="0"/>
+            <a:r>
+              <a:rPr lang="en-US" sz="4000" dirty="0"/>
+              <a:t>Quantity cannot substitute quality </a:t>
+            </a:r>
+          </a:p>
+        </p:txBody>
+      </p:sp>
+    </p:spTree>
+    <p:extLst>
+      <p:ext uri="{BB962C8B-B14F-4D97-AF65-F5344CB8AC3E}">
+        <p14:creationId xmlns:p14="http://schemas.microsoft.com/office/powerpoint/2010/main" val="1715874542"/>
+      </p:ext>
+    </p:extLst>
+  </p:cSld>
+  <p:clrMapOvr>
+    <a:masterClrMapping/>
+  </p:clrMapOvr>
+</p:sld>
+</file>
+
+<file path=ppt/slides/slide23.xml><?xml version="1.0" encoding="utf-8"?>
+<p:sld xmlns:a="http://schemas.openxmlformats.org/drawingml/2006/main" xmlns:r="http://schemas.openxmlformats.org/officeDocument/2006/relationships" xmlns:p="http://schemas.openxmlformats.org/presentationml/2006/main">
+  <p:cSld>
+    <p:spTree>
+      <p:nvGrpSpPr>
+        <p:cNvPr id="1" name=""/>
+        <p:cNvGrpSpPr/>
+        <p:nvPr/>
+      </p:nvGrpSpPr>
+      <p:grpSpPr>
+        <a:xfrm>
+          <a:off x="0" y="0"/>
+          <a:ext cx="0" cy="0"/>
+          <a:chOff x="0" y="0"/>
+          <a:chExt cx="0" cy="0"/>
+        </a:xfrm>
+      </p:grpSpPr>
+      <p:sp>
+        <p:nvSpPr>
+          <p:cNvPr id="2" name="Title 1">
+            <a:extLst>
+              <a:ext uri="{FF2B5EF4-FFF2-40B4-BE49-F238E27FC236}">
+                <a16:creationId xmlns:a16="http://schemas.microsoft.com/office/drawing/2014/main" id="{F5C5AB4B-E0E1-5941-8EF8-96D616F939F7}"/>
+              </a:ext>
+            </a:extLst>
+          </p:cNvPr>
+          <p:cNvSpPr>
+            <a:spLocks noGrp="1"/>
+          </p:cNvSpPr>
+          <p:nvPr>
+            <p:ph type="title"/>
+          </p:nvPr>
+        </p:nvSpPr>
+        <p:spPr/>
+        <p:txBody>
+          <a:bodyPr>
+            <a:normAutofit/>
+          </a:bodyPr>
+          <a:lstStyle/>
+          <a:p>
+            <a:pPr lvl="1"/>
+            <a:r>
+              <a:rPr lang="en-US" sz="6000" dirty="0"/>
+              <a:t>The budget </a:t>
+            </a:r>
+          </a:p>
+        </p:txBody>
+      </p:sp>
+      <p:sp>
+        <p:nvSpPr>
+          <p:cNvPr id="3" name="Content Placeholder 2">
+            <a:extLst>
+              <a:ext uri="{FF2B5EF4-FFF2-40B4-BE49-F238E27FC236}">
+                <a16:creationId xmlns:a16="http://schemas.microsoft.com/office/drawing/2014/main" id="{DB85285A-6D63-3343-B7B6-EEAF18C7C58B}"/>
+              </a:ext>
+            </a:extLst>
+          </p:cNvPr>
+          <p:cNvSpPr>
+            <a:spLocks noGrp="1"/>
+          </p:cNvSpPr>
+          <p:nvPr>
+            <p:ph idx="1"/>
+          </p:nvPr>
+        </p:nvSpPr>
+        <p:spPr/>
+        <p:txBody>
+          <a:bodyPr>
+            <a:normAutofit lnSpcReduction="10000"/>
+          </a:bodyPr>
+          <a:lstStyle/>
+          <a:p>
+            <a:endParaRPr lang="en-US" sz="4000" dirty="0"/>
+          </a:p>
+          <a:p>
+            <a:r>
+              <a:rPr lang="en-US" sz="4000" dirty="0"/>
+              <a:t>Ask for what you need </a:t>
+            </a:r>
+          </a:p>
+          <a:p>
+            <a:endParaRPr lang="en-US" sz="4000" dirty="0"/>
+          </a:p>
+          <a:p>
+            <a:r>
+              <a:rPr lang="en-US" sz="4000" dirty="0"/>
+              <a:t>Too much or too little undermines the proposal</a:t>
+            </a:r>
+          </a:p>
+        </p:txBody>
+      </p:sp>
+    </p:spTree>
+    <p:extLst>
+      <p:ext uri="{BB962C8B-B14F-4D97-AF65-F5344CB8AC3E}">
+        <p14:creationId xmlns:p14="http://schemas.microsoft.com/office/powerpoint/2010/main" val="2194891398"/>
+      </p:ext>
+    </p:extLst>
+  </p:cSld>
+  <p:clrMapOvr>
+    <a:masterClrMapping/>
+  </p:clrMapOvr>
+</p:sld>
+</file>
+
+<file path=ppt/slides/slide24.xml><?xml version="1.0" encoding="utf-8"?>
+<p:sld xmlns:a="http://schemas.openxmlformats.org/drawingml/2006/main" xmlns:r="http://schemas.openxmlformats.org/officeDocument/2006/relationships" xmlns:p="http://schemas.openxmlformats.org/presentationml/2006/main">
+  <p:cSld>
+    <p:spTree>
+      <p:nvGrpSpPr>
+        <p:cNvPr id="1" name=""/>
+        <p:cNvGrpSpPr/>
+        <p:nvPr/>
+      </p:nvGrpSpPr>
+      <p:grpSpPr>
+        <a:xfrm>
+          <a:off x="0" y="0"/>
+          <a:ext cx="0" cy="0"/>
+          <a:chOff x="0" y="0"/>
+          <a:chExt cx="0" cy="0"/>
+        </a:xfrm>
+      </p:grpSpPr>
+      <p:sp>
+        <p:nvSpPr>
+          <p:cNvPr id="2" name="Title 1">
+            <a:extLst>
+              <a:ext uri="{FF2B5EF4-FFF2-40B4-BE49-F238E27FC236}">
+                <a16:creationId xmlns:a16="http://schemas.microsoft.com/office/drawing/2014/main" id="{B6240AE2-3A5C-9015-647E-515EF8AE5173}"/>
+              </a:ext>
+            </a:extLst>
+          </p:cNvPr>
+          <p:cNvSpPr>
+            <a:spLocks noGrp="1"/>
+          </p:cNvSpPr>
+          <p:nvPr>
+            <p:ph type="title"/>
+          </p:nvPr>
+        </p:nvSpPr>
+        <p:spPr/>
+        <p:txBody>
+          <a:bodyPr/>
+          <a:lstStyle/>
+          <a:p>
+            <a:endParaRPr lang="en-US"/>
+          </a:p>
+        </p:txBody>
+      </p:sp>
+      <p:sp>
+        <p:nvSpPr>
+          <p:cNvPr id="3" name="Content Placeholder 2">
+            <a:extLst>
+              <a:ext uri="{FF2B5EF4-FFF2-40B4-BE49-F238E27FC236}">
+                <a16:creationId xmlns:a16="http://schemas.microsoft.com/office/drawing/2014/main" id="{685A308C-A15E-53AC-CA3E-454A68E42E57}"/>
+              </a:ext>
+            </a:extLst>
+          </p:cNvPr>
+          <p:cNvSpPr>
+            <a:spLocks noGrp="1"/>
+          </p:cNvSpPr>
+          <p:nvPr>
+            <p:ph idx="1"/>
+          </p:nvPr>
+        </p:nvSpPr>
+        <p:spPr/>
+        <p:txBody>
+          <a:bodyPr/>
+          <a:lstStyle/>
+          <a:p>
+            <a:endParaRPr lang="en-US"/>
+          </a:p>
+        </p:txBody>
+      </p:sp>
+    </p:spTree>
+    <p:extLst>
+      <p:ext uri="{BB962C8B-B14F-4D97-AF65-F5344CB8AC3E}">
+        <p14:creationId xmlns:p14="http://schemas.microsoft.com/office/powerpoint/2010/main" val="2271058854"/>
+      </p:ext>
+    </p:extLst>
+  </p:cSld>
+  <p:clrMapOvr>
+    <a:masterClrMapping/>
+  </p:clrMapOvr>
+</p:sld>
+</file>
+
+<file path=ppt/slides/slide3.xml><?xml version="1.0" encoding="utf-8"?>
+<p:sld xmlns:a="http://schemas.openxmlformats.org/drawingml/2006/main" xmlns:r="http://schemas.openxmlformats.org/officeDocument/2006/relationships" xmlns:p="http://schemas.openxmlformats.org/presentationml/2006/main">
+  <p:cSld>
+    <p:spTree>
+      <p:nvGrpSpPr>
+        <p:cNvPr id="1" name=""/>
+        <p:cNvGrpSpPr/>
+        <p:nvPr/>
+      </p:nvGrpSpPr>
+      <p:grpSpPr>
+        <a:xfrm>
+          <a:off x="0" y="0"/>
+          <a:ext cx="0" cy="0"/>
+          <a:chOff x="0" y="0"/>
+          <a:chExt cx="0" cy="0"/>
+        </a:xfrm>
+      </p:grpSpPr>
+      <p:sp>
+        <p:nvSpPr>
+          <p:cNvPr id="2" name="Title 1">
+            <a:extLst>
+              <a:ext uri="{FF2B5EF4-FFF2-40B4-BE49-F238E27FC236}">
+                <a16:creationId xmlns:a16="http://schemas.microsoft.com/office/drawing/2014/main" id="{2DF57BFA-C9AB-2344-9C32-416626C2609F}"/>
+              </a:ext>
+            </a:extLst>
+          </p:cNvPr>
+          <p:cNvSpPr>
+            <a:spLocks noGrp="1"/>
+          </p:cNvSpPr>
+          <p:nvPr>
+            <p:ph type="title"/>
+          </p:nvPr>
+        </p:nvSpPr>
+        <p:spPr/>
+        <p:txBody>
+          <a:bodyPr>
+            <a:normAutofit/>
+          </a:bodyPr>
+          <a:lstStyle/>
+          <a:p>
+            <a:r>
+              <a:rPr lang="en-US" sz="6000" dirty="0"/>
+              <a:t>Reading a research paper </a:t>
+            </a:r>
+          </a:p>
+        </p:txBody>
+      </p:sp>
+      <p:sp>
+        <p:nvSpPr>
+          <p:cNvPr id="3" name="Content Placeholder 2">
+            <a:extLst>
+              <a:ext uri="{FF2B5EF4-FFF2-40B4-BE49-F238E27FC236}">
+                <a16:creationId xmlns:a16="http://schemas.microsoft.com/office/drawing/2014/main" id="{7B11EA24-9670-004B-AC6C-BD39C60B6FBA}"/>
+              </a:ext>
+            </a:extLst>
+          </p:cNvPr>
+          <p:cNvSpPr>
+            <a:spLocks noGrp="1"/>
+          </p:cNvSpPr>
+          <p:nvPr>
+            <p:ph idx="1"/>
+          </p:nvPr>
+        </p:nvSpPr>
+        <p:spPr/>
+        <p:txBody>
+          <a:bodyPr>
+            <a:normAutofit fontScale="85000" lnSpcReduction="20000"/>
+          </a:bodyPr>
+          <a:lstStyle/>
+          <a:p>
+            <a:r>
+              <a:rPr lang="en-US" dirty="0"/>
+              <a:t>What problem is being addressed? </a:t>
+            </a:r>
+          </a:p>
+          <a:p>
+            <a:pPr lvl="1"/>
+            <a:r>
+              <a:rPr lang="en-US" dirty="0"/>
+              <a:t>Why care?  </a:t>
+            </a:r>
+          </a:p>
+          <a:p>
+            <a:endParaRPr lang="en-US" dirty="0"/>
+          </a:p>
+          <a:p>
+            <a:r>
+              <a:rPr lang="en-US" dirty="0"/>
+              <a:t>What are the main results? </a:t>
+            </a:r>
+          </a:p>
+          <a:p>
+            <a:pPr lvl="1"/>
+            <a:r>
+              <a:rPr lang="en-US" dirty="0"/>
+              <a:t>So what? </a:t>
+            </a:r>
+          </a:p>
+          <a:p>
+            <a:endParaRPr lang="en-US" dirty="0"/>
+          </a:p>
+          <a:p>
+            <a:r>
+              <a:rPr lang="en-US" dirty="0"/>
+              <a:t>What is the supporting evidence? </a:t>
+            </a:r>
+          </a:p>
+          <a:p>
+            <a:pPr lvl="1"/>
+            <a:r>
+              <a:rPr lang="en-US" dirty="0"/>
+              <a:t>What are the caveats? </a:t>
+            </a:r>
+          </a:p>
+          <a:p>
+            <a:pPr lvl="1"/>
+            <a:r>
+              <a:rPr lang="en-US" dirty="0"/>
+              <a:t>How direct is the evidence?   </a:t>
+            </a:r>
+          </a:p>
+          <a:p>
+            <a:pPr lvl="1"/>
+            <a:endParaRPr lang="en-US" dirty="0"/>
+          </a:p>
+          <a:p>
+            <a:endParaRPr lang="en-US" dirty="0"/>
+          </a:p>
+        </p:txBody>
+      </p:sp>
+    </p:spTree>
+    <p:extLst>
+      <p:ext uri="{BB962C8B-B14F-4D97-AF65-F5344CB8AC3E}">
+        <p14:creationId xmlns:p14="http://schemas.microsoft.com/office/powerpoint/2010/main" val="2242698363"/>
+      </p:ext>
+    </p:extLst>
+  </p:cSld>
+  <p:clrMapOvr>
+    <a:masterClrMapping/>
+  </p:clrMapOvr>
+</p:sld>
+</file>
+
+<file path=ppt/slides/slide4.xml><?xml version="1.0" encoding="utf-8"?>
+<p:sld xmlns:a="http://schemas.openxmlformats.org/drawingml/2006/main" xmlns:r="http://schemas.openxmlformats.org/officeDocument/2006/relationships" xmlns:p="http://schemas.openxmlformats.org/presentationml/2006/main">
+  <p:cSld>
+    <p:spTree>
+      <p:nvGrpSpPr>
+        <p:cNvPr id="1" name=""/>
+        <p:cNvGrpSpPr/>
+        <p:nvPr/>
+      </p:nvGrpSpPr>
+      <p:grpSpPr>
+        <a:xfrm>
+          <a:off x="0" y="0"/>
+          <a:ext cx="0" cy="0"/>
+          <a:chOff x="0" y="0"/>
+          <a:chExt cx="0" cy="0"/>
+        </a:xfrm>
+      </p:grpSpPr>
+      <p:sp>
+        <p:nvSpPr>
+          <p:cNvPr id="2" name="Title 1">
+            <a:extLst>
+              <a:ext uri="{FF2B5EF4-FFF2-40B4-BE49-F238E27FC236}">
+                <a16:creationId xmlns:a16="http://schemas.microsoft.com/office/drawing/2014/main" id="{2DF57BFA-C9AB-2344-9C32-416626C2609F}"/>
+              </a:ext>
+            </a:extLst>
+          </p:cNvPr>
+          <p:cNvSpPr>
+            <a:spLocks noGrp="1"/>
+          </p:cNvSpPr>
+          <p:nvPr>
+            <p:ph type="title"/>
+          </p:nvPr>
+        </p:nvSpPr>
+        <p:spPr/>
+        <p:txBody>
+          <a:bodyPr>
+            <a:normAutofit/>
+          </a:bodyPr>
+          <a:lstStyle/>
+          <a:p>
+            <a:r>
+              <a:rPr lang="en-US" sz="6000" dirty="0"/>
+              <a:t>Writing </a:t>
+            </a:r>
+          </a:p>
+        </p:txBody>
+      </p:sp>
+      <p:sp>
+        <p:nvSpPr>
+          <p:cNvPr id="3" name="Content Placeholder 2">
+            <a:extLst>
+              <a:ext uri="{FF2B5EF4-FFF2-40B4-BE49-F238E27FC236}">
+                <a16:creationId xmlns:a16="http://schemas.microsoft.com/office/drawing/2014/main" id="{7B11EA24-9670-004B-AC6C-BD39C60B6FBA}"/>
+              </a:ext>
+            </a:extLst>
+          </p:cNvPr>
+          <p:cNvSpPr>
+            <a:spLocks noGrp="1"/>
+          </p:cNvSpPr>
+          <p:nvPr>
+            <p:ph idx="1"/>
+          </p:nvPr>
+        </p:nvSpPr>
+        <p:spPr/>
+        <p:txBody>
+          <a:bodyPr/>
+          <a:lstStyle/>
+          <a:p>
+            <a:r>
+              <a:rPr lang="en-US" dirty="0"/>
+              <a:t>What is your message?</a:t>
+            </a:r>
+          </a:p>
+          <a:p>
+            <a:endParaRPr lang="en-US" dirty="0"/>
+          </a:p>
+          <a:p>
+            <a:r>
+              <a:rPr lang="en-US" dirty="0"/>
+              <a:t>What do your readers need to know to appreciate the message?</a:t>
+            </a:r>
+          </a:p>
+          <a:p>
+            <a:endParaRPr lang="en-US" dirty="0"/>
+          </a:p>
+          <a:p>
+            <a:r>
+              <a:rPr lang="en-US" dirty="0"/>
+              <a:t>What is the best way to structure the information? </a:t>
+            </a:r>
+          </a:p>
+        </p:txBody>
+      </p:sp>
+    </p:spTree>
+    <p:extLst>
+      <p:ext uri="{BB962C8B-B14F-4D97-AF65-F5344CB8AC3E}">
+        <p14:creationId xmlns:p14="http://schemas.microsoft.com/office/powerpoint/2010/main" val="437557128"/>
+      </p:ext>
+    </p:extLst>
+  </p:cSld>
+  <p:clrMapOvr>
+    <a:masterClrMapping/>
+  </p:clrMapOvr>
+</p:sld>
+</file>
+
+<file path=ppt/slides/slide5.xml><?xml version="1.0" encoding="utf-8"?>
+<p:sld xmlns:a="http://schemas.openxmlformats.org/drawingml/2006/main" xmlns:r="http://schemas.openxmlformats.org/officeDocument/2006/relationships" xmlns:p="http://schemas.openxmlformats.org/presentationml/2006/main">
+  <p:cSld>
+    <p:spTree>
+      <p:nvGrpSpPr>
+        <p:cNvPr id="1" name=""/>
+        <p:cNvGrpSpPr/>
+        <p:nvPr/>
+      </p:nvGrpSpPr>
+      <p:grpSpPr>
+        <a:xfrm>
+          <a:off x="0" y="0"/>
+          <a:ext cx="0" cy="0"/>
+          <a:chOff x="0" y="0"/>
+          <a:chExt cx="0" cy="0"/>
+        </a:xfrm>
+      </p:grpSpPr>
+      <p:sp>
+        <p:nvSpPr>
+          <p:cNvPr id="2" name="Title 1">
+            <a:extLst>
+              <a:ext uri="{FF2B5EF4-FFF2-40B4-BE49-F238E27FC236}">
+                <a16:creationId xmlns:a16="http://schemas.microsoft.com/office/drawing/2014/main" id="{F5C5AB4B-E0E1-5941-8EF8-96D616F939F7}"/>
+              </a:ext>
+            </a:extLst>
+          </p:cNvPr>
+          <p:cNvSpPr>
+            <a:spLocks noGrp="1"/>
+          </p:cNvSpPr>
+          <p:nvPr>
+            <p:ph type="title"/>
+          </p:nvPr>
+        </p:nvSpPr>
+        <p:spPr/>
+        <p:txBody>
+          <a:bodyPr>
+            <a:normAutofit/>
+          </a:bodyPr>
+          <a:lstStyle/>
+          <a:p>
+            <a:r>
+              <a:rPr lang="en-US" sz="5000" dirty="0"/>
+              <a:t>Principles for writing up research</a:t>
+            </a:r>
+          </a:p>
+        </p:txBody>
+      </p:sp>
+      <p:sp>
+        <p:nvSpPr>
+          <p:cNvPr id="3" name="Content Placeholder 2">
+            <a:extLst>
+              <a:ext uri="{FF2B5EF4-FFF2-40B4-BE49-F238E27FC236}">
+                <a16:creationId xmlns:a16="http://schemas.microsoft.com/office/drawing/2014/main" id="{DB85285A-6D63-3343-B7B6-EEAF18C7C58B}"/>
+              </a:ext>
+            </a:extLst>
+          </p:cNvPr>
+          <p:cNvSpPr>
+            <a:spLocks noGrp="1"/>
+          </p:cNvSpPr>
+          <p:nvPr>
+            <p:ph idx="1"/>
+          </p:nvPr>
+        </p:nvSpPr>
+        <p:spPr>
+          <a:xfrm>
+            <a:off x="832232" y="2614410"/>
+            <a:ext cx="10451464" cy="3694950"/>
+          </a:xfrm>
+        </p:spPr>
+        <p:txBody>
+          <a:bodyPr>
+            <a:normAutofit/>
+          </a:bodyPr>
+          <a:lstStyle/>
+          <a:p>
+            <a:pPr lvl="0">
+              <a:lnSpc>
+                <a:spcPct val="100000"/>
+              </a:lnSpc>
+            </a:pPr>
+            <a:r>
+              <a:rPr lang="en-US" sz="3200" dirty="0"/>
+              <a:t>Writing up research is first about thinking, framing and interpretation, and then about writing per say.</a:t>
+            </a:r>
+          </a:p>
+          <a:p>
+            <a:pPr lvl="0">
+              <a:lnSpc>
+                <a:spcPct val="150000"/>
+              </a:lnSpc>
+            </a:pPr>
+            <a:r>
+              <a:rPr lang="en-US" sz="3200" dirty="0"/>
+              <a:t>Start with </a:t>
+            </a:r>
+            <a:r>
+              <a:rPr lang="en-US" sz="3200" b="1" dirty="0"/>
+              <a:t>why</a:t>
+            </a:r>
+            <a:r>
+              <a:rPr lang="en-US" sz="3200" dirty="0"/>
+              <a:t>. Then move to </a:t>
+            </a:r>
+            <a:r>
+              <a:rPr lang="en-US" sz="3200" b="1" dirty="0"/>
+              <a:t>how</a:t>
+            </a:r>
+            <a:r>
+              <a:rPr lang="en-US" sz="3200" dirty="0"/>
+              <a:t> and </a:t>
+            </a:r>
+            <a:r>
+              <a:rPr lang="en-US" sz="3200" b="1" dirty="0"/>
+              <a:t>what</a:t>
+            </a:r>
+            <a:r>
+              <a:rPr lang="en-US" sz="3200" dirty="0"/>
+              <a:t>.</a:t>
+            </a:r>
+          </a:p>
+          <a:p>
+            <a:pPr lvl="0">
+              <a:lnSpc>
+                <a:spcPct val="100000"/>
+              </a:lnSpc>
+            </a:pPr>
+            <a:r>
+              <a:rPr lang="en-US" sz="3200" dirty="0"/>
+              <a:t>Make the most general statements supported by the results. Try to negate each statement until you cannot.</a:t>
+            </a:r>
+          </a:p>
+          <a:p>
+            <a:pPr lvl="0"/>
+            <a:endParaRPr lang="en-US" sz="3200" dirty="0"/>
+          </a:p>
+          <a:p>
+            <a:pPr lvl="0"/>
+            <a:endParaRPr lang="en-US" sz="3200" dirty="0"/>
+          </a:p>
+        </p:txBody>
+      </p:sp>
+    </p:spTree>
+    <p:extLst>
+      <p:ext uri="{BB962C8B-B14F-4D97-AF65-F5344CB8AC3E}">
+        <p14:creationId xmlns:p14="http://schemas.microsoft.com/office/powerpoint/2010/main" val="3685326721"/>
+      </p:ext>
+    </p:extLst>
+  </p:cSld>
+  <p:clrMapOvr>
+    <a:masterClrMapping/>
+  </p:clrMapOvr>
+</p:sld>
+</file>
+
+<file path=ppt/slides/slide6.xml><?xml version="1.0" encoding="utf-8"?>
+<p:sld xmlns:a="http://schemas.openxmlformats.org/drawingml/2006/main" xmlns:r="http://schemas.openxmlformats.org/officeDocument/2006/relationships" xmlns:p="http://schemas.openxmlformats.org/presentationml/2006/main">
+  <p:cSld>
+    <p:spTree>
+      <p:nvGrpSpPr>
+        <p:cNvPr id="1" name=""/>
+        <p:cNvGrpSpPr/>
+        <p:nvPr/>
+      </p:nvGrpSpPr>
+      <p:grpSpPr>
+        <a:xfrm>
+          <a:off x="0" y="0"/>
+          <a:ext cx="0" cy="0"/>
+          <a:chOff x="0" y="0"/>
+          <a:chExt cx="0" cy="0"/>
+        </a:xfrm>
+      </p:grpSpPr>
+      <p:sp>
+        <p:nvSpPr>
+          <p:cNvPr id="2" name="Title 1">
+            <a:extLst>
+              <a:ext uri="{FF2B5EF4-FFF2-40B4-BE49-F238E27FC236}">
+                <a16:creationId xmlns:a16="http://schemas.microsoft.com/office/drawing/2014/main" id="{5C92C97A-5264-564D-97ED-08A6D3DFD980}"/>
+              </a:ext>
+            </a:extLst>
+          </p:cNvPr>
+          <p:cNvSpPr>
+            <a:spLocks noGrp="1"/>
+          </p:cNvSpPr>
+          <p:nvPr>
+            <p:ph type="title"/>
+          </p:nvPr>
+        </p:nvSpPr>
+        <p:spPr>
+          <a:xfrm>
+            <a:off x="841246" y="978619"/>
+            <a:ext cx="5991244" cy="1106424"/>
+          </a:xfrm>
+        </p:spPr>
+        <p:txBody>
+          <a:bodyPr>
+            <a:normAutofit/>
+          </a:bodyPr>
+          <a:lstStyle/>
+          <a:p>
+            <a:r>
+              <a:rPr lang="en-US" dirty="0"/>
+              <a:t>References</a:t>
+            </a:r>
+            <a:r>
+              <a:rPr lang="en-US" sz="3200" dirty="0"/>
+              <a:t> </a:t>
+            </a:r>
+          </a:p>
+        </p:txBody>
+      </p:sp>
+      <p:sp>
+        <p:nvSpPr>
+          <p:cNvPr id="3" name="Content Placeholder 2">
+            <a:extLst>
+              <a:ext uri="{FF2B5EF4-FFF2-40B4-BE49-F238E27FC236}">
+                <a16:creationId xmlns:a16="http://schemas.microsoft.com/office/drawing/2014/main" id="{93C32FF6-A561-37E8-AC62-4741335398C3}"/>
+              </a:ext>
+            </a:extLst>
+          </p:cNvPr>
+          <p:cNvSpPr>
+            <a:spLocks noGrp="1"/>
+          </p:cNvSpPr>
+          <p:nvPr>
+            <p:ph idx="1"/>
+          </p:nvPr>
+        </p:nvSpPr>
+        <p:spPr>
+          <a:xfrm>
+            <a:off x="693683" y="2252870"/>
+            <a:ext cx="6337737" cy="3560251"/>
+          </a:xfrm>
+        </p:spPr>
+        <p:txBody>
+          <a:bodyPr>
+            <a:normAutofit/>
+          </a:bodyPr>
+          <a:lstStyle/>
+          <a:p>
+            <a:r>
+              <a:rPr lang="en-US" sz="3200" dirty="0"/>
+              <a:t>Primary function</a:t>
+            </a:r>
+          </a:p>
+          <a:p>
+            <a:endParaRPr lang="en-US" sz="3200" dirty="0"/>
+          </a:p>
+          <a:p>
+            <a:r>
+              <a:rPr lang="en-US" sz="3200" dirty="0"/>
+              <a:t>Secondary function </a:t>
+            </a:r>
+          </a:p>
+          <a:p>
+            <a:endParaRPr lang="en-US" sz="3200" dirty="0"/>
+          </a:p>
+          <a:p>
+            <a:r>
+              <a:rPr lang="en-US" sz="3200" dirty="0"/>
+              <a:t>Is self-citation ever acceptable ? </a:t>
+            </a:r>
+          </a:p>
+        </p:txBody>
+      </p:sp>
+      <p:pic>
+        <p:nvPicPr>
+          <p:cNvPr id="7" name="Graphic 6" descr="Closed Quotation Mark">
+            <a:extLst>
+              <a:ext uri="{FF2B5EF4-FFF2-40B4-BE49-F238E27FC236}">
+                <a16:creationId xmlns:a16="http://schemas.microsoft.com/office/drawing/2014/main" id="{7651A4B4-CBEB-AED1-004E-224999FDE078}"/>
+              </a:ext>
+            </a:extLst>
+          </p:cNvPr>
+          <p:cNvPicPr>
+            <a:picLocks noChangeAspect="1"/>
+          </p:cNvPicPr>
+          <p:nvPr/>
+        </p:nvPicPr>
+        <p:blipFill>
+          <a:blip r:embed="rId2">
+            <a:extLst>
+              <a:ext uri="{28A0092B-C50C-407E-A947-70E740481C1C}">
+                <a14:useLocalDpi xmlns:a14="http://schemas.microsoft.com/office/drawing/2010/main" val="0"/>
+              </a:ext>
+              <a:ext uri="{96DAC541-7B7A-43D3-8B79-37D633B846F1}">
+                <asvg:svgBlip xmlns:asvg="http://schemas.microsoft.com/office/drawing/2016/SVG/main" r:embed="rId3"/>
+              </a:ext>
+            </a:extLst>
+          </a:blip>
+          <a:stretch>
+            <a:fillRect/>
+          </a:stretch>
+        </p:blipFill>
+        <p:spPr>
+          <a:xfrm>
+            <a:off x="7679814" y="1329879"/>
+            <a:ext cx="4097657" cy="4097657"/>
+          </a:xfrm>
+          <a:prstGeom prst="rect">
+            <a:avLst/>
+          </a:prstGeom>
+        </p:spPr>
+      </p:pic>
+    </p:spTree>
+    <p:extLst>
+      <p:ext uri="{BB962C8B-B14F-4D97-AF65-F5344CB8AC3E}">
+        <p14:creationId xmlns:p14="http://schemas.microsoft.com/office/powerpoint/2010/main" val="2221485188"/>
+      </p:ext>
+    </p:extLst>
+  </p:cSld>
+  <p:clrMapOvr>
+    <a:masterClrMapping/>
+  </p:clrMapOvr>
+</p:sld>
+</file>
+
+<file path=ppt/slides/slide7.xml><?xml version="1.0" encoding="utf-8"?>
+<p:sld xmlns:a="http://schemas.openxmlformats.org/drawingml/2006/main" xmlns:r="http://schemas.openxmlformats.org/officeDocument/2006/relationships" xmlns:p="http://schemas.openxmlformats.org/presentationml/2006/main">
+  <p:cSld>
+    <p:spTree>
+      <p:nvGrpSpPr>
+        <p:cNvPr id="1" name=""/>
+        <p:cNvGrpSpPr/>
+        <p:nvPr/>
+      </p:nvGrpSpPr>
+      <p:grpSpPr>
+        <a:xfrm>
+          <a:off x="0" y="0"/>
+          <a:ext cx="0" cy="0"/>
+          <a:chOff x="0" y="0"/>
+          <a:chExt cx="0" cy="0"/>
+        </a:xfrm>
+      </p:grpSpPr>
+      <p:sp>
+        <p:nvSpPr>
+          <p:cNvPr id="2" name="Title 1">
+            <a:extLst>
+              <a:ext uri="{FF2B5EF4-FFF2-40B4-BE49-F238E27FC236}">
+                <a16:creationId xmlns:a16="http://schemas.microsoft.com/office/drawing/2014/main" id="{AC931A13-62F6-7C9B-E02A-1DD2ABBEB0C4}"/>
+              </a:ext>
+            </a:extLst>
+          </p:cNvPr>
+          <p:cNvSpPr>
+            <a:spLocks noGrp="1"/>
+          </p:cNvSpPr>
+          <p:nvPr>
+            <p:ph type="title"/>
+          </p:nvPr>
+        </p:nvSpPr>
+        <p:spPr/>
+        <p:txBody>
+          <a:bodyPr/>
+          <a:lstStyle/>
+          <a:p>
+            <a:endParaRPr lang="en-US"/>
+          </a:p>
+        </p:txBody>
+      </p:sp>
+      <p:pic>
+        <p:nvPicPr>
+          <p:cNvPr id="5" name="Content Placeholder 4" descr="A screenshot of a computer&#10;&#10;Description automatically generated">
+            <a:extLst>
+              <a:ext uri="{FF2B5EF4-FFF2-40B4-BE49-F238E27FC236}">
+                <a16:creationId xmlns:a16="http://schemas.microsoft.com/office/drawing/2014/main" id="{3A44B938-D8F0-6F0C-EDC2-A887AE556C81}"/>
+              </a:ext>
+            </a:extLst>
+          </p:cNvPr>
+          <p:cNvPicPr>
+            <a:picLocks noGrp="1" noChangeAspect="1"/>
+          </p:cNvPicPr>
+          <p:nvPr>
+            <p:ph idx="1"/>
+          </p:nvPr>
+        </p:nvPicPr>
+        <p:blipFill rotWithShape="1">
+          <a:blip r:embed="rId2"/>
+          <a:srcRect t="14852" b="7177"/>
+          <a:stretch/>
+        </p:blipFill>
+        <p:spPr>
+          <a:xfrm>
+            <a:off x="908304" y="130381"/>
+            <a:ext cx="10158808" cy="2880360"/>
+          </a:xfrm>
+        </p:spPr>
+      </p:pic>
+      <p:sp>
+        <p:nvSpPr>
+          <p:cNvPr id="7" name="TextBox 6">
+            <a:extLst>
+              <a:ext uri="{FF2B5EF4-FFF2-40B4-BE49-F238E27FC236}">
+                <a16:creationId xmlns:a16="http://schemas.microsoft.com/office/drawing/2014/main" id="{69051A0C-AFDC-33A9-74D4-5E722CBAC725}"/>
+              </a:ext>
+            </a:extLst>
+          </p:cNvPr>
+          <p:cNvSpPr txBox="1"/>
+          <p:nvPr/>
+        </p:nvSpPr>
+        <p:spPr>
+          <a:xfrm>
+            <a:off x="146987" y="3689605"/>
+            <a:ext cx="4929509" cy="2802562"/>
+          </a:xfrm>
+          <a:prstGeom prst="rect">
+            <a:avLst/>
+          </a:prstGeom>
+          <a:noFill/>
+        </p:spPr>
+        <p:txBody>
+          <a:bodyPr wrap="square" rtlCol="0">
+            <a:spAutoFit/>
+          </a:bodyPr>
+          <a:lstStyle/>
+          <a:p>
+            <a:pPr>
+              <a:lnSpc>
+                <a:spcPct val="150000"/>
+              </a:lnSpc>
+            </a:pPr>
+            <a:r>
+              <a:rPr lang="en-US" sz="2400" dirty="0">
+                <a:solidFill>
+                  <a:srgbClr val="262626"/>
+                </a:solidFill>
+                <a:latin typeface="Open Sans" panose="020B0606030504020204" pitchFamily="34" charset="0"/>
+              </a:rPr>
+              <a:t>T</a:t>
+            </a:r>
+            <a:r>
+              <a:rPr lang="en-US" sz="2400" b="0" i="0" dirty="0">
+                <a:solidFill>
+                  <a:srgbClr val="262626"/>
+                </a:solidFill>
+                <a:effectLst/>
+                <a:latin typeface="Open Sans" panose="020B0606030504020204" pitchFamily="34" charset="0"/>
+              </a:rPr>
+              <a:t>he index </a:t>
+            </a:r>
+            <a:r>
+              <a:rPr lang="en-US" sz="2400" b="0" i="1" dirty="0">
+                <a:solidFill>
+                  <a:srgbClr val="262626"/>
+                </a:solidFill>
+                <a:effectLst/>
+                <a:latin typeface="Open Sans" panose="020B0606030504020204" pitchFamily="34" charset="0"/>
+              </a:rPr>
+              <a:t>h</a:t>
+            </a:r>
+            <a:r>
+              <a:rPr lang="en-US" sz="2400" b="0" i="0" dirty="0">
+                <a:solidFill>
+                  <a:srgbClr val="262626"/>
+                </a:solidFill>
+                <a:effectLst/>
+                <a:latin typeface="Open Sans" panose="020B0606030504020204" pitchFamily="34" charset="0"/>
+              </a:rPr>
+              <a:t>, defined as the number of papers with citation number ≥</a:t>
+            </a:r>
+            <a:r>
+              <a:rPr lang="en-US" sz="2400" b="0" i="1" dirty="0">
+                <a:solidFill>
+                  <a:srgbClr val="262626"/>
+                </a:solidFill>
+                <a:effectLst/>
+                <a:latin typeface="Open Sans" panose="020B0606030504020204" pitchFamily="34" charset="0"/>
+              </a:rPr>
+              <a:t>h</a:t>
+            </a:r>
+            <a:r>
+              <a:rPr lang="en-US" sz="2400" b="0" i="0" dirty="0">
+                <a:solidFill>
+                  <a:srgbClr val="262626"/>
+                </a:solidFill>
+                <a:effectLst/>
+                <a:latin typeface="Open Sans" panose="020B0606030504020204" pitchFamily="34" charset="0"/>
+              </a:rPr>
+              <a:t>, as a useful index to characterize the scientific output of a researcher.</a:t>
+            </a:r>
+            <a:endParaRPr lang="en-US" sz="2400" dirty="0"/>
+          </a:p>
+        </p:txBody>
+      </p:sp>
+      <p:pic>
+        <p:nvPicPr>
+          <p:cNvPr id="1028" name="Picture 4">
+            <a:extLst>
+              <a:ext uri="{FF2B5EF4-FFF2-40B4-BE49-F238E27FC236}">
+                <a16:creationId xmlns:a16="http://schemas.microsoft.com/office/drawing/2014/main" id="{7AB9F6B3-D5F0-F32B-48E7-E5733F488FB2}"/>
+              </a:ext>
+            </a:extLst>
+          </p:cNvPr>
+          <p:cNvPicPr>
+            <a:picLocks noChangeAspect="1" noChangeArrowheads="1"/>
+          </p:cNvPicPr>
+          <p:nvPr/>
+        </p:nvPicPr>
+        <p:blipFill>
+          <a:blip r:embed="rId3">
+            <a:extLst>
+              <a:ext uri="{28A0092B-C50C-407E-A947-70E740481C1C}">
+                <a14:useLocalDpi xmlns:a14="http://schemas.microsoft.com/office/drawing/2010/main" val="0"/>
+              </a:ext>
+            </a:extLst>
+          </a:blip>
+          <a:srcRect/>
+          <a:stretch>
+            <a:fillRect/>
+          </a:stretch>
+        </p:blipFill>
+        <p:spPr bwMode="auto">
+          <a:xfrm>
+            <a:off x="6342712" y="3298619"/>
+            <a:ext cx="4724400" cy="3429000"/>
+          </a:xfrm>
+          <a:prstGeom prst="rect">
+            <a:avLst/>
+          </a:prstGeom>
+          <a:noFill/>
+          <a:extLst>
+            <a:ext uri="{909E8E84-426E-40DD-AFC4-6F175D3DCCD1}">
+              <a14:hiddenFill xmlns:a14="http://schemas.microsoft.com/office/drawing/2010/main">
+                <a:solidFill>
+                  <a:srgbClr val="FFFFFF"/>
+                </a:solidFill>
+              </a14:hiddenFill>
+            </a:ext>
+          </a:extLst>
+        </p:spPr>
+      </p:pic>
+    </p:spTree>
+    <p:extLst>
+      <p:ext uri="{BB962C8B-B14F-4D97-AF65-F5344CB8AC3E}">
+        <p14:creationId xmlns:p14="http://schemas.microsoft.com/office/powerpoint/2010/main" val="1706742981"/>
+      </p:ext>
+    </p:extLst>
+  </p:cSld>
+  <p:clrMapOvr>
+    <a:masterClrMapping/>
+  </p:clrMapOvr>
+</p:sld>
+</file>
+
+<file path=ppt/slides/slide8.xml><?xml version="1.0" encoding="utf-8"?>
+<p:sld xmlns:a="http://schemas.openxmlformats.org/drawingml/2006/main" xmlns:r="http://schemas.openxmlformats.org/officeDocument/2006/relationships" xmlns:p="http://schemas.openxmlformats.org/presentationml/2006/main">
+  <p:cSld>
+    <p:spTree>
+      <p:nvGrpSpPr>
+        <p:cNvPr id="1" name=""/>
+        <p:cNvGrpSpPr/>
+        <p:nvPr/>
+      </p:nvGrpSpPr>
+      <p:grpSpPr>
+        <a:xfrm>
+          <a:off x="0" y="0"/>
+          <a:ext cx="0" cy="0"/>
+          <a:chOff x="0" y="0"/>
+          <a:chExt cx="0" cy="0"/>
+        </a:xfrm>
+      </p:grpSpPr>
+      <p:pic>
+        <p:nvPicPr>
+          <p:cNvPr id="3" name="Picture 2">
+            <a:extLst>
+              <a:ext uri="{FF2B5EF4-FFF2-40B4-BE49-F238E27FC236}">
+                <a16:creationId xmlns:a16="http://schemas.microsoft.com/office/drawing/2014/main" id="{0CA693B2-C584-9844-95B6-0EAE35C409C4}"/>
+              </a:ext>
+            </a:extLst>
+          </p:cNvPr>
+          <p:cNvPicPr>
+            <a:picLocks noChangeAspect="1"/>
+          </p:cNvPicPr>
+          <p:nvPr/>
+        </p:nvPicPr>
+        <p:blipFill>
+          <a:blip r:embed="rId2"/>
+          <a:stretch>
+            <a:fillRect/>
+          </a:stretch>
+        </p:blipFill>
+        <p:spPr>
+          <a:xfrm>
+            <a:off x="864695" y="0"/>
+            <a:ext cx="10462609" cy="6858000"/>
+          </a:xfrm>
+          <a:prstGeom prst="rect">
+            <a:avLst/>
+          </a:prstGeom>
+        </p:spPr>
+      </p:pic>
+      <p:sp>
+        <p:nvSpPr>
+          <p:cNvPr id="4" name="Rectangle 3">
+            <a:extLst>
+              <a:ext uri="{FF2B5EF4-FFF2-40B4-BE49-F238E27FC236}">
+                <a16:creationId xmlns:a16="http://schemas.microsoft.com/office/drawing/2014/main" id="{8798690C-DBED-0643-9F5F-0A9C36663AAB}"/>
+              </a:ext>
+            </a:extLst>
+          </p:cNvPr>
+          <p:cNvSpPr/>
+          <p:nvPr/>
+        </p:nvSpPr>
+        <p:spPr>
+          <a:xfrm>
+            <a:off x="5665076" y="1076486"/>
+            <a:ext cx="6526924" cy="338554"/>
+          </a:xfrm>
+          <a:prstGeom prst="rect">
+            <a:avLst/>
+          </a:prstGeom>
+        </p:spPr>
+        <p:txBody>
+          <a:bodyPr wrap="square">
+            <a:spAutoFit/>
+          </a:bodyPr>
+          <a:lstStyle/>
+          <a:p>
+            <a:r>
+              <a:rPr lang="en-US" sz="1600" dirty="0">
+                <a:solidFill>
+                  <a:srgbClr val="FF0000"/>
+                </a:solidFill>
+              </a:rPr>
+              <a:t>https://</a:t>
+            </a:r>
+            <a:r>
+              <a:rPr lang="en-US" sz="1600" dirty="0" err="1">
+                <a:solidFill>
+                  <a:srgbClr val="FF0000"/>
+                </a:solidFill>
+              </a:rPr>
+              <a:t>www.nature.com</a:t>
+            </a:r>
+            <a:r>
+              <a:rPr lang="en-US" sz="1600" dirty="0">
+                <a:solidFill>
+                  <a:srgbClr val="FF0000"/>
+                </a:solidFill>
+              </a:rPr>
+              <a:t>/documents/nature-summary-</a:t>
+            </a:r>
+            <a:r>
+              <a:rPr lang="en-US" sz="1600" dirty="0" err="1">
+                <a:solidFill>
+                  <a:srgbClr val="FF0000"/>
+                </a:solidFill>
+              </a:rPr>
+              <a:t>paragraph.pdf</a:t>
+            </a:r>
+            <a:endParaRPr lang="en-US" sz="1600" dirty="0">
+              <a:solidFill>
+                <a:srgbClr val="FF0000"/>
+              </a:solidFill>
+            </a:endParaRPr>
+          </a:p>
+        </p:txBody>
+      </p:sp>
+    </p:spTree>
+    <p:extLst>
+      <p:ext uri="{BB962C8B-B14F-4D97-AF65-F5344CB8AC3E}">
+        <p14:creationId xmlns:p14="http://schemas.microsoft.com/office/powerpoint/2010/main" val="1284319578"/>
+      </p:ext>
+    </p:extLst>
+  </p:cSld>
+  <p:clrMapOvr>
+    <a:masterClrMapping/>
+  </p:clrMapOvr>
+</p:sld>
+</file>
+
+<file path=ppt/slides/slide9.xml><?xml version="1.0" encoding="utf-8"?>
+<p:sld xmlns:a="http://schemas.openxmlformats.org/drawingml/2006/main" xmlns:r="http://schemas.openxmlformats.org/officeDocument/2006/relationships" xmlns:p="http://schemas.openxmlformats.org/presentationml/2006/main">
+  <p:cSld>
+    <p:spTree>
+      <p:nvGrpSpPr>
+        <p:cNvPr id="1" name=""/>
+        <p:cNvGrpSpPr/>
+        <p:nvPr/>
+      </p:nvGrpSpPr>
+      <p:grpSpPr>
+        <a:xfrm>
+          <a:off x="0" y="0"/>
+          <a:ext cx="0" cy="0"/>
+          <a:chOff x="0" y="0"/>
+          <a:chExt cx="0" cy="0"/>
+        </a:xfrm>
+      </p:grpSpPr>
+      <p:sp>
+        <p:nvSpPr>
+          <p:cNvPr id="4" name="TextBox 3">
+            <a:extLst>
+              <a:ext uri="{FF2B5EF4-FFF2-40B4-BE49-F238E27FC236}">
+                <a16:creationId xmlns:a16="http://schemas.microsoft.com/office/drawing/2014/main" id="{09009522-68D6-E2B1-EB91-0919E78F9FCD}"/>
+              </a:ext>
+            </a:extLst>
+          </p:cNvPr>
+          <p:cNvSpPr txBox="1"/>
+          <p:nvPr/>
+        </p:nvSpPr>
+        <p:spPr>
+          <a:xfrm>
+            <a:off x="868680" y="1719072"/>
+            <a:ext cx="3103427" cy="3520440"/>
+          </a:xfrm>
+          <a:prstGeom prst="rect">
+            <a:avLst/>
+          </a:prstGeom>
+        </p:spPr>
+        <p:txBody>
+          <a:bodyPr vert="horz" lIns="91440" tIns="45720" rIns="91440" bIns="45720" rtlCol="0" anchor="t">
+            <a:normAutofit/>
+          </a:bodyPr>
+          <a:lstStyle/>
+          <a:p>
+            <a:pPr>
+              <a:lnSpc>
+                <a:spcPct val="90000"/>
+              </a:lnSpc>
+              <a:spcBef>
+                <a:spcPct val="0"/>
+              </a:spcBef>
+              <a:spcAft>
+                <a:spcPts val="600"/>
+              </a:spcAft>
+            </a:pPr>
+            <a:r>
+              <a:rPr lang="en-US" sz="3600" b="1" dirty="0">
+                <a:latin typeface="+mj-lt"/>
+                <a:ea typeface="+mj-ea"/>
+                <a:cs typeface="+mj-cs"/>
+              </a:rPr>
+              <a:t>Writing tips</a:t>
+            </a:r>
+          </a:p>
+        </p:txBody>
+      </p:sp>
+      <p:graphicFrame>
+        <p:nvGraphicFramePr>
+          <p:cNvPr id="5" name="TextBox 2">
+            <a:extLst>
+              <a:ext uri="{FF2B5EF4-FFF2-40B4-BE49-F238E27FC236}">
+                <a16:creationId xmlns:a16="http://schemas.microsoft.com/office/drawing/2014/main" id="{A14CC023-F814-1975-0E0C-4D2D4CCA07C1}"/>
+              </a:ext>
+            </a:extLst>
+          </p:cNvPr>
+          <p:cNvGraphicFramePr/>
+          <p:nvPr/>
+        </p:nvGraphicFramePr>
+        <p:xfrm>
+          <a:off x="4727448" y="640080"/>
+          <a:ext cx="6967728" cy="5577840"/>
+        </p:xfrm>
+        <a:graphic>
+          <a:graphicData uri="http://schemas.openxmlformats.org/drawingml/2006/diagram">
+            <dgm:relIds xmlns:dgm="http://schemas.openxmlformats.org/drawingml/2006/diagram" xmlns:r="http://schemas.openxmlformats.org/officeDocument/2006/relationships" r:dm="rId2" r:lo="rId3" r:qs="rId4" r:cs="rId5"/>
+          </a:graphicData>
+        </a:graphic>
+      </p:graphicFrame>
+    </p:spTree>
+    <p:extLst>
+      <p:ext uri="{BB962C8B-B14F-4D97-AF65-F5344CB8AC3E}">
+        <p14:creationId xmlns:p14="http://schemas.microsoft.com/office/powerpoint/2010/main" val="329731274"/>
       </p:ext>
     </p:extLst>
   </p:cSld>
@@ -15443,4 +16174,10 @@
     </a:ext>
   </a:extLst>
 </a:theme>
+</file>
+
+<file path=docMetadata/LabelInfo.xml><?xml version="1.0" encoding="utf-8"?>
+<clbl:labelList xmlns:clbl="http://schemas.microsoft.com/office/2020/mipLabelMetadata">
+  <clbl:label id="{7893ce20-a697-4fd6-a4da-14011f6a471d}" enabled="1" method="Standard" siteId="{a8eec281-aaa3-4dae-ac9b-9a398b9215e7}" contentBits="0" removed="0"/>
+</clbl:labelList>
 </file>